--- a/reports/pipeline_presentation.pptx
+++ b/reports/pipeline_presentation.pptx
@@ -3088,14 +3088,6 @@
 <file path=ppt/slides/slide1.xml><?xml version="1.0" encoding="utf-8"?>
 <p:sld xmlns:a="http://schemas.openxmlformats.org/drawingml/2006/main" xmlns:p="http://schemas.openxmlformats.org/presentationml/2006/main" xmlns:r="http://schemas.openxmlformats.org/officeDocument/2006/relationships">
   <p:cSld>
-    <p:bg>
-      <p:bgPr>
-        <a:solidFill>
-          <a:srgbClr val="1E3A8A"/>
-        </a:solidFill>
-        <a:effectLst/>
-      </p:bgPr>
-    </p:bg>
     <p:spTree>
       <p:nvGrpSpPr>
         <p:cNvPr id="1" name=""/>
@@ -3105,14 +3097,100 @@
       <p:grpSpPr/>
       <p:sp>
         <p:nvSpPr>
-          <p:cNvPr id="2" name="TextBox 1"/>
+          <p:cNvPr id="2" name="Rectangle 1"/>
+          <p:cNvSpPr/>
+          <p:nvPr/>
+        </p:nvSpPr>
+        <p:spPr>
+          <a:xfrm>
+            <a:off x="0" y="0"/>
+            <a:ext cx="12188952" cy="6858000"/>
+          </a:xfrm>
+          <a:prstGeom prst="rect">
+            <a:avLst/>
+          </a:prstGeom>
+          <a:solidFill>
+            <a:srgbClr val="1E3A8A"/>
+          </a:solidFill>
+          <a:ln>
+            <a:noFill/>
+          </a:ln>
+        </p:spPr>
+        <p:style>
+          <a:lnRef idx="1">
+            <a:schemeClr val="accent1"/>
+          </a:lnRef>
+          <a:fillRef idx="3">
+            <a:schemeClr val="accent1"/>
+          </a:fillRef>
+          <a:effectRef idx="2">
+            <a:schemeClr val="accent1"/>
+          </a:effectRef>
+          <a:fontRef idx="minor">
+            <a:schemeClr val="lt1"/>
+          </a:fontRef>
+        </p:style>
+        <p:txBody>
+          <a:bodyPr rtlCol="0" anchor="ctr"/>
+          <a:lstStyle/>
+          <a:p>
+            <a:pPr algn="ctr"/>
+          </a:p>
+        </p:txBody>
+      </p:sp>
+      <p:sp>
+        <p:nvSpPr>
+          <p:cNvPr id="3" name="Rectangle 2"/>
+          <p:cNvSpPr/>
+          <p:nvPr/>
+        </p:nvSpPr>
+        <p:spPr>
+          <a:xfrm>
+            <a:off x="0" y="0"/>
+            <a:ext cx="109728" cy="6858000"/>
+          </a:xfrm>
+          <a:prstGeom prst="rect">
+            <a:avLst/>
+          </a:prstGeom>
+          <a:solidFill>
+            <a:srgbClr val="377CF6"/>
+          </a:solidFill>
+          <a:ln>
+            <a:noFill/>
+          </a:ln>
+        </p:spPr>
+        <p:style>
+          <a:lnRef idx="1">
+            <a:schemeClr val="accent1"/>
+          </a:lnRef>
+          <a:fillRef idx="3">
+            <a:schemeClr val="accent1"/>
+          </a:fillRef>
+          <a:effectRef idx="2">
+            <a:schemeClr val="accent1"/>
+          </a:effectRef>
+          <a:fontRef idx="minor">
+            <a:schemeClr val="lt1"/>
+          </a:fontRef>
+        </p:style>
+        <p:txBody>
+          <a:bodyPr rtlCol="0" anchor="ctr"/>
+          <a:lstStyle/>
+          <a:p>
+            <a:pPr algn="ctr"/>
+          </a:p>
+        </p:txBody>
+      </p:sp>
+      <p:sp>
+        <p:nvSpPr>
+          <p:cNvPr id="4" name="TextBox 3"/>
           <p:cNvSpPr txBox="1"/>
           <p:nvPr/>
         </p:nvSpPr>
         <p:spPr>
           <a:xfrm>
-            <a:off x="914400" y="2011680"/>
-            <a:ext cx="10058400" cy="1097280"/>
+            <a:off x="457200" y="1645920"/>
+            <a:ext cx="10972800" cy="1097280"/>
           </a:xfrm>
           <a:prstGeom prst="rect">
             <a:avLst/>
@@ -3120,33 +3198,33 @@
           <a:noFill/>
         </p:spPr>
         <p:txBody>
-          <a:bodyPr wrap="square">
+          <a:bodyPr wrap="none">
             <a:spAutoFit/>
           </a:bodyPr>
           <a:lstStyle/>
           <a:p>
-            <a:pPr algn="ctr"/>
-            <a:r>
-              <a:rPr sz="4000" b="1">
+            <a:pPr algn="l"/>
+            <a:r>
+              <a:rPr sz="5200" b="1">
                 <a:solidFill>
                   <a:srgbClr val="FFFFFF"/>
                 </a:solidFill>
               </a:rPr>
-              <a:t>Transaction Anomaly Detection</a:t>
-            </a:r>
-          </a:p>
-        </p:txBody>
-      </p:sp>
-      <p:sp>
-        <p:nvSpPr>
-          <p:cNvPr id="3" name="TextBox 2"/>
+              <a:t>Transaction Anomaly</a:t>
+            </a:r>
+          </a:p>
+        </p:txBody>
+      </p:sp>
+      <p:sp>
+        <p:nvSpPr>
+          <p:cNvPr id="5" name="TextBox 4"/>
           <p:cNvSpPr txBox="1"/>
           <p:nvPr/>
         </p:nvSpPr>
         <p:spPr>
           <a:xfrm>
-            <a:off x="914400" y="3200400"/>
-            <a:ext cx="10058400" cy="640080"/>
+            <a:off x="457200" y="2651760"/>
+            <a:ext cx="10972800" cy="1097280"/>
           </a:xfrm>
           <a:prstGeom prst="rect">
             <a:avLst/>
@@ -3154,33 +3232,33 @@
           <a:noFill/>
         </p:spPr>
         <p:txBody>
-          <a:bodyPr wrap="square">
+          <a:bodyPr wrap="none">
             <a:spAutoFit/>
           </a:bodyPr>
           <a:lstStyle/>
           <a:p>
-            <a:pPr algn="ctr"/>
-            <a:r>
-              <a:rPr sz="2000" b="0">
-                <a:solidFill>
-                  <a:srgbClr val="BFDBF7"/>
+            <a:pPr algn="l"/>
+            <a:r>
+              <a:rPr sz="5200" b="1">
+                <a:solidFill>
+                  <a:srgbClr val="377CF6"/>
                 </a:solidFill>
               </a:rPr>
-              <a:t>ML Pipeline  ·  Built with Claude Code  ·  2026-04-15</a:t>
-            </a:r>
-          </a:p>
-        </p:txBody>
-      </p:sp>
-      <p:sp>
-        <p:nvSpPr>
-          <p:cNvPr id="4" name="TextBox 3"/>
+              <a:t>Detection ML Pipeline</a:t>
+            </a:r>
+          </a:p>
+        </p:txBody>
+      </p:sp>
+      <p:sp>
+        <p:nvSpPr>
+          <p:cNvPr id="6" name="TextBox 5"/>
           <p:cNvSpPr txBox="1"/>
           <p:nvPr/>
         </p:nvSpPr>
         <p:spPr>
           <a:xfrm>
-            <a:off x="914400" y="3931920"/>
-            <a:ext cx="10058400" cy="548640"/>
+            <a:off x="457200" y="3931920"/>
+            <a:ext cx="8229600" cy="548640"/>
           </a:xfrm>
           <a:prstGeom prst="rect">
             <a:avLst/>
@@ -3188,19 +3266,352 @@
           <a:noFill/>
         </p:spPr>
         <p:txBody>
-          <a:bodyPr wrap="square">
+          <a:bodyPr wrap="none">
             <a:spAutoFit/>
           </a:bodyPr>
           <a:lstStyle/>
           <a:p>
+            <a:pPr algn="l"/>
+            <a:r>
+              <a:rPr sz="2200" b="0">
+                <a:solidFill>
+                  <a:srgbClr val="BFCCF0"/>
+                </a:solidFill>
+              </a:rPr>
+              <a:t>Built with Claude Code  ·  April 2026</a:t>
+            </a:r>
+          </a:p>
+        </p:txBody>
+      </p:sp>
+      <p:sp>
+        <p:nvSpPr>
+          <p:cNvPr id="7" name="Rectangle 6"/>
+          <p:cNvSpPr/>
+          <p:nvPr/>
+        </p:nvSpPr>
+        <p:spPr>
+          <a:xfrm>
+            <a:off x="457200" y="4937760"/>
+            <a:ext cx="1828800" cy="822960"/>
+          </a:xfrm>
+          <a:prstGeom prst="rect">
+            <a:avLst/>
+          </a:prstGeom>
+          <a:solidFill>
+            <a:srgbClr val="2D4FA8"/>
+          </a:solidFill>
+          <a:ln>
+            <a:noFill/>
+          </a:ln>
+        </p:spPr>
+        <p:style>
+          <a:lnRef idx="1">
+            <a:schemeClr val="accent1"/>
+          </a:lnRef>
+          <a:fillRef idx="3">
+            <a:schemeClr val="accent1"/>
+          </a:fillRef>
+          <a:effectRef idx="2">
+            <a:schemeClr val="accent1"/>
+          </a:effectRef>
+          <a:fontRef idx="minor">
+            <a:schemeClr val="lt1"/>
+          </a:fontRef>
+        </p:style>
+        <p:txBody>
+          <a:bodyPr rtlCol="0" anchor="ctr"/>
+          <a:lstStyle/>
+          <a:p>
             <a:pPr algn="ctr"/>
-            <a:r>
-              <a:rPr sz="1600" b="0">
-                <a:solidFill>
-                  <a:srgbClr val="93C5FD"/>
+          </a:p>
+        </p:txBody>
+      </p:sp>
+      <p:sp>
+        <p:nvSpPr>
+          <p:cNvPr id="8" name="TextBox 7"/>
+          <p:cNvSpPr txBox="1"/>
+          <p:nvPr/>
+        </p:nvSpPr>
+        <p:spPr>
+          <a:xfrm>
+            <a:off x="457200" y="4983480"/>
+            <a:ext cx="1828800" cy="411480"/>
+          </a:xfrm>
+          <a:prstGeom prst="rect">
+            <a:avLst/>
+          </a:prstGeom>
+          <a:noFill/>
+        </p:spPr>
+        <p:txBody>
+          <a:bodyPr wrap="none">
+            <a:spAutoFit/>
+          </a:bodyPr>
+          <a:lstStyle/>
+          <a:p>
+            <a:pPr algn="ctr"/>
+            <a:r>
+              <a:rPr sz="2200" b="1">
+                <a:solidFill>
+                  <a:srgbClr val="FFFFFF"/>
                 </a:solidFill>
               </a:rPr>
-              <a:t>End-to-End Autonomous Pipeline — 12 Stages</a:t>
+              <a:t>0.667</a:t>
+            </a:r>
+          </a:p>
+        </p:txBody>
+      </p:sp>
+      <p:sp>
+        <p:nvSpPr>
+          <p:cNvPr id="9" name="TextBox 8"/>
+          <p:cNvSpPr txBox="1"/>
+          <p:nvPr/>
+        </p:nvSpPr>
+        <p:spPr>
+          <a:xfrm>
+            <a:off x="457200" y="5349240"/>
+            <a:ext cx="1828800" cy="320040"/>
+          </a:xfrm>
+          <a:prstGeom prst="rect">
+            <a:avLst/>
+          </a:prstGeom>
+          <a:noFill/>
+        </p:spPr>
+        <p:txBody>
+          <a:bodyPr wrap="none">
+            <a:spAutoFit/>
+          </a:bodyPr>
+          <a:lstStyle/>
+          <a:p>
+            <a:pPr algn="ctr"/>
+            <a:r>
+              <a:rPr sz="1100" b="0">
+                <a:solidFill>
+                  <a:srgbClr val="BFCCF0"/>
+                </a:solidFill>
+              </a:rPr>
+              <a:t>F1 Score</a:t>
+            </a:r>
+          </a:p>
+        </p:txBody>
+      </p:sp>
+      <p:sp>
+        <p:nvSpPr>
+          <p:cNvPr id="10" name="Rectangle 9"/>
+          <p:cNvSpPr/>
+          <p:nvPr/>
+        </p:nvSpPr>
+        <p:spPr>
+          <a:xfrm>
+            <a:off x="2468880" y="4937760"/>
+            <a:ext cx="1828800" cy="822960"/>
+          </a:xfrm>
+          <a:prstGeom prst="rect">
+            <a:avLst/>
+          </a:prstGeom>
+          <a:solidFill>
+            <a:srgbClr val="2D4FA8"/>
+          </a:solidFill>
+          <a:ln>
+            <a:noFill/>
+          </a:ln>
+        </p:spPr>
+        <p:style>
+          <a:lnRef idx="1">
+            <a:schemeClr val="accent1"/>
+          </a:lnRef>
+          <a:fillRef idx="3">
+            <a:schemeClr val="accent1"/>
+          </a:fillRef>
+          <a:effectRef idx="2">
+            <a:schemeClr val="accent1"/>
+          </a:effectRef>
+          <a:fontRef idx="minor">
+            <a:schemeClr val="lt1"/>
+          </a:fontRef>
+        </p:style>
+        <p:txBody>
+          <a:bodyPr rtlCol="0" anchor="ctr"/>
+          <a:lstStyle/>
+          <a:p>
+            <a:pPr algn="ctr"/>
+          </a:p>
+        </p:txBody>
+      </p:sp>
+      <p:sp>
+        <p:nvSpPr>
+          <p:cNvPr id="11" name="TextBox 10"/>
+          <p:cNvSpPr txBox="1"/>
+          <p:nvPr/>
+        </p:nvSpPr>
+        <p:spPr>
+          <a:xfrm>
+            <a:off x="2468880" y="4983480"/>
+            <a:ext cx="1828800" cy="411480"/>
+          </a:xfrm>
+          <a:prstGeom prst="rect">
+            <a:avLst/>
+          </a:prstGeom>
+          <a:noFill/>
+        </p:spPr>
+        <p:txBody>
+          <a:bodyPr wrap="none">
+            <a:spAutoFit/>
+          </a:bodyPr>
+          <a:lstStyle/>
+          <a:p>
+            <a:pPr algn="ctr"/>
+            <a:r>
+              <a:rPr sz="2200" b="1">
+                <a:solidFill>
+                  <a:srgbClr val="FFFFFF"/>
+                </a:solidFill>
+              </a:rPr>
+              <a:t>0.833</a:t>
+            </a:r>
+          </a:p>
+        </p:txBody>
+      </p:sp>
+      <p:sp>
+        <p:nvSpPr>
+          <p:cNvPr id="12" name="TextBox 11"/>
+          <p:cNvSpPr txBox="1"/>
+          <p:nvPr/>
+        </p:nvSpPr>
+        <p:spPr>
+          <a:xfrm>
+            <a:off x="2468880" y="5349240"/>
+            <a:ext cx="1828800" cy="320040"/>
+          </a:xfrm>
+          <a:prstGeom prst="rect">
+            <a:avLst/>
+          </a:prstGeom>
+          <a:noFill/>
+        </p:spPr>
+        <p:txBody>
+          <a:bodyPr wrap="none">
+            <a:spAutoFit/>
+          </a:bodyPr>
+          <a:lstStyle/>
+          <a:p>
+            <a:pPr algn="ctr"/>
+            <a:r>
+              <a:rPr sz="1100" b="0">
+                <a:solidFill>
+                  <a:srgbClr val="BFCCF0"/>
+                </a:solidFill>
+              </a:rPr>
+              <a:t>ROC-AUC</a:t>
+            </a:r>
+          </a:p>
+        </p:txBody>
+      </p:sp>
+      <p:sp>
+        <p:nvSpPr>
+          <p:cNvPr id="13" name="Rectangle 12"/>
+          <p:cNvSpPr/>
+          <p:nvPr/>
+        </p:nvSpPr>
+        <p:spPr>
+          <a:xfrm>
+            <a:off x="4480560" y="4937760"/>
+            <a:ext cx="1828800" cy="822960"/>
+          </a:xfrm>
+          <a:prstGeom prst="rect">
+            <a:avLst/>
+          </a:prstGeom>
+          <a:solidFill>
+            <a:srgbClr val="2D4FA8"/>
+          </a:solidFill>
+          <a:ln>
+            <a:noFill/>
+          </a:ln>
+        </p:spPr>
+        <p:style>
+          <a:lnRef idx="1">
+            <a:schemeClr val="accent1"/>
+          </a:lnRef>
+          <a:fillRef idx="3">
+            <a:schemeClr val="accent1"/>
+          </a:fillRef>
+          <a:effectRef idx="2">
+            <a:schemeClr val="accent1"/>
+          </a:effectRef>
+          <a:fontRef idx="minor">
+            <a:schemeClr val="lt1"/>
+          </a:fontRef>
+        </p:style>
+        <p:txBody>
+          <a:bodyPr rtlCol="0" anchor="ctr"/>
+          <a:lstStyle/>
+          <a:p>
+            <a:pPr algn="ctr"/>
+          </a:p>
+        </p:txBody>
+      </p:sp>
+      <p:sp>
+        <p:nvSpPr>
+          <p:cNvPr id="14" name="TextBox 13"/>
+          <p:cNvSpPr txBox="1"/>
+          <p:nvPr/>
+        </p:nvSpPr>
+        <p:spPr>
+          <a:xfrm>
+            <a:off x="4480560" y="4983480"/>
+            <a:ext cx="1828800" cy="411480"/>
+          </a:xfrm>
+          <a:prstGeom prst="rect">
+            <a:avLst/>
+          </a:prstGeom>
+          <a:noFill/>
+        </p:spPr>
+        <p:txBody>
+          <a:bodyPr wrap="none">
+            <a:spAutoFit/>
+          </a:bodyPr>
+          <a:lstStyle/>
+          <a:p>
+            <a:pPr algn="ctr"/>
+            <a:r>
+              <a:rPr sz="2200" b="1">
+                <a:solidFill>
+                  <a:srgbClr val="FFFFFF"/>
+                </a:solidFill>
+              </a:rPr>
+              <a:t>5</a:t>
+            </a:r>
+          </a:p>
+        </p:txBody>
+      </p:sp>
+      <p:sp>
+        <p:nvSpPr>
+          <p:cNvPr id="15" name="TextBox 14"/>
+          <p:cNvSpPr txBox="1"/>
+          <p:nvPr/>
+        </p:nvSpPr>
+        <p:spPr>
+          <a:xfrm>
+            <a:off x="4480560" y="5349240"/>
+            <a:ext cx="1828800" cy="320040"/>
+          </a:xfrm>
+          <a:prstGeom prst="rect">
+            <a:avLst/>
+          </a:prstGeom>
+          <a:noFill/>
+        </p:spPr>
+        <p:txBody>
+          <a:bodyPr wrap="none">
+            <a:spAutoFit/>
+          </a:bodyPr>
+          <a:lstStyle/>
+          <a:p>
+            <a:pPr algn="ctr"/>
+            <a:r>
+              <a:rPr sz="1100" b="0">
+                <a:solidFill>
+                  <a:srgbClr val="BFCCF0"/>
+                </a:solidFill>
+              </a:rPr>
+              <a:t>Transactions</a:t>
             </a:r>
           </a:p>
         </p:txBody>
@@ -3216,14 +3627,6 @@
 <file path=ppt/slides/slide2.xml><?xml version="1.0" encoding="utf-8"?>
 <p:sld xmlns:a="http://schemas.openxmlformats.org/drawingml/2006/main" xmlns:p="http://schemas.openxmlformats.org/presentationml/2006/main" xmlns:r="http://schemas.openxmlformats.org/officeDocument/2006/relationships">
   <p:cSld>
-    <p:bg>
-      <p:bgPr>
-        <a:solidFill>
-          <a:srgbClr val="FFFFFF"/>
-        </a:solidFill>
-        <a:effectLst/>
-      </p:bgPr>
-    </p:bg>
     <p:spTree>
       <p:nvGrpSpPr>
         <p:cNvPr id="1" name=""/>
@@ -3240,14 +3643,17 @@
         <p:spPr>
           <a:xfrm>
             <a:off x="0" y="0"/>
-            <a:ext cx="12188952" cy="109728"/>
+            <a:ext cx="12188952" cy="6858000"/>
           </a:xfrm>
           <a:prstGeom prst="rect">
             <a:avLst/>
           </a:prstGeom>
           <a:solidFill>
-            <a:srgbClr val="1E3A8A"/>
+            <a:srgbClr val="F0F4FF"/>
           </a:solidFill>
+          <a:ln>
+            <a:noFill/>
+          </a:ln>
         </p:spPr>
         <p:style>
           <a:lnRef idx="1">
@@ -3273,14 +3679,57 @@
       </p:sp>
       <p:sp>
         <p:nvSpPr>
-          <p:cNvPr id="3" name="TextBox 2"/>
+          <p:cNvPr id="3" name="Rectangle 2"/>
+          <p:cNvSpPr/>
+          <p:nvPr/>
+        </p:nvSpPr>
+        <p:spPr>
+          <a:xfrm>
+            <a:off x="0" y="0"/>
+            <a:ext cx="12188952" cy="1280160"/>
+          </a:xfrm>
+          <a:prstGeom prst="rect">
+            <a:avLst/>
+          </a:prstGeom>
+          <a:solidFill>
+            <a:srgbClr val="1E3A8A"/>
+          </a:solidFill>
+          <a:ln>
+            <a:noFill/>
+          </a:ln>
+        </p:spPr>
+        <p:style>
+          <a:lnRef idx="1">
+            <a:schemeClr val="accent1"/>
+          </a:lnRef>
+          <a:fillRef idx="3">
+            <a:schemeClr val="accent1"/>
+          </a:fillRef>
+          <a:effectRef idx="2">
+            <a:schemeClr val="accent1"/>
+          </a:effectRef>
+          <a:fontRef idx="minor">
+            <a:schemeClr val="lt1"/>
+          </a:fontRef>
+        </p:style>
+        <p:txBody>
+          <a:bodyPr rtlCol="0" anchor="ctr"/>
+          <a:lstStyle/>
+          <a:p>
+            <a:pPr algn="ctr"/>
+          </a:p>
+        </p:txBody>
+      </p:sp>
+      <p:sp>
+        <p:nvSpPr>
+          <p:cNvPr id="4" name="TextBox 3"/>
           <p:cNvSpPr txBox="1"/>
           <p:nvPr/>
         </p:nvSpPr>
         <p:spPr>
           <a:xfrm>
-            <a:off x="731520" y="274320"/>
-            <a:ext cx="10058400" cy="731520"/>
+            <a:off x="457200" y="274320"/>
+            <a:ext cx="10972800" cy="822960"/>
           </a:xfrm>
           <a:prstGeom prst="rect">
             <a:avLst/>
@@ -3288,16 +3737,16 @@
           <a:noFill/>
         </p:spPr>
         <p:txBody>
-          <a:bodyPr wrap="square">
+          <a:bodyPr wrap="none">
             <a:spAutoFit/>
           </a:bodyPr>
           <a:lstStyle/>
           <a:p>
             <a:pPr algn="l"/>
             <a:r>
-              <a:rPr sz="3200" b="1">
-                <a:solidFill>
-                  <a:srgbClr val="1E3A8A"/>
+              <a:rPr sz="3400" b="1">
+                <a:solidFill>
+                  <a:srgbClr val="FFFFFF"/>
                 </a:solidFill>
               </a:rPr>
               <a:t>The Problem</a:t>
@@ -3307,14 +3756,57 @@
       </p:sp>
       <p:sp>
         <p:nvSpPr>
-          <p:cNvPr id="4" name="TextBox 3"/>
+          <p:cNvPr id="5" name="Rectangle 4"/>
+          <p:cNvSpPr/>
+          <p:nvPr/>
+        </p:nvSpPr>
+        <p:spPr>
+          <a:xfrm>
+            <a:off x="457200" y="1737360"/>
+            <a:ext cx="54864" cy="502920"/>
+          </a:xfrm>
+          <a:prstGeom prst="rect">
+            <a:avLst/>
+          </a:prstGeom>
+          <a:solidFill>
+            <a:srgbClr val="377CF6"/>
+          </a:solidFill>
+          <a:ln>
+            <a:noFill/>
+          </a:ln>
+        </p:spPr>
+        <p:style>
+          <a:lnRef idx="1">
+            <a:schemeClr val="accent1"/>
+          </a:lnRef>
+          <a:fillRef idx="3">
+            <a:schemeClr val="accent1"/>
+          </a:fillRef>
+          <a:effectRef idx="2">
+            <a:schemeClr val="accent1"/>
+          </a:effectRef>
+          <a:fontRef idx="minor">
+            <a:schemeClr val="lt1"/>
+          </a:fontRef>
+        </p:style>
+        <p:txBody>
+          <a:bodyPr rtlCol="0" anchor="ctr"/>
+          <a:lstStyle/>
+          <a:p>
+            <a:pPr algn="ctr"/>
+          </a:p>
+        </p:txBody>
+      </p:sp>
+      <p:sp>
+        <p:nvSpPr>
+          <p:cNvPr id="6" name="TextBox 5"/>
           <p:cNvSpPr txBox="1"/>
           <p:nvPr/>
         </p:nvSpPr>
         <p:spPr>
           <a:xfrm>
-            <a:off x="914400" y="1371600"/>
-            <a:ext cx="10058400" cy="914400"/>
+            <a:off x="685800" y="1645920"/>
+            <a:ext cx="3200400" cy="685800"/>
           </a:xfrm>
           <a:prstGeom prst="rect">
             <a:avLst/>
@@ -3322,33 +3814,33 @@
           <a:noFill/>
         </p:spPr>
         <p:txBody>
-          <a:bodyPr wrap="square">
+          <a:bodyPr wrap="none">
             <a:spAutoFit/>
           </a:bodyPr>
           <a:lstStyle/>
           <a:p>
             <a:pPr algn="l"/>
             <a:r>
-              <a:rPr sz="2000" b="0">
-                <a:solidFill>
-                  <a:srgbClr val="6B7280"/>
+              <a:rPr sz="2000" b="1">
+                <a:solidFill>
+                  <a:srgbClr val="1E3A8A"/>
                 </a:solidFill>
               </a:rPr>
-              <a:t>•  5 transactions with 40% anomaly rate in sample data</a:t>
-            </a:r>
-          </a:p>
-        </p:txBody>
-      </p:sp>
-      <p:sp>
-        <p:nvSpPr>
-          <p:cNvPr id="5" name="TextBox 4"/>
+              <a:t>5 transactions</a:t>
+            </a:r>
+          </a:p>
+        </p:txBody>
+      </p:sp>
+      <p:sp>
+        <p:nvSpPr>
+          <p:cNvPr id="7" name="TextBox 6"/>
           <p:cNvSpPr txBox="1"/>
           <p:nvPr/>
         </p:nvSpPr>
         <p:spPr>
           <a:xfrm>
-            <a:off x="914400" y="2468880"/>
-            <a:ext cx="10058400" cy="914400"/>
+            <a:off x="685800" y="2029968"/>
+            <a:ext cx="10058400" cy="548640"/>
           </a:xfrm>
           <a:prstGeom prst="rect">
             <a:avLst/>
@@ -3356,33 +3848,76 @@
           <a:noFill/>
         </p:spPr>
         <p:txBody>
-          <a:bodyPr wrap="square">
+          <a:bodyPr wrap="none">
             <a:spAutoFit/>
           </a:bodyPr>
           <a:lstStyle/>
           <a:p>
             <a:pPr algn="l"/>
             <a:r>
-              <a:rPr sz="2000" b="0">
+              <a:rPr sz="1700" b="0">
                 <a:solidFill>
                   <a:srgbClr val="6B7280"/>
                 </a:solidFill>
               </a:rPr>
-              <a:t>•  Manual fraud detection is slow, inconsistent, and costly</a:t>
-            </a:r>
-          </a:p>
-        </p:txBody>
-      </p:sp>
-      <p:sp>
-        <p:nvSpPr>
-          <p:cNvPr id="6" name="TextBox 5"/>
+              <a:t>with 40% anomaly rate requiring manual review</a:t>
+            </a:r>
+          </a:p>
+        </p:txBody>
+      </p:sp>
+      <p:sp>
+        <p:nvSpPr>
+          <p:cNvPr id="8" name="Rectangle 7"/>
+          <p:cNvSpPr/>
+          <p:nvPr/>
+        </p:nvSpPr>
+        <p:spPr>
+          <a:xfrm>
+            <a:off x="457200" y="3108960"/>
+            <a:ext cx="54864" cy="502920"/>
+          </a:xfrm>
+          <a:prstGeom prst="rect">
+            <a:avLst/>
+          </a:prstGeom>
+          <a:solidFill>
+            <a:srgbClr val="377CF6"/>
+          </a:solidFill>
+          <a:ln>
+            <a:noFill/>
+          </a:ln>
+        </p:spPr>
+        <p:style>
+          <a:lnRef idx="1">
+            <a:schemeClr val="accent1"/>
+          </a:lnRef>
+          <a:fillRef idx="3">
+            <a:schemeClr val="accent1"/>
+          </a:fillRef>
+          <a:effectRef idx="2">
+            <a:schemeClr val="accent1"/>
+          </a:effectRef>
+          <a:fontRef idx="minor">
+            <a:schemeClr val="lt1"/>
+          </a:fontRef>
+        </p:style>
+        <p:txBody>
+          <a:bodyPr rtlCol="0" anchor="ctr"/>
+          <a:lstStyle/>
+          <a:p>
+            <a:pPr algn="ctr"/>
+          </a:p>
+        </p:txBody>
+      </p:sp>
+      <p:sp>
+        <p:nvSpPr>
+          <p:cNvPr id="9" name="TextBox 8"/>
           <p:cNvSpPr txBox="1"/>
           <p:nvPr/>
         </p:nvSpPr>
         <p:spPr>
           <a:xfrm>
-            <a:off x="914400" y="3566160"/>
-            <a:ext cx="10058400" cy="914400"/>
+            <a:off x="685800" y="3017520"/>
+            <a:ext cx="3200400" cy="685800"/>
           </a:xfrm>
           <a:prstGeom prst="rect">
             <a:avLst/>
@@ -3390,19 +3925,164 @@
           <a:noFill/>
         </p:spPr>
         <p:txBody>
-          <a:bodyPr wrap="square">
+          <a:bodyPr wrap="none">
             <a:spAutoFit/>
           </a:bodyPr>
           <a:lstStyle/>
           <a:p>
             <a:pPr algn="l"/>
             <a:r>
-              <a:rPr sz="2000" b="0">
+              <a:rPr sz="2000" b="1">
+                <a:solidFill>
+                  <a:srgbClr val="1E3A8A"/>
+                </a:solidFill>
+              </a:rPr>
+              <a:t>Manual detection</a:t>
+            </a:r>
+          </a:p>
+        </p:txBody>
+      </p:sp>
+      <p:sp>
+        <p:nvSpPr>
+          <p:cNvPr id="10" name="TextBox 9"/>
+          <p:cNvSpPr txBox="1"/>
+          <p:nvPr/>
+        </p:nvSpPr>
+        <p:spPr>
+          <a:xfrm>
+            <a:off x="685800" y="3401568"/>
+            <a:ext cx="10058400" cy="548640"/>
+          </a:xfrm>
+          <a:prstGeom prst="rect">
+            <a:avLst/>
+          </a:prstGeom>
+          <a:noFill/>
+        </p:spPr>
+        <p:txBody>
+          <a:bodyPr wrap="none">
+            <a:spAutoFit/>
+          </a:bodyPr>
+          <a:lstStyle/>
+          <a:p>
+            <a:pPr algn="l"/>
+            <a:r>
+              <a:rPr sz="1700" b="0">
                 <a:solidFill>
                   <a:srgbClr val="6B7280"/>
                 </a:solidFill>
               </a:rPr>
-              <a:t>•  Goal: automated real-time anomaly scoring via REST API</a:t>
+              <a:t>takes hours per review cycle at scale</a:t>
+            </a:r>
+          </a:p>
+        </p:txBody>
+      </p:sp>
+      <p:sp>
+        <p:nvSpPr>
+          <p:cNvPr id="11" name="Rectangle 10"/>
+          <p:cNvSpPr/>
+          <p:nvPr/>
+        </p:nvSpPr>
+        <p:spPr>
+          <a:xfrm>
+            <a:off x="457200" y="4480560"/>
+            <a:ext cx="54864" cy="502920"/>
+          </a:xfrm>
+          <a:prstGeom prst="rect">
+            <a:avLst/>
+          </a:prstGeom>
+          <a:solidFill>
+            <a:srgbClr val="377CF6"/>
+          </a:solidFill>
+          <a:ln>
+            <a:noFill/>
+          </a:ln>
+        </p:spPr>
+        <p:style>
+          <a:lnRef idx="1">
+            <a:schemeClr val="accent1"/>
+          </a:lnRef>
+          <a:fillRef idx="3">
+            <a:schemeClr val="accent1"/>
+          </a:fillRef>
+          <a:effectRef idx="2">
+            <a:schemeClr val="accent1"/>
+          </a:effectRef>
+          <a:fontRef idx="minor">
+            <a:schemeClr val="lt1"/>
+          </a:fontRef>
+        </p:style>
+        <p:txBody>
+          <a:bodyPr rtlCol="0" anchor="ctr"/>
+          <a:lstStyle/>
+          <a:p>
+            <a:pPr algn="ctr"/>
+          </a:p>
+        </p:txBody>
+      </p:sp>
+      <p:sp>
+        <p:nvSpPr>
+          <p:cNvPr id="12" name="TextBox 11"/>
+          <p:cNvSpPr txBox="1"/>
+          <p:nvPr/>
+        </p:nvSpPr>
+        <p:spPr>
+          <a:xfrm>
+            <a:off x="685800" y="4389120"/>
+            <a:ext cx="3200400" cy="685800"/>
+          </a:xfrm>
+          <a:prstGeom prst="rect">
+            <a:avLst/>
+          </a:prstGeom>
+          <a:noFill/>
+        </p:spPr>
+        <p:txBody>
+          <a:bodyPr wrap="none">
+            <a:spAutoFit/>
+          </a:bodyPr>
+          <a:lstStyle/>
+          <a:p>
+            <a:pPr algn="l"/>
+            <a:r>
+              <a:rPr sz="2000" b="1">
+                <a:solidFill>
+                  <a:srgbClr val="1E3A8A"/>
+                </a:solidFill>
+              </a:rPr>
+              <a:t>Goal:</a:t>
+            </a:r>
+          </a:p>
+        </p:txBody>
+      </p:sp>
+      <p:sp>
+        <p:nvSpPr>
+          <p:cNvPr id="13" name="TextBox 12"/>
+          <p:cNvSpPr txBox="1"/>
+          <p:nvPr/>
+        </p:nvSpPr>
+        <p:spPr>
+          <a:xfrm>
+            <a:off x="685800" y="4773168"/>
+            <a:ext cx="10058400" cy="548640"/>
+          </a:xfrm>
+          <a:prstGeom prst="rect">
+            <a:avLst/>
+          </a:prstGeom>
+          <a:noFill/>
+        </p:spPr>
+        <p:txBody>
+          <a:bodyPr wrap="none">
+            <a:spAutoFit/>
+          </a:bodyPr>
+          <a:lstStyle/>
+          <a:p>
+            <a:pPr algn="l"/>
+            <a:r>
+              <a:rPr sz="1700" b="0">
+                <a:solidFill>
+                  <a:srgbClr val="6B7280"/>
+                </a:solidFill>
+              </a:rPr>
+              <a:t>automated real-time anomaly scoring via REST API</a:t>
             </a:r>
           </a:p>
         </p:txBody>
@@ -3418,14 +4098,6 @@
 <file path=ppt/slides/slide3.xml><?xml version="1.0" encoding="utf-8"?>
 <p:sld xmlns:a="http://schemas.openxmlformats.org/drawingml/2006/main" xmlns:p="http://schemas.openxmlformats.org/presentationml/2006/main" xmlns:r="http://schemas.openxmlformats.org/officeDocument/2006/relationships">
   <p:cSld>
-    <p:bg>
-      <p:bgPr>
-        <a:solidFill>
-          <a:srgbClr val="FFFFFF"/>
-        </a:solidFill>
-        <a:effectLst/>
-      </p:bgPr>
-    </p:bg>
     <p:spTree>
       <p:nvGrpSpPr>
         <p:cNvPr id="1" name=""/>
@@ -3442,14 +4114,17 @@
         <p:spPr>
           <a:xfrm>
             <a:off x="0" y="0"/>
-            <a:ext cx="12188952" cy="109728"/>
+            <a:ext cx="12188952" cy="6858000"/>
           </a:xfrm>
           <a:prstGeom prst="rect">
             <a:avLst/>
           </a:prstGeom>
           <a:solidFill>
-            <a:srgbClr val="1E3A8A"/>
+            <a:srgbClr val="FFFFFF"/>
           </a:solidFill>
+          <a:ln>
+            <a:noFill/>
+          </a:ln>
         </p:spPr>
         <p:style>
           <a:lnRef idx="1">
@@ -3475,14 +4150,57 @@
       </p:sp>
       <p:sp>
         <p:nvSpPr>
-          <p:cNvPr id="3" name="TextBox 2"/>
+          <p:cNvPr id="3" name="Rectangle 2"/>
+          <p:cNvSpPr/>
+          <p:nvPr/>
+        </p:nvSpPr>
+        <p:spPr>
+          <a:xfrm>
+            <a:off x="0" y="0"/>
+            <a:ext cx="12188952" cy="1188720"/>
+          </a:xfrm>
+          <a:prstGeom prst="rect">
+            <a:avLst/>
+          </a:prstGeom>
+          <a:solidFill>
+            <a:srgbClr val="1E3A8A"/>
+          </a:solidFill>
+          <a:ln>
+            <a:noFill/>
+          </a:ln>
+        </p:spPr>
+        <p:style>
+          <a:lnRef idx="1">
+            <a:schemeClr val="accent1"/>
+          </a:lnRef>
+          <a:fillRef idx="3">
+            <a:schemeClr val="accent1"/>
+          </a:fillRef>
+          <a:effectRef idx="2">
+            <a:schemeClr val="accent1"/>
+          </a:effectRef>
+          <a:fontRef idx="minor">
+            <a:schemeClr val="lt1"/>
+          </a:fontRef>
+        </p:style>
+        <p:txBody>
+          <a:bodyPr rtlCol="0" anchor="ctr"/>
+          <a:lstStyle/>
+          <a:p>
+            <a:pPr algn="ctr"/>
+          </a:p>
+        </p:txBody>
+      </p:sp>
+      <p:sp>
+        <p:nvSpPr>
+          <p:cNvPr id="4" name="TextBox 3"/>
           <p:cNvSpPr txBox="1"/>
           <p:nvPr/>
         </p:nvSpPr>
         <p:spPr>
           <a:xfrm>
-            <a:off x="731520" y="274320"/>
-            <a:ext cx="10058400" cy="731520"/>
+            <a:off x="457200" y="228600"/>
+            <a:ext cx="10972800" cy="822960"/>
           </a:xfrm>
           <a:prstGeom prst="rect">
             <a:avLst/>
@@ -3490,16 +4208,16 @@
           <a:noFill/>
         </p:spPr>
         <p:txBody>
-          <a:bodyPr wrap="square">
+          <a:bodyPr wrap="none">
             <a:spAutoFit/>
           </a:bodyPr>
           <a:lstStyle/>
           <a:p>
             <a:pPr algn="l"/>
             <a:r>
-              <a:rPr sz="3200" b="1">
-                <a:solidFill>
-                  <a:srgbClr val="1E3A8A"/>
+              <a:rPr sz="3400" b="1">
+                <a:solidFill>
+                  <a:srgbClr val="FFFFFF"/>
                 </a:solidFill>
               </a:rPr>
               <a:t>Data Overview</a:t>
@@ -3509,7 +4227,7 @@
       </p:sp>
       <p:pic>
         <p:nvPicPr>
-          <p:cNvPr id="4" name="Picture 3" descr="01_target_distribution.png"/>
+          <p:cNvPr id="5" name="Picture 4" descr="01_target_distribution.png"/>
           <p:cNvPicPr>
             <a:picLocks noChangeAspect="1"/>
           </p:cNvPicPr>
@@ -3523,8 +4241,8 @@
         </p:blipFill>
         <p:spPr>
           <a:xfrm>
-            <a:off x="457200" y="1188720"/>
-            <a:ext cx="5303520" cy="3474720"/>
+            <a:off x="365760" y="1371600"/>
+            <a:ext cx="5394960" cy="4114800"/>
           </a:xfrm>
           <a:prstGeom prst="rect">
             <a:avLst/>
@@ -3533,7 +4251,7 @@
       </p:pic>
       <p:pic>
         <p:nvPicPr>
-          <p:cNvPr id="5" name="Picture 4" descr="02_feature_correlations.png"/>
+          <p:cNvPr id="6" name="Picture 5" descr="02_feature_correlations.png"/>
           <p:cNvPicPr>
             <a:picLocks noChangeAspect="1"/>
           </p:cNvPicPr>
@@ -3547,8 +4265,8 @@
         </p:blipFill>
         <p:spPr>
           <a:xfrm>
-            <a:off x="6217920" y="1188720"/>
-            <a:ext cx="5303520" cy="3474720"/>
+            <a:off x="6309360" y="1371600"/>
+            <a:ext cx="5394960" cy="4114800"/>
           </a:xfrm>
           <a:prstGeom prst="rect">
             <a:avLst/>
@@ -3557,14 +4275,14 @@
       </p:pic>
       <p:sp>
         <p:nvSpPr>
-          <p:cNvPr id="6" name="TextBox 5"/>
+          <p:cNvPr id="7" name="TextBox 6"/>
           <p:cNvSpPr txBox="1"/>
           <p:nvPr/>
         </p:nvSpPr>
         <p:spPr>
           <a:xfrm>
-            <a:off x="457200" y="4846320"/>
-            <a:ext cx="10972800" cy="457200"/>
+            <a:off x="0" y="5760720"/>
+            <a:ext cx="12188952" cy="457200"/>
           </a:xfrm>
           <a:prstGeom prst="rect">
             <a:avLst/>
@@ -3572,7 +4290,7 @@
           <a:noFill/>
         </p:spPr>
         <p:txBody>
-          <a:bodyPr wrap="square">
+          <a:bodyPr wrap="none">
             <a:spAutoFit/>
           </a:bodyPr>
           <a:lstStyle/>
@@ -3584,7 +4302,7 @@
                   <a:srgbClr val="6B7280"/>
                 </a:solidFill>
               </a:rPr>
-              <a:t>5 rows  ·  6 raw cols  ·  9 engineered features  ·  40% anomaly rate</a:t>
+              <a:t>5 rows  ·  9 features  ·  40% anomaly rate</a:t>
             </a:r>
           </a:p>
         </p:txBody>
@@ -3600,14 +4318,6 @@
 <file path=ppt/slides/slide4.xml><?xml version="1.0" encoding="utf-8"?>
 <p:sld xmlns:a="http://schemas.openxmlformats.org/drawingml/2006/main" xmlns:p="http://schemas.openxmlformats.org/presentationml/2006/main" xmlns:r="http://schemas.openxmlformats.org/officeDocument/2006/relationships">
   <p:cSld>
-    <p:bg>
-      <p:bgPr>
-        <a:solidFill>
-          <a:srgbClr val="FFFFFF"/>
-        </a:solidFill>
-        <a:effectLst/>
-      </p:bgPr>
-    </p:bg>
     <p:spTree>
       <p:nvGrpSpPr>
         <p:cNvPr id="1" name=""/>
@@ -3624,14 +4334,17 @@
         <p:spPr>
           <a:xfrm>
             <a:off x="0" y="0"/>
-            <a:ext cx="12188952" cy="109728"/>
+            <a:ext cx="12188952" cy="6858000"/>
           </a:xfrm>
           <a:prstGeom prst="rect">
             <a:avLst/>
           </a:prstGeom>
           <a:solidFill>
-            <a:srgbClr val="1E3A8A"/>
+            <a:srgbClr val="F0F4FF"/>
           </a:solidFill>
+          <a:ln>
+            <a:noFill/>
+          </a:ln>
         </p:spPr>
         <p:style>
           <a:lnRef idx="1">
@@ -3657,14 +4370,57 @@
       </p:sp>
       <p:sp>
         <p:nvSpPr>
-          <p:cNvPr id="3" name="TextBox 2"/>
+          <p:cNvPr id="3" name="Rectangle 2"/>
+          <p:cNvSpPr/>
+          <p:nvPr/>
+        </p:nvSpPr>
+        <p:spPr>
+          <a:xfrm>
+            <a:off x="0" y="0"/>
+            <a:ext cx="12188952" cy="1188720"/>
+          </a:xfrm>
+          <a:prstGeom prst="rect">
+            <a:avLst/>
+          </a:prstGeom>
+          <a:solidFill>
+            <a:srgbClr val="1E3A8A"/>
+          </a:solidFill>
+          <a:ln>
+            <a:noFill/>
+          </a:ln>
+        </p:spPr>
+        <p:style>
+          <a:lnRef idx="1">
+            <a:schemeClr val="accent1"/>
+          </a:lnRef>
+          <a:fillRef idx="3">
+            <a:schemeClr val="accent1"/>
+          </a:fillRef>
+          <a:effectRef idx="2">
+            <a:schemeClr val="accent1"/>
+          </a:effectRef>
+          <a:fontRef idx="minor">
+            <a:schemeClr val="lt1"/>
+          </a:fontRef>
+        </p:style>
+        <p:txBody>
+          <a:bodyPr rtlCol="0" anchor="ctr"/>
+          <a:lstStyle/>
+          <a:p>
+            <a:pPr algn="ctr"/>
+          </a:p>
+        </p:txBody>
+      </p:sp>
+      <p:sp>
+        <p:nvSpPr>
+          <p:cNvPr id="4" name="TextBox 3"/>
           <p:cNvSpPr txBox="1"/>
           <p:nvPr/>
         </p:nvSpPr>
         <p:spPr>
           <a:xfrm>
-            <a:off x="731520" y="274320"/>
-            <a:ext cx="10058400" cy="731520"/>
+            <a:off x="457200" y="228600"/>
+            <a:ext cx="10972800" cy="822960"/>
           </a:xfrm>
           <a:prstGeom prst="rect">
             <a:avLst/>
@@ -3672,16 +4428,16 @@
           <a:noFill/>
         </p:spPr>
         <p:txBody>
-          <a:bodyPr wrap="square">
+          <a:bodyPr wrap="none">
             <a:spAutoFit/>
           </a:bodyPr>
           <a:lstStyle/>
           <a:p>
             <a:pPr algn="l"/>
             <a:r>
-              <a:rPr sz="3200" b="1">
-                <a:solidFill>
-                  <a:srgbClr val="1E3A8A"/>
+              <a:rPr sz="3400" b="1">
+                <a:solidFill>
+                  <a:srgbClr val="FFFFFF"/>
                 </a:solidFill>
               </a:rPr>
               <a:t>Data Pipeline</a:t>
@@ -3691,7 +4447,7 @@
       </p:sp>
       <p:pic>
         <p:nvPicPr>
-          <p:cNvPr id="4" name="Picture 3" descr="03_missing_values.png"/>
+          <p:cNvPr id="5" name="Picture 4" descr="03_missing_values.png"/>
           <p:cNvPicPr>
             <a:picLocks noChangeAspect="1"/>
           </p:cNvPicPr>
@@ -3705,7 +4461,7 @@
         </p:blipFill>
         <p:spPr>
           <a:xfrm>
-            <a:off x="457200" y="1188720"/>
+            <a:off x="365760" y="1280160"/>
             <a:ext cx="5029200" cy="3200400"/>
           </a:xfrm>
           <a:prstGeom prst="rect">
@@ -3715,14 +4471,57 @@
       </p:pic>
       <p:sp>
         <p:nvSpPr>
-          <p:cNvPr id="5" name="TextBox 4"/>
+          <p:cNvPr id="6" name="Rectangle 5"/>
+          <p:cNvSpPr/>
+          <p:nvPr/>
+        </p:nvSpPr>
+        <p:spPr>
+          <a:xfrm>
+            <a:off x="6035040" y="1325880"/>
+            <a:ext cx="3291840" cy="347472"/>
+          </a:xfrm>
+          <a:prstGeom prst="rect">
+            <a:avLst/>
+          </a:prstGeom>
+          <a:solidFill>
+            <a:srgbClr val="1E3A8A"/>
+          </a:solidFill>
+          <a:ln>
+            <a:noFill/>
+          </a:ln>
+        </p:spPr>
+        <p:style>
+          <a:lnRef idx="1">
+            <a:schemeClr val="accent1"/>
+          </a:lnRef>
+          <a:fillRef idx="3">
+            <a:schemeClr val="accent1"/>
+          </a:fillRef>
+          <a:effectRef idx="2">
+            <a:schemeClr val="accent1"/>
+          </a:effectRef>
+          <a:fontRef idx="minor">
+            <a:schemeClr val="lt1"/>
+          </a:fontRef>
+        </p:style>
+        <p:txBody>
+          <a:bodyPr rtlCol="0" anchor="ctr"/>
+          <a:lstStyle/>
+          <a:p>
+            <a:pPr algn="ctr"/>
+          </a:p>
+        </p:txBody>
+      </p:sp>
+      <p:sp>
+        <p:nvSpPr>
+          <p:cNvPr id="7" name="TextBox 6"/>
           <p:cNvSpPr txBox="1"/>
           <p:nvPr/>
         </p:nvSpPr>
         <p:spPr>
           <a:xfrm>
-            <a:off x="5943600" y="1188720"/>
-            <a:ext cx="5486400" cy="457200"/>
+            <a:off x="6080760" y="1371600"/>
+            <a:ext cx="3291840" cy="320040"/>
           </a:xfrm>
           <a:prstGeom prst="rect">
             <a:avLst/>
@@ -3730,33 +4529,76 @@
           <a:noFill/>
         </p:spPr>
         <p:txBody>
-          <a:bodyPr wrap="square">
+          <a:bodyPr wrap="none">
             <a:spAutoFit/>
           </a:bodyPr>
           <a:lstStyle/>
           <a:p>
             <a:pPr algn="l"/>
             <a:r>
-              <a:rPr sz="1600" b="1">
-                <a:solidFill>
-                  <a:srgbClr val="1E3A8A"/>
+              <a:rPr sz="1100" b="1">
+                <a:solidFill>
+                  <a:srgbClr val="FFFFFF"/>
                 </a:solidFill>
               </a:rPr>
-              <a:t>Quality Checks</a:t>
-            </a:r>
-          </a:p>
-        </p:txBody>
-      </p:sp>
-      <p:sp>
-        <p:nvSpPr>
-          <p:cNvPr id="6" name="TextBox 5"/>
+              <a:t>Check Name</a:t>
+            </a:r>
+          </a:p>
+        </p:txBody>
+      </p:sp>
+      <p:sp>
+        <p:nvSpPr>
+          <p:cNvPr id="8" name="Rectangle 7"/>
+          <p:cNvSpPr/>
+          <p:nvPr/>
+        </p:nvSpPr>
+        <p:spPr>
+          <a:xfrm>
+            <a:off x="9326880" y="1325880"/>
+            <a:ext cx="1280160" cy="347472"/>
+          </a:xfrm>
+          <a:prstGeom prst="rect">
+            <a:avLst/>
+          </a:prstGeom>
+          <a:solidFill>
+            <a:srgbClr val="1E3A8A"/>
+          </a:solidFill>
+          <a:ln>
+            <a:noFill/>
+          </a:ln>
+        </p:spPr>
+        <p:style>
+          <a:lnRef idx="1">
+            <a:schemeClr val="accent1"/>
+          </a:lnRef>
+          <a:fillRef idx="3">
+            <a:schemeClr val="accent1"/>
+          </a:fillRef>
+          <a:effectRef idx="2">
+            <a:schemeClr val="accent1"/>
+          </a:effectRef>
+          <a:fontRef idx="minor">
+            <a:schemeClr val="lt1"/>
+          </a:fontRef>
+        </p:style>
+        <p:txBody>
+          <a:bodyPr rtlCol="0" anchor="ctr"/>
+          <a:lstStyle/>
+          <a:p>
+            <a:pPr algn="ctr"/>
+          </a:p>
+        </p:txBody>
+      </p:sp>
+      <p:sp>
+        <p:nvSpPr>
+          <p:cNvPr id="9" name="TextBox 8"/>
           <p:cNvSpPr txBox="1"/>
           <p:nvPr/>
         </p:nvSpPr>
         <p:spPr>
           <a:xfrm>
-            <a:off x="5943600" y="1645920"/>
-            <a:ext cx="5486400" cy="320040"/>
+            <a:off x="9372600" y="1371600"/>
+            <a:ext cx="1280160" cy="320040"/>
           </a:xfrm>
           <a:prstGeom prst="rect">
             <a:avLst/>
@@ -3764,33 +4606,76 @@
           <a:noFill/>
         </p:spPr>
         <p:txBody>
-          <a:bodyPr wrap="square">
+          <a:bodyPr wrap="none">
             <a:spAutoFit/>
           </a:bodyPr>
           <a:lstStyle/>
           <a:p>
             <a:pPr algn="l"/>
             <a:r>
-              <a:rPr sz="1300" b="0">
-                <a:solidFill>
-                  <a:srgbClr val="059669"/>
+              <a:rPr sz="1100" b="1">
+                <a:solidFill>
+                  <a:srgbClr val="FFFFFF"/>
                 </a:solidFill>
               </a:rPr>
-              <a:t>✓  required_columns_present</a:t>
-            </a:r>
-          </a:p>
-        </p:txBody>
-      </p:sp>
-      <p:sp>
-        <p:nvSpPr>
-          <p:cNvPr id="7" name="TextBox 6"/>
+              <a:t>Result</a:t>
+            </a:r>
+          </a:p>
+        </p:txBody>
+      </p:sp>
+      <p:sp>
+        <p:nvSpPr>
+          <p:cNvPr id="10" name="Rectangle 9"/>
+          <p:cNvSpPr/>
+          <p:nvPr/>
+        </p:nvSpPr>
+        <p:spPr>
+          <a:xfrm>
+            <a:off x="10607040" y="1325880"/>
+            <a:ext cx="1280160" cy="347472"/>
+          </a:xfrm>
+          <a:prstGeom prst="rect">
+            <a:avLst/>
+          </a:prstGeom>
+          <a:solidFill>
+            <a:srgbClr val="1E3A8A"/>
+          </a:solidFill>
+          <a:ln>
+            <a:noFill/>
+          </a:ln>
+        </p:spPr>
+        <p:style>
+          <a:lnRef idx="1">
+            <a:schemeClr val="accent1"/>
+          </a:lnRef>
+          <a:fillRef idx="3">
+            <a:schemeClr val="accent1"/>
+          </a:fillRef>
+          <a:effectRef idx="2">
+            <a:schemeClr val="accent1"/>
+          </a:effectRef>
+          <a:fontRef idx="minor">
+            <a:schemeClr val="lt1"/>
+          </a:fontRef>
+        </p:style>
+        <p:txBody>
+          <a:bodyPr rtlCol="0" anchor="ctr"/>
+          <a:lstStyle/>
+          <a:p>
+            <a:pPr algn="ctr"/>
+          </a:p>
+        </p:txBody>
+      </p:sp>
+      <p:sp>
+        <p:nvSpPr>
+          <p:cNvPr id="11" name="TextBox 10"/>
           <p:cNvSpPr txBox="1"/>
           <p:nvPr/>
         </p:nvSpPr>
         <p:spPr>
           <a:xfrm>
-            <a:off x="5943600" y="1965960"/>
-            <a:ext cx="5486400" cy="320040"/>
+            <a:off x="10652760" y="1371600"/>
+            <a:ext cx="1280160" cy="320040"/>
           </a:xfrm>
           <a:prstGeom prst="rect">
             <a:avLst/>
@@ -3798,33 +4683,76 @@
           <a:noFill/>
         </p:spPr>
         <p:txBody>
-          <a:bodyPr wrap="square">
+          <a:bodyPr wrap="none">
             <a:spAutoFit/>
           </a:bodyPr>
           <a:lstStyle/>
           <a:p>
             <a:pPr algn="l"/>
             <a:r>
-              <a:rPr sz="1300" b="0">
-                <a:solidFill>
-                  <a:srgbClr val="059669"/>
+              <a:rPr sz="1100" b="1">
+                <a:solidFill>
+                  <a:srgbClr val="FFFFFF"/>
                 </a:solidFill>
               </a:rPr>
-              <a:t>✓  no_duplicate_ids</a:t>
-            </a:r>
-          </a:p>
-        </p:txBody>
-      </p:sp>
-      <p:sp>
-        <p:nvSpPr>
-          <p:cNvPr id="8" name="TextBox 7"/>
+              <a:t>Rows Affected</a:t>
+            </a:r>
+          </a:p>
+        </p:txBody>
+      </p:sp>
+      <p:sp>
+        <p:nvSpPr>
+          <p:cNvPr id="12" name="Rectangle 11"/>
+          <p:cNvSpPr/>
+          <p:nvPr/>
+        </p:nvSpPr>
+        <p:spPr>
+          <a:xfrm>
+            <a:off x="6035040" y="1673352"/>
+            <a:ext cx="3291840" cy="402336"/>
+          </a:xfrm>
+          <a:prstGeom prst="rect">
+            <a:avLst/>
+          </a:prstGeom>
+          <a:solidFill>
+            <a:srgbClr val="FFFFFF"/>
+          </a:solidFill>
+          <a:ln>
+            <a:noFill/>
+          </a:ln>
+        </p:spPr>
+        <p:style>
+          <a:lnRef idx="1">
+            <a:schemeClr val="accent1"/>
+          </a:lnRef>
+          <a:fillRef idx="3">
+            <a:schemeClr val="accent1"/>
+          </a:fillRef>
+          <a:effectRef idx="2">
+            <a:schemeClr val="accent1"/>
+          </a:effectRef>
+          <a:fontRef idx="minor">
+            <a:schemeClr val="lt1"/>
+          </a:fontRef>
+        </p:style>
+        <p:txBody>
+          <a:bodyPr rtlCol="0" anchor="ctr"/>
+          <a:lstStyle/>
+          <a:p>
+            <a:pPr algn="ctr"/>
+          </a:p>
+        </p:txBody>
+      </p:sp>
+      <p:sp>
+        <p:nvSpPr>
+          <p:cNvPr id="13" name="TextBox 12"/>
           <p:cNvSpPr txBox="1"/>
           <p:nvPr/>
         </p:nvSpPr>
         <p:spPr>
           <a:xfrm>
-            <a:off x="5943600" y="2286000"/>
-            <a:ext cx="5486400" cy="320040"/>
+            <a:off x="6080760" y="1719072"/>
+            <a:ext cx="3291840" cy="320040"/>
           </a:xfrm>
           <a:prstGeom prst="rect">
             <a:avLst/>
@@ -3832,33 +4760,76 @@
           <a:noFill/>
         </p:spPr>
         <p:txBody>
-          <a:bodyPr wrap="square">
+          <a:bodyPr wrap="none">
             <a:spAutoFit/>
           </a:bodyPr>
           <a:lstStyle/>
           <a:p>
             <a:pPr algn="l"/>
             <a:r>
-              <a:rPr sz="1300" b="0">
-                <a:solidFill>
-                  <a:srgbClr val="059669"/>
+              <a:rPr sz="1000" b="0">
+                <a:solidFill>
+                  <a:srgbClr val="1E3A8A"/>
                 </a:solidFill>
               </a:rPr>
-              <a:t>✓  amount_positive</a:t>
-            </a:r>
-          </a:p>
-        </p:txBody>
-      </p:sp>
-      <p:sp>
-        <p:nvSpPr>
-          <p:cNvPr id="9" name="TextBox 8"/>
+              <a:t>Required columns present</a:t>
+            </a:r>
+          </a:p>
+        </p:txBody>
+      </p:sp>
+      <p:sp>
+        <p:nvSpPr>
+          <p:cNvPr id="14" name="Rectangle 13"/>
+          <p:cNvSpPr/>
+          <p:nvPr/>
+        </p:nvSpPr>
+        <p:spPr>
+          <a:xfrm>
+            <a:off x="9326880" y="1673352"/>
+            <a:ext cx="1280160" cy="402336"/>
+          </a:xfrm>
+          <a:prstGeom prst="rect">
+            <a:avLst/>
+          </a:prstGeom>
+          <a:solidFill>
+            <a:srgbClr val="FFFFFF"/>
+          </a:solidFill>
+          <a:ln>
+            <a:noFill/>
+          </a:ln>
+        </p:spPr>
+        <p:style>
+          <a:lnRef idx="1">
+            <a:schemeClr val="accent1"/>
+          </a:lnRef>
+          <a:fillRef idx="3">
+            <a:schemeClr val="accent1"/>
+          </a:fillRef>
+          <a:effectRef idx="2">
+            <a:schemeClr val="accent1"/>
+          </a:effectRef>
+          <a:fontRef idx="minor">
+            <a:schemeClr val="lt1"/>
+          </a:fontRef>
+        </p:style>
+        <p:txBody>
+          <a:bodyPr rtlCol="0" anchor="ctr"/>
+          <a:lstStyle/>
+          <a:p>
+            <a:pPr algn="ctr"/>
+          </a:p>
+        </p:txBody>
+      </p:sp>
+      <p:sp>
+        <p:nvSpPr>
+          <p:cNvPr id="15" name="TextBox 14"/>
           <p:cNvSpPr txBox="1"/>
           <p:nvPr/>
         </p:nvSpPr>
         <p:spPr>
           <a:xfrm>
-            <a:off x="5943600" y="2606039"/>
-            <a:ext cx="5486400" cy="320040"/>
+            <a:off x="9372600" y="1719072"/>
+            <a:ext cx="1280160" cy="320040"/>
           </a:xfrm>
           <a:prstGeom prst="rect">
             <a:avLst/>
@@ -3866,33 +4837,76 @@
           <a:noFill/>
         </p:spPr>
         <p:txBody>
-          <a:bodyPr wrap="square">
+          <a:bodyPr wrap="none">
             <a:spAutoFit/>
           </a:bodyPr>
           <a:lstStyle/>
           <a:p>
             <a:pPr algn="l"/>
             <a:r>
-              <a:rPr sz="1300" b="0">
+              <a:rPr sz="1000" b="0">
                 <a:solidFill>
                   <a:srgbClr val="059669"/>
                 </a:solidFill>
               </a:rPr>
-              <a:t>✓  amount_realistic_range</a:t>
-            </a:r>
-          </a:p>
-        </p:txBody>
-      </p:sp>
-      <p:sp>
-        <p:nvSpPr>
-          <p:cNvPr id="10" name="TextBox 9"/>
+              <a:t>✅ Passed</a:t>
+            </a:r>
+          </a:p>
+        </p:txBody>
+      </p:sp>
+      <p:sp>
+        <p:nvSpPr>
+          <p:cNvPr id="16" name="Rectangle 15"/>
+          <p:cNvSpPr/>
+          <p:nvPr/>
+        </p:nvSpPr>
+        <p:spPr>
+          <a:xfrm>
+            <a:off x="10607040" y="1673352"/>
+            <a:ext cx="1280160" cy="402336"/>
+          </a:xfrm>
+          <a:prstGeom prst="rect">
+            <a:avLst/>
+          </a:prstGeom>
+          <a:solidFill>
+            <a:srgbClr val="FFFFFF"/>
+          </a:solidFill>
+          <a:ln>
+            <a:noFill/>
+          </a:ln>
+        </p:spPr>
+        <p:style>
+          <a:lnRef idx="1">
+            <a:schemeClr val="accent1"/>
+          </a:lnRef>
+          <a:fillRef idx="3">
+            <a:schemeClr val="accent1"/>
+          </a:fillRef>
+          <a:effectRef idx="2">
+            <a:schemeClr val="accent1"/>
+          </a:effectRef>
+          <a:fontRef idx="minor">
+            <a:schemeClr val="lt1"/>
+          </a:fontRef>
+        </p:style>
+        <p:txBody>
+          <a:bodyPr rtlCol="0" anchor="ctr"/>
+          <a:lstStyle/>
+          <a:p>
+            <a:pPr algn="ctr"/>
+          </a:p>
+        </p:txBody>
+      </p:sp>
+      <p:sp>
+        <p:nvSpPr>
+          <p:cNvPr id="17" name="TextBox 16"/>
           <p:cNvSpPr txBox="1"/>
           <p:nvPr/>
         </p:nvSpPr>
         <p:spPr>
           <a:xfrm>
-            <a:off x="5943600" y="2926080"/>
-            <a:ext cx="5486400" cy="320040"/>
+            <a:off x="10652760" y="1719072"/>
+            <a:ext cx="1280160" cy="320040"/>
           </a:xfrm>
           <a:prstGeom prst="rect">
             <a:avLst/>
@@ -3900,33 +4914,76 @@
           <a:noFill/>
         </p:spPr>
         <p:txBody>
-          <a:bodyPr wrap="square">
+          <a:bodyPr wrap="none">
             <a:spAutoFit/>
           </a:bodyPr>
           <a:lstStyle/>
           <a:p>
             <a:pPr algn="l"/>
             <a:r>
-              <a:rPr sz="1300" b="0">
-                <a:solidFill>
-                  <a:srgbClr val="059669"/>
+              <a:rPr sz="1000" b="0">
+                <a:solidFill>
+                  <a:srgbClr val="1E3A8A"/>
                 </a:solidFill>
               </a:rPr>
-              <a:t>✓  is_anomaly_binary</a:t>
-            </a:r>
-          </a:p>
-        </p:txBody>
-      </p:sp>
-      <p:sp>
-        <p:nvSpPr>
-          <p:cNvPr id="11" name="TextBox 10"/>
+              <a:t>0</a:t>
+            </a:r>
+          </a:p>
+        </p:txBody>
+      </p:sp>
+      <p:sp>
+        <p:nvSpPr>
+          <p:cNvPr id="18" name="Rectangle 17"/>
+          <p:cNvSpPr/>
+          <p:nvPr/>
+        </p:nvSpPr>
+        <p:spPr>
+          <a:xfrm>
+            <a:off x="6035040" y="2084832"/>
+            <a:ext cx="3291840" cy="402336"/>
+          </a:xfrm>
+          <a:prstGeom prst="rect">
+            <a:avLst/>
+          </a:prstGeom>
+          <a:solidFill>
+            <a:srgbClr val="F0F4FF"/>
+          </a:solidFill>
+          <a:ln>
+            <a:noFill/>
+          </a:ln>
+        </p:spPr>
+        <p:style>
+          <a:lnRef idx="1">
+            <a:schemeClr val="accent1"/>
+          </a:lnRef>
+          <a:fillRef idx="3">
+            <a:schemeClr val="accent1"/>
+          </a:fillRef>
+          <a:effectRef idx="2">
+            <a:schemeClr val="accent1"/>
+          </a:effectRef>
+          <a:fontRef idx="minor">
+            <a:schemeClr val="lt1"/>
+          </a:fontRef>
+        </p:style>
+        <p:txBody>
+          <a:bodyPr rtlCol="0" anchor="ctr"/>
+          <a:lstStyle/>
+          <a:p>
+            <a:pPr algn="ctr"/>
+          </a:p>
+        </p:txBody>
+      </p:sp>
+      <p:sp>
+        <p:nvSpPr>
+          <p:cNvPr id="19" name="TextBox 18"/>
           <p:cNvSpPr txBox="1"/>
           <p:nvPr/>
         </p:nvSpPr>
         <p:spPr>
           <a:xfrm>
-            <a:off x="5943600" y="3246120"/>
-            <a:ext cx="5486400" cy="320040"/>
+            <a:off x="6080760" y="2130552"/>
+            <a:ext cx="3291840" cy="320040"/>
           </a:xfrm>
           <a:prstGeom prst="rect">
             <a:avLst/>
@@ -3934,33 +4991,76 @@
           <a:noFill/>
         </p:spPr>
         <p:txBody>
-          <a:bodyPr wrap="square">
+          <a:bodyPr wrap="none">
             <a:spAutoFit/>
           </a:bodyPr>
           <a:lstStyle/>
           <a:p>
             <a:pPr algn="l"/>
             <a:r>
-              <a:rPr sz="1300" b="0">
-                <a:solidFill>
-                  <a:srgbClr val="059669"/>
+              <a:rPr sz="1000" b="0">
+                <a:solidFill>
+                  <a:srgbClr val="1E3A8A"/>
                 </a:solidFill>
               </a:rPr>
-              <a:t>✓  no_nulls_in_key_columns</a:t>
-            </a:r>
-          </a:p>
-        </p:txBody>
-      </p:sp>
-      <p:sp>
-        <p:nvSpPr>
-          <p:cNvPr id="12" name="TextBox 11"/>
+              <a:t>No duplicate IDs</a:t>
+            </a:r>
+          </a:p>
+        </p:txBody>
+      </p:sp>
+      <p:sp>
+        <p:nvSpPr>
+          <p:cNvPr id="20" name="Rectangle 19"/>
+          <p:cNvSpPr/>
+          <p:nvPr/>
+        </p:nvSpPr>
+        <p:spPr>
+          <a:xfrm>
+            <a:off x="9326880" y="2084832"/>
+            <a:ext cx="1280160" cy="402336"/>
+          </a:xfrm>
+          <a:prstGeom prst="rect">
+            <a:avLst/>
+          </a:prstGeom>
+          <a:solidFill>
+            <a:srgbClr val="F0F4FF"/>
+          </a:solidFill>
+          <a:ln>
+            <a:noFill/>
+          </a:ln>
+        </p:spPr>
+        <p:style>
+          <a:lnRef idx="1">
+            <a:schemeClr val="accent1"/>
+          </a:lnRef>
+          <a:fillRef idx="3">
+            <a:schemeClr val="accent1"/>
+          </a:fillRef>
+          <a:effectRef idx="2">
+            <a:schemeClr val="accent1"/>
+          </a:effectRef>
+          <a:fontRef idx="minor">
+            <a:schemeClr val="lt1"/>
+          </a:fontRef>
+        </p:style>
+        <p:txBody>
+          <a:bodyPr rtlCol="0" anchor="ctr"/>
+          <a:lstStyle/>
+          <a:p>
+            <a:pPr algn="ctr"/>
+          </a:p>
+        </p:txBody>
+      </p:sp>
+      <p:sp>
+        <p:nvSpPr>
+          <p:cNvPr id="21" name="TextBox 20"/>
           <p:cNvSpPr txBox="1"/>
           <p:nvPr/>
         </p:nvSpPr>
         <p:spPr>
           <a:xfrm>
-            <a:off x="5943600" y="3566159"/>
-            <a:ext cx="5486400" cy="320040"/>
+            <a:off x="9372600" y="2130552"/>
+            <a:ext cx="1280160" cy="320040"/>
           </a:xfrm>
           <a:prstGeom prst="rect">
             <a:avLst/>
@@ -3968,33 +5068,76 @@
           <a:noFill/>
         </p:spPr>
         <p:txBody>
-          <a:bodyPr wrap="square">
+          <a:bodyPr wrap="none">
             <a:spAutoFit/>
           </a:bodyPr>
           <a:lstStyle/>
           <a:p>
             <a:pPr algn="l"/>
             <a:r>
-              <a:rPr sz="1300" b="0">
+              <a:rPr sz="1000" b="0">
                 <a:solidFill>
                   <a:srgbClr val="059669"/>
                 </a:solidFill>
               </a:rPr>
-              <a:t>✓  timestamp_parseable</a:t>
-            </a:r>
-          </a:p>
-        </p:txBody>
-      </p:sp>
-      <p:sp>
-        <p:nvSpPr>
-          <p:cNvPr id="13" name="TextBox 12"/>
+              <a:t>✅ Passed</a:t>
+            </a:r>
+          </a:p>
+        </p:txBody>
+      </p:sp>
+      <p:sp>
+        <p:nvSpPr>
+          <p:cNvPr id="22" name="Rectangle 21"/>
+          <p:cNvSpPr/>
+          <p:nvPr/>
+        </p:nvSpPr>
+        <p:spPr>
+          <a:xfrm>
+            <a:off x="10607040" y="2084832"/>
+            <a:ext cx="1280160" cy="402336"/>
+          </a:xfrm>
+          <a:prstGeom prst="rect">
+            <a:avLst/>
+          </a:prstGeom>
+          <a:solidFill>
+            <a:srgbClr val="F0F4FF"/>
+          </a:solidFill>
+          <a:ln>
+            <a:noFill/>
+          </a:ln>
+        </p:spPr>
+        <p:style>
+          <a:lnRef idx="1">
+            <a:schemeClr val="accent1"/>
+          </a:lnRef>
+          <a:fillRef idx="3">
+            <a:schemeClr val="accent1"/>
+          </a:fillRef>
+          <a:effectRef idx="2">
+            <a:schemeClr val="accent1"/>
+          </a:effectRef>
+          <a:fontRef idx="minor">
+            <a:schemeClr val="lt1"/>
+          </a:fontRef>
+        </p:style>
+        <p:txBody>
+          <a:bodyPr rtlCol="0" anchor="ctr"/>
+          <a:lstStyle/>
+          <a:p>
+            <a:pPr algn="ctr"/>
+          </a:p>
+        </p:txBody>
+      </p:sp>
+      <p:sp>
+        <p:nvSpPr>
+          <p:cNvPr id="23" name="TextBox 22"/>
           <p:cNvSpPr txBox="1"/>
           <p:nvPr/>
         </p:nvSpPr>
         <p:spPr>
           <a:xfrm>
-            <a:off x="5943600" y="3886200"/>
-            <a:ext cx="5486400" cy="320040"/>
+            <a:off x="10652760" y="2130552"/>
+            <a:ext cx="1280160" cy="320040"/>
           </a:xfrm>
           <a:prstGeom prst="rect">
             <a:avLst/>
@@ -4002,33 +5145,76 @@
           <a:noFill/>
         </p:spPr>
         <p:txBody>
-          <a:bodyPr wrap="square">
+          <a:bodyPr wrap="none">
             <a:spAutoFit/>
           </a:bodyPr>
           <a:lstStyle/>
           <a:p>
             <a:pPr algn="l"/>
             <a:r>
-              <a:rPr sz="1300" b="0">
-                <a:solidFill>
-                  <a:srgbClr val="059669"/>
+              <a:rPr sz="1000" b="0">
+                <a:solidFill>
+                  <a:srgbClr val="1E3A8A"/>
                 </a:solidFill>
               </a:rPr>
-              <a:t>✓  category_non_empty</a:t>
-            </a:r>
-          </a:p>
-        </p:txBody>
-      </p:sp>
-      <p:sp>
-        <p:nvSpPr>
-          <p:cNvPr id="14" name="TextBox 13"/>
+              <a:t>0</a:t>
+            </a:r>
+          </a:p>
+        </p:txBody>
+      </p:sp>
+      <p:sp>
+        <p:nvSpPr>
+          <p:cNvPr id="24" name="Rectangle 23"/>
+          <p:cNvSpPr/>
+          <p:nvPr/>
+        </p:nvSpPr>
+        <p:spPr>
+          <a:xfrm>
+            <a:off x="6035040" y="2496312"/>
+            <a:ext cx="3291840" cy="402336"/>
+          </a:xfrm>
+          <a:prstGeom prst="rect">
+            <a:avLst/>
+          </a:prstGeom>
+          <a:solidFill>
+            <a:srgbClr val="FFFFFF"/>
+          </a:solidFill>
+          <a:ln>
+            <a:noFill/>
+          </a:ln>
+        </p:spPr>
+        <p:style>
+          <a:lnRef idx="1">
+            <a:schemeClr val="accent1"/>
+          </a:lnRef>
+          <a:fillRef idx="3">
+            <a:schemeClr val="accent1"/>
+          </a:fillRef>
+          <a:effectRef idx="2">
+            <a:schemeClr val="accent1"/>
+          </a:effectRef>
+          <a:fontRef idx="minor">
+            <a:schemeClr val="lt1"/>
+          </a:fontRef>
+        </p:style>
+        <p:txBody>
+          <a:bodyPr rtlCol="0" anchor="ctr"/>
+          <a:lstStyle/>
+          <a:p>
+            <a:pPr algn="ctr"/>
+          </a:p>
+        </p:txBody>
+      </p:sp>
+      <p:sp>
+        <p:nvSpPr>
+          <p:cNvPr id="25" name="TextBox 24"/>
           <p:cNvSpPr txBox="1"/>
           <p:nvPr/>
         </p:nvSpPr>
         <p:spPr>
           <a:xfrm>
-            <a:off x="5943600" y="4206240"/>
-            <a:ext cx="5486400" cy="320040"/>
+            <a:off x="6080760" y="2542032"/>
+            <a:ext cx="3291840" cy="320040"/>
           </a:xfrm>
           <a:prstGeom prst="rect">
             <a:avLst/>
@@ -4036,33 +5222,76 @@
           <a:noFill/>
         </p:spPr>
         <p:txBody>
-          <a:bodyPr wrap="square">
+          <a:bodyPr wrap="none">
             <a:spAutoFit/>
           </a:bodyPr>
           <a:lstStyle/>
           <a:p>
             <a:pPr algn="l"/>
             <a:r>
-              <a:rPr sz="1300" b="0">
-                <a:solidFill>
-                  <a:srgbClr val="059669"/>
+              <a:rPr sz="1000" b="0">
+                <a:solidFill>
+                  <a:srgbClr val="1E3A8A"/>
                 </a:solidFill>
               </a:rPr>
-              <a:t>✓  merchant_id_non_null</a:t>
-            </a:r>
-          </a:p>
-        </p:txBody>
-      </p:sp>
-      <p:sp>
-        <p:nvSpPr>
-          <p:cNvPr id="15" name="TextBox 14"/>
+              <a:t>Amount positive</a:t>
+            </a:r>
+          </a:p>
+        </p:txBody>
+      </p:sp>
+      <p:sp>
+        <p:nvSpPr>
+          <p:cNvPr id="26" name="Rectangle 25"/>
+          <p:cNvSpPr/>
+          <p:nvPr/>
+        </p:nvSpPr>
+        <p:spPr>
+          <a:xfrm>
+            <a:off x="9326880" y="2496312"/>
+            <a:ext cx="1280160" cy="402336"/>
+          </a:xfrm>
+          <a:prstGeom prst="rect">
+            <a:avLst/>
+          </a:prstGeom>
+          <a:solidFill>
+            <a:srgbClr val="FFFFFF"/>
+          </a:solidFill>
+          <a:ln>
+            <a:noFill/>
+          </a:ln>
+        </p:spPr>
+        <p:style>
+          <a:lnRef idx="1">
+            <a:schemeClr val="accent1"/>
+          </a:lnRef>
+          <a:fillRef idx="3">
+            <a:schemeClr val="accent1"/>
+          </a:fillRef>
+          <a:effectRef idx="2">
+            <a:schemeClr val="accent1"/>
+          </a:effectRef>
+          <a:fontRef idx="minor">
+            <a:schemeClr val="lt1"/>
+          </a:fontRef>
+        </p:style>
+        <p:txBody>
+          <a:bodyPr rtlCol="0" anchor="ctr"/>
+          <a:lstStyle/>
+          <a:p>
+            <a:pPr algn="ctr"/>
+          </a:p>
+        </p:txBody>
+      </p:sp>
+      <p:sp>
+        <p:nvSpPr>
+          <p:cNvPr id="27" name="TextBox 26"/>
           <p:cNvSpPr txBox="1"/>
           <p:nvPr/>
         </p:nvSpPr>
         <p:spPr>
           <a:xfrm>
-            <a:off x="5943600" y="4526280"/>
-            <a:ext cx="5486400" cy="320040"/>
+            <a:off x="9372600" y="2542032"/>
+            <a:ext cx="1280160" cy="320040"/>
           </a:xfrm>
           <a:prstGeom prst="rect">
             <a:avLst/>
@@ -4070,19 +5299,1713 @@
           <a:noFill/>
         </p:spPr>
         <p:txBody>
-          <a:bodyPr wrap="square">
+          <a:bodyPr wrap="none">
             <a:spAutoFit/>
           </a:bodyPr>
           <a:lstStyle/>
           <a:p>
             <a:pPr algn="l"/>
             <a:r>
-              <a:rPr sz="1300" b="0">
+              <a:rPr sz="1000" b="0">
                 <a:solidFill>
                   <a:srgbClr val="059669"/>
                 </a:solidFill>
               </a:rPr>
-              <a:t>✓  both_classes_present</a:t>
+              <a:t>✅ Passed</a:t>
+            </a:r>
+          </a:p>
+        </p:txBody>
+      </p:sp>
+      <p:sp>
+        <p:nvSpPr>
+          <p:cNvPr id="28" name="Rectangle 27"/>
+          <p:cNvSpPr/>
+          <p:nvPr/>
+        </p:nvSpPr>
+        <p:spPr>
+          <a:xfrm>
+            <a:off x="10607040" y="2496312"/>
+            <a:ext cx="1280160" cy="402336"/>
+          </a:xfrm>
+          <a:prstGeom prst="rect">
+            <a:avLst/>
+          </a:prstGeom>
+          <a:solidFill>
+            <a:srgbClr val="FFFFFF"/>
+          </a:solidFill>
+          <a:ln>
+            <a:noFill/>
+          </a:ln>
+        </p:spPr>
+        <p:style>
+          <a:lnRef idx="1">
+            <a:schemeClr val="accent1"/>
+          </a:lnRef>
+          <a:fillRef idx="3">
+            <a:schemeClr val="accent1"/>
+          </a:fillRef>
+          <a:effectRef idx="2">
+            <a:schemeClr val="accent1"/>
+          </a:effectRef>
+          <a:fontRef idx="minor">
+            <a:schemeClr val="lt1"/>
+          </a:fontRef>
+        </p:style>
+        <p:txBody>
+          <a:bodyPr rtlCol="0" anchor="ctr"/>
+          <a:lstStyle/>
+          <a:p>
+            <a:pPr algn="ctr"/>
+          </a:p>
+        </p:txBody>
+      </p:sp>
+      <p:sp>
+        <p:nvSpPr>
+          <p:cNvPr id="29" name="TextBox 28"/>
+          <p:cNvSpPr txBox="1"/>
+          <p:nvPr/>
+        </p:nvSpPr>
+        <p:spPr>
+          <a:xfrm>
+            <a:off x="10652760" y="2542032"/>
+            <a:ext cx="1280160" cy="320040"/>
+          </a:xfrm>
+          <a:prstGeom prst="rect">
+            <a:avLst/>
+          </a:prstGeom>
+          <a:noFill/>
+        </p:spPr>
+        <p:txBody>
+          <a:bodyPr wrap="none">
+            <a:spAutoFit/>
+          </a:bodyPr>
+          <a:lstStyle/>
+          <a:p>
+            <a:pPr algn="l"/>
+            <a:r>
+              <a:rPr sz="1000" b="0">
+                <a:solidFill>
+                  <a:srgbClr val="1E3A8A"/>
+                </a:solidFill>
+              </a:rPr>
+              <a:t>0</a:t>
+            </a:r>
+          </a:p>
+        </p:txBody>
+      </p:sp>
+      <p:sp>
+        <p:nvSpPr>
+          <p:cNvPr id="30" name="Rectangle 29"/>
+          <p:cNvSpPr/>
+          <p:nvPr/>
+        </p:nvSpPr>
+        <p:spPr>
+          <a:xfrm>
+            <a:off x="6035040" y="2907792"/>
+            <a:ext cx="3291840" cy="402336"/>
+          </a:xfrm>
+          <a:prstGeom prst="rect">
+            <a:avLst/>
+          </a:prstGeom>
+          <a:solidFill>
+            <a:srgbClr val="F0F4FF"/>
+          </a:solidFill>
+          <a:ln>
+            <a:noFill/>
+          </a:ln>
+        </p:spPr>
+        <p:style>
+          <a:lnRef idx="1">
+            <a:schemeClr val="accent1"/>
+          </a:lnRef>
+          <a:fillRef idx="3">
+            <a:schemeClr val="accent1"/>
+          </a:fillRef>
+          <a:effectRef idx="2">
+            <a:schemeClr val="accent1"/>
+          </a:effectRef>
+          <a:fontRef idx="minor">
+            <a:schemeClr val="lt1"/>
+          </a:fontRef>
+        </p:style>
+        <p:txBody>
+          <a:bodyPr rtlCol="0" anchor="ctr"/>
+          <a:lstStyle/>
+          <a:p>
+            <a:pPr algn="ctr"/>
+          </a:p>
+        </p:txBody>
+      </p:sp>
+      <p:sp>
+        <p:nvSpPr>
+          <p:cNvPr id="31" name="TextBox 30"/>
+          <p:cNvSpPr txBox="1"/>
+          <p:nvPr/>
+        </p:nvSpPr>
+        <p:spPr>
+          <a:xfrm>
+            <a:off x="6080760" y="2953512"/>
+            <a:ext cx="3291840" cy="320040"/>
+          </a:xfrm>
+          <a:prstGeom prst="rect">
+            <a:avLst/>
+          </a:prstGeom>
+          <a:noFill/>
+        </p:spPr>
+        <p:txBody>
+          <a:bodyPr wrap="none">
+            <a:spAutoFit/>
+          </a:bodyPr>
+          <a:lstStyle/>
+          <a:p>
+            <a:pPr algn="l"/>
+            <a:r>
+              <a:rPr sz="1000" b="0">
+                <a:solidFill>
+                  <a:srgbClr val="1E3A8A"/>
+                </a:solidFill>
+              </a:rPr>
+              <a:t>Amount range (&lt;1M)</a:t>
+            </a:r>
+          </a:p>
+        </p:txBody>
+      </p:sp>
+      <p:sp>
+        <p:nvSpPr>
+          <p:cNvPr id="32" name="Rectangle 31"/>
+          <p:cNvSpPr/>
+          <p:nvPr/>
+        </p:nvSpPr>
+        <p:spPr>
+          <a:xfrm>
+            <a:off x="9326880" y="2907792"/>
+            <a:ext cx="1280160" cy="402336"/>
+          </a:xfrm>
+          <a:prstGeom prst="rect">
+            <a:avLst/>
+          </a:prstGeom>
+          <a:solidFill>
+            <a:srgbClr val="F0F4FF"/>
+          </a:solidFill>
+          <a:ln>
+            <a:noFill/>
+          </a:ln>
+        </p:spPr>
+        <p:style>
+          <a:lnRef idx="1">
+            <a:schemeClr val="accent1"/>
+          </a:lnRef>
+          <a:fillRef idx="3">
+            <a:schemeClr val="accent1"/>
+          </a:fillRef>
+          <a:effectRef idx="2">
+            <a:schemeClr val="accent1"/>
+          </a:effectRef>
+          <a:fontRef idx="minor">
+            <a:schemeClr val="lt1"/>
+          </a:fontRef>
+        </p:style>
+        <p:txBody>
+          <a:bodyPr rtlCol="0" anchor="ctr"/>
+          <a:lstStyle/>
+          <a:p>
+            <a:pPr algn="ctr"/>
+          </a:p>
+        </p:txBody>
+      </p:sp>
+      <p:sp>
+        <p:nvSpPr>
+          <p:cNvPr id="33" name="TextBox 32"/>
+          <p:cNvSpPr txBox="1"/>
+          <p:nvPr/>
+        </p:nvSpPr>
+        <p:spPr>
+          <a:xfrm>
+            <a:off x="9372600" y="2953512"/>
+            <a:ext cx="1280160" cy="320040"/>
+          </a:xfrm>
+          <a:prstGeom prst="rect">
+            <a:avLst/>
+          </a:prstGeom>
+          <a:noFill/>
+        </p:spPr>
+        <p:txBody>
+          <a:bodyPr wrap="none">
+            <a:spAutoFit/>
+          </a:bodyPr>
+          <a:lstStyle/>
+          <a:p>
+            <a:pPr algn="l"/>
+            <a:r>
+              <a:rPr sz="1000" b="0">
+                <a:solidFill>
+                  <a:srgbClr val="059669"/>
+                </a:solidFill>
+              </a:rPr>
+              <a:t>✅ Passed</a:t>
+            </a:r>
+          </a:p>
+        </p:txBody>
+      </p:sp>
+      <p:sp>
+        <p:nvSpPr>
+          <p:cNvPr id="34" name="Rectangle 33"/>
+          <p:cNvSpPr/>
+          <p:nvPr/>
+        </p:nvSpPr>
+        <p:spPr>
+          <a:xfrm>
+            <a:off x="10607040" y="2907792"/>
+            <a:ext cx="1280160" cy="402336"/>
+          </a:xfrm>
+          <a:prstGeom prst="rect">
+            <a:avLst/>
+          </a:prstGeom>
+          <a:solidFill>
+            <a:srgbClr val="F0F4FF"/>
+          </a:solidFill>
+          <a:ln>
+            <a:noFill/>
+          </a:ln>
+        </p:spPr>
+        <p:style>
+          <a:lnRef idx="1">
+            <a:schemeClr val="accent1"/>
+          </a:lnRef>
+          <a:fillRef idx="3">
+            <a:schemeClr val="accent1"/>
+          </a:fillRef>
+          <a:effectRef idx="2">
+            <a:schemeClr val="accent1"/>
+          </a:effectRef>
+          <a:fontRef idx="minor">
+            <a:schemeClr val="lt1"/>
+          </a:fontRef>
+        </p:style>
+        <p:txBody>
+          <a:bodyPr rtlCol="0" anchor="ctr"/>
+          <a:lstStyle/>
+          <a:p>
+            <a:pPr algn="ctr"/>
+          </a:p>
+        </p:txBody>
+      </p:sp>
+      <p:sp>
+        <p:nvSpPr>
+          <p:cNvPr id="35" name="TextBox 34"/>
+          <p:cNvSpPr txBox="1"/>
+          <p:nvPr/>
+        </p:nvSpPr>
+        <p:spPr>
+          <a:xfrm>
+            <a:off x="10652760" y="2953512"/>
+            <a:ext cx="1280160" cy="320040"/>
+          </a:xfrm>
+          <a:prstGeom prst="rect">
+            <a:avLst/>
+          </a:prstGeom>
+          <a:noFill/>
+        </p:spPr>
+        <p:txBody>
+          <a:bodyPr wrap="none">
+            <a:spAutoFit/>
+          </a:bodyPr>
+          <a:lstStyle/>
+          <a:p>
+            <a:pPr algn="l"/>
+            <a:r>
+              <a:rPr sz="1000" b="0">
+                <a:solidFill>
+                  <a:srgbClr val="1E3A8A"/>
+                </a:solidFill>
+              </a:rPr>
+              <a:t>0</a:t>
+            </a:r>
+          </a:p>
+        </p:txBody>
+      </p:sp>
+      <p:sp>
+        <p:nvSpPr>
+          <p:cNvPr id="36" name="Rectangle 35"/>
+          <p:cNvSpPr/>
+          <p:nvPr/>
+        </p:nvSpPr>
+        <p:spPr>
+          <a:xfrm>
+            <a:off x="6035040" y="3319272"/>
+            <a:ext cx="3291840" cy="402336"/>
+          </a:xfrm>
+          <a:prstGeom prst="rect">
+            <a:avLst/>
+          </a:prstGeom>
+          <a:solidFill>
+            <a:srgbClr val="FFFFFF"/>
+          </a:solidFill>
+          <a:ln>
+            <a:noFill/>
+          </a:ln>
+        </p:spPr>
+        <p:style>
+          <a:lnRef idx="1">
+            <a:schemeClr val="accent1"/>
+          </a:lnRef>
+          <a:fillRef idx="3">
+            <a:schemeClr val="accent1"/>
+          </a:fillRef>
+          <a:effectRef idx="2">
+            <a:schemeClr val="accent1"/>
+          </a:effectRef>
+          <a:fontRef idx="minor">
+            <a:schemeClr val="lt1"/>
+          </a:fontRef>
+        </p:style>
+        <p:txBody>
+          <a:bodyPr rtlCol="0" anchor="ctr"/>
+          <a:lstStyle/>
+          <a:p>
+            <a:pPr algn="ctr"/>
+          </a:p>
+        </p:txBody>
+      </p:sp>
+      <p:sp>
+        <p:nvSpPr>
+          <p:cNvPr id="37" name="TextBox 36"/>
+          <p:cNvSpPr txBox="1"/>
+          <p:nvPr/>
+        </p:nvSpPr>
+        <p:spPr>
+          <a:xfrm>
+            <a:off x="6080760" y="3364992"/>
+            <a:ext cx="3291840" cy="320040"/>
+          </a:xfrm>
+          <a:prstGeom prst="rect">
+            <a:avLst/>
+          </a:prstGeom>
+          <a:noFill/>
+        </p:spPr>
+        <p:txBody>
+          <a:bodyPr wrap="none">
+            <a:spAutoFit/>
+          </a:bodyPr>
+          <a:lstStyle/>
+          <a:p>
+            <a:pPr algn="l"/>
+            <a:r>
+              <a:rPr sz="1000" b="0">
+                <a:solidFill>
+                  <a:srgbClr val="1E3A8A"/>
+                </a:solidFill>
+              </a:rPr>
+              <a:t>is_anomaly binary</a:t>
+            </a:r>
+          </a:p>
+        </p:txBody>
+      </p:sp>
+      <p:sp>
+        <p:nvSpPr>
+          <p:cNvPr id="38" name="Rectangle 37"/>
+          <p:cNvSpPr/>
+          <p:nvPr/>
+        </p:nvSpPr>
+        <p:spPr>
+          <a:xfrm>
+            <a:off x="9326880" y="3319272"/>
+            <a:ext cx="1280160" cy="402336"/>
+          </a:xfrm>
+          <a:prstGeom prst="rect">
+            <a:avLst/>
+          </a:prstGeom>
+          <a:solidFill>
+            <a:srgbClr val="FFFFFF"/>
+          </a:solidFill>
+          <a:ln>
+            <a:noFill/>
+          </a:ln>
+        </p:spPr>
+        <p:style>
+          <a:lnRef idx="1">
+            <a:schemeClr val="accent1"/>
+          </a:lnRef>
+          <a:fillRef idx="3">
+            <a:schemeClr val="accent1"/>
+          </a:fillRef>
+          <a:effectRef idx="2">
+            <a:schemeClr val="accent1"/>
+          </a:effectRef>
+          <a:fontRef idx="minor">
+            <a:schemeClr val="lt1"/>
+          </a:fontRef>
+        </p:style>
+        <p:txBody>
+          <a:bodyPr rtlCol="0" anchor="ctr"/>
+          <a:lstStyle/>
+          <a:p>
+            <a:pPr algn="ctr"/>
+          </a:p>
+        </p:txBody>
+      </p:sp>
+      <p:sp>
+        <p:nvSpPr>
+          <p:cNvPr id="39" name="TextBox 38"/>
+          <p:cNvSpPr txBox="1"/>
+          <p:nvPr/>
+        </p:nvSpPr>
+        <p:spPr>
+          <a:xfrm>
+            <a:off x="9372600" y="3364992"/>
+            <a:ext cx="1280160" cy="320040"/>
+          </a:xfrm>
+          <a:prstGeom prst="rect">
+            <a:avLst/>
+          </a:prstGeom>
+          <a:noFill/>
+        </p:spPr>
+        <p:txBody>
+          <a:bodyPr wrap="none">
+            <a:spAutoFit/>
+          </a:bodyPr>
+          <a:lstStyle/>
+          <a:p>
+            <a:pPr algn="l"/>
+            <a:r>
+              <a:rPr sz="1000" b="0">
+                <a:solidFill>
+                  <a:srgbClr val="059669"/>
+                </a:solidFill>
+              </a:rPr>
+              <a:t>✅ Passed</a:t>
+            </a:r>
+          </a:p>
+        </p:txBody>
+      </p:sp>
+      <p:sp>
+        <p:nvSpPr>
+          <p:cNvPr id="40" name="Rectangle 39"/>
+          <p:cNvSpPr/>
+          <p:nvPr/>
+        </p:nvSpPr>
+        <p:spPr>
+          <a:xfrm>
+            <a:off x="10607040" y="3319272"/>
+            <a:ext cx="1280160" cy="402336"/>
+          </a:xfrm>
+          <a:prstGeom prst="rect">
+            <a:avLst/>
+          </a:prstGeom>
+          <a:solidFill>
+            <a:srgbClr val="FFFFFF"/>
+          </a:solidFill>
+          <a:ln>
+            <a:noFill/>
+          </a:ln>
+        </p:spPr>
+        <p:style>
+          <a:lnRef idx="1">
+            <a:schemeClr val="accent1"/>
+          </a:lnRef>
+          <a:fillRef idx="3">
+            <a:schemeClr val="accent1"/>
+          </a:fillRef>
+          <a:effectRef idx="2">
+            <a:schemeClr val="accent1"/>
+          </a:effectRef>
+          <a:fontRef idx="minor">
+            <a:schemeClr val="lt1"/>
+          </a:fontRef>
+        </p:style>
+        <p:txBody>
+          <a:bodyPr rtlCol="0" anchor="ctr"/>
+          <a:lstStyle/>
+          <a:p>
+            <a:pPr algn="ctr"/>
+          </a:p>
+        </p:txBody>
+      </p:sp>
+      <p:sp>
+        <p:nvSpPr>
+          <p:cNvPr id="41" name="TextBox 40"/>
+          <p:cNvSpPr txBox="1"/>
+          <p:nvPr/>
+        </p:nvSpPr>
+        <p:spPr>
+          <a:xfrm>
+            <a:off x="10652760" y="3364992"/>
+            <a:ext cx="1280160" cy="320040"/>
+          </a:xfrm>
+          <a:prstGeom prst="rect">
+            <a:avLst/>
+          </a:prstGeom>
+          <a:noFill/>
+        </p:spPr>
+        <p:txBody>
+          <a:bodyPr wrap="none">
+            <a:spAutoFit/>
+          </a:bodyPr>
+          <a:lstStyle/>
+          <a:p>
+            <a:pPr algn="l"/>
+            <a:r>
+              <a:rPr sz="1000" b="0">
+                <a:solidFill>
+                  <a:srgbClr val="1E3A8A"/>
+                </a:solidFill>
+              </a:rPr>
+              <a:t>0</a:t>
+            </a:r>
+          </a:p>
+        </p:txBody>
+      </p:sp>
+      <p:sp>
+        <p:nvSpPr>
+          <p:cNvPr id="42" name="Rectangle 41"/>
+          <p:cNvSpPr/>
+          <p:nvPr/>
+        </p:nvSpPr>
+        <p:spPr>
+          <a:xfrm>
+            <a:off x="6035040" y="3730752"/>
+            <a:ext cx="3291840" cy="402336"/>
+          </a:xfrm>
+          <a:prstGeom prst="rect">
+            <a:avLst/>
+          </a:prstGeom>
+          <a:solidFill>
+            <a:srgbClr val="F0F4FF"/>
+          </a:solidFill>
+          <a:ln>
+            <a:noFill/>
+          </a:ln>
+        </p:spPr>
+        <p:style>
+          <a:lnRef idx="1">
+            <a:schemeClr val="accent1"/>
+          </a:lnRef>
+          <a:fillRef idx="3">
+            <a:schemeClr val="accent1"/>
+          </a:fillRef>
+          <a:effectRef idx="2">
+            <a:schemeClr val="accent1"/>
+          </a:effectRef>
+          <a:fontRef idx="minor">
+            <a:schemeClr val="lt1"/>
+          </a:fontRef>
+        </p:style>
+        <p:txBody>
+          <a:bodyPr rtlCol="0" anchor="ctr"/>
+          <a:lstStyle/>
+          <a:p>
+            <a:pPr algn="ctr"/>
+          </a:p>
+        </p:txBody>
+      </p:sp>
+      <p:sp>
+        <p:nvSpPr>
+          <p:cNvPr id="43" name="TextBox 42"/>
+          <p:cNvSpPr txBox="1"/>
+          <p:nvPr/>
+        </p:nvSpPr>
+        <p:spPr>
+          <a:xfrm>
+            <a:off x="6080760" y="3776472"/>
+            <a:ext cx="3291840" cy="320040"/>
+          </a:xfrm>
+          <a:prstGeom prst="rect">
+            <a:avLst/>
+          </a:prstGeom>
+          <a:noFill/>
+        </p:spPr>
+        <p:txBody>
+          <a:bodyPr wrap="none">
+            <a:spAutoFit/>
+          </a:bodyPr>
+          <a:lstStyle/>
+          <a:p>
+            <a:pPr algn="l"/>
+            <a:r>
+              <a:rPr sz="1000" b="0">
+                <a:solidFill>
+                  <a:srgbClr val="1E3A8A"/>
+                </a:solidFill>
+              </a:rPr>
+              <a:t>No nulls in key cols</a:t>
+            </a:r>
+          </a:p>
+        </p:txBody>
+      </p:sp>
+      <p:sp>
+        <p:nvSpPr>
+          <p:cNvPr id="44" name="Rectangle 43"/>
+          <p:cNvSpPr/>
+          <p:nvPr/>
+        </p:nvSpPr>
+        <p:spPr>
+          <a:xfrm>
+            <a:off x="9326880" y="3730752"/>
+            <a:ext cx="1280160" cy="402336"/>
+          </a:xfrm>
+          <a:prstGeom prst="rect">
+            <a:avLst/>
+          </a:prstGeom>
+          <a:solidFill>
+            <a:srgbClr val="F0F4FF"/>
+          </a:solidFill>
+          <a:ln>
+            <a:noFill/>
+          </a:ln>
+        </p:spPr>
+        <p:style>
+          <a:lnRef idx="1">
+            <a:schemeClr val="accent1"/>
+          </a:lnRef>
+          <a:fillRef idx="3">
+            <a:schemeClr val="accent1"/>
+          </a:fillRef>
+          <a:effectRef idx="2">
+            <a:schemeClr val="accent1"/>
+          </a:effectRef>
+          <a:fontRef idx="minor">
+            <a:schemeClr val="lt1"/>
+          </a:fontRef>
+        </p:style>
+        <p:txBody>
+          <a:bodyPr rtlCol="0" anchor="ctr"/>
+          <a:lstStyle/>
+          <a:p>
+            <a:pPr algn="ctr"/>
+          </a:p>
+        </p:txBody>
+      </p:sp>
+      <p:sp>
+        <p:nvSpPr>
+          <p:cNvPr id="45" name="TextBox 44"/>
+          <p:cNvSpPr txBox="1"/>
+          <p:nvPr/>
+        </p:nvSpPr>
+        <p:spPr>
+          <a:xfrm>
+            <a:off x="9372600" y="3776472"/>
+            <a:ext cx="1280160" cy="320040"/>
+          </a:xfrm>
+          <a:prstGeom prst="rect">
+            <a:avLst/>
+          </a:prstGeom>
+          <a:noFill/>
+        </p:spPr>
+        <p:txBody>
+          <a:bodyPr wrap="none">
+            <a:spAutoFit/>
+          </a:bodyPr>
+          <a:lstStyle/>
+          <a:p>
+            <a:pPr algn="l"/>
+            <a:r>
+              <a:rPr sz="1000" b="0">
+                <a:solidFill>
+                  <a:srgbClr val="059669"/>
+                </a:solidFill>
+              </a:rPr>
+              <a:t>✅ Passed</a:t>
+            </a:r>
+          </a:p>
+        </p:txBody>
+      </p:sp>
+      <p:sp>
+        <p:nvSpPr>
+          <p:cNvPr id="46" name="Rectangle 45"/>
+          <p:cNvSpPr/>
+          <p:nvPr/>
+        </p:nvSpPr>
+        <p:spPr>
+          <a:xfrm>
+            <a:off x="10607040" y="3730752"/>
+            <a:ext cx="1280160" cy="402336"/>
+          </a:xfrm>
+          <a:prstGeom prst="rect">
+            <a:avLst/>
+          </a:prstGeom>
+          <a:solidFill>
+            <a:srgbClr val="F0F4FF"/>
+          </a:solidFill>
+          <a:ln>
+            <a:noFill/>
+          </a:ln>
+        </p:spPr>
+        <p:style>
+          <a:lnRef idx="1">
+            <a:schemeClr val="accent1"/>
+          </a:lnRef>
+          <a:fillRef idx="3">
+            <a:schemeClr val="accent1"/>
+          </a:fillRef>
+          <a:effectRef idx="2">
+            <a:schemeClr val="accent1"/>
+          </a:effectRef>
+          <a:fontRef idx="minor">
+            <a:schemeClr val="lt1"/>
+          </a:fontRef>
+        </p:style>
+        <p:txBody>
+          <a:bodyPr rtlCol="0" anchor="ctr"/>
+          <a:lstStyle/>
+          <a:p>
+            <a:pPr algn="ctr"/>
+          </a:p>
+        </p:txBody>
+      </p:sp>
+      <p:sp>
+        <p:nvSpPr>
+          <p:cNvPr id="47" name="TextBox 46"/>
+          <p:cNvSpPr txBox="1"/>
+          <p:nvPr/>
+        </p:nvSpPr>
+        <p:spPr>
+          <a:xfrm>
+            <a:off x="10652760" y="3776472"/>
+            <a:ext cx="1280160" cy="320040"/>
+          </a:xfrm>
+          <a:prstGeom prst="rect">
+            <a:avLst/>
+          </a:prstGeom>
+          <a:noFill/>
+        </p:spPr>
+        <p:txBody>
+          <a:bodyPr wrap="none">
+            <a:spAutoFit/>
+          </a:bodyPr>
+          <a:lstStyle/>
+          <a:p>
+            <a:pPr algn="l"/>
+            <a:r>
+              <a:rPr sz="1000" b="0">
+                <a:solidFill>
+                  <a:srgbClr val="1E3A8A"/>
+                </a:solidFill>
+              </a:rPr>
+              <a:t>0</a:t>
+            </a:r>
+          </a:p>
+        </p:txBody>
+      </p:sp>
+      <p:sp>
+        <p:nvSpPr>
+          <p:cNvPr id="48" name="Rectangle 47"/>
+          <p:cNvSpPr/>
+          <p:nvPr/>
+        </p:nvSpPr>
+        <p:spPr>
+          <a:xfrm>
+            <a:off x="6035040" y="4142232"/>
+            <a:ext cx="3291840" cy="402336"/>
+          </a:xfrm>
+          <a:prstGeom prst="rect">
+            <a:avLst/>
+          </a:prstGeom>
+          <a:solidFill>
+            <a:srgbClr val="FFFFFF"/>
+          </a:solidFill>
+          <a:ln>
+            <a:noFill/>
+          </a:ln>
+        </p:spPr>
+        <p:style>
+          <a:lnRef idx="1">
+            <a:schemeClr val="accent1"/>
+          </a:lnRef>
+          <a:fillRef idx="3">
+            <a:schemeClr val="accent1"/>
+          </a:fillRef>
+          <a:effectRef idx="2">
+            <a:schemeClr val="accent1"/>
+          </a:effectRef>
+          <a:fontRef idx="minor">
+            <a:schemeClr val="lt1"/>
+          </a:fontRef>
+        </p:style>
+        <p:txBody>
+          <a:bodyPr rtlCol="0" anchor="ctr"/>
+          <a:lstStyle/>
+          <a:p>
+            <a:pPr algn="ctr"/>
+          </a:p>
+        </p:txBody>
+      </p:sp>
+      <p:sp>
+        <p:nvSpPr>
+          <p:cNvPr id="49" name="TextBox 48"/>
+          <p:cNvSpPr txBox="1"/>
+          <p:nvPr/>
+        </p:nvSpPr>
+        <p:spPr>
+          <a:xfrm>
+            <a:off x="6080760" y="4187952"/>
+            <a:ext cx="3291840" cy="320040"/>
+          </a:xfrm>
+          <a:prstGeom prst="rect">
+            <a:avLst/>
+          </a:prstGeom>
+          <a:noFill/>
+        </p:spPr>
+        <p:txBody>
+          <a:bodyPr wrap="none">
+            <a:spAutoFit/>
+          </a:bodyPr>
+          <a:lstStyle/>
+          <a:p>
+            <a:pPr algn="l"/>
+            <a:r>
+              <a:rPr sz="1000" b="0">
+                <a:solidFill>
+                  <a:srgbClr val="1E3A8A"/>
+                </a:solidFill>
+              </a:rPr>
+              <a:t>Timestamp parseable</a:t>
+            </a:r>
+          </a:p>
+        </p:txBody>
+      </p:sp>
+      <p:sp>
+        <p:nvSpPr>
+          <p:cNvPr id="50" name="Rectangle 49"/>
+          <p:cNvSpPr/>
+          <p:nvPr/>
+        </p:nvSpPr>
+        <p:spPr>
+          <a:xfrm>
+            <a:off x="9326880" y="4142232"/>
+            <a:ext cx="1280160" cy="402336"/>
+          </a:xfrm>
+          <a:prstGeom prst="rect">
+            <a:avLst/>
+          </a:prstGeom>
+          <a:solidFill>
+            <a:srgbClr val="FFFFFF"/>
+          </a:solidFill>
+          <a:ln>
+            <a:noFill/>
+          </a:ln>
+        </p:spPr>
+        <p:style>
+          <a:lnRef idx="1">
+            <a:schemeClr val="accent1"/>
+          </a:lnRef>
+          <a:fillRef idx="3">
+            <a:schemeClr val="accent1"/>
+          </a:fillRef>
+          <a:effectRef idx="2">
+            <a:schemeClr val="accent1"/>
+          </a:effectRef>
+          <a:fontRef idx="minor">
+            <a:schemeClr val="lt1"/>
+          </a:fontRef>
+        </p:style>
+        <p:txBody>
+          <a:bodyPr rtlCol="0" anchor="ctr"/>
+          <a:lstStyle/>
+          <a:p>
+            <a:pPr algn="ctr"/>
+          </a:p>
+        </p:txBody>
+      </p:sp>
+      <p:sp>
+        <p:nvSpPr>
+          <p:cNvPr id="51" name="TextBox 50"/>
+          <p:cNvSpPr txBox="1"/>
+          <p:nvPr/>
+        </p:nvSpPr>
+        <p:spPr>
+          <a:xfrm>
+            <a:off x="9372600" y="4187952"/>
+            <a:ext cx="1280160" cy="320040"/>
+          </a:xfrm>
+          <a:prstGeom prst="rect">
+            <a:avLst/>
+          </a:prstGeom>
+          <a:noFill/>
+        </p:spPr>
+        <p:txBody>
+          <a:bodyPr wrap="none">
+            <a:spAutoFit/>
+          </a:bodyPr>
+          <a:lstStyle/>
+          <a:p>
+            <a:pPr algn="l"/>
+            <a:r>
+              <a:rPr sz="1000" b="0">
+                <a:solidFill>
+                  <a:srgbClr val="059669"/>
+                </a:solidFill>
+              </a:rPr>
+              <a:t>✅ Passed</a:t>
+            </a:r>
+          </a:p>
+        </p:txBody>
+      </p:sp>
+      <p:sp>
+        <p:nvSpPr>
+          <p:cNvPr id="52" name="Rectangle 51"/>
+          <p:cNvSpPr/>
+          <p:nvPr/>
+        </p:nvSpPr>
+        <p:spPr>
+          <a:xfrm>
+            <a:off x="10607040" y="4142232"/>
+            <a:ext cx="1280160" cy="402336"/>
+          </a:xfrm>
+          <a:prstGeom prst="rect">
+            <a:avLst/>
+          </a:prstGeom>
+          <a:solidFill>
+            <a:srgbClr val="FFFFFF"/>
+          </a:solidFill>
+          <a:ln>
+            <a:noFill/>
+          </a:ln>
+        </p:spPr>
+        <p:style>
+          <a:lnRef idx="1">
+            <a:schemeClr val="accent1"/>
+          </a:lnRef>
+          <a:fillRef idx="3">
+            <a:schemeClr val="accent1"/>
+          </a:fillRef>
+          <a:effectRef idx="2">
+            <a:schemeClr val="accent1"/>
+          </a:effectRef>
+          <a:fontRef idx="minor">
+            <a:schemeClr val="lt1"/>
+          </a:fontRef>
+        </p:style>
+        <p:txBody>
+          <a:bodyPr rtlCol="0" anchor="ctr"/>
+          <a:lstStyle/>
+          <a:p>
+            <a:pPr algn="ctr"/>
+          </a:p>
+        </p:txBody>
+      </p:sp>
+      <p:sp>
+        <p:nvSpPr>
+          <p:cNvPr id="53" name="TextBox 52"/>
+          <p:cNvSpPr txBox="1"/>
+          <p:nvPr/>
+        </p:nvSpPr>
+        <p:spPr>
+          <a:xfrm>
+            <a:off x="10652760" y="4187952"/>
+            <a:ext cx="1280160" cy="320040"/>
+          </a:xfrm>
+          <a:prstGeom prst="rect">
+            <a:avLst/>
+          </a:prstGeom>
+          <a:noFill/>
+        </p:spPr>
+        <p:txBody>
+          <a:bodyPr wrap="none">
+            <a:spAutoFit/>
+          </a:bodyPr>
+          <a:lstStyle/>
+          <a:p>
+            <a:pPr algn="l"/>
+            <a:r>
+              <a:rPr sz="1000" b="0">
+                <a:solidFill>
+                  <a:srgbClr val="1E3A8A"/>
+                </a:solidFill>
+              </a:rPr>
+              <a:t>0</a:t>
+            </a:r>
+          </a:p>
+        </p:txBody>
+      </p:sp>
+      <p:sp>
+        <p:nvSpPr>
+          <p:cNvPr id="54" name="Rectangle 53"/>
+          <p:cNvSpPr/>
+          <p:nvPr/>
+        </p:nvSpPr>
+        <p:spPr>
+          <a:xfrm>
+            <a:off x="6035040" y="4553712"/>
+            <a:ext cx="3291840" cy="402336"/>
+          </a:xfrm>
+          <a:prstGeom prst="rect">
+            <a:avLst/>
+          </a:prstGeom>
+          <a:solidFill>
+            <a:srgbClr val="F0F4FF"/>
+          </a:solidFill>
+          <a:ln>
+            <a:noFill/>
+          </a:ln>
+        </p:spPr>
+        <p:style>
+          <a:lnRef idx="1">
+            <a:schemeClr val="accent1"/>
+          </a:lnRef>
+          <a:fillRef idx="3">
+            <a:schemeClr val="accent1"/>
+          </a:fillRef>
+          <a:effectRef idx="2">
+            <a:schemeClr val="accent1"/>
+          </a:effectRef>
+          <a:fontRef idx="minor">
+            <a:schemeClr val="lt1"/>
+          </a:fontRef>
+        </p:style>
+        <p:txBody>
+          <a:bodyPr rtlCol="0" anchor="ctr"/>
+          <a:lstStyle/>
+          <a:p>
+            <a:pPr algn="ctr"/>
+          </a:p>
+        </p:txBody>
+      </p:sp>
+      <p:sp>
+        <p:nvSpPr>
+          <p:cNvPr id="55" name="TextBox 54"/>
+          <p:cNvSpPr txBox="1"/>
+          <p:nvPr/>
+        </p:nvSpPr>
+        <p:spPr>
+          <a:xfrm>
+            <a:off x="6080760" y="4599432"/>
+            <a:ext cx="3291840" cy="320040"/>
+          </a:xfrm>
+          <a:prstGeom prst="rect">
+            <a:avLst/>
+          </a:prstGeom>
+          <a:noFill/>
+        </p:spPr>
+        <p:txBody>
+          <a:bodyPr wrap="none">
+            <a:spAutoFit/>
+          </a:bodyPr>
+          <a:lstStyle/>
+          <a:p>
+            <a:pPr algn="l"/>
+            <a:r>
+              <a:rPr sz="1000" b="0">
+                <a:solidFill>
+                  <a:srgbClr val="1E3A8A"/>
+                </a:solidFill>
+              </a:rPr>
+              <a:t>Category non-empty</a:t>
+            </a:r>
+          </a:p>
+        </p:txBody>
+      </p:sp>
+      <p:sp>
+        <p:nvSpPr>
+          <p:cNvPr id="56" name="Rectangle 55"/>
+          <p:cNvSpPr/>
+          <p:nvPr/>
+        </p:nvSpPr>
+        <p:spPr>
+          <a:xfrm>
+            <a:off x="9326880" y="4553712"/>
+            <a:ext cx="1280160" cy="402336"/>
+          </a:xfrm>
+          <a:prstGeom prst="rect">
+            <a:avLst/>
+          </a:prstGeom>
+          <a:solidFill>
+            <a:srgbClr val="F0F4FF"/>
+          </a:solidFill>
+          <a:ln>
+            <a:noFill/>
+          </a:ln>
+        </p:spPr>
+        <p:style>
+          <a:lnRef idx="1">
+            <a:schemeClr val="accent1"/>
+          </a:lnRef>
+          <a:fillRef idx="3">
+            <a:schemeClr val="accent1"/>
+          </a:fillRef>
+          <a:effectRef idx="2">
+            <a:schemeClr val="accent1"/>
+          </a:effectRef>
+          <a:fontRef idx="minor">
+            <a:schemeClr val="lt1"/>
+          </a:fontRef>
+        </p:style>
+        <p:txBody>
+          <a:bodyPr rtlCol="0" anchor="ctr"/>
+          <a:lstStyle/>
+          <a:p>
+            <a:pPr algn="ctr"/>
+          </a:p>
+        </p:txBody>
+      </p:sp>
+      <p:sp>
+        <p:nvSpPr>
+          <p:cNvPr id="57" name="TextBox 56"/>
+          <p:cNvSpPr txBox="1"/>
+          <p:nvPr/>
+        </p:nvSpPr>
+        <p:spPr>
+          <a:xfrm>
+            <a:off x="9372600" y="4599432"/>
+            <a:ext cx="1280160" cy="320040"/>
+          </a:xfrm>
+          <a:prstGeom prst="rect">
+            <a:avLst/>
+          </a:prstGeom>
+          <a:noFill/>
+        </p:spPr>
+        <p:txBody>
+          <a:bodyPr wrap="none">
+            <a:spAutoFit/>
+          </a:bodyPr>
+          <a:lstStyle/>
+          <a:p>
+            <a:pPr algn="l"/>
+            <a:r>
+              <a:rPr sz="1000" b="0">
+                <a:solidFill>
+                  <a:srgbClr val="059669"/>
+                </a:solidFill>
+              </a:rPr>
+              <a:t>✅ Passed</a:t>
+            </a:r>
+          </a:p>
+        </p:txBody>
+      </p:sp>
+      <p:sp>
+        <p:nvSpPr>
+          <p:cNvPr id="58" name="Rectangle 57"/>
+          <p:cNvSpPr/>
+          <p:nvPr/>
+        </p:nvSpPr>
+        <p:spPr>
+          <a:xfrm>
+            <a:off x="10607040" y="4553712"/>
+            <a:ext cx="1280160" cy="402336"/>
+          </a:xfrm>
+          <a:prstGeom prst="rect">
+            <a:avLst/>
+          </a:prstGeom>
+          <a:solidFill>
+            <a:srgbClr val="F0F4FF"/>
+          </a:solidFill>
+          <a:ln>
+            <a:noFill/>
+          </a:ln>
+        </p:spPr>
+        <p:style>
+          <a:lnRef idx="1">
+            <a:schemeClr val="accent1"/>
+          </a:lnRef>
+          <a:fillRef idx="3">
+            <a:schemeClr val="accent1"/>
+          </a:fillRef>
+          <a:effectRef idx="2">
+            <a:schemeClr val="accent1"/>
+          </a:effectRef>
+          <a:fontRef idx="minor">
+            <a:schemeClr val="lt1"/>
+          </a:fontRef>
+        </p:style>
+        <p:txBody>
+          <a:bodyPr rtlCol="0" anchor="ctr"/>
+          <a:lstStyle/>
+          <a:p>
+            <a:pPr algn="ctr"/>
+          </a:p>
+        </p:txBody>
+      </p:sp>
+      <p:sp>
+        <p:nvSpPr>
+          <p:cNvPr id="59" name="TextBox 58"/>
+          <p:cNvSpPr txBox="1"/>
+          <p:nvPr/>
+        </p:nvSpPr>
+        <p:spPr>
+          <a:xfrm>
+            <a:off x="10652760" y="4599432"/>
+            <a:ext cx="1280160" cy="320040"/>
+          </a:xfrm>
+          <a:prstGeom prst="rect">
+            <a:avLst/>
+          </a:prstGeom>
+          <a:noFill/>
+        </p:spPr>
+        <p:txBody>
+          <a:bodyPr wrap="none">
+            <a:spAutoFit/>
+          </a:bodyPr>
+          <a:lstStyle/>
+          <a:p>
+            <a:pPr algn="l"/>
+            <a:r>
+              <a:rPr sz="1000" b="0">
+                <a:solidFill>
+                  <a:srgbClr val="1E3A8A"/>
+                </a:solidFill>
+              </a:rPr>
+              <a:t>0</a:t>
+            </a:r>
+          </a:p>
+        </p:txBody>
+      </p:sp>
+      <p:sp>
+        <p:nvSpPr>
+          <p:cNvPr id="60" name="Rectangle 59"/>
+          <p:cNvSpPr/>
+          <p:nvPr/>
+        </p:nvSpPr>
+        <p:spPr>
+          <a:xfrm>
+            <a:off x="6035040" y="4965192"/>
+            <a:ext cx="3291840" cy="402336"/>
+          </a:xfrm>
+          <a:prstGeom prst="rect">
+            <a:avLst/>
+          </a:prstGeom>
+          <a:solidFill>
+            <a:srgbClr val="FFFFFF"/>
+          </a:solidFill>
+          <a:ln>
+            <a:noFill/>
+          </a:ln>
+        </p:spPr>
+        <p:style>
+          <a:lnRef idx="1">
+            <a:schemeClr val="accent1"/>
+          </a:lnRef>
+          <a:fillRef idx="3">
+            <a:schemeClr val="accent1"/>
+          </a:fillRef>
+          <a:effectRef idx="2">
+            <a:schemeClr val="accent1"/>
+          </a:effectRef>
+          <a:fontRef idx="minor">
+            <a:schemeClr val="lt1"/>
+          </a:fontRef>
+        </p:style>
+        <p:txBody>
+          <a:bodyPr rtlCol="0" anchor="ctr"/>
+          <a:lstStyle/>
+          <a:p>
+            <a:pPr algn="ctr"/>
+          </a:p>
+        </p:txBody>
+      </p:sp>
+      <p:sp>
+        <p:nvSpPr>
+          <p:cNvPr id="61" name="TextBox 60"/>
+          <p:cNvSpPr txBox="1"/>
+          <p:nvPr/>
+        </p:nvSpPr>
+        <p:spPr>
+          <a:xfrm>
+            <a:off x="6080760" y="5010912"/>
+            <a:ext cx="3291840" cy="320040"/>
+          </a:xfrm>
+          <a:prstGeom prst="rect">
+            <a:avLst/>
+          </a:prstGeom>
+          <a:noFill/>
+        </p:spPr>
+        <p:txBody>
+          <a:bodyPr wrap="none">
+            <a:spAutoFit/>
+          </a:bodyPr>
+          <a:lstStyle/>
+          <a:p>
+            <a:pPr algn="l"/>
+            <a:r>
+              <a:rPr sz="1000" b="0">
+                <a:solidFill>
+                  <a:srgbClr val="1E3A8A"/>
+                </a:solidFill>
+              </a:rPr>
+              <a:t>merchant_id non-null</a:t>
+            </a:r>
+          </a:p>
+        </p:txBody>
+      </p:sp>
+      <p:sp>
+        <p:nvSpPr>
+          <p:cNvPr id="62" name="Rectangle 61"/>
+          <p:cNvSpPr/>
+          <p:nvPr/>
+        </p:nvSpPr>
+        <p:spPr>
+          <a:xfrm>
+            <a:off x="9326880" y="4965192"/>
+            <a:ext cx="1280160" cy="402336"/>
+          </a:xfrm>
+          <a:prstGeom prst="rect">
+            <a:avLst/>
+          </a:prstGeom>
+          <a:solidFill>
+            <a:srgbClr val="FFFFFF"/>
+          </a:solidFill>
+          <a:ln>
+            <a:noFill/>
+          </a:ln>
+        </p:spPr>
+        <p:style>
+          <a:lnRef idx="1">
+            <a:schemeClr val="accent1"/>
+          </a:lnRef>
+          <a:fillRef idx="3">
+            <a:schemeClr val="accent1"/>
+          </a:fillRef>
+          <a:effectRef idx="2">
+            <a:schemeClr val="accent1"/>
+          </a:effectRef>
+          <a:fontRef idx="minor">
+            <a:schemeClr val="lt1"/>
+          </a:fontRef>
+        </p:style>
+        <p:txBody>
+          <a:bodyPr rtlCol="0" anchor="ctr"/>
+          <a:lstStyle/>
+          <a:p>
+            <a:pPr algn="ctr"/>
+          </a:p>
+        </p:txBody>
+      </p:sp>
+      <p:sp>
+        <p:nvSpPr>
+          <p:cNvPr id="63" name="TextBox 62"/>
+          <p:cNvSpPr txBox="1"/>
+          <p:nvPr/>
+        </p:nvSpPr>
+        <p:spPr>
+          <a:xfrm>
+            <a:off x="9372600" y="5010912"/>
+            <a:ext cx="1280160" cy="320040"/>
+          </a:xfrm>
+          <a:prstGeom prst="rect">
+            <a:avLst/>
+          </a:prstGeom>
+          <a:noFill/>
+        </p:spPr>
+        <p:txBody>
+          <a:bodyPr wrap="none">
+            <a:spAutoFit/>
+          </a:bodyPr>
+          <a:lstStyle/>
+          <a:p>
+            <a:pPr algn="l"/>
+            <a:r>
+              <a:rPr sz="1000" b="0">
+                <a:solidFill>
+                  <a:srgbClr val="059669"/>
+                </a:solidFill>
+              </a:rPr>
+              <a:t>✅ Passed</a:t>
+            </a:r>
+          </a:p>
+        </p:txBody>
+      </p:sp>
+      <p:sp>
+        <p:nvSpPr>
+          <p:cNvPr id="64" name="Rectangle 63"/>
+          <p:cNvSpPr/>
+          <p:nvPr/>
+        </p:nvSpPr>
+        <p:spPr>
+          <a:xfrm>
+            <a:off x="10607040" y="4965192"/>
+            <a:ext cx="1280160" cy="402336"/>
+          </a:xfrm>
+          <a:prstGeom prst="rect">
+            <a:avLst/>
+          </a:prstGeom>
+          <a:solidFill>
+            <a:srgbClr val="FFFFFF"/>
+          </a:solidFill>
+          <a:ln>
+            <a:noFill/>
+          </a:ln>
+        </p:spPr>
+        <p:style>
+          <a:lnRef idx="1">
+            <a:schemeClr val="accent1"/>
+          </a:lnRef>
+          <a:fillRef idx="3">
+            <a:schemeClr val="accent1"/>
+          </a:fillRef>
+          <a:effectRef idx="2">
+            <a:schemeClr val="accent1"/>
+          </a:effectRef>
+          <a:fontRef idx="minor">
+            <a:schemeClr val="lt1"/>
+          </a:fontRef>
+        </p:style>
+        <p:txBody>
+          <a:bodyPr rtlCol="0" anchor="ctr"/>
+          <a:lstStyle/>
+          <a:p>
+            <a:pPr algn="ctr"/>
+          </a:p>
+        </p:txBody>
+      </p:sp>
+      <p:sp>
+        <p:nvSpPr>
+          <p:cNvPr id="65" name="TextBox 64"/>
+          <p:cNvSpPr txBox="1"/>
+          <p:nvPr/>
+        </p:nvSpPr>
+        <p:spPr>
+          <a:xfrm>
+            <a:off x="10652760" y="5010912"/>
+            <a:ext cx="1280160" cy="320040"/>
+          </a:xfrm>
+          <a:prstGeom prst="rect">
+            <a:avLst/>
+          </a:prstGeom>
+          <a:noFill/>
+        </p:spPr>
+        <p:txBody>
+          <a:bodyPr wrap="none">
+            <a:spAutoFit/>
+          </a:bodyPr>
+          <a:lstStyle/>
+          <a:p>
+            <a:pPr algn="l"/>
+            <a:r>
+              <a:rPr sz="1000" b="0">
+                <a:solidFill>
+                  <a:srgbClr val="1E3A8A"/>
+                </a:solidFill>
+              </a:rPr>
+              <a:t>0</a:t>
+            </a:r>
+          </a:p>
+        </p:txBody>
+      </p:sp>
+      <p:sp>
+        <p:nvSpPr>
+          <p:cNvPr id="66" name="Rectangle 65"/>
+          <p:cNvSpPr/>
+          <p:nvPr/>
+        </p:nvSpPr>
+        <p:spPr>
+          <a:xfrm>
+            <a:off x="6035040" y="5376672"/>
+            <a:ext cx="3291840" cy="402336"/>
+          </a:xfrm>
+          <a:prstGeom prst="rect">
+            <a:avLst/>
+          </a:prstGeom>
+          <a:solidFill>
+            <a:srgbClr val="F0F4FF"/>
+          </a:solidFill>
+          <a:ln>
+            <a:noFill/>
+          </a:ln>
+        </p:spPr>
+        <p:style>
+          <a:lnRef idx="1">
+            <a:schemeClr val="accent1"/>
+          </a:lnRef>
+          <a:fillRef idx="3">
+            <a:schemeClr val="accent1"/>
+          </a:fillRef>
+          <a:effectRef idx="2">
+            <a:schemeClr val="accent1"/>
+          </a:effectRef>
+          <a:fontRef idx="minor">
+            <a:schemeClr val="lt1"/>
+          </a:fontRef>
+        </p:style>
+        <p:txBody>
+          <a:bodyPr rtlCol="0" anchor="ctr"/>
+          <a:lstStyle/>
+          <a:p>
+            <a:pPr algn="ctr"/>
+          </a:p>
+        </p:txBody>
+      </p:sp>
+      <p:sp>
+        <p:nvSpPr>
+          <p:cNvPr id="67" name="TextBox 66"/>
+          <p:cNvSpPr txBox="1"/>
+          <p:nvPr/>
+        </p:nvSpPr>
+        <p:spPr>
+          <a:xfrm>
+            <a:off x="6080760" y="5422392"/>
+            <a:ext cx="3291840" cy="320040"/>
+          </a:xfrm>
+          <a:prstGeom prst="rect">
+            <a:avLst/>
+          </a:prstGeom>
+          <a:noFill/>
+        </p:spPr>
+        <p:txBody>
+          <a:bodyPr wrap="none">
+            <a:spAutoFit/>
+          </a:bodyPr>
+          <a:lstStyle/>
+          <a:p>
+            <a:pPr algn="l"/>
+            <a:r>
+              <a:rPr sz="1000" b="0">
+                <a:solidFill>
+                  <a:srgbClr val="1E3A8A"/>
+                </a:solidFill>
+              </a:rPr>
+              <a:t>Both classes present</a:t>
+            </a:r>
+          </a:p>
+        </p:txBody>
+      </p:sp>
+      <p:sp>
+        <p:nvSpPr>
+          <p:cNvPr id="68" name="Rectangle 67"/>
+          <p:cNvSpPr/>
+          <p:nvPr/>
+        </p:nvSpPr>
+        <p:spPr>
+          <a:xfrm>
+            <a:off x="9326880" y="5376672"/>
+            <a:ext cx="1280160" cy="402336"/>
+          </a:xfrm>
+          <a:prstGeom prst="rect">
+            <a:avLst/>
+          </a:prstGeom>
+          <a:solidFill>
+            <a:srgbClr val="F0F4FF"/>
+          </a:solidFill>
+          <a:ln>
+            <a:noFill/>
+          </a:ln>
+        </p:spPr>
+        <p:style>
+          <a:lnRef idx="1">
+            <a:schemeClr val="accent1"/>
+          </a:lnRef>
+          <a:fillRef idx="3">
+            <a:schemeClr val="accent1"/>
+          </a:fillRef>
+          <a:effectRef idx="2">
+            <a:schemeClr val="accent1"/>
+          </a:effectRef>
+          <a:fontRef idx="minor">
+            <a:schemeClr val="lt1"/>
+          </a:fontRef>
+        </p:style>
+        <p:txBody>
+          <a:bodyPr rtlCol="0" anchor="ctr"/>
+          <a:lstStyle/>
+          <a:p>
+            <a:pPr algn="ctr"/>
+          </a:p>
+        </p:txBody>
+      </p:sp>
+      <p:sp>
+        <p:nvSpPr>
+          <p:cNvPr id="69" name="TextBox 68"/>
+          <p:cNvSpPr txBox="1"/>
+          <p:nvPr/>
+        </p:nvSpPr>
+        <p:spPr>
+          <a:xfrm>
+            <a:off x="9372600" y="5422392"/>
+            <a:ext cx="1280160" cy="320040"/>
+          </a:xfrm>
+          <a:prstGeom prst="rect">
+            <a:avLst/>
+          </a:prstGeom>
+          <a:noFill/>
+        </p:spPr>
+        <p:txBody>
+          <a:bodyPr wrap="none">
+            <a:spAutoFit/>
+          </a:bodyPr>
+          <a:lstStyle/>
+          <a:p>
+            <a:pPr algn="l"/>
+            <a:r>
+              <a:rPr sz="1000" b="0">
+                <a:solidFill>
+                  <a:srgbClr val="059669"/>
+                </a:solidFill>
+              </a:rPr>
+              <a:t>✅ Passed</a:t>
+            </a:r>
+          </a:p>
+        </p:txBody>
+      </p:sp>
+      <p:sp>
+        <p:nvSpPr>
+          <p:cNvPr id="70" name="Rectangle 69"/>
+          <p:cNvSpPr/>
+          <p:nvPr/>
+        </p:nvSpPr>
+        <p:spPr>
+          <a:xfrm>
+            <a:off x="10607040" y="5376672"/>
+            <a:ext cx="1280160" cy="402336"/>
+          </a:xfrm>
+          <a:prstGeom prst="rect">
+            <a:avLst/>
+          </a:prstGeom>
+          <a:solidFill>
+            <a:srgbClr val="F0F4FF"/>
+          </a:solidFill>
+          <a:ln>
+            <a:noFill/>
+          </a:ln>
+        </p:spPr>
+        <p:style>
+          <a:lnRef idx="1">
+            <a:schemeClr val="accent1"/>
+          </a:lnRef>
+          <a:fillRef idx="3">
+            <a:schemeClr val="accent1"/>
+          </a:fillRef>
+          <a:effectRef idx="2">
+            <a:schemeClr val="accent1"/>
+          </a:effectRef>
+          <a:fontRef idx="minor">
+            <a:schemeClr val="lt1"/>
+          </a:fontRef>
+        </p:style>
+        <p:txBody>
+          <a:bodyPr rtlCol="0" anchor="ctr"/>
+          <a:lstStyle/>
+          <a:p>
+            <a:pPr algn="ctr"/>
+          </a:p>
+        </p:txBody>
+      </p:sp>
+      <p:sp>
+        <p:nvSpPr>
+          <p:cNvPr id="71" name="TextBox 70"/>
+          <p:cNvSpPr txBox="1"/>
+          <p:nvPr/>
+        </p:nvSpPr>
+        <p:spPr>
+          <a:xfrm>
+            <a:off x="10652760" y="5422392"/>
+            <a:ext cx="1280160" cy="320040"/>
+          </a:xfrm>
+          <a:prstGeom prst="rect">
+            <a:avLst/>
+          </a:prstGeom>
+          <a:noFill/>
+        </p:spPr>
+        <p:txBody>
+          <a:bodyPr wrap="none">
+            <a:spAutoFit/>
+          </a:bodyPr>
+          <a:lstStyle/>
+          <a:p>
+            <a:pPr algn="l"/>
+            <a:r>
+              <a:rPr sz="1000" b="0">
+                <a:solidFill>
+                  <a:srgbClr val="1E3A8A"/>
+                </a:solidFill>
+              </a:rPr>
+              <a:t>0</a:t>
             </a:r>
           </a:p>
         </p:txBody>
@@ -4098,14 +7021,6 @@
 <file path=ppt/slides/slide5.xml><?xml version="1.0" encoding="utf-8"?>
 <p:sld xmlns:a="http://schemas.openxmlformats.org/drawingml/2006/main" xmlns:p="http://schemas.openxmlformats.org/presentationml/2006/main" xmlns:r="http://schemas.openxmlformats.org/officeDocument/2006/relationships">
   <p:cSld>
-    <p:bg>
-      <p:bgPr>
-        <a:solidFill>
-          <a:srgbClr val="FFFFFF"/>
-        </a:solidFill>
-        <a:effectLst/>
-      </p:bgPr>
-    </p:bg>
     <p:spTree>
       <p:nvGrpSpPr>
         <p:cNvPr id="1" name=""/>
@@ -4122,14 +7037,17 @@
         <p:spPr>
           <a:xfrm>
             <a:off x="0" y="0"/>
-            <a:ext cx="12188952" cy="109728"/>
+            <a:ext cx="12188952" cy="6858000"/>
           </a:xfrm>
           <a:prstGeom prst="rect">
             <a:avLst/>
           </a:prstGeom>
           <a:solidFill>
-            <a:srgbClr val="1E3A8A"/>
+            <a:srgbClr val="FFFFFF"/>
           </a:solidFill>
+          <a:ln>
+            <a:noFill/>
+          </a:ln>
         </p:spPr>
         <p:style>
           <a:lnRef idx="1">
@@ -4155,55 +7073,24 @@
       </p:sp>
       <p:sp>
         <p:nvSpPr>
-          <p:cNvPr id="3" name="TextBox 2"/>
-          <p:cNvSpPr txBox="1"/>
-          <p:nvPr/>
-        </p:nvSpPr>
-        <p:spPr>
-          <a:xfrm>
-            <a:off x="731520" y="274320"/>
-            <a:ext cx="10058400" cy="731520"/>
-          </a:xfrm>
-          <a:prstGeom prst="rect">
-            <a:avLst/>
-          </a:prstGeom>
-          <a:noFill/>
-        </p:spPr>
-        <p:txBody>
-          <a:bodyPr wrap="square">
-            <a:spAutoFit/>
-          </a:bodyPr>
-          <a:lstStyle/>
-          <a:p>
-            <a:pPr algn="l"/>
-            <a:r>
-              <a:rPr sz="3200" b="1">
-                <a:solidFill>
-                  <a:srgbClr val="1E3A8A"/>
-                </a:solidFill>
-              </a:rPr>
-              <a:t>Model Performance</a:t>
-            </a:r>
-          </a:p>
-        </p:txBody>
-      </p:sp>
-      <p:sp>
-        <p:nvSpPr>
-          <p:cNvPr id="4" name="Rectangle 3"/>
+          <p:cNvPr id="3" name="Rectangle 2"/>
           <p:cNvSpPr/>
           <p:nvPr/>
         </p:nvSpPr>
         <p:spPr>
           <a:xfrm>
-            <a:off x="548640" y="1280160"/>
-            <a:ext cx="3474720" cy="1645920"/>
+            <a:off x="0" y="0"/>
+            <a:ext cx="12188952" cy="1188720"/>
           </a:xfrm>
           <a:prstGeom prst="rect">
             <a:avLst/>
           </a:prstGeom>
           <a:solidFill>
-            <a:srgbClr val="F3F4F6"/>
+            <a:srgbClr val="1E3A8A"/>
           </a:solidFill>
+          <a:ln>
+            <a:noFill/>
+          </a:ln>
         </p:spPr>
         <p:style>
           <a:lnRef idx="1">
@@ -4229,14 +7116,14 @@
       </p:sp>
       <p:sp>
         <p:nvSpPr>
-          <p:cNvPr id="5" name="TextBox 4"/>
+          <p:cNvPr id="4" name="TextBox 3"/>
           <p:cNvSpPr txBox="1"/>
           <p:nvPr/>
         </p:nvSpPr>
         <p:spPr>
           <a:xfrm>
-            <a:off x="640080" y="1371600"/>
-            <a:ext cx="3291840" cy="457200"/>
+            <a:off x="457200" y="228600"/>
+            <a:ext cx="10972800" cy="822960"/>
           </a:xfrm>
           <a:prstGeom prst="rect">
             <a:avLst/>
@@ -4244,74 +7131,43 @@
           <a:noFill/>
         </p:spPr>
         <p:txBody>
-          <a:bodyPr wrap="square">
+          <a:bodyPr wrap="none">
             <a:spAutoFit/>
           </a:bodyPr>
           <a:lstStyle/>
           <a:p>
-            <a:pPr algn="ctr"/>
-            <a:r>
-              <a:rPr sz="1400" b="0">
-                <a:solidFill>
-                  <a:srgbClr val="6B7280"/>
+            <a:pPr algn="l"/>
+            <a:r>
+              <a:rPr sz="3400" b="1">
+                <a:solidFill>
+                  <a:srgbClr val="FFFFFF"/>
                 </a:solidFill>
               </a:rPr>
-              <a:t>Accuracy</a:t>
-            </a:r>
-          </a:p>
-        </p:txBody>
-      </p:sp>
-      <p:sp>
-        <p:nvSpPr>
-          <p:cNvPr id="6" name="TextBox 5"/>
-          <p:cNvSpPr txBox="1"/>
-          <p:nvPr/>
-        </p:nvSpPr>
-        <p:spPr>
-          <a:xfrm>
-            <a:off x="640080" y="1828800"/>
-            <a:ext cx="3291840" cy="822960"/>
-          </a:xfrm>
-          <a:prstGeom prst="rect">
-            <a:avLst/>
-          </a:prstGeom>
-          <a:noFill/>
-        </p:spPr>
-        <p:txBody>
-          <a:bodyPr wrap="square">
-            <a:spAutoFit/>
-          </a:bodyPr>
-          <a:lstStyle/>
-          <a:p>
-            <a:pPr algn="ctr"/>
-            <a:r>
-              <a:rPr sz="3000" b="1">
-                <a:solidFill>
-                  <a:srgbClr val="1E3A8A"/>
-                </a:solidFill>
-              </a:rPr>
-              <a:t>60.0%</a:t>
-            </a:r>
-          </a:p>
-        </p:txBody>
-      </p:sp>
-      <p:sp>
-        <p:nvSpPr>
-          <p:cNvPr id="7" name="Rectangle 6"/>
+              <a:t>Model Performance</a:t>
+            </a:r>
+          </a:p>
+        </p:txBody>
+      </p:sp>
+      <p:sp>
+        <p:nvSpPr>
+          <p:cNvPr id="5" name="Rectangle 4"/>
           <p:cNvSpPr/>
           <p:nvPr/>
         </p:nvSpPr>
         <p:spPr>
           <a:xfrm>
-            <a:off x="4389120" y="1280160"/>
-            <a:ext cx="3474720" cy="1645920"/>
+            <a:off x="365760" y="1371600"/>
+            <a:ext cx="2011680" cy="1371600"/>
           </a:xfrm>
           <a:prstGeom prst="rect">
             <a:avLst/>
           </a:prstGeom>
           <a:solidFill>
-            <a:srgbClr val="F3F4F6"/>
+            <a:srgbClr val="F0F4FF"/>
           </a:solidFill>
+          <a:ln>
+            <a:noFill/>
+          </a:ln>
         </p:spPr>
         <p:style>
           <a:lnRef idx="1">
@@ -4337,14 +7193,14 @@
       </p:sp>
       <p:sp>
         <p:nvSpPr>
-          <p:cNvPr id="8" name="TextBox 7"/>
+          <p:cNvPr id="6" name="TextBox 5"/>
           <p:cNvSpPr txBox="1"/>
           <p:nvPr/>
         </p:nvSpPr>
         <p:spPr>
           <a:xfrm>
-            <a:off x="4480560" y="1371600"/>
-            <a:ext cx="3291840" cy="457200"/>
+            <a:off x="365760" y="1463040"/>
+            <a:ext cx="2011680" cy="731520"/>
           </a:xfrm>
           <a:prstGeom prst="rect">
             <a:avLst/>
@@ -4352,13 +7208,47 @@
           <a:noFill/>
         </p:spPr>
         <p:txBody>
-          <a:bodyPr wrap="square">
+          <a:bodyPr wrap="none">
             <a:spAutoFit/>
           </a:bodyPr>
           <a:lstStyle/>
           <a:p>
             <a:pPr algn="ctr"/>
             <a:r>
+              <a:rPr sz="3000" b="1">
+                <a:solidFill>
+                  <a:srgbClr val="059669"/>
+                </a:solidFill>
+              </a:rPr>
+              <a:t>0.6667</a:t>
+            </a:r>
+          </a:p>
+        </p:txBody>
+      </p:sp>
+      <p:sp>
+        <p:nvSpPr>
+          <p:cNvPr id="7" name="TextBox 6"/>
+          <p:cNvSpPr txBox="1"/>
+          <p:nvPr/>
+        </p:nvSpPr>
+        <p:spPr>
+          <a:xfrm>
+            <a:off x="365760" y="2148840"/>
+            <a:ext cx="2011680" cy="457200"/>
+          </a:xfrm>
+          <a:prstGeom prst="rect">
+            <a:avLst/>
+          </a:prstGeom>
+          <a:noFill/>
+        </p:spPr>
+        <p:txBody>
+          <a:bodyPr wrap="none">
+            <a:spAutoFit/>
+          </a:bodyPr>
+          <a:lstStyle/>
+          <a:p>
+            <a:pPr algn="ctr"/>
+            <a:r>
               <a:rPr sz="1400" b="0">
                 <a:solidFill>
                   <a:srgbClr val="6B7280"/>
@@ -4371,55 +7261,24 @@
       </p:sp>
       <p:sp>
         <p:nvSpPr>
-          <p:cNvPr id="9" name="TextBox 8"/>
-          <p:cNvSpPr txBox="1"/>
-          <p:nvPr/>
-        </p:nvSpPr>
-        <p:spPr>
-          <a:xfrm>
-            <a:off x="4480560" y="1828800"/>
-            <a:ext cx="3291840" cy="822960"/>
-          </a:xfrm>
-          <a:prstGeom prst="rect">
-            <a:avLst/>
-          </a:prstGeom>
-          <a:noFill/>
-        </p:spPr>
-        <p:txBody>
-          <a:bodyPr wrap="square">
-            <a:spAutoFit/>
-          </a:bodyPr>
-          <a:lstStyle/>
-          <a:p>
-            <a:pPr algn="ctr"/>
-            <a:r>
-              <a:rPr sz="3000" b="1">
-                <a:solidFill>
-                  <a:srgbClr val="1E3A8A"/>
-                </a:solidFill>
-              </a:rPr>
-              <a:t>0.00</a:t>
-            </a:r>
-          </a:p>
-        </p:txBody>
-      </p:sp>
-      <p:sp>
-        <p:nvSpPr>
-          <p:cNvPr id="10" name="Rectangle 9"/>
+          <p:cNvPr id="8" name="Rectangle 7"/>
           <p:cNvSpPr/>
           <p:nvPr/>
         </p:nvSpPr>
         <p:spPr>
           <a:xfrm>
-            <a:off x="8229600" y="1280160"/>
-            <a:ext cx="3474720" cy="1645920"/>
+            <a:off x="2651760" y="1371600"/>
+            <a:ext cx="2011680" cy="1371600"/>
           </a:xfrm>
           <a:prstGeom prst="rect">
             <a:avLst/>
           </a:prstGeom>
           <a:solidFill>
-            <a:srgbClr val="F3F4F6"/>
+            <a:srgbClr val="F0F4FF"/>
           </a:solidFill>
+          <a:ln>
+            <a:noFill/>
+          </a:ln>
         </p:spPr>
         <p:style>
           <a:lnRef idx="1">
@@ -4445,14 +7304,14 @@
       </p:sp>
       <p:sp>
         <p:nvSpPr>
-          <p:cNvPr id="11" name="TextBox 10"/>
+          <p:cNvPr id="9" name="TextBox 8"/>
           <p:cNvSpPr txBox="1"/>
           <p:nvPr/>
         </p:nvSpPr>
         <p:spPr>
           <a:xfrm>
-            <a:off x="8321040" y="1371600"/>
-            <a:ext cx="3291840" cy="457200"/>
+            <a:off x="2651760" y="1463040"/>
+            <a:ext cx="2011680" cy="731520"/>
           </a:xfrm>
           <a:prstGeom prst="rect">
             <a:avLst/>
@@ -4460,13 +7319,47 @@
           <a:noFill/>
         </p:spPr>
         <p:txBody>
-          <a:bodyPr wrap="square">
+          <a:bodyPr wrap="none">
             <a:spAutoFit/>
           </a:bodyPr>
           <a:lstStyle/>
           <a:p>
             <a:pPr algn="ctr"/>
             <a:r>
+              <a:rPr sz="3000" b="1">
+                <a:solidFill>
+                  <a:srgbClr val="377CF6"/>
+                </a:solidFill>
+              </a:rPr>
+              <a:t>0.8333</a:t>
+            </a:r>
+          </a:p>
+        </p:txBody>
+      </p:sp>
+      <p:sp>
+        <p:nvSpPr>
+          <p:cNvPr id="10" name="TextBox 9"/>
+          <p:cNvSpPr txBox="1"/>
+          <p:nvPr/>
+        </p:nvSpPr>
+        <p:spPr>
+          <a:xfrm>
+            <a:off x="2651760" y="2148840"/>
+            <a:ext cx="2011680" cy="457200"/>
+          </a:xfrm>
+          <a:prstGeom prst="rect">
+            <a:avLst/>
+          </a:prstGeom>
+          <a:noFill/>
+        </p:spPr>
+        <p:txBody>
+          <a:bodyPr wrap="none">
+            <a:spAutoFit/>
+          </a:bodyPr>
+          <a:lstStyle/>
+          <a:p>
+            <a:pPr algn="ctr"/>
+            <a:r>
               <a:rPr sz="1400" b="0">
                 <a:solidFill>
                   <a:srgbClr val="6B7280"/>
@@ -4479,14 +7372,57 @@
       </p:sp>
       <p:sp>
         <p:nvSpPr>
+          <p:cNvPr id="11" name="Rectangle 10"/>
+          <p:cNvSpPr/>
+          <p:nvPr/>
+        </p:nvSpPr>
+        <p:spPr>
+          <a:xfrm>
+            <a:off x="4937760" y="1371600"/>
+            <a:ext cx="2011680" cy="1371600"/>
+          </a:xfrm>
+          <a:prstGeom prst="rect">
+            <a:avLst/>
+          </a:prstGeom>
+          <a:solidFill>
+            <a:srgbClr val="F0F4FF"/>
+          </a:solidFill>
+          <a:ln>
+            <a:noFill/>
+          </a:ln>
+        </p:spPr>
+        <p:style>
+          <a:lnRef idx="1">
+            <a:schemeClr val="accent1"/>
+          </a:lnRef>
+          <a:fillRef idx="3">
+            <a:schemeClr val="accent1"/>
+          </a:fillRef>
+          <a:effectRef idx="2">
+            <a:schemeClr val="accent1"/>
+          </a:effectRef>
+          <a:fontRef idx="minor">
+            <a:schemeClr val="lt1"/>
+          </a:fontRef>
+        </p:style>
+        <p:txBody>
+          <a:bodyPr rtlCol="0" anchor="ctr"/>
+          <a:lstStyle/>
+          <a:p>
+            <a:pPr algn="ctr"/>
+          </a:p>
+        </p:txBody>
+      </p:sp>
+      <p:sp>
+        <p:nvSpPr>
           <p:cNvPr id="12" name="TextBox 11"/>
           <p:cNvSpPr txBox="1"/>
           <p:nvPr/>
         </p:nvSpPr>
         <p:spPr>
           <a:xfrm>
-            <a:off x="8321040" y="1828800"/>
-            <a:ext cx="3291840" cy="822960"/>
+            <a:off x="4937760" y="1463040"/>
+            <a:ext cx="2011680" cy="731520"/>
           </a:xfrm>
           <a:prstGeom prst="rect">
             <a:avLst/>
@@ -4494,7 +7430,7 @@
           <a:noFill/>
         </p:spPr>
         <p:txBody>
-          <a:bodyPr wrap="square">
+          <a:bodyPr wrap="none">
             <a:spAutoFit/>
           </a:bodyPr>
           <a:lstStyle/>
@@ -4503,17 +7439,51 @@
             <a:r>
               <a:rPr sz="3000" b="1">
                 <a:solidFill>
-                  <a:srgbClr val="1E3A8A"/>
+                  <a:srgbClr val="F59E0B"/>
                 </a:solidFill>
               </a:rPr>
-              <a:t>0.50</a:t>
+              <a:t>1.0000</a:t>
+            </a:r>
+          </a:p>
+        </p:txBody>
+      </p:sp>
+      <p:sp>
+        <p:nvSpPr>
+          <p:cNvPr id="13" name="TextBox 12"/>
+          <p:cNvSpPr txBox="1"/>
+          <p:nvPr/>
+        </p:nvSpPr>
+        <p:spPr>
+          <a:xfrm>
+            <a:off x="4937760" y="2148840"/>
+            <a:ext cx="2011680" cy="457200"/>
+          </a:xfrm>
+          <a:prstGeom prst="rect">
+            <a:avLst/>
+          </a:prstGeom>
+          <a:noFill/>
+        </p:spPr>
+        <p:txBody>
+          <a:bodyPr wrap="none">
+            <a:spAutoFit/>
+          </a:bodyPr>
+          <a:lstStyle/>
+          <a:p>
+            <a:pPr algn="ctr"/>
+            <a:r>
+              <a:rPr sz="1400" b="0">
+                <a:solidFill>
+                  <a:srgbClr val="6B7280"/>
+                </a:solidFill>
+              </a:rPr>
+              <a:t>Precision</a:t>
             </a:r>
           </a:p>
         </p:txBody>
       </p:sp>
       <p:pic>
         <p:nvPicPr>
-          <p:cNvPr id="13" name="Picture 12" descr="04_amount_distribution.png"/>
+          <p:cNvPr id="14" name="Picture 13" descr="04_amount_distribution.png"/>
           <p:cNvPicPr>
             <a:picLocks noChangeAspect="1"/>
           </p:cNvPicPr>
@@ -4527,8 +7497,8 @@
         </p:blipFill>
         <p:spPr>
           <a:xfrm>
-            <a:off x="457200" y="3108960"/>
-            <a:ext cx="10972800" cy="2743200"/>
+            <a:off x="365760" y="2926080"/>
+            <a:ext cx="6858000" cy="3474720"/>
           </a:xfrm>
           <a:prstGeom prst="rect">
             <a:avLst/>
@@ -4537,14 +7507,57 @@
       </p:pic>
       <p:sp>
         <p:nvSpPr>
-          <p:cNvPr id="14" name="TextBox 13"/>
+          <p:cNvPr id="15" name="Rectangle 14"/>
+          <p:cNvSpPr/>
+          <p:nvPr/>
+        </p:nvSpPr>
+        <p:spPr>
+          <a:xfrm>
+            <a:off x="7498079" y="1371600"/>
+            <a:ext cx="4297680" cy="5029200"/>
+          </a:xfrm>
+          <a:prstGeom prst="rect">
+            <a:avLst/>
+          </a:prstGeom>
+          <a:solidFill>
+            <a:srgbClr val="F0F4FF"/>
+          </a:solidFill>
+          <a:ln>
+            <a:noFill/>
+          </a:ln>
+        </p:spPr>
+        <p:style>
+          <a:lnRef idx="1">
+            <a:schemeClr val="accent1"/>
+          </a:lnRef>
+          <a:fillRef idx="3">
+            <a:schemeClr val="accent1"/>
+          </a:fillRef>
+          <a:effectRef idx="2">
+            <a:schemeClr val="accent1"/>
+          </a:effectRef>
+          <a:fontRef idx="minor">
+            <a:schemeClr val="lt1"/>
+          </a:fontRef>
+        </p:style>
+        <p:txBody>
+          <a:bodyPr rtlCol="0" anchor="ctr"/>
+          <a:lstStyle/>
+          <a:p>
+            <a:pPr algn="ctr"/>
+          </a:p>
+        </p:txBody>
+      </p:sp>
+      <p:sp>
+        <p:nvSpPr>
+          <p:cNvPr id="16" name="TextBox 15"/>
           <p:cNvSpPr txBox="1"/>
           <p:nvPr/>
         </p:nvSpPr>
         <p:spPr>
           <a:xfrm>
-            <a:off x="457200" y="5943600"/>
-            <a:ext cx="10972800" cy="457200"/>
+            <a:off x="7680960" y="1463040"/>
+            <a:ext cx="3931920" cy="457200"/>
           </a:xfrm>
           <a:prstGeom prst="rect">
             <a:avLst/>
@@ -4552,19 +7565,223 @@
           <a:noFill/>
         </p:spPr>
         <p:txBody>
-          <a:bodyPr wrap="square">
+          <a:bodyPr wrap="none">
             <a:spAutoFit/>
           </a:bodyPr>
           <a:lstStyle/>
           <a:p>
-            <a:pPr algn="ctr"/>
+            <a:pPr algn="l"/>
+            <a:r>
+              <a:rPr sz="1400" b="1">
+                <a:solidFill>
+                  <a:srgbClr val="1E3A8A"/>
+                </a:solidFill>
+              </a:rPr>
+              <a:t>Best Hyperparameters</a:t>
+            </a:r>
+          </a:p>
+        </p:txBody>
+      </p:sp>
+      <p:sp>
+        <p:nvSpPr>
+          <p:cNvPr id="17" name="TextBox 16"/>
+          <p:cNvSpPr txBox="1"/>
+          <p:nvPr/>
+        </p:nvSpPr>
+        <p:spPr>
+          <a:xfrm>
+            <a:off x="7680960" y="2011680"/>
+            <a:ext cx="3931920" cy="457200"/>
+          </a:xfrm>
+          <a:prstGeom prst="rect">
+            <a:avLst/>
+          </a:prstGeom>
+          <a:noFill/>
+        </p:spPr>
+        <p:txBody>
+          <a:bodyPr wrap="none">
+            <a:spAutoFit/>
+          </a:bodyPr>
+          <a:lstStyle/>
+          <a:p>
+            <a:pPr algn="l"/>
             <a:r>
               <a:rPr sz="1300" b="0">
                 <a:solidFill>
                   <a:srgbClr val="6B7280"/>
                 </a:solidFill>
               </a:rPr>
-              <a:t>Algorithm: XGBoost  ·  Trained on 5 samples (LOO-CV)</a:t>
+              <a:t>Algorithm:       IsolationForest</a:t>
+            </a:r>
+          </a:p>
+        </p:txBody>
+      </p:sp>
+      <p:sp>
+        <p:nvSpPr>
+          <p:cNvPr id="18" name="TextBox 17"/>
+          <p:cNvSpPr txBox="1"/>
+          <p:nvPr/>
+        </p:nvSpPr>
+        <p:spPr>
+          <a:xfrm>
+            <a:off x="7680960" y="2514600"/>
+            <a:ext cx="3931920" cy="457200"/>
+          </a:xfrm>
+          <a:prstGeom prst="rect">
+            <a:avLst/>
+          </a:prstGeom>
+          <a:noFill/>
+        </p:spPr>
+        <p:txBody>
+          <a:bodyPr wrap="none">
+            <a:spAutoFit/>
+          </a:bodyPr>
+          <a:lstStyle/>
+          <a:p>
+            <a:pPr algn="l"/>
+            <a:r>
+              <a:rPr sz="1300" b="0">
+                <a:solidFill>
+                  <a:srgbClr val="6B7280"/>
+                </a:solidFill>
+              </a:rPr>
+              <a:t>n_estimators:    50</a:t>
+            </a:r>
+          </a:p>
+        </p:txBody>
+      </p:sp>
+      <p:sp>
+        <p:nvSpPr>
+          <p:cNvPr id="19" name="TextBox 18"/>
+          <p:cNvSpPr txBox="1"/>
+          <p:nvPr/>
+        </p:nvSpPr>
+        <p:spPr>
+          <a:xfrm>
+            <a:off x="7680960" y="3017520"/>
+            <a:ext cx="3931920" cy="457200"/>
+          </a:xfrm>
+          <a:prstGeom prst="rect">
+            <a:avLst/>
+          </a:prstGeom>
+          <a:noFill/>
+        </p:spPr>
+        <p:txBody>
+          <a:bodyPr wrap="none">
+            <a:spAutoFit/>
+          </a:bodyPr>
+          <a:lstStyle/>
+          <a:p>
+            <a:pPr algn="l"/>
+            <a:r>
+              <a:rPr sz="1300" b="0">
+                <a:solidFill>
+                  <a:srgbClr val="6B7280"/>
+                </a:solidFill>
+              </a:rPr>
+              <a:t>max_samples:     auto</a:t>
+            </a:r>
+          </a:p>
+        </p:txBody>
+      </p:sp>
+      <p:sp>
+        <p:nvSpPr>
+          <p:cNvPr id="20" name="TextBox 19"/>
+          <p:cNvSpPr txBox="1"/>
+          <p:nvPr/>
+        </p:nvSpPr>
+        <p:spPr>
+          <a:xfrm>
+            <a:off x="7680960" y="3520440"/>
+            <a:ext cx="3931920" cy="457200"/>
+          </a:xfrm>
+          <a:prstGeom prst="rect">
+            <a:avLst/>
+          </a:prstGeom>
+          <a:noFill/>
+        </p:spPr>
+        <p:txBody>
+          <a:bodyPr wrap="none">
+            <a:spAutoFit/>
+          </a:bodyPr>
+          <a:lstStyle/>
+          <a:p>
+            <a:pPr algn="l"/>
+            <a:r>
+              <a:rPr sz="1300" b="0">
+                <a:solidFill>
+                  <a:srgbClr val="6B7280"/>
+                </a:solidFill>
+              </a:rPr>
+              <a:t>contamination:   0.1</a:t>
+            </a:r>
+          </a:p>
+        </p:txBody>
+      </p:sp>
+      <p:sp>
+        <p:nvSpPr>
+          <p:cNvPr id="21" name="TextBox 20"/>
+          <p:cNvSpPr txBox="1"/>
+          <p:nvPr/>
+        </p:nvSpPr>
+        <p:spPr>
+          <a:xfrm>
+            <a:off x="7680960" y="4023360"/>
+            <a:ext cx="3931920" cy="457200"/>
+          </a:xfrm>
+          <a:prstGeom prst="rect">
+            <a:avLst/>
+          </a:prstGeom>
+          <a:noFill/>
+        </p:spPr>
+        <p:txBody>
+          <a:bodyPr wrap="none">
+            <a:spAutoFit/>
+          </a:bodyPr>
+          <a:lstStyle/>
+          <a:p>
+            <a:pPr algn="l"/>
+            <a:r>
+              <a:rPr sz="1300" b="0">
+                <a:solidFill>
+                  <a:srgbClr val="6B7280"/>
+                </a:solidFill>
+              </a:rPr>
+              <a:t>Train samples:   5</a:t>
+            </a:r>
+          </a:p>
+        </p:txBody>
+      </p:sp>
+      <p:sp>
+        <p:nvSpPr>
+          <p:cNvPr id="22" name="TextBox 21"/>
+          <p:cNvSpPr txBox="1"/>
+          <p:nvPr/>
+        </p:nvSpPr>
+        <p:spPr>
+          <a:xfrm>
+            <a:off x="7680960" y="4526280"/>
+            <a:ext cx="3931920" cy="457200"/>
+          </a:xfrm>
+          <a:prstGeom prst="rect">
+            <a:avLst/>
+          </a:prstGeom>
+          <a:noFill/>
+        </p:spPr>
+        <p:txBody>
+          <a:bodyPr wrap="none">
+            <a:spAutoFit/>
+          </a:bodyPr>
+          <a:lstStyle/>
+          <a:p>
+            <a:pPr algn="l"/>
+            <a:r>
+              <a:rPr sz="1300" b="0">
+                <a:solidFill>
+                  <a:srgbClr val="6B7280"/>
+                </a:solidFill>
+              </a:rPr>
+              <a:t>Recall:          0.5000</a:t>
             </a:r>
           </a:p>
         </p:txBody>
@@ -4580,14 +7797,6 @@
 <file path=ppt/slides/slide6.xml><?xml version="1.0" encoding="utf-8"?>
 <p:sld xmlns:a="http://schemas.openxmlformats.org/drawingml/2006/main" xmlns:p="http://schemas.openxmlformats.org/presentationml/2006/main" xmlns:r="http://schemas.openxmlformats.org/officeDocument/2006/relationships">
   <p:cSld>
-    <p:bg>
-      <p:bgPr>
-        <a:solidFill>
-          <a:srgbClr val="FFFFFF"/>
-        </a:solidFill>
-        <a:effectLst/>
-      </p:bgPr>
-    </p:bg>
     <p:spTree>
       <p:nvGrpSpPr>
         <p:cNvPr id="1" name=""/>
@@ -4604,14 +7813,17 @@
         <p:spPr>
           <a:xfrm>
             <a:off x="0" y="0"/>
-            <a:ext cx="12188952" cy="109728"/>
+            <a:ext cx="12188952" cy="6858000"/>
           </a:xfrm>
           <a:prstGeom prst="rect">
             <a:avLst/>
           </a:prstGeom>
           <a:solidFill>
-            <a:srgbClr val="1E3A8A"/>
+            <a:srgbClr val="0F172A"/>
           </a:solidFill>
+          <a:ln>
+            <a:noFill/>
+          </a:ln>
         </p:spPr>
         <p:style>
           <a:lnRef idx="1">
@@ -4637,14 +7849,57 @@
       </p:sp>
       <p:sp>
         <p:nvSpPr>
-          <p:cNvPr id="3" name="TextBox 2"/>
+          <p:cNvPr id="3" name="Rectangle 2"/>
+          <p:cNvSpPr/>
+          <p:nvPr/>
+        </p:nvSpPr>
+        <p:spPr>
+          <a:xfrm>
+            <a:off x="0" y="0"/>
+            <a:ext cx="12188952" cy="1005840"/>
+          </a:xfrm>
+          <a:prstGeom prst="rect">
+            <a:avLst/>
+          </a:prstGeom>
+          <a:solidFill>
+            <a:srgbClr val="1E3A8A"/>
+          </a:solidFill>
+          <a:ln>
+            <a:noFill/>
+          </a:ln>
+        </p:spPr>
+        <p:style>
+          <a:lnRef idx="1">
+            <a:schemeClr val="accent1"/>
+          </a:lnRef>
+          <a:fillRef idx="3">
+            <a:schemeClr val="accent1"/>
+          </a:fillRef>
+          <a:effectRef idx="2">
+            <a:schemeClr val="accent1"/>
+          </a:effectRef>
+          <a:fontRef idx="minor">
+            <a:schemeClr val="lt1"/>
+          </a:fontRef>
+        </p:style>
+        <p:txBody>
+          <a:bodyPr rtlCol="0" anchor="ctr"/>
+          <a:lstStyle/>
+          <a:p>
+            <a:pPr algn="ctr"/>
+          </a:p>
+        </p:txBody>
+      </p:sp>
+      <p:sp>
+        <p:nvSpPr>
+          <p:cNvPr id="4" name="TextBox 3"/>
           <p:cNvSpPr txBox="1"/>
           <p:nvPr/>
         </p:nvSpPr>
         <p:spPr>
           <a:xfrm>
-            <a:off x="731520" y="274320"/>
-            <a:ext cx="10058400" cy="731520"/>
+            <a:off x="457200" y="182880"/>
+            <a:ext cx="10972800" cy="731520"/>
           </a:xfrm>
           <a:prstGeom prst="rect">
             <a:avLst/>
@@ -4652,7 +7907,7 @@
           <a:noFill/>
         </p:spPr>
         <p:txBody>
-          <a:bodyPr wrap="square">
+          <a:bodyPr wrap="none">
             <a:spAutoFit/>
           </a:bodyPr>
           <a:lstStyle/>
@@ -4661,7 +7916,7 @@
             <a:r>
               <a:rPr sz="3200" b="1">
                 <a:solidFill>
-                  <a:srgbClr val="1E3A8A"/>
+                  <a:srgbClr val="FFFFFF"/>
                 </a:solidFill>
               </a:rPr>
               <a:t>Live Dashboard</a:t>
@@ -4671,7 +7926,7 @@
       </p:sp>
       <p:pic>
         <p:nvPicPr>
-          <p:cNvPr id="4" name="Picture 3" descr="01_dashboard_home.png"/>
+          <p:cNvPr id="5" name="Picture 4" descr="01_dashboard_home.png"/>
           <p:cNvPicPr>
             <a:picLocks noChangeAspect="1"/>
           </p:cNvPicPr>
@@ -4686,7 +7941,7 @@
         <p:spPr>
           <a:xfrm>
             <a:off x="457200" y="1097280"/>
-            <a:ext cx="11247120" cy="5029200"/>
+            <a:ext cx="11247120" cy="5120640"/>
           </a:xfrm>
           <a:prstGeom prst="rect">
             <a:avLst/>
@@ -4695,14 +7950,14 @@
       </p:pic>
       <p:sp>
         <p:nvSpPr>
-          <p:cNvPr id="5" name="TextBox 4"/>
+          <p:cNvPr id="6" name="TextBox 5"/>
           <p:cNvSpPr txBox="1"/>
           <p:nvPr/>
         </p:nvSpPr>
         <p:spPr>
           <a:xfrm>
-            <a:off x="457200" y="6309360"/>
-            <a:ext cx="10972800" cy="365760"/>
+            <a:off x="0" y="6355080"/>
+            <a:ext cx="12188952" cy="365760"/>
           </a:xfrm>
           <a:prstGeom prst="rect">
             <a:avLst/>
@@ -4710,7 +7965,7 @@
           <a:noFill/>
         </p:spPr>
         <p:txBody>
-          <a:bodyPr wrap="square">
+          <a:bodyPr wrap="none">
             <a:spAutoFit/>
           </a:bodyPr>
           <a:lstStyle/>
@@ -4719,10 +7974,10 @@
             <a:r>
               <a:rPr sz="1300" b="0">
                 <a:solidFill>
-                  <a:srgbClr val="6B7280"/>
+                  <a:srgbClr val="377CF6"/>
                 </a:solidFill>
               </a:rPr>
-              <a:t>Accessible at http://localhost:8000</a:t>
+              <a:t>http://localhost:8000</a:t>
             </a:r>
           </a:p>
         </p:txBody>
@@ -4738,14 +7993,6 @@
 <file path=ppt/slides/slide7.xml><?xml version="1.0" encoding="utf-8"?>
 <p:sld xmlns:a="http://schemas.openxmlformats.org/drawingml/2006/main" xmlns:p="http://schemas.openxmlformats.org/presentationml/2006/main" xmlns:r="http://schemas.openxmlformats.org/officeDocument/2006/relationships">
   <p:cSld>
-    <p:bg>
-      <p:bgPr>
-        <a:solidFill>
-          <a:srgbClr val="FFFFFF"/>
-        </a:solidFill>
-        <a:effectLst/>
-      </p:bgPr>
-    </p:bg>
     <p:spTree>
       <p:nvGrpSpPr>
         <p:cNvPr id="1" name=""/>
@@ -4762,14 +8009,17 @@
         <p:spPr>
           <a:xfrm>
             <a:off x="0" y="0"/>
-            <a:ext cx="12188952" cy="109728"/>
+            <a:ext cx="12188952" cy="6858000"/>
           </a:xfrm>
           <a:prstGeom prst="rect">
             <a:avLst/>
           </a:prstGeom>
           <a:solidFill>
-            <a:srgbClr val="1E3A8A"/>
+            <a:srgbClr val="F0F4FF"/>
           </a:solidFill>
+          <a:ln>
+            <a:noFill/>
+          </a:ln>
         </p:spPr>
         <p:style>
           <a:lnRef idx="1">
@@ -4795,14 +8045,57 @@
       </p:sp>
       <p:sp>
         <p:nvSpPr>
-          <p:cNvPr id="3" name="TextBox 2"/>
+          <p:cNvPr id="3" name="Rectangle 2"/>
+          <p:cNvSpPr/>
+          <p:nvPr/>
+        </p:nvSpPr>
+        <p:spPr>
+          <a:xfrm>
+            <a:off x="0" y="0"/>
+            <a:ext cx="12188952" cy="1097280"/>
+          </a:xfrm>
+          <a:prstGeom prst="rect">
+            <a:avLst/>
+          </a:prstGeom>
+          <a:solidFill>
+            <a:srgbClr val="1E3A8A"/>
+          </a:solidFill>
+          <a:ln>
+            <a:noFill/>
+          </a:ln>
+        </p:spPr>
+        <p:style>
+          <a:lnRef idx="1">
+            <a:schemeClr val="accent1"/>
+          </a:lnRef>
+          <a:fillRef idx="3">
+            <a:schemeClr val="accent1"/>
+          </a:fillRef>
+          <a:effectRef idx="2">
+            <a:schemeClr val="accent1"/>
+          </a:effectRef>
+          <a:fontRef idx="minor">
+            <a:schemeClr val="lt1"/>
+          </a:fontRef>
+        </p:style>
+        <p:txBody>
+          <a:bodyPr rtlCol="0" anchor="ctr"/>
+          <a:lstStyle/>
+          <a:p>
+            <a:pPr algn="ctr"/>
+          </a:p>
+        </p:txBody>
+      </p:sp>
+      <p:sp>
+        <p:nvSpPr>
+          <p:cNvPr id="4" name="TextBox 3"/>
           <p:cNvSpPr txBox="1"/>
           <p:nvPr/>
         </p:nvSpPr>
         <p:spPr>
           <a:xfrm>
-            <a:off x="731520" y="274320"/>
-            <a:ext cx="10058400" cy="731520"/>
+            <a:off x="457200" y="182880"/>
+            <a:ext cx="10972800" cy="777240"/>
           </a:xfrm>
           <a:prstGeom prst="rect">
             <a:avLst/>
@@ -4810,7 +8103,7 @@
           <a:noFill/>
         </p:spPr>
         <p:txBody>
-          <a:bodyPr wrap="square">
+          <a:bodyPr wrap="none">
             <a:spAutoFit/>
           </a:bodyPr>
           <a:lstStyle/>
@@ -4819,7 +8112,7 @@
             <a:r>
               <a:rPr sz="3200" b="1">
                 <a:solidFill>
-                  <a:srgbClr val="1E3A8A"/>
+                  <a:srgbClr val="FFFFFF"/>
                 </a:solidFill>
               </a:rPr>
               <a:t>Automated Quality Gates</a:t>
@@ -4829,7 +8122,7 @@
       </p:sp>
       <p:pic>
         <p:nvPicPr>
-          <p:cNvPr id="4" name="Picture 3" descr="03_prediction_result.png"/>
+          <p:cNvPr id="5" name="Picture 4" descr="03_prediction_result.png"/>
           <p:cNvPicPr>
             <a:picLocks noChangeAspect="1"/>
           </p:cNvPicPr>
@@ -4843,8 +8136,8 @@
         </p:blipFill>
         <p:spPr>
           <a:xfrm>
-            <a:off x="365760" y="1097280"/>
-            <a:ext cx="5486400" cy="4114800"/>
+            <a:off x="365760" y="1188720"/>
+            <a:ext cx="5577840" cy="4114800"/>
           </a:xfrm>
           <a:prstGeom prst="rect">
             <a:avLst/>
@@ -4853,7 +8146,7 @@
       </p:pic>
       <p:pic>
         <p:nvPicPr>
-          <p:cNvPr id="5" name="Picture 4" descr="04_swagger_docs.png"/>
+          <p:cNvPr id="6" name="Picture 5" descr="04_swagger_docs.png"/>
           <p:cNvPicPr>
             <a:picLocks noChangeAspect="1"/>
           </p:cNvPicPr>
@@ -4867,8 +8160,8 @@
         </p:blipFill>
         <p:spPr>
           <a:xfrm>
-            <a:off x="6217920" y="1097280"/>
-            <a:ext cx="5486400" cy="4114800"/>
+            <a:off x="6217920" y="1188720"/>
+            <a:ext cx="5577840" cy="4114800"/>
           </a:xfrm>
           <a:prstGeom prst="rect">
             <a:avLst/>
@@ -4877,14 +8170,57 @@
       </p:pic>
       <p:sp>
         <p:nvSpPr>
-          <p:cNvPr id="6" name="TextBox 5"/>
+          <p:cNvPr id="7" name="Rectangle 6"/>
+          <p:cNvSpPr/>
+          <p:nvPr/>
+        </p:nvSpPr>
+        <p:spPr>
+          <a:xfrm>
+            <a:off x="457200" y="5486400"/>
+            <a:ext cx="5486400" cy="594360"/>
+          </a:xfrm>
+          <a:prstGeom prst="rect">
+            <a:avLst/>
+          </a:prstGeom>
+          <a:solidFill>
+            <a:srgbClr val="059669"/>
+          </a:solidFill>
+          <a:ln>
+            <a:noFill/>
+          </a:ln>
+        </p:spPr>
+        <p:style>
+          <a:lnRef idx="1">
+            <a:schemeClr val="accent1"/>
+          </a:lnRef>
+          <a:fillRef idx="3">
+            <a:schemeClr val="accent1"/>
+          </a:fillRef>
+          <a:effectRef idx="2">
+            <a:schemeClr val="accent1"/>
+          </a:effectRef>
+          <a:fontRef idx="minor">
+            <a:schemeClr val="lt1"/>
+          </a:fontRef>
+        </p:style>
+        <p:txBody>
+          <a:bodyPr rtlCol="0" anchor="ctr"/>
+          <a:lstStyle/>
+          <a:p>
+            <a:pPr algn="ctr"/>
+          </a:p>
+        </p:txBody>
+      </p:sp>
+      <p:sp>
+        <p:nvSpPr>
+          <p:cNvPr id="8" name="TextBox 7"/>
           <p:cNvSpPr txBox="1"/>
           <p:nvPr/>
         </p:nvSpPr>
         <p:spPr>
           <a:xfrm>
-            <a:off x="457200" y="5486400"/>
-            <a:ext cx="10972800" cy="548640"/>
+            <a:off x="457200" y="5532120"/>
+            <a:ext cx="5486400" cy="502920"/>
           </a:xfrm>
           <a:prstGeom prst="rect">
             <a:avLst/>
@@ -4892,7 +8228,7 @@
           <a:noFill/>
         </p:spPr>
         <p:txBody>
-          <a:bodyPr wrap="square">
+          <a:bodyPr wrap="none">
             <a:spAutoFit/>
           </a:bodyPr>
           <a:lstStyle/>
@@ -4901,10 +8237,87 @@
             <a:r>
               <a:rPr sz="1600" b="1">
                 <a:solidFill>
-                  <a:srgbClr val="059669"/>
+                  <a:srgbClr val="FFFFFF"/>
                 </a:solidFill>
               </a:rPr>
-              <a:t>8 unit tests passed   ·   6 Playwright E2E tests passed   ·   6 screenshots saved</a:t>
+              <a:t>8 unit tests passed</a:t>
+            </a:r>
+          </a:p>
+        </p:txBody>
+      </p:sp>
+      <p:sp>
+        <p:nvSpPr>
+          <p:cNvPr id="9" name="Rectangle 8"/>
+          <p:cNvSpPr/>
+          <p:nvPr/>
+        </p:nvSpPr>
+        <p:spPr>
+          <a:xfrm>
+            <a:off x="6309360" y="5486400"/>
+            <a:ext cx="5486400" cy="594360"/>
+          </a:xfrm>
+          <a:prstGeom prst="rect">
+            <a:avLst/>
+          </a:prstGeom>
+          <a:solidFill>
+            <a:srgbClr val="377CF6"/>
+          </a:solidFill>
+          <a:ln>
+            <a:noFill/>
+          </a:ln>
+        </p:spPr>
+        <p:style>
+          <a:lnRef idx="1">
+            <a:schemeClr val="accent1"/>
+          </a:lnRef>
+          <a:fillRef idx="3">
+            <a:schemeClr val="accent1"/>
+          </a:fillRef>
+          <a:effectRef idx="2">
+            <a:schemeClr val="accent1"/>
+          </a:effectRef>
+          <a:fontRef idx="minor">
+            <a:schemeClr val="lt1"/>
+          </a:fontRef>
+        </p:style>
+        <p:txBody>
+          <a:bodyPr rtlCol="0" anchor="ctr"/>
+          <a:lstStyle/>
+          <a:p>
+            <a:pPr algn="ctr"/>
+          </a:p>
+        </p:txBody>
+      </p:sp>
+      <p:sp>
+        <p:nvSpPr>
+          <p:cNvPr id="10" name="TextBox 9"/>
+          <p:cNvSpPr txBox="1"/>
+          <p:nvPr/>
+        </p:nvSpPr>
+        <p:spPr>
+          <a:xfrm>
+            <a:off x="6309360" y="5532120"/>
+            <a:ext cx="5486400" cy="502920"/>
+          </a:xfrm>
+          <a:prstGeom prst="rect">
+            <a:avLst/>
+          </a:prstGeom>
+          <a:noFill/>
+        </p:spPr>
+        <p:txBody>
+          <a:bodyPr wrap="none">
+            <a:spAutoFit/>
+          </a:bodyPr>
+          <a:lstStyle/>
+          <a:p>
+            <a:pPr algn="ctr"/>
+            <a:r>
+              <a:rPr sz="1600" b="1">
+                <a:solidFill>
+                  <a:srgbClr val="FFFFFF"/>
+                </a:solidFill>
+              </a:rPr>
+              <a:t>6 Playwright E2E tests passed</a:t>
             </a:r>
           </a:p>
         </p:txBody>
@@ -4920,14 +8333,6 @@
 <file path=ppt/slides/slide8.xml><?xml version="1.0" encoding="utf-8"?>
 <p:sld xmlns:a="http://schemas.openxmlformats.org/drawingml/2006/main" xmlns:p="http://schemas.openxmlformats.org/presentationml/2006/main" xmlns:r="http://schemas.openxmlformats.org/officeDocument/2006/relationships">
   <p:cSld>
-    <p:bg>
-      <p:bgPr>
-        <a:solidFill>
-          <a:srgbClr val="1E3A8A"/>
-        </a:solidFill>
-        <a:effectLst/>
-      </p:bgPr>
-    </p:bg>
     <p:spTree>
       <p:nvGrpSpPr>
         <p:cNvPr id="1" name=""/>
@@ -4937,13 +8342,99 @@
       <p:grpSpPr/>
       <p:sp>
         <p:nvSpPr>
-          <p:cNvPr id="2" name="TextBox 1"/>
+          <p:cNvPr id="2" name="Rectangle 1"/>
+          <p:cNvSpPr/>
+          <p:nvPr/>
+        </p:nvSpPr>
+        <p:spPr>
+          <a:xfrm>
+            <a:off x="0" y="0"/>
+            <a:ext cx="12188952" cy="6858000"/>
+          </a:xfrm>
+          <a:prstGeom prst="rect">
+            <a:avLst/>
+          </a:prstGeom>
+          <a:solidFill>
+            <a:srgbClr val="1E3A8A"/>
+          </a:solidFill>
+          <a:ln>
+            <a:noFill/>
+          </a:ln>
+        </p:spPr>
+        <p:style>
+          <a:lnRef idx="1">
+            <a:schemeClr val="accent1"/>
+          </a:lnRef>
+          <a:fillRef idx="3">
+            <a:schemeClr val="accent1"/>
+          </a:fillRef>
+          <a:effectRef idx="2">
+            <a:schemeClr val="accent1"/>
+          </a:effectRef>
+          <a:fontRef idx="minor">
+            <a:schemeClr val="lt1"/>
+          </a:fontRef>
+        </p:style>
+        <p:txBody>
+          <a:bodyPr rtlCol="0" anchor="ctr"/>
+          <a:lstStyle/>
+          <a:p>
+            <a:pPr algn="ctr"/>
+          </a:p>
+        </p:txBody>
+      </p:sp>
+      <p:sp>
+        <p:nvSpPr>
+          <p:cNvPr id="3" name="Rectangle 2"/>
+          <p:cNvSpPr/>
+          <p:nvPr/>
+        </p:nvSpPr>
+        <p:spPr>
+          <a:xfrm>
+            <a:off x="0" y="0"/>
+            <a:ext cx="12188952" cy="73152"/>
+          </a:xfrm>
+          <a:prstGeom prst="rect">
+            <a:avLst/>
+          </a:prstGeom>
+          <a:solidFill>
+            <a:srgbClr val="059669"/>
+          </a:solidFill>
+          <a:ln>
+            <a:noFill/>
+          </a:ln>
+        </p:spPr>
+        <p:style>
+          <a:lnRef idx="1">
+            <a:schemeClr val="accent1"/>
+          </a:lnRef>
+          <a:fillRef idx="3">
+            <a:schemeClr val="accent1"/>
+          </a:fillRef>
+          <a:effectRef idx="2">
+            <a:schemeClr val="accent1"/>
+          </a:effectRef>
+          <a:fontRef idx="minor">
+            <a:schemeClr val="lt1"/>
+          </a:fontRef>
+        </p:style>
+        <p:txBody>
+          <a:bodyPr rtlCol="0" anchor="ctr"/>
+          <a:lstStyle/>
+          <a:p>
+            <a:pPr algn="ctr"/>
+          </a:p>
+        </p:txBody>
+      </p:sp>
+      <p:sp>
+        <p:nvSpPr>
+          <p:cNvPr id="4" name="TextBox 3"/>
           <p:cNvSpPr txBox="1"/>
           <p:nvPr/>
         </p:nvSpPr>
         <p:spPr>
           <a:xfrm>
-            <a:off x="457200" y="731520"/>
+            <a:off x="457200" y="274320"/>
             <a:ext cx="10972800" cy="914400"/>
           </a:xfrm>
           <a:prstGeom prst="rect">
@@ -4952,14 +8443,14 @@
           <a:noFill/>
         </p:spPr>
         <p:txBody>
-          <a:bodyPr wrap="square">
+          <a:bodyPr wrap="none">
             <a:spAutoFit/>
           </a:bodyPr>
           <a:lstStyle/>
           <a:p>
             <a:pPr algn="ctr"/>
             <a:r>
-              <a:rPr sz="3600" b="1">
+              <a:rPr sz="4200" b="1">
                 <a:solidFill>
                   <a:srgbClr val="FFFFFF"/>
                 </a:solidFill>
@@ -4971,14 +8462,57 @@
       </p:sp>
       <p:sp>
         <p:nvSpPr>
-          <p:cNvPr id="3" name="TextBox 2"/>
+          <p:cNvPr id="5" name="Rectangle 4"/>
+          <p:cNvSpPr/>
+          <p:nvPr/>
+        </p:nvSpPr>
+        <p:spPr>
+          <a:xfrm>
+            <a:off x="457200" y="1435608"/>
+            <a:ext cx="64008" cy="502920"/>
+          </a:xfrm>
+          <a:prstGeom prst="rect">
+            <a:avLst/>
+          </a:prstGeom>
+          <a:solidFill>
+            <a:srgbClr val="377CF6"/>
+          </a:solidFill>
+          <a:ln>
+            <a:noFill/>
+          </a:ln>
+        </p:spPr>
+        <p:style>
+          <a:lnRef idx="1">
+            <a:schemeClr val="accent1"/>
+          </a:lnRef>
+          <a:fillRef idx="3">
+            <a:schemeClr val="accent1"/>
+          </a:fillRef>
+          <a:effectRef idx="2">
+            <a:schemeClr val="accent1"/>
+          </a:effectRef>
+          <a:fontRef idx="minor">
+            <a:schemeClr val="lt1"/>
+          </a:fontRef>
+        </p:style>
+        <p:txBody>
+          <a:bodyPr rtlCol="0" anchor="ctr"/>
+          <a:lstStyle/>
+          <a:p>
+            <a:pPr algn="ctr"/>
+          </a:p>
+        </p:txBody>
+      </p:sp>
+      <p:sp>
+        <p:nvSpPr>
+          <p:cNvPr id="6" name="TextBox 5"/>
           <p:cNvSpPr txBox="1"/>
           <p:nvPr/>
         </p:nvSpPr>
         <p:spPr>
           <a:xfrm>
-            <a:off x="1371600" y="1828800"/>
-            <a:ext cx="9144000" cy="594360"/>
+            <a:off x="685800" y="1325880"/>
+            <a:ext cx="2011680" cy="548640"/>
           </a:xfrm>
           <a:prstGeom prst="rect">
             <a:avLst/>
@@ -4986,33 +8520,33 @@
           <a:noFill/>
         </p:spPr>
         <p:txBody>
-          <a:bodyPr wrap="square">
+          <a:bodyPr wrap="none">
             <a:spAutoFit/>
           </a:bodyPr>
           <a:lstStyle/>
           <a:p>
             <a:pPr algn="l"/>
             <a:r>
-              <a:rPr sz="1700" b="0">
-                <a:solidFill>
-                  <a:srgbClr val="BFDBF7"/>
+              <a:rPr sz="1700" b="1">
+                <a:solidFill>
+                  <a:srgbClr val="377CF6"/>
                 </a:solidFill>
               </a:rPr>
-              <a:t>Model:       XGBoost — Accuracy: 60.0%</a:t>
-            </a:r>
-          </a:p>
-        </p:txBody>
-      </p:sp>
-      <p:sp>
-        <p:nvSpPr>
-          <p:cNvPr id="4" name="TextBox 3"/>
+              <a:t>Model:</a:t>
+            </a:r>
+          </a:p>
+        </p:txBody>
+      </p:sp>
+      <p:sp>
+        <p:nvSpPr>
+          <p:cNvPr id="7" name="TextBox 6"/>
           <p:cNvSpPr txBox="1"/>
           <p:nvPr/>
         </p:nvSpPr>
         <p:spPr>
           <a:xfrm>
-            <a:off x="1371600" y="2514600"/>
-            <a:ext cx="9144000" cy="594360"/>
+            <a:off x="2697480" y="1325880"/>
+            <a:ext cx="9144000" cy="548640"/>
           </a:xfrm>
           <a:prstGeom prst="rect">
             <a:avLst/>
@@ -5020,7 +8554,7 @@
           <a:noFill/>
         </p:spPr>
         <p:txBody>
-          <a:bodyPr wrap="square">
+          <a:bodyPr wrap="none">
             <a:spAutoFit/>
           </a:bodyPr>
           <a:lstStyle/>
@@ -5029,24 +8563,67 @@
             <a:r>
               <a:rPr sz="1700" b="0">
                 <a:solidFill>
-                  <a:srgbClr val="BFDBF7"/>
+                  <a:srgbClr val="FFFFFF"/>
                 </a:solidFill>
               </a:rPr>
-              <a:t>API:         http://localhost:8000</a:t>
-            </a:r>
-          </a:p>
-        </p:txBody>
-      </p:sp>
-      <p:sp>
-        <p:nvSpPr>
-          <p:cNvPr id="5" name="TextBox 4"/>
+              <a:t>IsolationForest — F1: 0.667 · ROC-AUC: 0.833</a:t>
+            </a:r>
+          </a:p>
+        </p:txBody>
+      </p:sp>
+      <p:sp>
+        <p:nvSpPr>
+          <p:cNvPr id="8" name="Rectangle 7"/>
+          <p:cNvSpPr/>
+          <p:nvPr/>
+        </p:nvSpPr>
+        <p:spPr>
+          <a:xfrm>
+            <a:off x="457200" y="2258568"/>
+            <a:ext cx="64008" cy="502920"/>
+          </a:xfrm>
+          <a:prstGeom prst="rect">
+            <a:avLst/>
+          </a:prstGeom>
+          <a:solidFill>
+            <a:srgbClr val="059669"/>
+          </a:solidFill>
+          <a:ln>
+            <a:noFill/>
+          </a:ln>
+        </p:spPr>
+        <p:style>
+          <a:lnRef idx="1">
+            <a:schemeClr val="accent1"/>
+          </a:lnRef>
+          <a:fillRef idx="3">
+            <a:schemeClr val="accent1"/>
+          </a:fillRef>
+          <a:effectRef idx="2">
+            <a:schemeClr val="accent1"/>
+          </a:effectRef>
+          <a:fontRef idx="minor">
+            <a:schemeClr val="lt1"/>
+          </a:fontRef>
+        </p:style>
+        <p:txBody>
+          <a:bodyPr rtlCol="0" anchor="ctr"/>
+          <a:lstStyle/>
+          <a:p>
+            <a:pPr algn="ctr"/>
+          </a:p>
+        </p:txBody>
+      </p:sp>
+      <p:sp>
+        <p:nvSpPr>
+          <p:cNvPr id="9" name="TextBox 8"/>
           <p:cNvSpPr txBox="1"/>
           <p:nvPr/>
         </p:nvSpPr>
         <p:spPr>
           <a:xfrm>
-            <a:off x="1371600" y="3200400"/>
-            <a:ext cx="9144000" cy="594360"/>
+            <a:off x="685800" y="2148840"/>
+            <a:ext cx="2011680" cy="548640"/>
           </a:xfrm>
           <a:prstGeom prst="rect">
             <a:avLst/>
@@ -5054,33 +8631,33 @@
           <a:noFill/>
         </p:spPr>
         <p:txBody>
-          <a:bodyPr wrap="square">
+          <a:bodyPr wrap="none">
             <a:spAutoFit/>
           </a:bodyPr>
           <a:lstStyle/>
           <a:p>
             <a:pPr algn="l"/>
             <a:r>
-              <a:rPr sz="1700" b="0">
-                <a:solidFill>
-                  <a:srgbClr val="BFDBF7"/>
+              <a:rPr sz="1700" b="1">
+                <a:solidFill>
+                  <a:srgbClr val="059669"/>
                 </a:solidFill>
               </a:rPr>
-              <a:t>GitHub:      github.com/heramb-analytics/claude-code-ml-pipeline-20260415-214802</a:t>
-            </a:r>
-          </a:p>
-        </p:txBody>
-      </p:sp>
-      <p:sp>
-        <p:nvSpPr>
-          <p:cNvPr id="6" name="TextBox 5"/>
+              <a:t>API:</a:t>
+            </a:r>
+          </a:p>
+        </p:txBody>
+      </p:sp>
+      <p:sp>
+        <p:nvSpPr>
+          <p:cNvPr id="10" name="TextBox 9"/>
           <p:cNvSpPr txBox="1"/>
           <p:nvPr/>
         </p:nvSpPr>
         <p:spPr>
           <a:xfrm>
-            <a:off x="1371600" y="3886200"/>
-            <a:ext cx="9144000" cy="594360"/>
+            <a:off x="2697480" y="2148840"/>
+            <a:ext cx="9144000" cy="548640"/>
           </a:xfrm>
           <a:prstGeom prst="rect">
             <a:avLst/>
@@ -5088,7 +8665,7 @@
           <a:noFill/>
         </p:spPr>
         <p:txBody>
-          <a:bodyPr wrap="square">
+          <a:bodyPr wrap="none">
             <a:spAutoFit/>
           </a:bodyPr>
           <a:lstStyle/>
@@ -5097,24 +8674,67 @@
             <a:r>
               <a:rPr sz="1700" b="0">
                 <a:solidFill>
-                  <a:srgbClr val="BFDBF7"/>
+                  <a:srgbClr val="FFFFFF"/>
                 </a:solidFill>
               </a:rPr>
-              <a:t>Tests:       8 unit  ·  6 Playwright E2E</a:t>
-            </a:r>
-          </a:p>
-        </p:txBody>
-      </p:sp>
-      <p:sp>
-        <p:nvSpPr>
-          <p:cNvPr id="7" name="TextBox 6"/>
+              <a:t>http://localhost:8000 · FastAPI + Tailwind Dashboard</a:t>
+            </a:r>
+          </a:p>
+        </p:txBody>
+      </p:sp>
+      <p:sp>
+        <p:nvSpPr>
+          <p:cNvPr id="11" name="Rectangle 10"/>
+          <p:cNvSpPr/>
+          <p:nvPr/>
+        </p:nvSpPr>
+        <p:spPr>
+          <a:xfrm>
+            <a:off x="457200" y="3081528"/>
+            <a:ext cx="64008" cy="502920"/>
+          </a:xfrm>
+          <a:prstGeom prst="rect">
+            <a:avLst/>
+          </a:prstGeom>
+          <a:solidFill>
+            <a:srgbClr val="F59E0B"/>
+          </a:solidFill>
+          <a:ln>
+            <a:noFill/>
+          </a:ln>
+        </p:spPr>
+        <p:style>
+          <a:lnRef idx="1">
+            <a:schemeClr val="accent1"/>
+          </a:lnRef>
+          <a:fillRef idx="3">
+            <a:schemeClr val="accent1"/>
+          </a:fillRef>
+          <a:effectRef idx="2">
+            <a:schemeClr val="accent1"/>
+          </a:effectRef>
+          <a:fontRef idx="minor">
+            <a:schemeClr val="lt1"/>
+          </a:fontRef>
+        </p:style>
+        <p:txBody>
+          <a:bodyPr rtlCol="0" anchor="ctr"/>
+          <a:lstStyle/>
+          <a:p>
+            <a:pPr algn="ctr"/>
+          </a:p>
+        </p:txBody>
+      </p:sp>
+      <p:sp>
+        <p:nvSpPr>
+          <p:cNvPr id="12" name="TextBox 11"/>
           <p:cNvSpPr txBox="1"/>
           <p:nvPr/>
         </p:nvSpPr>
         <p:spPr>
           <a:xfrm>
-            <a:off x="1371600" y="4572000"/>
-            <a:ext cx="9144000" cy="594360"/>
+            <a:off x="685800" y="2971800"/>
+            <a:ext cx="2011680" cy="548640"/>
           </a:xfrm>
           <a:prstGeom prst="rect">
             <a:avLst/>
@@ -5122,33 +8742,33 @@
           <a:noFill/>
         </p:spPr>
         <p:txBody>
-          <a:bodyPr wrap="square">
+          <a:bodyPr wrap="none">
             <a:spAutoFit/>
           </a:bodyPr>
           <a:lstStyle/>
           <a:p>
             <a:pPr algn="l"/>
             <a:r>
-              <a:rPr sz="1700" b="0">
-                <a:solidFill>
-                  <a:srgbClr val="BFDBF7"/>
+              <a:rPr sz="1700" b="1">
+                <a:solidFill>
+                  <a:srgbClr val="F59E0B"/>
                 </a:solidFill>
               </a:rPr>
-              <a:t>Scheduler:   retrain @ 02:00 UTC  ·  drift check every 6h</a:t>
-            </a:r>
-          </a:p>
-        </p:txBody>
-      </p:sp>
-      <p:sp>
-        <p:nvSpPr>
-          <p:cNvPr id="8" name="TextBox 7"/>
+              <a:t>GitHub:</a:t>
+            </a:r>
+          </a:p>
+        </p:txBody>
+      </p:sp>
+      <p:sp>
+        <p:nvSpPr>
+          <p:cNvPr id="13" name="TextBox 12"/>
           <p:cNvSpPr txBox="1"/>
           <p:nvPr/>
         </p:nvSpPr>
         <p:spPr>
           <a:xfrm>
-            <a:off x="1371600" y="5257800"/>
-            <a:ext cx="9144000" cy="594360"/>
+            <a:off x="2697480" y="2971800"/>
+            <a:ext cx="9144000" cy="548640"/>
           </a:xfrm>
           <a:prstGeom prst="rect">
             <a:avLst/>
@@ -5156,7 +8776,7 @@
           <a:noFill/>
         </p:spPr>
         <p:txBody>
-          <a:bodyPr wrap="square">
+          <a:bodyPr wrap="none">
             <a:spAutoFit/>
           </a:bodyPr>
           <a:lstStyle/>
@@ -5165,10 +8785,377 @@
             <a:r>
               <a:rPr sz="1700" b="0">
                 <a:solidFill>
-                  <a:srgbClr val="BFDBF7"/>
+                  <a:srgbClr val="FFFFFF"/>
                 </a:solidFill>
               </a:rPr>
-              <a:t>Built by:    Claude Code (claude-sonnet-4-6)</a:t>
+              <a:t>heramb-analytics/claude-code-ml-pipeline-20260415-214802</a:t>
+            </a:r>
+          </a:p>
+        </p:txBody>
+      </p:sp>
+      <p:sp>
+        <p:nvSpPr>
+          <p:cNvPr id="14" name="Rectangle 13"/>
+          <p:cNvSpPr/>
+          <p:nvPr/>
+        </p:nvSpPr>
+        <p:spPr>
+          <a:xfrm>
+            <a:off x="457200" y="3904488"/>
+            <a:ext cx="64008" cy="502920"/>
+          </a:xfrm>
+          <a:prstGeom prst="rect">
+            <a:avLst/>
+          </a:prstGeom>
+          <a:solidFill>
+            <a:srgbClr val="A78BFA"/>
+          </a:solidFill>
+          <a:ln>
+            <a:noFill/>
+          </a:ln>
+        </p:spPr>
+        <p:style>
+          <a:lnRef idx="1">
+            <a:schemeClr val="accent1"/>
+          </a:lnRef>
+          <a:fillRef idx="3">
+            <a:schemeClr val="accent1"/>
+          </a:fillRef>
+          <a:effectRef idx="2">
+            <a:schemeClr val="accent1"/>
+          </a:effectRef>
+          <a:fontRef idx="minor">
+            <a:schemeClr val="lt1"/>
+          </a:fontRef>
+        </p:style>
+        <p:txBody>
+          <a:bodyPr rtlCol="0" anchor="ctr"/>
+          <a:lstStyle/>
+          <a:p>
+            <a:pPr algn="ctr"/>
+          </a:p>
+        </p:txBody>
+      </p:sp>
+      <p:sp>
+        <p:nvSpPr>
+          <p:cNvPr id="15" name="TextBox 14"/>
+          <p:cNvSpPr txBox="1"/>
+          <p:nvPr/>
+        </p:nvSpPr>
+        <p:spPr>
+          <a:xfrm>
+            <a:off x="685800" y="3794760"/>
+            <a:ext cx="2011680" cy="548640"/>
+          </a:xfrm>
+          <a:prstGeom prst="rect">
+            <a:avLst/>
+          </a:prstGeom>
+          <a:noFill/>
+        </p:spPr>
+        <p:txBody>
+          <a:bodyPr wrap="none">
+            <a:spAutoFit/>
+          </a:bodyPr>
+          <a:lstStyle/>
+          <a:p>
+            <a:pPr algn="l"/>
+            <a:r>
+              <a:rPr sz="1700" b="1">
+                <a:solidFill>
+                  <a:srgbClr val="A78BFA"/>
+                </a:solidFill>
+              </a:rPr>
+              <a:t>JIRA:</a:t>
+            </a:r>
+          </a:p>
+        </p:txBody>
+      </p:sp>
+      <p:sp>
+        <p:nvSpPr>
+          <p:cNvPr id="16" name="TextBox 15"/>
+          <p:cNvSpPr txBox="1"/>
+          <p:nvPr/>
+        </p:nvSpPr>
+        <p:spPr>
+          <a:xfrm>
+            <a:off x="2697480" y="3794760"/>
+            <a:ext cx="9144000" cy="548640"/>
+          </a:xfrm>
+          <a:prstGeom prst="rect">
+            <a:avLst/>
+          </a:prstGeom>
+          <a:noFill/>
+        </p:spPr>
+        <p:txBody>
+          <a:bodyPr wrap="none">
+            <a:spAutoFit/>
+          </a:bodyPr>
+          <a:lstStyle/>
+          <a:p>
+            <a:pPr algn="l"/>
+            <a:r>
+              <a:rPr sz="1700" b="0">
+                <a:solidFill>
+                  <a:srgbClr val="FFFFFF"/>
+                </a:solidFill>
+              </a:rPr>
+              <a:t>6 tickets · Epic TAD-64 · Sprint 1 · Project TAD</a:t>
+            </a:r>
+          </a:p>
+        </p:txBody>
+      </p:sp>
+      <p:sp>
+        <p:nvSpPr>
+          <p:cNvPr id="17" name="Rectangle 16"/>
+          <p:cNvSpPr/>
+          <p:nvPr/>
+        </p:nvSpPr>
+        <p:spPr>
+          <a:xfrm>
+            <a:off x="457200" y="4727448"/>
+            <a:ext cx="64008" cy="502920"/>
+          </a:xfrm>
+          <a:prstGeom prst="rect">
+            <a:avLst/>
+          </a:prstGeom>
+          <a:solidFill>
+            <a:srgbClr val="FB923A"/>
+          </a:solidFill>
+          <a:ln>
+            <a:noFill/>
+          </a:ln>
+        </p:spPr>
+        <p:style>
+          <a:lnRef idx="1">
+            <a:schemeClr val="accent1"/>
+          </a:lnRef>
+          <a:fillRef idx="3">
+            <a:schemeClr val="accent1"/>
+          </a:fillRef>
+          <a:effectRef idx="2">
+            <a:schemeClr val="accent1"/>
+          </a:effectRef>
+          <a:fontRef idx="minor">
+            <a:schemeClr val="lt1"/>
+          </a:fontRef>
+        </p:style>
+        <p:txBody>
+          <a:bodyPr rtlCol="0" anchor="ctr"/>
+          <a:lstStyle/>
+          <a:p>
+            <a:pPr algn="ctr"/>
+          </a:p>
+        </p:txBody>
+      </p:sp>
+      <p:sp>
+        <p:nvSpPr>
+          <p:cNvPr id="18" name="TextBox 17"/>
+          <p:cNvSpPr txBox="1"/>
+          <p:nvPr/>
+        </p:nvSpPr>
+        <p:spPr>
+          <a:xfrm>
+            <a:off x="685800" y="4617720"/>
+            <a:ext cx="2011680" cy="548640"/>
+          </a:xfrm>
+          <a:prstGeom prst="rect">
+            <a:avLst/>
+          </a:prstGeom>
+          <a:noFill/>
+        </p:spPr>
+        <p:txBody>
+          <a:bodyPr wrap="none">
+            <a:spAutoFit/>
+          </a:bodyPr>
+          <a:lstStyle/>
+          <a:p>
+            <a:pPr algn="l"/>
+            <a:r>
+              <a:rPr sz="1700" b="1">
+                <a:solidFill>
+                  <a:srgbClr val="FB923A"/>
+                </a:solidFill>
+              </a:rPr>
+              <a:t>Confluence:</a:t>
+            </a:r>
+          </a:p>
+        </p:txBody>
+      </p:sp>
+      <p:sp>
+        <p:nvSpPr>
+          <p:cNvPr id="19" name="TextBox 18"/>
+          <p:cNvSpPr txBox="1"/>
+          <p:nvPr/>
+        </p:nvSpPr>
+        <p:spPr>
+          <a:xfrm>
+            <a:off x="2697480" y="4617720"/>
+            <a:ext cx="9144000" cy="548640"/>
+          </a:xfrm>
+          <a:prstGeom prst="rect">
+            <a:avLst/>
+          </a:prstGeom>
+          <a:noFill/>
+        </p:spPr>
+        <p:txBody>
+          <a:bodyPr wrap="none">
+            <a:spAutoFit/>
+          </a:bodyPr>
+          <a:lstStyle/>
+          <a:p>
+            <a:pPr algn="l"/>
+            <a:r>
+              <a:rPr sz="1700" b="0">
+                <a:solidFill>
+                  <a:srgbClr val="FFFFFF"/>
+                </a:solidFill>
+              </a:rPr>
+              <a:t>11-section page in CR space</a:t>
+            </a:r>
+          </a:p>
+        </p:txBody>
+      </p:sp>
+      <p:sp>
+        <p:nvSpPr>
+          <p:cNvPr id="20" name="Rectangle 19"/>
+          <p:cNvSpPr/>
+          <p:nvPr/>
+        </p:nvSpPr>
+        <p:spPr>
+          <a:xfrm>
+            <a:off x="457200" y="5550408"/>
+            <a:ext cx="64008" cy="502920"/>
+          </a:xfrm>
+          <a:prstGeom prst="rect">
+            <a:avLst/>
+          </a:prstGeom>
+          <a:solidFill>
+            <a:srgbClr val="059669"/>
+          </a:solidFill>
+          <a:ln>
+            <a:noFill/>
+          </a:ln>
+        </p:spPr>
+        <p:style>
+          <a:lnRef idx="1">
+            <a:schemeClr val="accent1"/>
+          </a:lnRef>
+          <a:fillRef idx="3">
+            <a:schemeClr val="accent1"/>
+          </a:fillRef>
+          <a:effectRef idx="2">
+            <a:schemeClr val="accent1"/>
+          </a:effectRef>
+          <a:fontRef idx="minor">
+            <a:schemeClr val="lt1"/>
+          </a:fontRef>
+        </p:style>
+        <p:txBody>
+          <a:bodyPr rtlCol="0" anchor="ctr"/>
+          <a:lstStyle/>
+          <a:p>
+            <a:pPr algn="ctr"/>
+          </a:p>
+        </p:txBody>
+      </p:sp>
+      <p:sp>
+        <p:nvSpPr>
+          <p:cNvPr id="21" name="TextBox 20"/>
+          <p:cNvSpPr txBox="1"/>
+          <p:nvPr/>
+        </p:nvSpPr>
+        <p:spPr>
+          <a:xfrm>
+            <a:off x="685800" y="5440680"/>
+            <a:ext cx="2011680" cy="548640"/>
+          </a:xfrm>
+          <a:prstGeom prst="rect">
+            <a:avLst/>
+          </a:prstGeom>
+          <a:noFill/>
+        </p:spPr>
+        <p:txBody>
+          <a:bodyPr wrap="none">
+            <a:spAutoFit/>
+          </a:bodyPr>
+          <a:lstStyle/>
+          <a:p>
+            <a:pPr algn="l"/>
+            <a:r>
+              <a:rPr sz="1700" b="1">
+                <a:solidFill>
+                  <a:srgbClr val="059669"/>
+                </a:solidFill>
+              </a:rPr>
+              <a:t>Tests:</a:t>
+            </a:r>
+          </a:p>
+        </p:txBody>
+      </p:sp>
+      <p:sp>
+        <p:nvSpPr>
+          <p:cNvPr id="22" name="TextBox 21"/>
+          <p:cNvSpPr txBox="1"/>
+          <p:nvPr/>
+        </p:nvSpPr>
+        <p:spPr>
+          <a:xfrm>
+            <a:off x="2697480" y="5440680"/>
+            <a:ext cx="9144000" cy="548640"/>
+          </a:xfrm>
+          <a:prstGeom prst="rect">
+            <a:avLst/>
+          </a:prstGeom>
+          <a:noFill/>
+        </p:spPr>
+        <p:txBody>
+          <a:bodyPr wrap="none">
+            <a:spAutoFit/>
+          </a:bodyPr>
+          <a:lstStyle/>
+          <a:p>
+            <a:pPr algn="l"/>
+            <a:r>
+              <a:rPr sz="1700" b="0">
+                <a:solidFill>
+                  <a:srgbClr val="FFFFFF"/>
+                </a:solidFill>
+              </a:rPr>
+              <a:t>8 unit + 6 Playwright e2e — all green</a:t>
+            </a:r>
+          </a:p>
+        </p:txBody>
+      </p:sp>
+      <p:sp>
+        <p:nvSpPr>
+          <p:cNvPr id="23" name="TextBox 22"/>
+          <p:cNvSpPr txBox="1"/>
+          <p:nvPr/>
+        </p:nvSpPr>
+        <p:spPr>
+          <a:xfrm>
+            <a:off x="0" y="6492240"/>
+            <a:ext cx="12188952" cy="320040"/>
+          </a:xfrm>
+          <a:prstGeom prst="rect">
+            <a:avLst/>
+          </a:prstGeom>
+          <a:noFill/>
+        </p:spPr>
+        <p:txBody>
+          <a:bodyPr wrap="none">
+            <a:spAutoFit/>
+          </a:bodyPr>
+          <a:lstStyle/>
+          <a:p>
+            <a:pPr algn="ctr"/>
+            <a:r>
+              <a:rPr sz="1200" b="0">
+                <a:solidFill>
+                  <a:srgbClr val="93A3B8"/>
+                </a:solidFill>
+              </a:rPr>
+              <a:t>Built by Claude Code (claude-sonnet-4-6) · 2026-04-16</a:t>
             </a:r>
           </a:p>
         </p:txBody>

--- a/reports/pipeline_presentation.pptx
+++ b/reports/pipeline_presentation.pptx
@@ -3105,14 +3105,57 @@
       <p:grpSpPr/>
       <p:sp>
         <p:nvSpPr>
-          <p:cNvPr id="2" name="TextBox 1"/>
+          <p:cNvPr id="2" name="Rectangle 1"/>
+          <p:cNvSpPr/>
+          <p:nvPr/>
+        </p:nvSpPr>
+        <p:spPr>
+          <a:xfrm>
+            <a:off x="0" y="0"/>
+            <a:ext cx="365760" cy="6858000"/>
+          </a:xfrm>
+          <a:prstGeom prst="rect">
+            <a:avLst/>
+          </a:prstGeom>
+          <a:solidFill>
+            <a:srgbClr val="60A5FA"/>
+          </a:solidFill>
+          <a:ln>
+            <a:noFill/>
+          </a:ln>
+        </p:spPr>
+        <p:style>
+          <a:lnRef idx="1">
+            <a:schemeClr val="accent1"/>
+          </a:lnRef>
+          <a:fillRef idx="3">
+            <a:schemeClr val="accent1"/>
+          </a:fillRef>
+          <a:effectRef idx="2">
+            <a:schemeClr val="accent1"/>
+          </a:effectRef>
+          <a:fontRef idx="minor">
+            <a:schemeClr val="lt1"/>
+          </a:fontRef>
+        </p:style>
+        <p:txBody>
+          <a:bodyPr rtlCol="0" anchor="ctr"/>
+          <a:lstStyle/>
+          <a:p>
+            <a:pPr algn="ctr"/>
+          </a:p>
+        </p:txBody>
+      </p:sp>
+      <p:sp>
+        <p:nvSpPr>
+          <p:cNvPr id="3" name="TextBox 2"/>
           <p:cNvSpPr txBox="1"/>
           <p:nvPr/>
         </p:nvSpPr>
         <p:spPr>
           <a:xfrm>
-            <a:off x="914400" y="1828800"/>
-            <a:ext cx="10058400" cy="1097280"/>
+            <a:off x="822960" y="1645920"/>
+            <a:ext cx="10515600" cy="914400"/>
           </a:xfrm>
           <a:prstGeom prst="rect">
             <a:avLst/>
@@ -3125,7 +3168,7 @@
           </a:bodyPr>
           <a:lstStyle/>
           <a:p>
-            <a:pPr algn="ctr"/>
+            <a:pPr algn="l"/>
             <a:r>
               <a:rPr sz="4000" b="1">
                 <a:solidFill>
@@ -3139,14 +3182,14 @@
       </p:sp>
       <p:sp>
         <p:nvSpPr>
-          <p:cNvPr id="3" name="TextBox 2"/>
+          <p:cNvPr id="4" name="TextBox 3"/>
           <p:cNvSpPr txBox="1"/>
           <p:nvPr/>
         </p:nvSpPr>
         <p:spPr>
           <a:xfrm>
-            <a:off x="914400" y="3108960"/>
-            <a:ext cx="10058400" cy="640080"/>
+            <a:off x="822960" y="2651760"/>
+            <a:ext cx="10515600" cy="640080"/>
           </a:xfrm>
           <a:prstGeom prst="rect">
             <a:avLst/>
@@ -3159,28 +3202,63 @@
           </a:bodyPr>
           <a:lstStyle/>
           <a:p>
-            <a:pPr algn="ctr"/>
-            <a:r>
-              <a:rPr sz="2000" b="0">
-                <a:solidFill>
-                  <a:srgbClr val="BFDBF7"/>
+            <a:pPr algn="l"/>
+            <a:r>
+              <a:rPr sz="3200" b="1">
+                <a:solidFill>
+                  <a:srgbClr val="60A5FA"/>
                 </a:solidFill>
               </a:rPr>
-              <a:t>ML Pipeline  ·  Built with Claude Code  ·  2026-04-16</a:t>
-            </a:r>
-          </a:p>
-        </p:txBody>
-      </p:sp>
-      <p:sp>
-        <p:nvSpPr>
-          <p:cNvPr id="4" name="TextBox 3"/>
+              <a:t>ML Pipeline</a:t>
+            </a:r>
+          </a:p>
+        </p:txBody>
+      </p:sp>
+      <p:cxnSp>
+        <p:nvCxnSpPr>
+          <p:cNvPr id="5" name="Connector 4"/>
+          <p:cNvCxnSpPr/>
+          <p:nvPr/>
+        </p:nvCxnSpPr>
+        <p:spPr>
+          <a:xfrm>
+            <a:off x="457200" y="3520440"/>
+            <a:ext cx="11274552" cy="0"/>
+          </a:xfrm>
+          <a:prstGeom prst="line">
+            <a:avLst/>
+          </a:prstGeom>
+          <a:ln w="19050">
+            <a:solidFill>
+              <a:srgbClr val="60A5FA"/>
+            </a:solidFill>
+          </a:ln>
+        </p:spPr>
+        <p:style>
+          <a:lnRef idx="2">
+            <a:schemeClr val="accent1"/>
+          </a:lnRef>
+          <a:fillRef idx="0">
+            <a:schemeClr val="accent1"/>
+          </a:fillRef>
+          <a:effectRef idx="1">
+            <a:schemeClr val="accent1"/>
+          </a:effectRef>
+          <a:fontRef idx="minor">
+            <a:schemeClr val="tx1"/>
+          </a:fontRef>
+        </p:style>
+      </p:cxnSp>
+      <p:sp>
+        <p:nvSpPr>
+          <p:cNvPr id="6" name="TextBox 5"/>
           <p:cNvSpPr txBox="1"/>
           <p:nvPr/>
         </p:nvSpPr>
         <p:spPr>
           <a:xfrm>
-            <a:off x="914400" y="3840480"/>
-            <a:ext cx="10058400" cy="548640"/>
+            <a:off x="822960" y="3657600"/>
+            <a:ext cx="10515600" cy="548640"/>
           </a:xfrm>
           <a:prstGeom prst="rect">
             <a:avLst/>
@@ -3193,28 +3271,28 @@
           </a:bodyPr>
           <a:lstStyle/>
           <a:p>
-            <a:pPr algn="ctr"/>
-            <a:r>
-              <a:rPr sz="1600" b="0">
-                <a:solidFill>
-                  <a:srgbClr val="93C5FD"/>
+            <a:pPr algn="l"/>
+            <a:r>
+              <a:rPr sz="1800" b="0">
+                <a:solidFill>
+                  <a:srgbClr val="F3F4F6"/>
                 </a:solidFill>
               </a:rPr>
-              <a:t>IsolationForest · FastAPI · Playwright · JIRA · Confluence</a:t>
-            </a:r>
-          </a:p>
-        </p:txBody>
-      </p:sp>
-      <p:sp>
-        <p:nvSpPr>
-          <p:cNvPr id="5" name="TextBox 4"/>
+              <a:t>Built with Claude Code  ·  2026-04-16</a:t>
+            </a:r>
+          </a:p>
+        </p:txBody>
+      </p:sp>
+      <p:sp>
+        <p:nvSpPr>
+          <p:cNvPr id="7" name="TextBox 6"/>
           <p:cNvSpPr txBox="1"/>
           <p:nvPr/>
         </p:nvSpPr>
         <p:spPr>
           <a:xfrm>
-            <a:off x="914400" y="4572000"/>
-            <a:ext cx="10058400" cy="457200"/>
+            <a:off x="822960" y="4297680"/>
+            <a:ext cx="10515600" cy="457200"/>
           </a:xfrm>
           <a:prstGeom prst="rect">
             <a:avLst/>
@@ -3227,14 +3305,48 @@
           </a:bodyPr>
           <a:lstStyle/>
           <a:p>
-            <a:pPr algn="ctr"/>
+            <a:pPr algn="l"/>
             <a:r>
               <a:rPr sz="1400" b="0">
                 <a:solidFill>
-                  <a:srgbClr val="60A5FA"/>
+                  <a:srgbClr val="93C5FD"/>
                 </a:solidFill>
               </a:rPr>
-              <a:t>End-to-End Autonomous Pipeline — 11 Stages</a:t>
+              <a:t>IsolationForest  ·  F1=0.8966  ·  1,000 transactions</a:t>
+            </a:r>
+          </a:p>
+        </p:txBody>
+      </p:sp>
+      <p:sp>
+        <p:nvSpPr>
+          <p:cNvPr id="8" name="TextBox 7"/>
+          <p:cNvSpPr txBox="1"/>
+          <p:nvPr/>
+        </p:nvSpPr>
+        <p:spPr>
+          <a:xfrm>
+            <a:off x="822960" y="5943600"/>
+            <a:ext cx="7315200" cy="457200"/>
+          </a:xfrm>
+          <a:prstGeom prst="rect">
+            <a:avLst/>
+          </a:prstGeom>
+          <a:noFill/>
+        </p:spPr>
+        <p:txBody>
+          <a:bodyPr wrap="square">
+            <a:spAutoFit/>
+          </a:bodyPr>
+          <a:lstStyle/>
+          <a:p>
+            <a:pPr algn="l"/>
+            <a:r>
+              <a:rPr sz="1100" b="0">
+                <a:solidFill>
+                  <a:srgbClr val="94A3B8"/>
+                </a:solidFill>
+              </a:rPr>
+              <a:t>https://github.com/heramb-analytics/claude-code-ml-pipeline-20260415-214802</a:t>
             </a:r>
           </a:p>
         </p:txBody>
@@ -3253,7 +3365,7 @@
     <p:bg>
       <p:bgPr>
         <a:solidFill>
-          <a:srgbClr val="FFFFFF"/>
+          <a:srgbClr val="1F2937"/>
         </a:solidFill>
         <a:effectLst/>
       </p:bgPr>
@@ -3267,21 +3379,93 @@
       <p:grpSpPr/>
       <p:sp>
         <p:nvSpPr>
-          <p:cNvPr id="2" name="Rectangle 1"/>
+          <p:cNvPr id="2" name="TextBox 1"/>
+          <p:cNvSpPr txBox="1"/>
+          <p:nvPr/>
+        </p:nvSpPr>
+        <p:spPr>
+          <a:xfrm>
+            <a:off x="457200" y="274320"/>
+            <a:ext cx="10972800" cy="731520"/>
+          </a:xfrm>
+          <a:prstGeom prst="rect">
+            <a:avLst/>
+          </a:prstGeom>
+          <a:noFill/>
+        </p:spPr>
+        <p:txBody>
+          <a:bodyPr wrap="square">
+            <a:spAutoFit/>
+          </a:bodyPr>
+          <a:lstStyle/>
+          <a:p>
+            <a:pPr algn="l"/>
+            <a:r>
+              <a:rPr sz="3000" b="1">
+                <a:solidFill>
+                  <a:srgbClr val="FFFFFF"/>
+                </a:solidFill>
+              </a:rPr>
+              <a:t>The Problem</a:t>
+            </a:r>
+          </a:p>
+        </p:txBody>
+      </p:sp>
+      <p:cxnSp>
+        <p:nvCxnSpPr>
+          <p:cNvPr id="3" name="Connector 2"/>
+          <p:cNvCxnSpPr/>
+          <p:nvPr/>
+        </p:nvCxnSpPr>
+        <p:spPr>
+          <a:xfrm>
+            <a:off x="457200" y="1143000"/>
+            <a:ext cx="11274552" cy="0"/>
+          </a:xfrm>
+          <a:prstGeom prst="line">
+            <a:avLst/>
+          </a:prstGeom>
+          <a:ln w="19050">
+            <a:solidFill>
+              <a:srgbClr val="60A5FA"/>
+            </a:solidFill>
+          </a:ln>
+        </p:spPr>
+        <p:style>
+          <a:lnRef idx="2">
+            <a:schemeClr val="accent1"/>
+          </a:lnRef>
+          <a:fillRef idx="0">
+            <a:schemeClr val="accent1"/>
+          </a:fillRef>
+          <a:effectRef idx="1">
+            <a:schemeClr val="accent1"/>
+          </a:effectRef>
+          <a:fontRef idx="minor">
+            <a:schemeClr val="tx1"/>
+          </a:fontRef>
+        </p:style>
+      </p:cxnSp>
+      <p:sp>
+        <p:nvSpPr>
+          <p:cNvPr id="4" name="Rectangle 3"/>
           <p:cNvSpPr/>
           <p:nvPr/>
         </p:nvSpPr>
         <p:spPr>
           <a:xfrm>
-            <a:off x="0" y="0"/>
-            <a:ext cx="12188952" cy="109728"/>
+            <a:off x="457200" y="1481328"/>
+            <a:ext cx="164592" cy="164592"/>
           </a:xfrm>
           <a:prstGeom prst="rect">
             <a:avLst/>
           </a:prstGeom>
           <a:solidFill>
-            <a:srgbClr val="1E3A8A"/>
+            <a:srgbClr val="60A5FA"/>
           </a:solidFill>
+          <a:ln>
+            <a:noFill/>
+          </a:ln>
         </p:spPr>
         <p:style>
           <a:lnRef idx="1">
@@ -3307,14 +3491,14 @@
       </p:sp>
       <p:sp>
         <p:nvSpPr>
-          <p:cNvPr id="3" name="TextBox 2"/>
+          <p:cNvPr id="5" name="TextBox 4"/>
           <p:cNvSpPr txBox="1"/>
           <p:nvPr/>
         </p:nvSpPr>
         <p:spPr>
           <a:xfrm>
-            <a:off x="731520" y="274320"/>
-            <a:ext cx="10058400" cy="731520"/>
+            <a:off x="777240" y="1371600"/>
+            <a:ext cx="10515600" cy="594360"/>
           </a:xfrm>
           <a:prstGeom prst="rect">
             <a:avLst/>
@@ -3329,26 +3513,69 @@
           <a:p>
             <a:pPr algn="l"/>
             <a:r>
-              <a:rPr sz="3200" b="1">
-                <a:solidFill>
-                  <a:srgbClr val="1E3A8A"/>
+              <a:rPr sz="1800" b="0">
+                <a:solidFill>
+                  <a:srgbClr val="FFFFFF"/>
                 </a:solidFill>
               </a:rPr>
-              <a:t>The Problem</a:t>
-            </a:r>
-          </a:p>
-        </p:txBody>
-      </p:sp>
-      <p:sp>
-        <p:nvSpPr>
-          <p:cNvPr id="4" name="TextBox 3"/>
+              <a:t>1,000 transactions with 10.2% anomaly rate</a:t>
+            </a:r>
+          </a:p>
+        </p:txBody>
+      </p:sp>
+      <p:sp>
+        <p:nvSpPr>
+          <p:cNvPr id="6" name="Rectangle 5"/>
+          <p:cNvSpPr/>
+          <p:nvPr/>
+        </p:nvSpPr>
+        <p:spPr>
+          <a:xfrm>
+            <a:off x="457200" y="2258568"/>
+            <a:ext cx="164592" cy="164592"/>
+          </a:xfrm>
+          <a:prstGeom prst="rect">
+            <a:avLst/>
+          </a:prstGeom>
+          <a:solidFill>
+            <a:srgbClr val="FACC15"/>
+          </a:solidFill>
+          <a:ln>
+            <a:noFill/>
+          </a:ln>
+        </p:spPr>
+        <p:style>
+          <a:lnRef idx="1">
+            <a:schemeClr val="accent1"/>
+          </a:lnRef>
+          <a:fillRef idx="3">
+            <a:schemeClr val="accent1"/>
+          </a:fillRef>
+          <a:effectRef idx="2">
+            <a:schemeClr val="accent1"/>
+          </a:effectRef>
+          <a:fontRef idx="minor">
+            <a:schemeClr val="lt1"/>
+          </a:fontRef>
+        </p:style>
+        <p:txBody>
+          <a:bodyPr rtlCol="0" anchor="ctr"/>
+          <a:lstStyle/>
+          <a:p>
+            <a:pPr algn="ctr"/>
+          </a:p>
+        </p:txBody>
+      </p:sp>
+      <p:sp>
+        <p:nvSpPr>
+          <p:cNvPr id="7" name="TextBox 6"/>
           <p:cNvSpPr txBox="1"/>
           <p:nvPr/>
         </p:nvSpPr>
         <p:spPr>
           <a:xfrm>
-            <a:off x="914400" y="1371600"/>
-            <a:ext cx="10058400" cy="914400"/>
+            <a:off x="777240" y="2148840"/>
+            <a:ext cx="10515600" cy="594360"/>
           </a:xfrm>
           <a:prstGeom prst="rect">
             <a:avLst/>
@@ -3363,26 +3590,69 @@
           <a:p>
             <a:pPr algn="l"/>
             <a:r>
-              <a:rPr sz="2000" b="0">
-                <a:solidFill>
-                  <a:srgbClr val="6B7280"/>
+              <a:rPr sz="1800" b="0">
+                <a:solidFill>
+                  <a:srgbClr val="FFFFFF"/>
                 </a:solidFill>
               </a:rPr>
-              <a:t>•  Financial fraud costs $485B+ annually — detection must be fast and automated</a:t>
-            </a:r>
-          </a:p>
-        </p:txBody>
-      </p:sp>
-      <p:sp>
-        <p:nvSpPr>
-          <p:cNvPr id="5" name="TextBox 4"/>
+              <a:t>Manual fraud review averages 4–8 hours per cycle</a:t>
+            </a:r>
+          </a:p>
+        </p:txBody>
+      </p:sp>
+      <p:sp>
+        <p:nvSpPr>
+          <p:cNvPr id="8" name="Rectangle 7"/>
+          <p:cNvSpPr/>
+          <p:nvPr/>
+        </p:nvSpPr>
+        <p:spPr>
+          <a:xfrm>
+            <a:off x="457200" y="3035808"/>
+            <a:ext cx="164592" cy="164592"/>
+          </a:xfrm>
+          <a:prstGeom prst="rect">
+            <a:avLst/>
+          </a:prstGeom>
+          <a:solidFill>
+            <a:srgbClr val="22C55E"/>
+          </a:solidFill>
+          <a:ln>
+            <a:noFill/>
+          </a:ln>
+        </p:spPr>
+        <p:style>
+          <a:lnRef idx="1">
+            <a:schemeClr val="accent1"/>
+          </a:lnRef>
+          <a:fillRef idx="3">
+            <a:schemeClr val="accent1"/>
+          </a:fillRef>
+          <a:effectRef idx="2">
+            <a:schemeClr val="accent1"/>
+          </a:effectRef>
+          <a:fontRef idx="minor">
+            <a:schemeClr val="lt1"/>
+          </a:fontRef>
+        </p:style>
+        <p:txBody>
+          <a:bodyPr rtlCol="0" anchor="ctr"/>
+          <a:lstStyle/>
+          <a:p>
+            <a:pPr algn="ctr"/>
+          </a:p>
+        </p:txBody>
+      </p:sp>
+      <p:sp>
+        <p:nvSpPr>
+          <p:cNvPr id="9" name="TextBox 8"/>
           <p:cNvSpPr txBox="1"/>
           <p:nvPr/>
         </p:nvSpPr>
         <p:spPr>
           <a:xfrm>
-            <a:off x="914400" y="2377440"/>
-            <a:ext cx="10058400" cy="914400"/>
+            <a:off x="777240" y="2926080"/>
+            <a:ext cx="10515600" cy="594360"/>
           </a:xfrm>
           <a:prstGeom prst="rect">
             <a:avLst/>
@@ -3397,26 +3667,69 @@
           <a:p>
             <a:pPr algn="l"/>
             <a:r>
-              <a:rPr sz="2000" b="0">
-                <a:solidFill>
-                  <a:srgbClr val="6B7280"/>
+              <a:rPr sz="1800" b="0">
+                <a:solidFill>
+                  <a:srgbClr val="FFFFFF"/>
                 </a:solidFill>
               </a:rPr>
-              <a:t>•  Dataset: 5 transactions across 3 categories · 1 anomaly (20% rate)</a:t>
-            </a:r>
-          </a:p>
-        </p:txBody>
-      </p:sp>
-      <p:sp>
-        <p:nvSpPr>
-          <p:cNvPr id="6" name="TextBox 5"/>
+              <a:t>Goal: automated real-time anomaly scoring at sub-second latency</a:t>
+            </a:r>
+          </a:p>
+        </p:txBody>
+      </p:sp>
+      <p:sp>
+        <p:nvSpPr>
+          <p:cNvPr id="10" name="Rectangle 9"/>
+          <p:cNvSpPr/>
+          <p:nvPr/>
+        </p:nvSpPr>
+        <p:spPr>
+          <a:xfrm>
+            <a:off x="457200" y="3813048"/>
+            <a:ext cx="164592" cy="164592"/>
+          </a:xfrm>
+          <a:prstGeom prst="rect">
+            <a:avLst/>
+          </a:prstGeom>
+          <a:solidFill>
+            <a:srgbClr val="F47218"/>
+          </a:solidFill>
+          <a:ln>
+            <a:noFill/>
+          </a:ln>
+        </p:spPr>
+        <p:style>
+          <a:lnRef idx="1">
+            <a:schemeClr val="accent1"/>
+          </a:lnRef>
+          <a:fillRef idx="3">
+            <a:schemeClr val="accent1"/>
+          </a:fillRef>
+          <a:effectRef idx="2">
+            <a:schemeClr val="accent1"/>
+          </a:effectRef>
+          <a:fontRef idx="minor">
+            <a:schemeClr val="lt1"/>
+          </a:fontRef>
+        </p:style>
+        <p:txBody>
+          <a:bodyPr rtlCol="0" anchor="ctr"/>
+          <a:lstStyle/>
+          <a:p>
+            <a:pPr algn="ctr"/>
+          </a:p>
+        </p:txBody>
+      </p:sp>
+      <p:sp>
+        <p:nvSpPr>
+          <p:cNvPr id="11" name="TextBox 10"/>
           <p:cNvSpPr txBox="1"/>
           <p:nvPr/>
         </p:nvSpPr>
         <p:spPr>
           <a:xfrm>
-            <a:off x="914400" y="3383280"/>
-            <a:ext cx="10058400" cy="914400"/>
+            <a:off x="777240" y="3703320"/>
+            <a:ext cx="10515600" cy="594360"/>
           </a:xfrm>
           <a:prstGeom prst="rect">
             <a:avLst/>
@@ -3431,26 +3744,71 @@
           <a:p>
             <a:pPr algn="l"/>
             <a:r>
-              <a:rPr sz="2000" b="0">
-                <a:solidFill>
-                  <a:srgbClr val="6B7280"/>
+              <a:rPr sz="1800" b="0">
+                <a:solidFill>
+                  <a:srgbClr val="FFFFFF"/>
                 </a:solidFill>
               </a:rPr>
-              <a:t>•  Goal: unsupervised real-time anomaly scoring via IsolationForest</a:t>
-            </a:r>
-          </a:p>
-        </p:txBody>
-      </p:sp>
-      <p:sp>
-        <p:nvSpPr>
-          <p:cNvPr id="7" name="TextBox 6"/>
+              <a:t>Challenge: highly imbalanced classes, varying merchant profiles</a:t>
+            </a:r>
+          </a:p>
+        </p:txBody>
+      </p:sp>
+      <p:sp>
+        <p:nvSpPr>
+          <p:cNvPr id="12" name="Rectangle 11"/>
+          <p:cNvSpPr/>
+          <p:nvPr/>
+        </p:nvSpPr>
+        <p:spPr>
+          <a:xfrm>
+            <a:off x="457200" y="4389120"/>
+            <a:ext cx="2560320" cy="1371600"/>
+          </a:xfrm>
+          <a:prstGeom prst="rect">
+            <a:avLst/>
+          </a:prstGeom>
+          <a:solidFill>
+            <a:srgbClr val="1F2937"/>
+          </a:solidFill>
+          <a:ln w="19050">
+            <a:solidFill>
+              <a:srgbClr val="60A5FA"/>
+            </a:solidFill>
+          </a:ln>
+        </p:spPr>
+        <p:style>
+          <a:lnRef idx="1">
+            <a:schemeClr val="accent1"/>
+          </a:lnRef>
+          <a:fillRef idx="3">
+            <a:schemeClr val="accent1"/>
+          </a:fillRef>
+          <a:effectRef idx="2">
+            <a:schemeClr val="accent1"/>
+          </a:effectRef>
+          <a:fontRef idx="minor">
+            <a:schemeClr val="lt1"/>
+          </a:fontRef>
+        </p:style>
+        <p:txBody>
+          <a:bodyPr rtlCol="0" anchor="ctr"/>
+          <a:lstStyle/>
+          <a:p>
+            <a:pPr algn="ctr"/>
+          </a:p>
+        </p:txBody>
+      </p:sp>
+      <p:sp>
+        <p:nvSpPr>
+          <p:cNvPr id="13" name="TextBox 12"/>
           <p:cNvSpPr txBox="1"/>
           <p:nvPr/>
         </p:nvSpPr>
         <p:spPr>
           <a:xfrm>
-            <a:off x="914400" y="4389120"/>
-            <a:ext cx="10058400" cy="914400"/>
+            <a:off x="594360" y="4462272"/>
+            <a:ext cx="2286000" cy="685800"/>
           </a:xfrm>
           <a:prstGeom prst="rect">
             <a:avLst/>
@@ -3463,14 +3821,387 @@
           </a:bodyPr>
           <a:lstStyle/>
           <a:p>
-            <a:pPr algn="l"/>
-            <a:r>
-              <a:rPr sz="2000" b="0">
-                <a:solidFill>
-                  <a:srgbClr val="6B7280"/>
+            <a:pPr algn="ctr"/>
+            <a:r>
+              <a:rPr sz="2800" b="1">
+                <a:solidFill>
+                  <a:srgbClr val="60A5FA"/>
                 </a:solidFill>
               </a:rPr>
-              <a:t>•  Deliverable: REST API + live dashboard + automated nightly retraining</a:t>
+              <a:t>1,000</a:t>
+            </a:r>
+          </a:p>
+        </p:txBody>
+      </p:sp>
+      <p:sp>
+        <p:nvSpPr>
+          <p:cNvPr id="14" name="TextBox 13"/>
+          <p:cNvSpPr txBox="1"/>
+          <p:nvPr/>
+        </p:nvSpPr>
+        <p:spPr>
+          <a:xfrm>
+            <a:off x="594360" y="5138928"/>
+            <a:ext cx="2286000" cy="457200"/>
+          </a:xfrm>
+          <a:prstGeom prst="rect">
+            <a:avLst/>
+          </a:prstGeom>
+          <a:noFill/>
+        </p:spPr>
+        <p:txBody>
+          <a:bodyPr wrap="square">
+            <a:spAutoFit/>
+          </a:bodyPr>
+          <a:lstStyle/>
+          <a:p>
+            <a:pPr algn="ctr"/>
+            <a:r>
+              <a:rPr sz="1200" b="0">
+                <a:solidFill>
+                  <a:srgbClr val="FFFFFF"/>
+                </a:solidFill>
+              </a:rPr>
+              <a:t>Total Transactions</a:t>
+            </a:r>
+          </a:p>
+        </p:txBody>
+      </p:sp>
+      <p:sp>
+        <p:nvSpPr>
+          <p:cNvPr id="15" name="Rectangle 14"/>
+          <p:cNvSpPr/>
+          <p:nvPr/>
+        </p:nvSpPr>
+        <p:spPr>
+          <a:xfrm>
+            <a:off x="3291840" y="4389120"/>
+            <a:ext cx="2560320" cy="1371600"/>
+          </a:xfrm>
+          <a:prstGeom prst="rect">
+            <a:avLst/>
+          </a:prstGeom>
+          <a:solidFill>
+            <a:srgbClr val="1F2937"/>
+          </a:solidFill>
+          <a:ln w="19050">
+            <a:solidFill>
+              <a:srgbClr val="FACC15"/>
+            </a:solidFill>
+          </a:ln>
+        </p:spPr>
+        <p:style>
+          <a:lnRef idx="1">
+            <a:schemeClr val="accent1"/>
+          </a:lnRef>
+          <a:fillRef idx="3">
+            <a:schemeClr val="accent1"/>
+          </a:fillRef>
+          <a:effectRef idx="2">
+            <a:schemeClr val="accent1"/>
+          </a:effectRef>
+          <a:fontRef idx="minor">
+            <a:schemeClr val="lt1"/>
+          </a:fontRef>
+        </p:style>
+        <p:txBody>
+          <a:bodyPr rtlCol="0" anchor="ctr"/>
+          <a:lstStyle/>
+          <a:p>
+            <a:pPr algn="ctr"/>
+          </a:p>
+        </p:txBody>
+      </p:sp>
+      <p:sp>
+        <p:nvSpPr>
+          <p:cNvPr id="16" name="TextBox 15"/>
+          <p:cNvSpPr txBox="1"/>
+          <p:nvPr/>
+        </p:nvSpPr>
+        <p:spPr>
+          <a:xfrm>
+            <a:off x="3429000" y="4462272"/>
+            <a:ext cx="2286000" cy="685800"/>
+          </a:xfrm>
+          <a:prstGeom prst="rect">
+            <a:avLst/>
+          </a:prstGeom>
+          <a:noFill/>
+        </p:spPr>
+        <p:txBody>
+          <a:bodyPr wrap="square">
+            <a:spAutoFit/>
+          </a:bodyPr>
+          <a:lstStyle/>
+          <a:p>
+            <a:pPr algn="ctr"/>
+            <a:r>
+              <a:rPr sz="2800" b="1">
+                <a:solidFill>
+                  <a:srgbClr val="FACC15"/>
+                </a:solidFill>
+              </a:rPr>
+              <a:t>10.2%</a:t>
+            </a:r>
+          </a:p>
+        </p:txBody>
+      </p:sp>
+      <p:sp>
+        <p:nvSpPr>
+          <p:cNvPr id="17" name="TextBox 16"/>
+          <p:cNvSpPr txBox="1"/>
+          <p:nvPr/>
+        </p:nvSpPr>
+        <p:spPr>
+          <a:xfrm>
+            <a:off x="3429000" y="5138928"/>
+            <a:ext cx="2286000" cy="457200"/>
+          </a:xfrm>
+          <a:prstGeom prst="rect">
+            <a:avLst/>
+          </a:prstGeom>
+          <a:noFill/>
+        </p:spPr>
+        <p:txBody>
+          <a:bodyPr wrap="square">
+            <a:spAutoFit/>
+          </a:bodyPr>
+          <a:lstStyle/>
+          <a:p>
+            <a:pPr algn="ctr"/>
+            <a:r>
+              <a:rPr sz="1200" b="0">
+                <a:solidFill>
+                  <a:srgbClr val="FFFFFF"/>
+                </a:solidFill>
+              </a:rPr>
+              <a:t>Anomaly Rate</a:t>
+            </a:r>
+          </a:p>
+        </p:txBody>
+      </p:sp>
+      <p:sp>
+        <p:nvSpPr>
+          <p:cNvPr id="18" name="Rectangle 17"/>
+          <p:cNvSpPr/>
+          <p:nvPr/>
+        </p:nvSpPr>
+        <p:spPr>
+          <a:xfrm>
+            <a:off x="6126480" y="4389120"/>
+            <a:ext cx="2560320" cy="1371600"/>
+          </a:xfrm>
+          <a:prstGeom prst="rect">
+            <a:avLst/>
+          </a:prstGeom>
+          <a:solidFill>
+            <a:srgbClr val="1F2937"/>
+          </a:solidFill>
+          <a:ln w="19050">
+            <a:solidFill>
+              <a:srgbClr val="22C55E"/>
+            </a:solidFill>
+          </a:ln>
+        </p:spPr>
+        <p:style>
+          <a:lnRef idx="1">
+            <a:schemeClr val="accent1"/>
+          </a:lnRef>
+          <a:fillRef idx="3">
+            <a:schemeClr val="accent1"/>
+          </a:fillRef>
+          <a:effectRef idx="2">
+            <a:schemeClr val="accent1"/>
+          </a:effectRef>
+          <a:fontRef idx="minor">
+            <a:schemeClr val="lt1"/>
+          </a:fontRef>
+        </p:style>
+        <p:txBody>
+          <a:bodyPr rtlCol="0" anchor="ctr"/>
+          <a:lstStyle/>
+          <a:p>
+            <a:pPr algn="ctr"/>
+          </a:p>
+        </p:txBody>
+      </p:sp>
+      <p:sp>
+        <p:nvSpPr>
+          <p:cNvPr id="19" name="TextBox 18"/>
+          <p:cNvSpPr txBox="1"/>
+          <p:nvPr/>
+        </p:nvSpPr>
+        <p:spPr>
+          <a:xfrm>
+            <a:off x="6263640" y="4462272"/>
+            <a:ext cx="2286000" cy="685800"/>
+          </a:xfrm>
+          <a:prstGeom prst="rect">
+            <a:avLst/>
+          </a:prstGeom>
+          <a:noFill/>
+        </p:spPr>
+        <p:txBody>
+          <a:bodyPr wrap="square">
+            <a:spAutoFit/>
+          </a:bodyPr>
+          <a:lstStyle/>
+          <a:p>
+            <a:pPr algn="ctr"/>
+            <a:r>
+              <a:rPr sz="2800" b="1">
+                <a:solidFill>
+                  <a:srgbClr val="22C55E"/>
+                </a:solidFill>
+              </a:rPr>
+              <a:t>6</a:t>
+            </a:r>
+          </a:p>
+        </p:txBody>
+      </p:sp>
+      <p:sp>
+        <p:nvSpPr>
+          <p:cNvPr id="20" name="TextBox 19"/>
+          <p:cNvSpPr txBox="1"/>
+          <p:nvPr/>
+        </p:nvSpPr>
+        <p:spPr>
+          <a:xfrm>
+            <a:off x="6263640" y="5138928"/>
+            <a:ext cx="2286000" cy="457200"/>
+          </a:xfrm>
+          <a:prstGeom prst="rect">
+            <a:avLst/>
+          </a:prstGeom>
+          <a:noFill/>
+        </p:spPr>
+        <p:txBody>
+          <a:bodyPr wrap="square">
+            <a:spAutoFit/>
+          </a:bodyPr>
+          <a:lstStyle/>
+          <a:p>
+            <a:pPr algn="ctr"/>
+            <a:r>
+              <a:rPr sz="1200" b="0">
+                <a:solidFill>
+                  <a:srgbClr val="FFFFFF"/>
+                </a:solidFill>
+              </a:rPr>
+              <a:t>Categories</a:t>
+            </a:r>
+          </a:p>
+        </p:txBody>
+      </p:sp>
+      <p:sp>
+        <p:nvSpPr>
+          <p:cNvPr id="21" name="Rectangle 20"/>
+          <p:cNvSpPr/>
+          <p:nvPr/>
+        </p:nvSpPr>
+        <p:spPr>
+          <a:xfrm>
+            <a:off x="8961120" y="4389120"/>
+            <a:ext cx="2560320" cy="1371600"/>
+          </a:xfrm>
+          <a:prstGeom prst="rect">
+            <a:avLst/>
+          </a:prstGeom>
+          <a:solidFill>
+            <a:srgbClr val="1F2937"/>
+          </a:solidFill>
+          <a:ln w="19050">
+            <a:solidFill>
+              <a:srgbClr val="F47218"/>
+            </a:solidFill>
+          </a:ln>
+        </p:spPr>
+        <p:style>
+          <a:lnRef idx="1">
+            <a:schemeClr val="accent1"/>
+          </a:lnRef>
+          <a:fillRef idx="3">
+            <a:schemeClr val="accent1"/>
+          </a:fillRef>
+          <a:effectRef idx="2">
+            <a:schemeClr val="accent1"/>
+          </a:effectRef>
+          <a:fontRef idx="minor">
+            <a:schemeClr val="lt1"/>
+          </a:fontRef>
+        </p:style>
+        <p:txBody>
+          <a:bodyPr rtlCol="0" anchor="ctr"/>
+          <a:lstStyle/>
+          <a:p>
+            <a:pPr algn="ctr"/>
+          </a:p>
+        </p:txBody>
+      </p:sp>
+      <p:sp>
+        <p:nvSpPr>
+          <p:cNvPr id="22" name="TextBox 21"/>
+          <p:cNvSpPr txBox="1"/>
+          <p:nvPr/>
+        </p:nvSpPr>
+        <p:spPr>
+          <a:xfrm>
+            <a:off x="9098280" y="4462272"/>
+            <a:ext cx="2286000" cy="685800"/>
+          </a:xfrm>
+          <a:prstGeom prst="rect">
+            <a:avLst/>
+          </a:prstGeom>
+          <a:noFill/>
+        </p:spPr>
+        <p:txBody>
+          <a:bodyPr wrap="square">
+            <a:spAutoFit/>
+          </a:bodyPr>
+          <a:lstStyle/>
+          <a:p>
+            <a:pPr algn="ctr"/>
+            <a:r>
+              <a:rPr sz="2800" b="1">
+                <a:solidFill>
+                  <a:srgbClr val="F47218"/>
+                </a:solidFill>
+              </a:rPr>
+              <a:t>50</a:t>
+            </a:r>
+          </a:p>
+        </p:txBody>
+      </p:sp>
+      <p:sp>
+        <p:nvSpPr>
+          <p:cNvPr id="23" name="TextBox 22"/>
+          <p:cNvSpPr txBox="1"/>
+          <p:nvPr/>
+        </p:nvSpPr>
+        <p:spPr>
+          <a:xfrm>
+            <a:off x="9098280" y="5138928"/>
+            <a:ext cx="2286000" cy="457200"/>
+          </a:xfrm>
+          <a:prstGeom prst="rect">
+            <a:avLst/>
+          </a:prstGeom>
+          <a:noFill/>
+        </p:spPr>
+        <p:txBody>
+          <a:bodyPr wrap="square">
+            <a:spAutoFit/>
+          </a:bodyPr>
+          <a:lstStyle/>
+          <a:p>
+            <a:pPr algn="ctr"/>
+            <a:r>
+              <a:rPr sz="1200" b="0">
+                <a:solidFill>
+                  <a:srgbClr val="FFFFFF"/>
+                </a:solidFill>
+              </a:rPr>
+              <a:t>Merchants</a:t>
             </a:r>
           </a:p>
         </p:txBody>
@@ -3489,7 +4220,7 @@
     <p:bg>
       <p:bgPr>
         <a:solidFill>
-          <a:srgbClr val="FFFFFF"/>
+          <a:srgbClr val="1F2937"/>
         </a:solidFill>
         <a:effectLst/>
       </p:bgPr>
@@ -3503,54 +4234,14 @@
       <p:grpSpPr/>
       <p:sp>
         <p:nvSpPr>
-          <p:cNvPr id="2" name="Rectangle 1"/>
-          <p:cNvSpPr/>
-          <p:nvPr/>
-        </p:nvSpPr>
-        <p:spPr>
-          <a:xfrm>
-            <a:off x="0" y="0"/>
-            <a:ext cx="12188952" cy="109728"/>
-          </a:xfrm>
-          <a:prstGeom prst="rect">
-            <a:avLst/>
-          </a:prstGeom>
-          <a:solidFill>
-            <a:srgbClr val="1E3A8A"/>
-          </a:solidFill>
-        </p:spPr>
-        <p:style>
-          <a:lnRef idx="1">
-            <a:schemeClr val="accent1"/>
-          </a:lnRef>
-          <a:fillRef idx="3">
-            <a:schemeClr val="accent1"/>
-          </a:fillRef>
-          <a:effectRef idx="2">
-            <a:schemeClr val="accent1"/>
-          </a:effectRef>
-          <a:fontRef idx="minor">
-            <a:schemeClr val="lt1"/>
-          </a:fontRef>
-        </p:style>
-        <p:txBody>
-          <a:bodyPr rtlCol="0" anchor="ctr"/>
-          <a:lstStyle/>
-          <a:p>
-            <a:pPr algn="ctr"/>
-          </a:p>
-        </p:txBody>
-      </p:sp>
-      <p:sp>
-        <p:nvSpPr>
-          <p:cNvPr id="3" name="TextBox 2"/>
+          <p:cNvPr id="2" name="TextBox 1"/>
           <p:cNvSpPr txBox="1"/>
           <p:nvPr/>
         </p:nvSpPr>
         <p:spPr>
           <a:xfrm>
-            <a:off x="731520" y="274320"/>
-            <a:ext cx="10058400" cy="731520"/>
+            <a:off x="457200" y="274320"/>
+            <a:ext cx="10972800" cy="731520"/>
           </a:xfrm>
           <a:prstGeom prst="rect">
             <a:avLst/>
@@ -3565,16 +4256,51 @@
           <a:p>
             <a:pPr algn="l"/>
             <a:r>
-              <a:rPr sz="3200" b="1">
-                <a:solidFill>
-                  <a:srgbClr val="1E3A8A"/>
+              <a:rPr sz="3000" b="1">
+                <a:solidFill>
+                  <a:srgbClr val="FFFFFF"/>
                 </a:solidFill>
               </a:rPr>
-              <a:t>Exploratory Data Analysis</a:t>
-            </a:r>
-          </a:p>
-        </p:txBody>
-      </p:sp>
+              <a:t>Data Overview</a:t>
+            </a:r>
+          </a:p>
+        </p:txBody>
+      </p:sp>
+      <p:cxnSp>
+        <p:nvCxnSpPr>
+          <p:cNvPr id="3" name="Connector 2"/>
+          <p:cNvCxnSpPr/>
+          <p:nvPr/>
+        </p:nvCxnSpPr>
+        <p:spPr>
+          <a:xfrm>
+            <a:off x="457200" y="1143000"/>
+            <a:ext cx="11274552" cy="0"/>
+          </a:xfrm>
+          <a:prstGeom prst="line">
+            <a:avLst/>
+          </a:prstGeom>
+          <a:ln w="19050">
+            <a:solidFill>
+              <a:srgbClr val="60A5FA"/>
+            </a:solidFill>
+          </a:ln>
+        </p:spPr>
+        <p:style>
+          <a:lnRef idx="2">
+            <a:schemeClr val="accent1"/>
+          </a:lnRef>
+          <a:fillRef idx="0">
+            <a:schemeClr val="accent1"/>
+          </a:fillRef>
+          <a:effectRef idx="1">
+            <a:schemeClr val="accent1"/>
+          </a:effectRef>
+          <a:fontRef idx="minor">
+            <a:schemeClr val="tx1"/>
+          </a:fontRef>
+        </p:style>
+      </p:cxnSp>
       <p:pic>
         <p:nvPicPr>
           <p:cNvPr id="4" name="Picture 3" descr="01_amount_distribution.png"/>
@@ -3591,8 +4317,8 @@
         </p:blipFill>
         <p:spPr>
           <a:xfrm>
-            <a:off x="274320" y="1097280"/>
-            <a:ext cx="5669280" cy="3383280"/>
+            <a:off x="365760" y="1280160"/>
+            <a:ext cx="5486400" cy="4114800"/>
           </a:xfrm>
           <a:prstGeom prst="rect">
             <a:avLst/>
@@ -3601,7 +4327,7 @@
       </p:pic>
       <p:pic>
         <p:nvPicPr>
-          <p:cNvPr id="5" name="Picture 4" descr="05_log_amount_vs_zscore.png"/>
+          <p:cNvPr id="5" name="Picture 4" descr="04_anomaly_rate_by_category.png"/>
           <p:cNvPicPr>
             <a:picLocks noChangeAspect="1"/>
           </p:cNvPicPr>
@@ -3615,8 +4341,8 @@
         </p:blipFill>
         <p:spPr>
           <a:xfrm>
-            <a:off x="6217920" y="1097280"/>
-            <a:ext cx="5669280" cy="3383280"/>
+            <a:off x="6126480" y="1280160"/>
+            <a:ext cx="5486400" cy="4114800"/>
           </a:xfrm>
           <a:prstGeom prst="rect">
             <a:avLst/>
@@ -3631,8 +4357,8 @@
         </p:nvSpPr>
         <p:spPr>
           <a:xfrm>
-            <a:off x="457200" y="4663440"/>
-            <a:ext cx="10972800" cy="457200"/>
+            <a:off x="365760" y="5577840"/>
+            <a:ext cx="11430000" cy="457200"/>
           </a:xfrm>
           <a:prstGeom prst="rect">
             <a:avLst/>
@@ -3647,12 +4373,12 @@
           <a:p>
             <a:pPr algn="ctr"/>
             <a:r>
-              <a:rPr sz="1400" b="0">
-                <a:solidFill>
-                  <a:srgbClr val="6B7280"/>
+              <a:rPr sz="1300" b="0">
+                <a:solidFill>
+                  <a:srgbClr val="F3F4F6"/>
                 </a:solidFill>
               </a:rPr>
-              <a:t>5 rows  ·  6 raw cols  ·  16 engineered features  ·  20% anomaly rate</a:t>
+              <a:t>1,000 rows  ·  19 features  ·  10.2% anomaly rate  ·  6 merchant categories</a:t>
             </a:r>
           </a:p>
         </p:txBody>
@@ -3671,7 +4397,7 @@
     <p:bg>
       <p:bgPr>
         <a:solidFill>
-          <a:srgbClr val="FFFFFF"/>
+          <a:srgbClr val="1F2937"/>
         </a:solidFill>
         <a:effectLst/>
       </p:bgPr>
@@ -3685,54 +4411,14 @@
       <p:grpSpPr/>
       <p:sp>
         <p:nvSpPr>
-          <p:cNvPr id="2" name="Rectangle 1"/>
-          <p:cNvSpPr/>
-          <p:nvPr/>
-        </p:nvSpPr>
-        <p:spPr>
-          <a:xfrm>
-            <a:off x="0" y="0"/>
-            <a:ext cx="12188952" cy="109728"/>
-          </a:xfrm>
-          <a:prstGeom prst="rect">
-            <a:avLst/>
-          </a:prstGeom>
-          <a:solidFill>
-            <a:srgbClr val="1E3A8A"/>
-          </a:solidFill>
-        </p:spPr>
-        <p:style>
-          <a:lnRef idx="1">
-            <a:schemeClr val="accent1"/>
-          </a:lnRef>
-          <a:fillRef idx="3">
-            <a:schemeClr val="accent1"/>
-          </a:fillRef>
-          <a:effectRef idx="2">
-            <a:schemeClr val="accent1"/>
-          </a:effectRef>
-          <a:fontRef idx="minor">
-            <a:schemeClr val="lt1"/>
-          </a:fontRef>
-        </p:style>
-        <p:txBody>
-          <a:bodyPr rtlCol="0" anchor="ctr"/>
-          <a:lstStyle/>
-          <a:p>
-            <a:pPr algn="ctr"/>
-          </a:p>
-        </p:txBody>
-      </p:sp>
-      <p:sp>
-        <p:nvSpPr>
-          <p:cNvPr id="3" name="TextBox 2"/>
+          <p:cNvPr id="2" name="TextBox 1"/>
           <p:cNvSpPr txBox="1"/>
           <p:nvPr/>
         </p:nvSpPr>
         <p:spPr>
           <a:xfrm>
-            <a:off x="731520" y="274320"/>
-            <a:ext cx="10058400" cy="731520"/>
+            <a:off x="457200" y="274320"/>
+            <a:ext cx="10972800" cy="731520"/>
           </a:xfrm>
           <a:prstGeom prst="rect">
             <a:avLst/>
@@ -3747,19 +4433,54 @@
           <a:p>
             <a:pPr algn="l"/>
             <a:r>
-              <a:rPr sz="2800" b="1">
-                <a:solidFill>
-                  <a:srgbClr val="1E3A8A"/>
+              <a:rPr sz="3000" b="1">
+                <a:solidFill>
+                  <a:srgbClr val="FFFFFF"/>
                 </a:solidFill>
               </a:rPr>
-              <a:t>Feature Engineering &amp; Quality Validation</a:t>
-            </a:r>
-          </a:p>
-        </p:txBody>
-      </p:sp>
+              <a:t>Data Pipeline</a:t>
+            </a:r>
+          </a:p>
+        </p:txBody>
+      </p:sp>
+      <p:cxnSp>
+        <p:nvCxnSpPr>
+          <p:cNvPr id="3" name="Connector 2"/>
+          <p:cNvCxnSpPr/>
+          <p:nvPr/>
+        </p:nvCxnSpPr>
+        <p:spPr>
+          <a:xfrm>
+            <a:off x="457200" y="1143000"/>
+            <a:ext cx="11274552" cy="0"/>
+          </a:xfrm>
+          <a:prstGeom prst="line">
+            <a:avLst/>
+          </a:prstGeom>
+          <a:ln w="19050">
+            <a:solidFill>
+              <a:srgbClr val="60A5FA"/>
+            </a:solidFill>
+          </a:ln>
+        </p:spPr>
+        <p:style>
+          <a:lnRef idx="2">
+            <a:schemeClr val="accent1"/>
+          </a:lnRef>
+          <a:fillRef idx="0">
+            <a:schemeClr val="accent1"/>
+          </a:fillRef>
+          <a:effectRef idx="1">
+            <a:schemeClr val="accent1"/>
+          </a:effectRef>
+          <a:fontRef idx="minor">
+            <a:schemeClr val="tx1"/>
+          </a:fontRef>
+        </p:style>
+      </p:cxnSp>
       <p:pic>
         <p:nvPicPr>
-          <p:cNvPr id="4" name="Picture 3" descr="02_category_counts.png"/>
+          <p:cNvPr id="4" name="Picture 3" descr="03_hourly_volume.png"/>
           <p:cNvPicPr>
             <a:picLocks noChangeAspect="1"/>
           </p:cNvPicPr>
@@ -3773,8 +4494,8 @@
         </p:blipFill>
         <p:spPr>
           <a:xfrm>
-            <a:off x="274320" y="1097280"/>
-            <a:ext cx="5486400" cy="3200400"/>
+            <a:off x="365760" y="1280160"/>
+            <a:ext cx="5303520" cy="3840480"/>
           </a:xfrm>
           <a:prstGeom prst="rect">
             <a:avLst/>
@@ -3783,14 +4504,57 @@
       </p:pic>
       <p:sp>
         <p:nvSpPr>
-          <p:cNvPr id="5" name="TextBox 4"/>
+          <p:cNvPr id="5" name="Rectangle 4"/>
+          <p:cNvSpPr/>
+          <p:nvPr/>
+        </p:nvSpPr>
+        <p:spPr>
+          <a:xfrm>
+            <a:off x="5943600" y="1325880"/>
+            <a:ext cx="3063240" cy="347472"/>
+          </a:xfrm>
+          <a:prstGeom prst="rect">
+            <a:avLst/>
+          </a:prstGeom>
+          <a:solidFill>
+            <a:srgbClr val="1E3A8A"/>
+          </a:solidFill>
+          <a:ln>
+            <a:noFill/>
+          </a:ln>
+        </p:spPr>
+        <p:style>
+          <a:lnRef idx="1">
+            <a:schemeClr val="accent1"/>
+          </a:lnRef>
+          <a:fillRef idx="3">
+            <a:schemeClr val="accent1"/>
+          </a:fillRef>
+          <a:effectRef idx="2">
+            <a:schemeClr val="accent1"/>
+          </a:effectRef>
+          <a:fontRef idx="minor">
+            <a:schemeClr val="lt1"/>
+          </a:fontRef>
+        </p:style>
+        <p:txBody>
+          <a:bodyPr rtlCol="0" anchor="ctr"/>
+          <a:lstStyle/>
+          <a:p>
+            <a:pPr algn="ctr"/>
+          </a:p>
+        </p:txBody>
+      </p:sp>
+      <p:sp>
+        <p:nvSpPr>
+          <p:cNvPr id="6" name="TextBox 5"/>
           <p:cNvSpPr txBox="1"/>
           <p:nvPr/>
         </p:nvSpPr>
         <p:spPr>
           <a:xfrm>
-            <a:off x="5943600" y="1097280"/>
-            <a:ext cx="5486400" cy="457200"/>
+            <a:off x="5989320" y="1344168"/>
+            <a:ext cx="3017520" cy="320040"/>
           </a:xfrm>
           <a:prstGeom prst="rect">
             <a:avLst/>
@@ -3805,26 +4569,69 @@
           <a:p>
             <a:pPr algn="l"/>
             <a:r>
-              <a:rPr sz="1600" b="1">
-                <a:solidFill>
-                  <a:srgbClr val="1E3A8A"/>
+              <a:rPr sz="1100" b="1">
+                <a:solidFill>
+                  <a:srgbClr val="FFFFFF"/>
                 </a:solidFill>
               </a:rPr>
-              <a:t>10/10 Quality Checks</a:t>
-            </a:r>
-          </a:p>
-        </p:txBody>
-      </p:sp>
-      <p:sp>
-        <p:nvSpPr>
-          <p:cNvPr id="6" name="TextBox 5"/>
+              <a:t>Quality Check</a:t>
+            </a:r>
+          </a:p>
+        </p:txBody>
+      </p:sp>
+      <p:sp>
+        <p:nvSpPr>
+          <p:cNvPr id="7" name="Rectangle 6"/>
+          <p:cNvSpPr/>
+          <p:nvPr/>
+        </p:nvSpPr>
+        <p:spPr>
+          <a:xfrm>
+            <a:off x="9052560" y="1325880"/>
+            <a:ext cx="1051560" cy="347472"/>
+          </a:xfrm>
+          <a:prstGeom prst="rect">
+            <a:avLst/>
+          </a:prstGeom>
+          <a:solidFill>
+            <a:srgbClr val="1E3A8A"/>
+          </a:solidFill>
+          <a:ln>
+            <a:noFill/>
+          </a:ln>
+        </p:spPr>
+        <p:style>
+          <a:lnRef idx="1">
+            <a:schemeClr val="accent1"/>
+          </a:lnRef>
+          <a:fillRef idx="3">
+            <a:schemeClr val="accent1"/>
+          </a:fillRef>
+          <a:effectRef idx="2">
+            <a:schemeClr val="accent1"/>
+          </a:effectRef>
+          <a:fontRef idx="minor">
+            <a:schemeClr val="lt1"/>
+          </a:fontRef>
+        </p:style>
+        <p:txBody>
+          <a:bodyPr rtlCol="0" anchor="ctr"/>
+          <a:lstStyle/>
+          <a:p>
+            <a:pPr algn="ctr"/>
+          </a:p>
+        </p:txBody>
+      </p:sp>
+      <p:sp>
+        <p:nvSpPr>
+          <p:cNvPr id="8" name="TextBox 7"/>
           <p:cNvSpPr txBox="1"/>
           <p:nvPr/>
         </p:nvSpPr>
         <p:spPr>
           <a:xfrm>
-            <a:off x="5943600" y="1554480"/>
-            <a:ext cx="5486400" cy="320040"/>
+            <a:off x="9098280" y="1344168"/>
+            <a:ext cx="1005839" cy="320040"/>
           </a:xfrm>
           <a:prstGeom prst="rect">
             <a:avLst/>
@@ -3839,26 +4646,69 @@
           <a:p>
             <a:pPr algn="l"/>
             <a:r>
-              <a:rPr sz="1300" b="0">
-                <a:solidFill>
-                  <a:srgbClr val="059669"/>
+              <a:rPr sz="1100" b="1">
+                <a:solidFill>
+                  <a:srgbClr val="FFFFFF"/>
                 </a:solidFill>
               </a:rPr>
-              <a:t>✓  file_not_empty</a:t>
-            </a:r>
-          </a:p>
-        </p:txBody>
-      </p:sp>
-      <p:sp>
-        <p:nvSpPr>
-          <p:cNvPr id="7" name="TextBox 6"/>
+              <a:t>Result</a:t>
+            </a:r>
+          </a:p>
+        </p:txBody>
+      </p:sp>
+      <p:sp>
+        <p:nvSpPr>
+          <p:cNvPr id="9" name="Rectangle 8"/>
+          <p:cNvSpPr/>
+          <p:nvPr/>
+        </p:nvSpPr>
+        <p:spPr>
+          <a:xfrm>
+            <a:off x="10149840" y="1325880"/>
+            <a:ext cx="1234439" cy="347472"/>
+          </a:xfrm>
+          <a:prstGeom prst="rect">
+            <a:avLst/>
+          </a:prstGeom>
+          <a:solidFill>
+            <a:srgbClr val="1E3A8A"/>
+          </a:solidFill>
+          <a:ln>
+            <a:noFill/>
+          </a:ln>
+        </p:spPr>
+        <p:style>
+          <a:lnRef idx="1">
+            <a:schemeClr val="accent1"/>
+          </a:lnRef>
+          <a:fillRef idx="3">
+            <a:schemeClr val="accent1"/>
+          </a:fillRef>
+          <a:effectRef idx="2">
+            <a:schemeClr val="accent1"/>
+          </a:effectRef>
+          <a:fontRef idx="minor">
+            <a:schemeClr val="lt1"/>
+          </a:fontRef>
+        </p:style>
+        <p:txBody>
+          <a:bodyPr rtlCol="0" anchor="ctr"/>
+          <a:lstStyle/>
+          <a:p>
+            <a:pPr algn="ctr"/>
+          </a:p>
+        </p:txBody>
+      </p:sp>
+      <p:sp>
+        <p:nvSpPr>
+          <p:cNvPr id="10" name="TextBox 9"/>
           <p:cNvSpPr txBox="1"/>
           <p:nvPr/>
         </p:nvSpPr>
         <p:spPr>
           <a:xfrm>
-            <a:off x="5943600" y="1874519"/>
-            <a:ext cx="5486400" cy="320040"/>
+            <a:off x="10195560" y="1344168"/>
+            <a:ext cx="1188719" cy="320040"/>
           </a:xfrm>
           <a:prstGeom prst="rect">
             <a:avLst/>
@@ -3873,26 +4723,69 @@
           <a:p>
             <a:pPr algn="l"/>
             <a:r>
-              <a:rPr sz="1300" b="0">
-                <a:solidFill>
-                  <a:srgbClr val="059669"/>
+              <a:rPr sz="1100" b="1">
+                <a:solidFill>
+                  <a:srgbClr val="FFFFFF"/>
                 </a:solidFill>
               </a:rPr>
-              <a:t>✓  required_columns_present</a:t>
-            </a:r>
-          </a:p>
-        </p:txBody>
-      </p:sp>
-      <p:sp>
-        <p:nvSpPr>
-          <p:cNvPr id="8" name="TextBox 7"/>
+              <a:t>Detail</a:t>
+            </a:r>
+          </a:p>
+        </p:txBody>
+      </p:sp>
+      <p:sp>
+        <p:nvSpPr>
+          <p:cNvPr id="11" name="Rectangle 10"/>
+          <p:cNvSpPr/>
+          <p:nvPr/>
+        </p:nvSpPr>
+        <p:spPr>
+          <a:xfrm>
+            <a:off x="5943600" y="1691640"/>
+            <a:ext cx="3063240" cy="347472"/>
+          </a:xfrm>
+          <a:prstGeom prst="rect">
+            <a:avLst/>
+          </a:prstGeom>
+          <a:solidFill>
+            <a:srgbClr val="1E293B"/>
+          </a:solidFill>
+          <a:ln>
+            <a:noFill/>
+          </a:ln>
+        </p:spPr>
+        <p:style>
+          <a:lnRef idx="1">
+            <a:schemeClr val="accent1"/>
+          </a:lnRef>
+          <a:fillRef idx="3">
+            <a:schemeClr val="accent1"/>
+          </a:fillRef>
+          <a:effectRef idx="2">
+            <a:schemeClr val="accent1"/>
+          </a:effectRef>
+          <a:fontRef idx="minor">
+            <a:schemeClr val="lt1"/>
+          </a:fontRef>
+        </p:style>
+        <p:txBody>
+          <a:bodyPr rtlCol="0" anchor="ctr"/>
+          <a:lstStyle/>
+          <a:p>
+            <a:pPr algn="ctr"/>
+          </a:p>
+        </p:txBody>
+      </p:sp>
+      <p:sp>
+        <p:nvSpPr>
+          <p:cNvPr id="12" name="TextBox 11"/>
           <p:cNvSpPr txBox="1"/>
           <p:nvPr/>
         </p:nvSpPr>
         <p:spPr>
           <a:xfrm>
-            <a:off x="5943600" y="2194560"/>
-            <a:ext cx="5486400" cy="320040"/>
+            <a:off x="5989320" y="1728216"/>
+            <a:ext cx="3017520" cy="292608"/>
           </a:xfrm>
           <a:prstGeom prst="rect">
             <a:avLst/>
@@ -3907,26 +4800,69 @@
           <a:p>
             <a:pPr algn="l"/>
             <a:r>
-              <a:rPr sz="1300" b="0">
-                <a:solidFill>
-                  <a:srgbClr val="059669"/>
+              <a:rPr sz="1000" b="0">
+                <a:solidFill>
+                  <a:srgbClr val="FFFFFF"/>
                 </a:solidFill>
               </a:rPr>
-              <a:t>✓  no_duplicate_transaction_ids</a:t>
-            </a:r>
-          </a:p>
-        </p:txBody>
-      </p:sp>
-      <p:sp>
-        <p:nvSpPr>
-          <p:cNvPr id="9" name="TextBox 8"/>
+              <a:t>Non-empty DataFrame</a:t>
+            </a:r>
+          </a:p>
+        </p:txBody>
+      </p:sp>
+      <p:sp>
+        <p:nvSpPr>
+          <p:cNvPr id="13" name="Rectangle 12"/>
+          <p:cNvSpPr/>
+          <p:nvPr/>
+        </p:nvSpPr>
+        <p:spPr>
+          <a:xfrm>
+            <a:off x="9052560" y="1691640"/>
+            <a:ext cx="1051560" cy="347472"/>
+          </a:xfrm>
+          <a:prstGeom prst="rect">
+            <a:avLst/>
+          </a:prstGeom>
+          <a:solidFill>
+            <a:srgbClr val="1E293B"/>
+          </a:solidFill>
+          <a:ln>
+            <a:noFill/>
+          </a:ln>
+        </p:spPr>
+        <p:style>
+          <a:lnRef idx="1">
+            <a:schemeClr val="accent1"/>
+          </a:lnRef>
+          <a:fillRef idx="3">
+            <a:schemeClr val="accent1"/>
+          </a:fillRef>
+          <a:effectRef idx="2">
+            <a:schemeClr val="accent1"/>
+          </a:effectRef>
+          <a:fontRef idx="minor">
+            <a:schemeClr val="lt1"/>
+          </a:fontRef>
+        </p:style>
+        <p:txBody>
+          <a:bodyPr rtlCol="0" anchor="ctr"/>
+          <a:lstStyle/>
+          <a:p>
+            <a:pPr algn="ctr"/>
+          </a:p>
+        </p:txBody>
+      </p:sp>
+      <p:sp>
+        <p:nvSpPr>
+          <p:cNvPr id="14" name="TextBox 13"/>
           <p:cNvSpPr txBox="1"/>
           <p:nvPr/>
         </p:nvSpPr>
         <p:spPr>
           <a:xfrm>
-            <a:off x="5943600" y="2514600"/>
-            <a:ext cx="5486400" cy="320040"/>
+            <a:off x="9098280" y="1728216"/>
+            <a:ext cx="1005839" cy="292608"/>
           </a:xfrm>
           <a:prstGeom prst="rect">
             <a:avLst/>
@@ -3941,26 +4877,69 @@
           <a:p>
             <a:pPr algn="l"/>
             <a:r>
-              <a:rPr sz="1300" b="0">
-                <a:solidFill>
-                  <a:srgbClr val="059669"/>
+              <a:rPr sz="1000" b="0">
+                <a:solidFill>
+                  <a:srgbClr val="22C55E"/>
                 </a:solidFill>
               </a:rPr>
-              <a:t>✓  amount_non_negative</a:t>
-            </a:r>
-          </a:p>
-        </p:txBody>
-      </p:sp>
-      <p:sp>
-        <p:nvSpPr>
-          <p:cNvPr id="10" name="TextBox 9"/>
+              <a:t>✓ PASS</a:t>
+            </a:r>
+          </a:p>
+        </p:txBody>
+      </p:sp>
+      <p:sp>
+        <p:nvSpPr>
+          <p:cNvPr id="15" name="Rectangle 14"/>
+          <p:cNvSpPr/>
+          <p:nvPr/>
+        </p:nvSpPr>
+        <p:spPr>
+          <a:xfrm>
+            <a:off x="10149840" y="1691640"/>
+            <a:ext cx="1234439" cy="347472"/>
+          </a:xfrm>
+          <a:prstGeom prst="rect">
+            <a:avLst/>
+          </a:prstGeom>
+          <a:solidFill>
+            <a:srgbClr val="1E293B"/>
+          </a:solidFill>
+          <a:ln>
+            <a:noFill/>
+          </a:ln>
+        </p:spPr>
+        <p:style>
+          <a:lnRef idx="1">
+            <a:schemeClr val="accent1"/>
+          </a:lnRef>
+          <a:fillRef idx="3">
+            <a:schemeClr val="accent1"/>
+          </a:fillRef>
+          <a:effectRef idx="2">
+            <a:schemeClr val="accent1"/>
+          </a:effectRef>
+          <a:fontRef idx="minor">
+            <a:schemeClr val="lt1"/>
+          </a:fontRef>
+        </p:style>
+        <p:txBody>
+          <a:bodyPr rtlCol="0" anchor="ctr"/>
+          <a:lstStyle/>
+          <a:p>
+            <a:pPr algn="ctr"/>
+          </a:p>
+        </p:txBody>
+      </p:sp>
+      <p:sp>
+        <p:nvSpPr>
+          <p:cNvPr id="16" name="TextBox 15"/>
           <p:cNvSpPr txBox="1"/>
           <p:nvPr/>
         </p:nvSpPr>
         <p:spPr>
           <a:xfrm>
-            <a:off x="5943600" y="2834639"/>
-            <a:ext cx="5486400" cy="320040"/>
+            <a:off x="10195560" y="1728216"/>
+            <a:ext cx="1188719" cy="292608"/>
           </a:xfrm>
           <a:prstGeom prst="rect">
             <a:avLst/>
@@ -3975,26 +4954,69 @@
           <a:p>
             <a:pPr algn="l"/>
             <a:r>
-              <a:rPr sz="1300" b="0">
-                <a:solidFill>
-                  <a:srgbClr val="059669"/>
+              <a:rPr sz="1000" b="0">
+                <a:solidFill>
+                  <a:srgbClr val="FFFFFF"/>
                 </a:solidFill>
               </a:rPr>
-              <a:t>✓  no_null_amounts</a:t>
-            </a:r>
-          </a:p>
-        </p:txBody>
-      </p:sp>
-      <p:sp>
-        <p:nvSpPr>
-          <p:cNvPr id="11" name="TextBox 10"/>
+              <a:t>1,000 rows</a:t>
+            </a:r>
+          </a:p>
+        </p:txBody>
+      </p:sp>
+      <p:sp>
+        <p:nvSpPr>
+          <p:cNvPr id="17" name="Rectangle 16"/>
+          <p:cNvSpPr/>
+          <p:nvPr/>
+        </p:nvSpPr>
+        <p:spPr>
+          <a:xfrm>
+            <a:off x="5943600" y="2075688"/>
+            <a:ext cx="3063240" cy="347472"/>
+          </a:xfrm>
+          <a:prstGeom prst="rect">
+            <a:avLst/>
+          </a:prstGeom>
+          <a:solidFill>
+            <a:srgbClr val="111827"/>
+          </a:solidFill>
+          <a:ln>
+            <a:noFill/>
+          </a:ln>
+        </p:spPr>
+        <p:style>
+          <a:lnRef idx="1">
+            <a:schemeClr val="accent1"/>
+          </a:lnRef>
+          <a:fillRef idx="3">
+            <a:schemeClr val="accent1"/>
+          </a:fillRef>
+          <a:effectRef idx="2">
+            <a:schemeClr val="accent1"/>
+          </a:effectRef>
+          <a:fontRef idx="minor">
+            <a:schemeClr val="lt1"/>
+          </a:fontRef>
+        </p:style>
+        <p:txBody>
+          <a:bodyPr rtlCol="0" anchor="ctr"/>
+          <a:lstStyle/>
+          <a:p>
+            <a:pPr algn="ctr"/>
+          </a:p>
+        </p:txBody>
+      </p:sp>
+      <p:sp>
+        <p:nvSpPr>
+          <p:cNvPr id="18" name="TextBox 17"/>
           <p:cNvSpPr txBox="1"/>
           <p:nvPr/>
         </p:nvSpPr>
         <p:spPr>
           <a:xfrm>
-            <a:off x="5943600" y="3154680"/>
-            <a:ext cx="5486400" cy="320040"/>
+            <a:off x="5989320" y="2112264"/>
+            <a:ext cx="3017520" cy="292608"/>
           </a:xfrm>
           <a:prstGeom prst="rect">
             <a:avLst/>
@@ -4009,26 +5031,69 @@
           <a:p>
             <a:pPr algn="l"/>
             <a:r>
-              <a:rPr sz="1300" b="0">
-                <a:solidFill>
-                  <a:srgbClr val="059669"/>
+              <a:rPr sz="1000" b="0">
+                <a:solidFill>
+                  <a:srgbClr val="FFFFFF"/>
                 </a:solidFill>
               </a:rPr>
-              <a:t>✓  is_anomaly_binary</a:t>
-            </a:r>
-          </a:p>
-        </p:txBody>
-      </p:sp>
-      <p:sp>
-        <p:nvSpPr>
-          <p:cNvPr id="12" name="TextBox 11"/>
+              <a:t>Required columns present</a:t>
+            </a:r>
+          </a:p>
+        </p:txBody>
+      </p:sp>
+      <p:sp>
+        <p:nvSpPr>
+          <p:cNvPr id="19" name="Rectangle 18"/>
+          <p:cNvSpPr/>
+          <p:nvPr/>
+        </p:nvSpPr>
+        <p:spPr>
+          <a:xfrm>
+            <a:off x="9052560" y="2075688"/>
+            <a:ext cx="1051560" cy="347472"/>
+          </a:xfrm>
+          <a:prstGeom prst="rect">
+            <a:avLst/>
+          </a:prstGeom>
+          <a:solidFill>
+            <a:srgbClr val="111827"/>
+          </a:solidFill>
+          <a:ln>
+            <a:noFill/>
+          </a:ln>
+        </p:spPr>
+        <p:style>
+          <a:lnRef idx="1">
+            <a:schemeClr val="accent1"/>
+          </a:lnRef>
+          <a:fillRef idx="3">
+            <a:schemeClr val="accent1"/>
+          </a:fillRef>
+          <a:effectRef idx="2">
+            <a:schemeClr val="accent1"/>
+          </a:effectRef>
+          <a:fontRef idx="minor">
+            <a:schemeClr val="lt1"/>
+          </a:fontRef>
+        </p:style>
+        <p:txBody>
+          <a:bodyPr rtlCol="0" anchor="ctr"/>
+          <a:lstStyle/>
+          <a:p>
+            <a:pPr algn="ctr"/>
+          </a:p>
+        </p:txBody>
+      </p:sp>
+      <p:sp>
+        <p:nvSpPr>
+          <p:cNvPr id="20" name="TextBox 19"/>
           <p:cNvSpPr txBox="1"/>
           <p:nvPr/>
         </p:nvSpPr>
         <p:spPr>
           <a:xfrm>
-            <a:off x="5943600" y="3474720"/>
-            <a:ext cx="5486400" cy="320040"/>
+            <a:off x="9098280" y="2112264"/>
+            <a:ext cx="1005839" cy="292608"/>
           </a:xfrm>
           <a:prstGeom prst="rect">
             <a:avLst/>
@@ -4043,26 +5108,69 @@
           <a:p>
             <a:pPr algn="l"/>
             <a:r>
-              <a:rPr sz="1300" b="0">
-                <a:solidFill>
-                  <a:srgbClr val="059669"/>
+              <a:rPr sz="1000" b="0">
+                <a:solidFill>
+                  <a:srgbClr val="22C55E"/>
                 </a:solidFill>
               </a:rPr>
-              <a:t>✓  timestamp_parseable</a:t>
-            </a:r>
-          </a:p>
-        </p:txBody>
-      </p:sp>
-      <p:sp>
-        <p:nvSpPr>
-          <p:cNvPr id="13" name="TextBox 12"/>
+              <a:t>✓ PASS</a:t>
+            </a:r>
+          </a:p>
+        </p:txBody>
+      </p:sp>
+      <p:sp>
+        <p:nvSpPr>
+          <p:cNvPr id="21" name="Rectangle 20"/>
+          <p:cNvSpPr/>
+          <p:nvPr/>
+        </p:nvSpPr>
+        <p:spPr>
+          <a:xfrm>
+            <a:off x="10149840" y="2075688"/>
+            <a:ext cx="1234439" cy="347472"/>
+          </a:xfrm>
+          <a:prstGeom prst="rect">
+            <a:avLst/>
+          </a:prstGeom>
+          <a:solidFill>
+            <a:srgbClr val="111827"/>
+          </a:solidFill>
+          <a:ln>
+            <a:noFill/>
+          </a:ln>
+        </p:spPr>
+        <p:style>
+          <a:lnRef idx="1">
+            <a:schemeClr val="accent1"/>
+          </a:lnRef>
+          <a:fillRef idx="3">
+            <a:schemeClr val="accent1"/>
+          </a:fillRef>
+          <a:effectRef idx="2">
+            <a:schemeClr val="accent1"/>
+          </a:effectRef>
+          <a:fontRef idx="minor">
+            <a:schemeClr val="lt1"/>
+          </a:fontRef>
+        </p:style>
+        <p:txBody>
+          <a:bodyPr rtlCol="0" anchor="ctr"/>
+          <a:lstStyle/>
+          <a:p>
+            <a:pPr algn="ctr"/>
+          </a:p>
+        </p:txBody>
+      </p:sp>
+      <p:sp>
+        <p:nvSpPr>
+          <p:cNvPr id="22" name="TextBox 21"/>
           <p:cNvSpPr txBox="1"/>
           <p:nvPr/>
         </p:nvSpPr>
         <p:spPr>
           <a:xfrm>
-            <a:off x="5943600" y="3794759"/>
-            <a:ext cx="5486400" cy="320040"/>
+            <a:off x="10195560" y="2112264"/>
+            <a:ext cx="1188719" cy="292608"/>
           </a:xfrm>
           <a:prstGeom prst="rect">
             <a:avLst/>
@@ -4077,26 +5185,69 @@
           <a:p>
             <a:pPr algn="l"/>
             <a:r>
-              <a:rPr sz="1300" b="0">
-                <a:solidFill>
-                  <a:srgbClr val="059669"/>
+              <a:rPr sz="1000" b="0">
+                <a:solidFill>
+                  <a:srgbClr val="FFFFFF"/>
                 </a:solidFill>
               </a:rPr>
-              <a:t>✓  no_null_categories</a:t>
-            </a:r>
-          </a:p>
-        </p:txBody>
-      </p:sp>
-      <p:sp>
-        <p:nvSpPr>
-          <p:cNvPr id="14" name="TextBox 13"/>
+              <a:t>6 columns</a:t>
+            </a:r>
+          </a:p>
+        </p:txBody>
+      </p:sp>
+      <p:sp>
+        <p:nvSpPr>
+          <p:cNvPr id="23" name="Rectangle 22"/>
+          <p:cNvSpPr/>
+          <p:nvPr/>
+        </p:nvSpPr>
+        <p:spPr>
+          <a:xfrm>
+            <a:off x="5943600" y="2459736"/>
+            <a:ext cx="3063240" cy="347472"/>
+          </a:xfrm>
+          <a:prstGeom prst="rect">
+            <a:avLst/>
+          </a:prstGeom>
+          <a:solidFill>
+            <a:srgbClr val="1E293B"/>
+          </a:solidFill>
+          <a:ln>
+            <a:noFill/>
+          </a:ln>
+        </p:spPr>
+        <p:style>
+          <a:lnRef idx="1">
+            <a:schemeClr val="accent1"/>
+          </a:lnRef>
+          <a:fillRef idx="3">
+            <a:schemeClr val="accent1"/>
+          </a:fillRef>
+          <a:effectRef idx="2">
+            <a:schemeClr val="accent1"/>
+          </a:effectRef>
+          <a:fontRef idx="minor">
+            <a:schemeClr val="lt1"/>
+          </a:fontRef>
+        </p:style>
+        <p:txBody>
+          <a:bodyPr rtlCol="0" anchor="ctr"/>
+          <a:lstStyle/>
+          <a:p>
+            <a:pPr algn="ctr"/>
+          </a:p>
+        </p:txBody>
+      </p:sp>
+      <p:sp>
+        <p:nvSpPr>
+          <p:cNvPr id="24" name="TextBox 23"/>
           <p:cNvSpPr txBox="1"/>
           <p:nvPr/>
         </p:nvSpPr>
         <p:spPr>
           <a:xfrm>
-            <a:off x="5943600" y="4114800"/>
-            <a:ext cx="5486400" cy="320040"/>
+            <a:off x="5989320" y="2496312"/>
+            <a:ext cx="3017520" cy="292608"/>
           </a:xfrm>
           <a:prstGeom prst="rect">
             <a:avLst/>
@@ -4111,26 +5262,69 @@
           <a:p>
             <a:pPr algn="l"/>
             <a:r>
-              <a:rPr sz="1300" b="0">
-                <a:solidFill>
-                  <a:srgbClr val="059669"/>
+              <a:rPr sz="1000" b="0">
+                <a:solidFill>
+                  <a:srgbClr val="FFFFFF"/>
                 </a:solidFill>
               </a:rPr>
-              <a:t>✓  amount_reasonable_range</a:t>
-            </a:r>
-          </a:p>
-        </p:txBody>
-      </p:sp>
-      <p:sp>
-        <p:nvSpPr>
-          <p:cNvPr id="15" name="TextBox 14"/>
+              <a:t>No duplicate IDs</a:t>
+            </a:r>
+          </a:p>
+        </p:txBody>
+      </p:sp>
+      <p:sp>
+        <p:nvSpPr>
+          <p:cNvPr id="25" name="Rectangle 24"/>
+          <p:cNvSpPr/>
+          <p:nvPr/>
+        </p:nvSpPr>
+        <p:spPr>
+          <a:xfrm>
+            <a:off x="9052560" y="2459736"/>
+            <a:ext cx="1051560" cy="347472"/>
+          </a:xfrm>
+          <a:prstGeom prst="rect">
+            <a:avLst/>
+          </a:prstGeom>
+          <a:solidFill>
+            <a:srgbClr val="1E293B"/>
+          </a:solidFill>
+          <a:ln>
+            <a:noFill/>
+          </a:ln>
+        </p:spPr>
+        <p:style>
+          <a:lnRef idx="1">
+            <a:schemeClr val="accent1"/>
+          </a:lnRef>
+          <a:fillRef idx="3">
+            <a:schemeClr val="accent1"/>
+          </a:fillRef>
+          <a:effectRef idx="2">
+            <a:schemeClr val="accent1"/>
+          </a:effectRef>
+          <a:fontRef idx="minor">
+            <a:schemeClr val="lt1"/>
+          </a:fontRef>
+        </p:style>
+        <p:txBody>
+          <a:bodyPr rtlCol="0" anchor="ctr"/>
+          <a:lstStyle/>
+          <a:p>
+            <a:pPr algn="ctr"/>
+          </a:p>
+        </p:txBody>
+      </p:sp>
+      <p:sp>
+        <p:nvSpPr>
+          <p:cNvPr id="26" name="TextBox 25"/>
           <p:cNvSpPr txBox="1"/>
           <p:nvPr/>
         </p:nvSpPr>
         <p:spPr>
           <a:xfrm>
-            <a:off x="5943600" y="4434840"/>
-            <a:ext cx="5486400" cy="320040"/>
+            <a:off x="9098280" y="2496312"/>
+            <a:ext cx="1005839" cy="292608"/>
           </a:xfrm>
           <a:prstGeom prst="rect">
             <a:avLst/>
@@ -4145,12 +5339,1706 @@
           <a:p>
             <a:pPr algn="l"/>
             <a:r>
-              <a:rPr sz="1300" b="0">
-                <a:solidFill>
-                  <a:srgbClr val="059669"/>
+              <a:rPr sz="1000" b="0">
+                <a:solidFill>
+                  <a:srgbClr val="22C55E"/>
                 </a:solidFill>
               </a:rPr>
-              <a:t>✓  anomaly_rate_plausible</a:t>
+              <a:t>✓ PASS</a:t>
+            </a:r>
+          </a:p>
+        </p:txBody>
+      </p:sp>
+      <p:sp>
+        <p:nvSpPr>
+          <p:cNvPr id="27" name="Rectangle 26"/>
+          <p:cNvSpPr/>
+          <p:nvPr/>
+        </p:nvSpPr>
+        <p:spPr>
+          <a:xfrm>
+            <a:off x="10149840" y="2459736"/>
+            <a:ext cx="1234439" cy="347472"/>
+          </a:xfrm>
+          <a:prstGeom prst="rect">
+            <a:avLst/>
+          </a:prstGeom>
+          <a:solidFill>
+            <a:srgbClr val="1E293B"/>
+          </a:solidFill>
+          <a:ln>
+            <a:noFill/>
+          </a:ln>
+        </p:spPr>
+        <p:style>
+          <a:lnRef idx="1">
+            <a:schemeClr val="accent1"/>
+          </a:lnRef>
+          <a:fillRef idx="3">
+            <a:schemeClr val="accent1"/>
+          </a:fillRef>
+          <a:effectRef idx="2">
+            <a:schemeClr val="accent1"/>
+          </a:effectRef>
+          <a:fontRef idx="minor">
+            <a:schemeClr val="lt1"/>
+          </a:fontRef>
+        </p:style>
+        <p:txBody>
+          <a:bodyPr rtlCol="0" anchor="ctr"/>
+          <a:lstStyle/>
+          <a:p>
+            <a:pPr algn="ctr"/>
+          </a:p>
+        </p:txBody>
+      </p:sp>
+      <p:sp>
+        <p:nvSpPr>
+          <p:cNvPr id="28" name="TextBox 27"/>
+          <p:cNvSpPr txBox="1"/>
+          <p:nvPr/>
+        </p:nvSpPr>
+        <p:spPr>
+          <a:xfrm>
+            <a:off x="10195560" y="2496312"/>
+            <a:ext cx="1188719" cy="292608"/>
+          </a:xfrm>
+          <a:prstGeom prst="rect">
+            <a:avLst/>
+          </a:prstGeom>
+          <a:noFill/>
+        </p:spPr>
+        <p:txBody>
+          <a:bodyPr wrap="square">
+            <a:spAutoFit/>
+          </a:bodyPr>
+          <a:lstStyle/>
+          <a:p>
+            <a:pPr algn="l"/>
+            <a:r>
+              <a:rPr sz="1000" b="0">
+                <a:solidFill>
+                  <a:srgbClr val="FFFFFF"/>
+                </a:solidFill>
+              </a:rPr>
+              <a:t>0 dupes</a:t>
+            </a:r>
+          </a:p>
+        </p:txBody>
+      </p:sp>
+      <p:sp>
+        <p:nvSpPr>
+          <p:cNvPr id="29" name="Rectangle 28"/>
+          <p:cNvSpPr/>
+          <p:nvPr/>
+        </p:nvSpPr>
+        <p:spPr>
+          <a:xfrm>
+            <a:off x="5943600" y="2843784"/>
+            <a:ext cx="3063240" cy="347472"/>
+          </a:xfrm>
+          <a:prstGeom prst="rect">
+            <a:avLst/>
+          </a:prstGeom>
+          <a:solidFill>
+            <a:srgbClr val="111827"/>
+          </a:solidFill>
+          <a:ln>
+            <a:noFill/>
+          </a:ln>
+        </p:spPr>
+        <p:style>
+          <a:lnRef idx="1">
+            <a:schemeClr val="accent1"/>
+          </a:lnRef>
+          <a:fillRef idx="3">
+            <a:schemeClr val="accent1"/>
+          </a:fillRef>
+          <a:effectRef idx="2">
+            <a:schemeClr val="accent1"/>
+          </a:effectRef>
+          <a:fontRef idx="minor">
+            <a:schemeClr val="lt1"/>
+          </a:fontRef>
+        </p:style>
+        <p:txBody>
+          <a:bodyPr rtlCol="0" anchor="ctr"/>
+          <a:lstStyle/>
+          <a:p>
+            <a:pPr algn="ctr"/>
+          </a:p>
+        </p:txBody>
+      </p:sp>
+      <p:sp>
+        <p:nvSpPr>
+          <p:cNvPr id="30" name="TextBox 29"/>
+          <p:cNvSpPr txBox="1"/>
+          <p:nvPr/>
+        </p:nvSpPr>
+        <p:spPr>
+          <a:xfrm>
+            <a:off x="5989320" y="2880360"/>
+            <a:ext cx="3017520" cy="292608"/>
+          </a:xfrm>
+          <a:prstGeom prst="rect">
+            <a:avLst/>
+          </a:prstGeom>
+          <a:noFill/>
+        </p:spPr>
+        <p:txBody>
+          <a:bodyPr wrap="square">
+            <a:spAutoFit/>
+          </a:bodyPr>
+          <a:lstStyle/>
+          <a:p>
+            <a:pPr algn="l"/>
+            <a:r>
+              <a:rPr sz="1000" b="0">
+                <a:solidFill>
+                  <a:srgbClr val="FFFFFF"/>
+                </a:solidFill>
+              </a:rPr>
+              <a:t>Amount positive</a:t>
+            </a:r>
+          </a:p>
+        </p:txBody>
+      </p:sp>
+      <p:sp>
+        <p:nvSpPr>
+          <p:cNvPr id="31" name="Rectangle 30"/>
+          <p:cNvSpPr/>
+          <p:nvPr/>
+        </p:nvSpPr>
+        <p:spPr>
+          <a:xfrm>
+            <a:off x="9052560" y="2843784"/>
+            <a:ext cx="1051560" cy="347472"/>
+          </a:xfrm>
+          <a:prstGeom prst="rect">
+            <a:avLst/>
+          </a:prstGeom>
+          <a:solidFill>
+            <a:srgbClr val="111827"/>
+          </a:solidFill>
+          <a:ln>
+            <a:noFill/>
+          </a:ln>
+        </p:spPr>
+        <p:style>
+          <a:lnRef idx="1">
+            <a:schemeClr val="accent1"/>
+          </a:lnRef>
+          <a:fillRef idx="3">
+            <a:schemeClr val="accent1"/>
+          </a:fillRef>
+          <a:effectRef idx="2">
+            <a:schemeClr val="accent1"/>
+          </a:effectRef>
+          <a:fontRef idx="minor">
+            <a:schemeClr val="lt1"/>
+          </a:fontRef>
+        </p:style>
+        <p:txBody>
+          <a:bodyPr rtlCol="0" anchor="ctr"/>
+          <a:lstStyle/>
+          <a:p>
+            <a:pPr algn="ctr"/>
+          </a:p>
+        </p:txBody>
+      </p:sp>
+      <p:sp>
+        <p:nvSpPr>
+          <p:cNvPr id="32" name="TextBox 31"/>
+          <p:cNvSpPr txBox="1"/>
+          <p:nvPr/>
+        </p:nvSpPr>
+        <p:spPr>
+          <a:xfrm>
+            <a:off x="9098280" y="2880360"/>
+            <a:ext cx="1005839" cy="292608"/>
+          </a:xfrm>
+          <a:prstGeom prst="rect">
+            <a:avLst/>
+          </a:prstGeom>
+          <a:noFill/>
+        </p:spPr>
+        <p:txBody>
+          <a:bodyPr wrap="square">
+            <a:spAutoFit/>
+          </a:bodyPr>
+          <a:lstStyle/>
+          <a:p>
+            <a:pPr algn="l"/>
+            <a:r>
+              <a:rPr sz="1000" b="0">
+                <a:solidFill>
+                  <a:srgbClr val="22C55E"/>
+                </a:solidFill>
+              </a:rPr>
+              <a:t>✓ PASS</a:t>
+            </a:r>
+          </a:p>
+        </p:txBody>
+      </p:sp>
+      <p:sp>
+        <p:nvSpPr>
+          <p:cNvPr id="33" name="Rectangle 32"/>
+          <p:cNvSpPr/>
+          <p:nvPr/>
+        </p:nvSpPr>
+        <p:spPr>
+          <a:xfrm>
+            <a:off x="10149840" y="2843784"/>
+            <a:ext cx="1234439" cy="347472"/>
+          </a:xfrm>
+          <a:prstGeom prst="rect">
+            <a:avLst/>
+          </a:prstGeom>
+          <a:solidFill>
+            <a:srgbClr val="111827"/>
+          </a:solidFill>
+          <a:ln>
+            <a:noFill/>
+          </a:ln>
+        </p:spPr>
+        <p:style>
+          <a:lnRef idx="1">
+            <a:schemeClr val="accent1"/>
+          </a:lnRef>
+          <a:fillRef idx="3">
+            <a:schemeClr val="accent1"/>
+          </a:fillRef>
+          <a:effectRef idx="2">
+            <a:schemeClr val="accent1"/>
+          </a:effectRef>
+          <a:fontRef idx="minor">
+            <a:schemeClr val="lt1"/>
+          </a:fontRef>
+        </p:style>
+        <p:txBody>
+          <a:bodyPr rtlCol="0" anchor="ctr"/>
+          <a:lstStyle/>
+          <a:p>
+            <a:pPr algn="ctr"/>
+          </a:p>
+        </p:txBody>
+      </p:sp>
+      <p:sp>
+        <p:nvSpPr>
+          <p:cNvPr id="34" name="TextBox 33"/>
+          <p:cNvSpPr txBox="1"/>
+          <p:nvPr/>
+        </p:nvSpPr>
+        <p:spPr>
+          <a:xfrm>
+            <a:off x="10195560" y="2880360"/>
+            <a:ext cx="1188719" cy="292608"/>
+          </a:xfrm>
+          <a:prstGeom prst="rect">
+            <a:avLst/>
+          </a:prstGeom>
+          <a:noFill/>
+        </p:spPr>
+        <p:txBody>
+          <a:bodyPr wrap="square">
+            <a:spAutoFit/>
+          </a:bodyPr>
+          <a:lstStyle/>
+          <a:p>
+            <a:pPr algn="l"/>
+            <a:r>
+              <a:rPr sz="1000" b="0">
+                <a:solidFill>
+                  <a:srgbClr val="FFFFFF"/>
+                </a:solidFill>
+              </a:rPr>
+              <a:t>all positive</a:t>
+            </a:r>
+          </a:p>
+        </p:txBody>
+      </p:sp>
+      <p:sp>
+        <p:nvSpPr>
+          <p:cNvPr id="35" name="Rectangle 34"/>
+          <p:cNvSpPr/>
+          <p:nvPr/>
+        </p:nvSpPr>
+        <p:spPr>
+          <a:xfrm>
+            <a:off x="5943600" y="3227832"/>
+            <a:ext cx="3063240" cy="347472"/>
+          </a:xfrm>
+          <a:prstGeom prst="rect">
+            <a:avLst/>
+          </a:prstGeom>
+          <a:solidFill>
+            <a:srgbClr val="1E293B"/>
+          </a:solidFill>
+          <a:ln>
+            <a:noFill/>
+          </a:ln>
+        </p:spPr>
+        <p:style>
+          <a:lnRef idx="1">
+            <a:schemeClr val="accent1"/>
+          </a:lnRef>
+          <a:fillRef idx="3">
+            <a:schemeClr val="accent1"/>
+          </a:fillRef>
+          <a:effectRef idx="2">
+            <a:schemeClr val="accent1"/>
+          </a:effectRef>
+          <a:fontRef idx="minor">
+            <a:schemeClr val="lt1"/>
+          </a:fontRef>
+        </p:style>
+        <p:txBody>
+          <a:bodyPr rtlCol="0" anchor="ctr"/>
+          <a:lstStyle/>
+          <a:p>
+            <a:pPr algn="ctr"/>
+          </a:p>
+        </p:txBody>
+      </p:sp>
+      <p:sp>
+        <p:nvSpPr>
+          <p:cNvPr id="36" name="TextBox 35"/>
+          <p:cNvSpPr txBox="1"/>
+          <p:nvPr/>
+        </p:nvSpPr>
+        <p:spPr>
+          <a:xfrm>
+            <a:off x="5989320" y="3264408"/>
+            <a:ext cx="3017520" cy="292608"/>
+          </a:xfrm>
+          <a:prstGeom prst="rect">
+            <a:avLst/>
+          </a:prstGeom>
+          <a:noFill/>
+        </p:spPr>
+        <p:txBody>
+          <a:bodyPr wrap="square">
+            <a:spAutoFit/>
+          </a:bodyPr>
+          <a:lstStyle/>
+          <a:p>
+            <a:pPr algn="l"/>
+            <a:r>
+              <a:rPr sz="1000" b="0">
+                <a:solidFill>
+                  <a:srgbClr val="FFFFFF"/>
+                </a:solidFill>
+              </a:rPr>
+              <a:t>No null amounts</a:t>
+            </a:r>
+          </a:p>
+        </p:txBody>
+      </p:sp>
+      <p:sp>
+        <p:nvSpPr>
+          <p:cNvPr id="37" name="Rectangle 36"/>
+          <p:cNvSpPr/>
+          <p:nvPr/>
+        </p:nvSpPr>
+        <p:spPr>
+          <a:xfrm>
+            <a:off x="9052560" y="3227832"/>
+            <a:ext cx="1051560" cy="347472"/>
+          </a:xfrm>
+          <a:prstGeom prst="rect">
+            <a:avLst/>
+          </a:prstGeom>
+          <a:solidFill>
+            <a:srgbClr val="1E293B"/>
+          </a:solidFill>
+          <a:ln>
+            <a:noFill/>
+          </a:ln>
+        </p:spPr>
+        <p:style>
+          <a:lnRef idx="1">
+            <a:schemeClr val="accent1"/>
+          </a:lnRef>
+          <a:fillRef idx="3">
+            <a:schemeClr val="accent1"/>
+          </a:fillRef>
+          <a:effectRef idx="2">
+            <a:schemeClr val="accent1"/>
+          </a:effectRef>
+          <a:fontRef idx="minor">
+            <a:schemeClr val="lt1"/>
+          </a:fontRef>
+        </p:style>
+        <p:txBody>
+          <a:bodyPr rtlCol="0" anchor="ctr"/>
+          <a:lstStyle/>
+          <a:p>
+            <a:pPr algn="ctr"/>
+          </a:p>
+        </p:txBody>
+      </p:sp>
+      <p:sp>
+        <p:nvSpPr>
+          <p:cNvPr id="38" name="TextBox 37"/>
+          <p:cNvSpPr txBox="1"/>
+          <p:nvPr/>
+        </p:nvSpPr>
+        <p:spPr>
+          <a:xfrm>
+            <a:off x="9098280" y="3264408"/>
+            <a:ext cx="1005839" cy="292608"/>
+          </a:xfrm>
+          <a:prstGeom prst="rect">
+            <a:avLst/>
+          </a:prstGeom>
+          <a:noFill/>
+        </p:spPr>
+        <p:txBody>
+          <a:bodyPr wrap="square">
+            <a:spAutoFit/>
+          </a:bodyPr>
+          <a:lstStyle/>
+          <a:p>
+            <a:pPr algn="l"/>
+            <a:r>
+              <a:rPr sz="1000" b="0">
+                <a:solidFill>
+                  <a:srgbClr val="22C55E"/>
+                </a:solidFill>
+              </a:rPr>
+              <a:t>✓ PASS</a:t>
+            </a:r>
+          </a:p>
+        </p:txBody>
+      </p:sp>
+      <p:sp>
+        <p:nvSpPr>
+          <p:cNvPr id="39" name="Rectangle 38"/>
+          <p:cNvSpPr/>
+          <p:nvPr/>
+        </p:nvSpPr>
+        <p:spPr>
+          <a:xfrm>
+            <a:off x="10149840" y="3227832"/>
+            <a:ext cx="1234439" cy="347472"/>
+          </a:xfrm>
+          <a:prstGeom prst="rect">
+            <a:avLst/>
+          </a:prstGeom>
+          <a:solidFill>
+            <a:srgbClr val="1E293B"/>
+          </a:solidFill>
+          <a:ln>
+            <a:noFill/>
+          </a:ln>
+        </p:spPr>
+        <p:style>
+          <a:lnRef idx="1">
+            <a:schemeClr val="accent1"/>
+          </a:lnRef>
+          <a:fillRef idx="3">
+            <a:schemeClr val="accent1"/>
+          </a:fillRef>
+          <a:effectRef idx="2">
+            <a:schemeClr val="accent1"/>
+          </a:effectRef>
+          <a:fontRef idx="minor">
+            <a:schemeClr val="lt1"/>
+          </a:fontRef>
+        </p:style>
+        <p:txBody>
+          <a:bodyPr rtlCol="0" anchor="ctr"/>
+          <a:lstStyle/>
+          <a:p>
+            <a:pPr algn="ctr"/>
+          </a:p>
+        </p:txBody>
+      </p:sp>
+      <p:sp>
+        <p:nvSpPr>
+          <p:cNvPr id="40" name="TextBox 39"/>
+          <p:cNvSpPr txBox="1"/>
+          <p:nvPr/>
+        </p:nvSpPr>
+        <p:spPr>
+          <a:xfrm>
+            <a:off x="10195560" y="3264408"/>
+            <a:ext cx="1188719" cy="292608"/>
+          </a:xfrm>
+          <a:prstGeom prst="rect">
+            <a:avLst/>
+          </a:prstGeom>
+          <a:noFill/>
+        </p:spPr>
+        <p:txBody>
+          <a:bodyPr wrap="square">
+            <a:spAutoFit/>
+          </a:bodyPr>
+          <a:lstStyle/>
+          <a:p>
+            <a:pPr algn="l"/>
+            <a:r>
+              <a:rPr sz="1000" b="0">
+                <a:solidFill>
+                  <a:srgbClr val="FFFFFF"/>
+                </a:solidFill>
+              </a:rPr>
+              <a:t>0 nulls</a:t>
+            </a:r>
+          </a:p>
+        </p:txBody>
+      </p:sp>
+      <p:sp>
+        <p:nvSpPr>
+          <p:cNvPr id="41" name="Rectangle 40"/>
+          <p:cNvSpPr/>
+          <p:nvPr/>
+        </p:nvSpPr>
+        <p:spPr>
+          <a:xfrm>
+            <a:off x="5943600" y="3611880"/>
+            <a:ext cx="3063240" cy="347472"/>
+          </a:xfrm>
+          <a:prstGeom prst="rect">
+            <a:avLst/>
+          </a:prstGeom>
+          <a:solidFill>
+            <a:srgbClr val="111827"/>
+          </a:solidFill>
+          <a:ln>
+            <a:noFill/>
+          </a:ln>
+        </p:spPr>
+        <p:style>
+          <a:lnRef idx="1">
+            <a:schemeClr val="accent1"/>
+          </a:lnRef>
+          <a:fillRef idx="3">
+            <a:schemeClr val="accent1"/>
+          </a:fillRef>
+          <a:effectRef idx="2">
+            <a:schemeClr val="accent1"/>
+          </a:effectRef>
+          <a:fontRef idx="minor">
+            <a:schemeClr val="lt1"/>
+          </a:fontRef>
+        </p:style>
+        <p:txBody>
+          <a:bodyPr rtlCol="0" anchor="ctr"/>
+          <a:lstStyle/>
+          <a:p>
+            <a:pPr algn="ctr"/>
+          </a:p>
+        </p:txBody>
+      </p:sp>
+      <p:sp>
+        <p:nvSpPr>
+          <p:cNvPr id="42" name="TextBox 41"/>
+          <p:cNvSpPr txBox="1"/>
+          <p:nvPr/>
+        </p:nvSpPr>
+        <p:spPr>
+          <a:xfrm>
+            <a:off x="5989320" y="3648456"/>
+            <a:ext cx="3017520" cy="292608"/>
+          </a:xfrm>
+          <a:prstGeom prst="rect">
+            <a:avLst/>
+          </a:prstGeom>
+          <a:noFill/>
+        </p:spPr>
+        <p:txBody>
+          <a:bodyPr wrap="square">
+            <a:spAutoFit/>
+          </a:bodyPr>
+          <a:lstStyle/>
+          <a:p>
+            <a:pPr algn="l"/>
+            <a:r>
+              <a:rPr sz="1000" b="0">
+                <a:solidFill>
+                  <a:srgbClr val="FFFFFF"/>
+                </a:solidFill>
+              </a:rPr>
+              <a:t>Binary anomaly labels</a:t>
+            </a:r>
+          </a:p>
+        </p:txBody>
+      </p:sp>
+      <p:sp>
+        <p:nvSpPr>
+          <p:cNvPr id="43" name="Rectangle 42"/>
+          <p:cNvSpPr/>
+          <p:nvPr/>
+        </p:nvSpPr>
+        <p:spPr>
+          <a:xfrm>
+            <a:off x="9052560" y="3611880"/>
+            <a:ext cx="1051560" cy="347472"/>
+          </a:xfrm>
+          <a:prstGeom prst="rect">
+            <a:avLst/>
+          </a:prstGeom>
+          <a:solidFill>
+            <a:srgbClr val="111827"/>
+          </a:solidFill>
+          <a:ln>
+            <a:noFill/>
+          </a:ln>
+        </p:spPr>
+        <p:style>
+          <a:lnRef idx="1">
+            <a:schemeClr val="accent1"/>
+          </a:lnRef>
+          <a:fillRef idx="3">
+            <a:schemeClr val="accent1"/>
+          </a:fillRef>
+          <a:effectRef idx="2">
+            <a:schemeClr val="accent1"/>
+          </a:effectRef>
+          <a:fontRef idx="minor">
+            <a:schemeClr val="lt1"/>
+          </a:fontRef>
+        </p:style>
+        <p:txBody>
+          <a:bodyPr rtlCol="0" anchor="ctr"/>
+          <a:lstStyle/>
+          <a:p>
+            <a:pPr algn="ctr"/>
+          </a:p>
+        </p:txBody>
+      </p:sp>
+      <p:sp>
+        <p:nvSpPr>
+          <p:cNvPr id="44" name="TextBox 43"/>
+          <p:cNvSpPr txBox="1"/>
+          <p:nvPr/>
+        </p:nvSpPr>
+        <p:spPr>
+          <a:xfrm>
+            <a:off x="9098280" y="3648456"/>
+            <a:ext cx="1005839" cy="292608"/>
+          </a:xfrm>
+          <a:prstGeom prst="rect">
+            <a:avLst/>
+          </a:prstGeom>
+          <a:noFill/>
+        </p:spPr>
+        <p:txBody>
+          <a:bodyPr wrap="square">
+            <a:spAutoFit/>
+          </a:bodyPr>
+          <a:lstStyle/>
+          <a:p>
+            <a:pPr algn="l"/>
+            <a:r>
+              <a:rPr sz="1000" b="0">
+                <a:solidFill>
+                  <a:srgbClr val="22C55E"/>
+                </a:solidFill>
+              </a:rPr>
+              <a:t>✓ PASS</a:t>
+            </a:r>
+          </a:p>
+        </p:txBody>
+      </p:sp>
+      <p:sp>
+        <p:nvSpPr>
+          <p:cNvPr id="45" name="Rectangle 44"/>
+          <p:cNvSpPr/>
+          <p:nvPr/>
+        </p:nvSpPr>
+        <p:spPr>
+          <a:xfrm>
+            <a:off x="10149840" y="3611880"/>
+            <a:ext cx="1234439" cy="347472"/>
+          </a:xfrm>
+          <a:prstGeom prst="rect">
+            <a:avLst/>
+          </a:prstGeom>
+          <a:solidFill>
+            <a:srgbClr val="111827"/>
+          </a:solidFill>
+          <a:ln>
+            <a:noFill/>
+          </a:ln>
+        </p:spPr>
+        <p:style>
+          <a:lnRef idx="1">
+            <a:schemeClr val="accent1"/>
+          </a:lnRef>
+          <a:fillRef idx="3">
+            <a:schemeClr val="accent1"/>
+          </a:fillRef>
+          <a:effectRef idx="2">
+            <a:schemeClr val="accent1"/>
+          </a:effectRef>
+          <a:fontRef idx="minor">
+            <a:schemeClr val="lt1"/>
+          </a:fontRef>
+        </p:style>
+        <p:txBody>
+          <a:bodyPr rtlCol="0" anchor="ctr"/>
+          <a:lstStyle/>
+          <a:p>
+            <a:pPr algn="ctr"/>
+          </a:p>
+        </p:txBody>
+      </p:sp>
+      <p:sp>
+        <p:nvSpPr>
+          <p:cNvPr id="46" name="TextBox 45"/>
+          <p:cNvSpPr txBox="1"/>
+          <p:nvPr/>
+        </p:nvSpPr>
+        <p:spPr>
+          <a:xfrm>
+            <a:off x="10195560" y="3648456"/>
+            <a:ext cx="1188719" cy="292608"/>
+          </a:xfrm>
+          <a:prstGeom prst="rect">
+            <a:avLst/>
+          </a:prstGeom>
+          <a:noFill/>
+        </p:spPr>
+        <p:txBody>
+          <a:bodyPr wrap="square">
+            <a:spAutoFit/>
+          </a:bodyPr>
+          <a:lstStyle/>
+          <a:p>
+            <a:pPr algn="l"/>
+            <a:r>
+              <a:rPr sz="1000" b="0">
+                <a:solidFill>
+                  <a:srgbClr val="FFFFFF"/>
+                </a:solidFill>
+              </a:rPr>
+              <a:t>100% valid</a:t>
+            </a:r>
+          </a:p>
+        </p:txBody>
+      </p:sp>
+      <p:sp>
+        <p:nvSpPr>
+          <p:cNvPr id="47" name="Rectangle 46"/>
+          <p:cNvSpPr/>
+          <p:nvPr/>
+        </p:nvSpPr>
+        <p:spPr>
+          <a:xfrm>
+            <a:off x="5943600" y="3995928"/>
+            <a:ext cx="3063240" cy="347472"/>
+          </a:xfrm>
+          <a:prstGeom prst="rect">
+            <a:avLst/>
+          </a:prstGeom>
+          <a:solidFill>
+            <a:srgbClr val="1E293B"/>
+          </a:solidFill>
+          <a:ln>
+            <a:noFill/>
+          </a:ln>
+        </p:spPr>
+        <p:style>
+          <a:lnRef idx="1">
+            <a:schemeClr val="accent1"/>
+          </a:lnRef>
+          <a:fillRef idx="3">
+            <a:schemeClr val="accent1"/>
+          </a:fillRef>
+          <a:effectRef idx="2">
+            <a:schemeClr val="accent1"/>
+          </a:effectRef>
+          <a:fontRef idx="minor">
+            <a:schemeClr val="lt1"/>
+          </a:fontRef>
+        </p:style>
+        <p:txBody>
+          <a:bodyPr rtlCol="0" anchor="ctr"/>
+          <a:lstStyle/>
+          <a:p>
+            <a:pPr algn="ctr"/>
+          </a:p>
+        </p:txBody>
+      </p:sp>
+      <p:sp>
+        <p:nvSpPr>
+          <p:cNvPr id="48" name="TextBox 47"/>
+          <p:cNvSpPr txBox="1"/>
+          <p:nvPr/>
+        </p:nvSpPr>
+        <p:spPr>
+          <a:xfrm>
+            <a:off x="5989320" y="4032504"/>
+            <a:ext cx="3017520" cy="292608"/>
+          </a:xfrm>
+          <a:prstGeom prst="rect">
+            <a:avLst/>
+          </a:prstGeom>
+          <a:noFill/>
+        </p:spPr>
+        <p:txBody>
+          <a:bodyPr wrap="square">
+            <a:spAutoFit/>
+          </a:bodyPr>
+          <a:lstStyle/>
+          <a:p>
+            <a:pPr algn="l"/>
+            <a:r>
+              <a:rPr sz="1000" b="0">
+                <a:solidFill>
+                  <a:srgbClr val="FFFFFF"/>
+                </a:solidFill>
+              </a:rPr>
+              <a:t>Valid timestamps</a:t>
+            </a:r>
+          </a:p>
+        </p:txBody>
+      </p:sp>
+      <p:sp>
+        <p:nvSpPr>
+          <p:cNvPr id="49" name="Rectangle 48"/>
+          <p:cNvSpPr/>
+          <p:nvPr/>
+        </p:nvSpPr>
+        <p:spPr>
+          <a:xfrm>
+            <a:off x="9052560" y="3995928"/>
+            <a:ext cx="1051560" cy="347472"/>
+          </a:xfrm>
+          <a:prstGeom prst="rect">
+            <a:avLst/>
+          </a:prstGeom>
+          <a:solidFill>
+            <a:srgbClr val="1E293B"/>
+          </a:solidFill>
+          <a:ln>
+            <a:noFill/>
+          </a:ln>
+        </p:spPr>
+        <p:style>
+          <a:lnRef idx="1">
+            <a:schemeClr val="accent1"/>
+          </a:lnRef>
+          <a:fillRef idx="3">
+            <a:schemeClr val="accent1"/>
+          </a:fillRef>
+          <a:effectRef idx="2">
+            <a:schemeClr val="accent1"/>
+          </a:effectRef>
+          <a:fontRef idx="minor">
+            <a:schemeClr val="lt1"/>
+          </a:fontRef>
+        </p:style>
+        <p:txBody>
+          <a:bodyPr rtlCol="0" anchor="ctr"/>
+          <a:lstStyle/>
+          <a:p>
+            <a:pPr algn="ctr"/>
+          </a:p>
+        </p:txBody>
+      </p:sp>
+      <p:sp>
+        <p:nvSpPr>
+          <p:cNvPr id="50" name="TextBox 49"/>
+          <p:cNvSpPr txBox="1"/>
+          <p:nvPr/>
+        </p:nvSpPr>
+        <p:spPr>
+          <a:xfrm>
+            <a:off x="9098280" y="4032504"/>
+            <a:ext cx="1005839" cy="292608"/>
+          </a:xfrm>
+          <a:prstGeom prst="rect">
+            <a:avLst/>
+          </a:prstGeom>
+          <a:noFill/>
+        </p:spPr>
+        <p:txBody>
+          <a:bodyPr wrap="square">
+            <a:spAutoFit/>
+          </a:bodyPr>
+          <a:lstStyle/>
+          <a:p>
+            <a:pPr algn="l"/>
+            <a:r>
+              <a:rPr sz="1000" b="0">
+                <a:solidFill>
+                  <a:srgbClr val="22C55E"/>
+                </a:solidFill>
+              </a:rPr>
+              <a:t>✓ PASS</a:t>
+            </a:r>
+          </a:p>
+        </p:txBody>
+      </p:sp>
+      <p:sp>
+        <p:nvSpPr>
+          <p:cNvPr id="51" name="Rectangle 50"/>
+          <p:cNvSpPr/>
+          <p:nvPr/>
+        </p:nvSpPr>
+        <p:spPr>
+          <a:xfrm>
+            <a:off x="10149840" y="3995928"/>
+            <a:ext cx="1234439" cy="347472"/>
+          </a:xfrm>
+          <a:prstGeom prst="rect">
+            <a:avLst/>
+          </a:prstGeom>
+          <a:solidFill>
+            <a:srgbClr val="1E293B"/>
+          </a:solidFill>
+          <a:ln>
+            <a:noFill/>
+          </a:ln>
+        </p:spPr>
+        <p:style>
+          <a:lnRef idx="1">
+            <a:schemeClr val="accent1"/>
+          </a:lnRef>
+          <a:fillRef idx="3">
+            <a:schemeClr val="accent1"/>
+          </a:fillRef>
+          <a:effectRef idx="2">
+            <a:schemeClr val="accent1"/>
+          </a:effectRef>
+          <a:fontRef idx="minor">
+            <a:schemeClr val="lt1"/>
+          </a:fontRef>
+        </p:style>
+        <p:txBody>
+          <a:bodyPr rtlCol="0" anchor="ctr"/>
+          <a:lstStyle/>
+          <a:p>
+            <a:pPr algn="ctr"/>
+          </a:p>
+        </p:txBody>
+      </p:sp>
+      <p:sp>
+        <p:nvSpPr>
+          <p:cNvPr id="52" name="TextBox 51"/>
+          <p:cNvSpPr txBox="1"/>
+          <p:nvPr/>
+        </p:nvSpPr>
+        <p:spPr>
+          <a:xfrm>
+            <a:off x="10195560" y="4032504"/>
+            <a:ext cx="1188719" cy="292608"/>
+          </a:xfrm>
+          <a:prstGeom prst="rect">
+            <a:avLst/>
+          </a:prstGeom>
+          <a:noFill/>
+        </p:spPr>
+        <p:txBody>
+          <a:bodyPr wrap="square">
+            <a:spAutoFit/>
+          </a:bodyPr>
+          <a:lstStyle/>
+          <a:p>
+            <a:pPr algn="l"/>
+            <a:r>
+              <a:rPr sz="1000" b="0">
+                <a:solidFill>
+                  <a:srgbClr val="FFFFFF"/>
+                </a:solidFill>
+              </a:rPr>
+              <a:t>auto-fixed</a:t>
+            </a:r>
+          </a:p>
+        </p:txBody>
+      </p:sp>
+      <p:sp>
+        <p:nvSpPr>
+          <p:cNvPr id="53" name="Rectangle 52"/>
+          <p:cNvSpPr/>
+          <p:nvPr/>
+        </p:nvSpPr>
+        <p:spPr>
+          <a:xfrm>
+            <a:off x="5943600" y="4379976"/>
+            <a:ext cx="3063240" cy="347472"/>
+          </a:xfrm>
+          <a:prstGeom prst="rect">
+            <a:avLst/>
+          </a:prstGeom>
+          <a:solidFill>
+            <a:srgbClr val="111827"/>
+          </a:solidFill>
+          <a:ln>
+            <a:noFill/>
+          </a:ln>
+        </p:spPr>
+        <p:style>
+          <a:lnRef idx="1">
+            <a:schemeClr val="accent1"/>
+          </a:lnRef>
+          <a:fillRef idx="3">
+            <a:schemeClr val="accent1"/>
+          </a:fillRef>
+          <a:effectRef idx="2">
+            <a:schemeClr val="accent1"/>
+          </a:effectRef>
+          <a:fontRef idx="minor">
+            <a:schemeClr val="lt1"/>
+          </a:fontRef>
+        </p:style>
+        <p:txBody>
+          <a:bodyPr rtlCol="0" anchor="ctr"/>
+          <a:lstStyle/>
+          <a:p>
+            <a:pPr algn="ctr"/>
+          </a:p>
+        </p:txBody>
+      </p:sp>
+      <p:sp>
+        <p:nvSpPr>
+          <p:cNvPr id="54" name="TextBox 53"/>
+          <p:cNvSpPr txBox="1"/>
+          <p:nvPr/>
+        </p:nvSpPr>
+        <p:spPr>
+          <a:xfrm>
+            <a:off x="5989320" y="4416552"/>
+            <a:ext cx="3017520" cy="292608"/>
+          </a:xfrm>
+          <a:prstGeom prst="rect">
+            <a:avLst/>
+          </a:prstGeom>
+          <a:noFill/>
+        </p:spPr>
+        <p:txBody>
+          <a:bodyPr wrap="square">
+            <a:spAutoFit/>
+          </a:bodyPr>
+          <a:lstStyle/>
+          <a:p>
+            <a:pPr algn="l"/>
+            <a:r>
+              <a:rPr sz="1000" b="0">
+                <a:solidFill>
+                  <a:srgbClr val="FFFFFF"/>
+                </a:solidFill>
+              </a:rPr>
+              <a:t>No null categories</a:t>
+            </a:r>
+          </a:p>
+        </p:txBody>
+      </p:sp>
+      <p:sp>
+        <p:nvSpPr>
+          <p:cNvPr id="55" name="Rectangle 54"/>
+          <p:cNvSpPr/>
+          <p:nvPr/>
+        </p:nvSpPr>
+        <p:spPr>
+          <a:xfrm>
+            <a:off x="9052560" y="4379976"/>
+            <a:ext cx="1051560" cy="347472"/>
+          </a:xfrm>
+          <a:prstGeom prst="rect">
+            <a:avLst/>
+          </a:prstGeom>
+          <a:solidFill>
+            <a:srgbClr val="111827"/>
+          </a:solidFill>
+          <a:ln>
+            <a:noFill/>
+          </a:ln>
+        </p:spPr>
+        <p:style>
+          <a:lnRef idx="1">
+            <a:schemeClr val="accent1"/>
+          </a:lnRef>
+          <a:fillRef idx="3">
+            <a:schemeClr val="accent1"/>
+          </a:fillRef>
+          <a:effectRef idx="2">
+            <a:schemeClr val="accent1"/>
+          </a:effectRef>
+          <a:fontRef idx="minor">
+            <a:schemeClr val="lt1"/>
+          </a:fontRef>
+        </p:style>
+        <p:txBody>
+          <a:bodyPr rtlCol="0" anchor="ctr"/>
+          <a:lstStyle/>
+          <a:p>
+            <a:pPr algn="ctr"/>
+          </a:p>
+        </p:txBody>
+      </p:sp>
+      <p:sp>
+        <p:nvSpPr>
+          <p:cNvPr id="56" name="TextBox 55"/>
+          <p:cNvSpPr txBox="1"/>
+          <p:nvPr/>
+        </p:nvSpPr>
+        <p:spPr>
+          <a:xfrm>
+            <a:off x="9098280" y="4416552"/>
+            <a:ext cx="1005839" cy="292608"/>
+          </a:xfrm>
+          <a:prstGeom prst="rect">
+            <a:avLst/>
+          </a:prstGeom>
+          <a:noFill/>
+        </p:spPr>
+        <p:txBody>
+          <a:bodyPr wrap="square">
+            <a:spAutoFit/>
+          </a:bodyPr>
+          <a:lstStyle/>
+          <a:p>
+            <a:pPr algn="l"/>
+            <a:r>
+              <a:rPr sz="1000" b="0">
+                <a:solidFill>
+                  <a:srgbClr val="22C55E"/>
+                </a:solidFill>
+              </a:rPr>
+              <a:t>✓ PASS</a:t>
+            </a:r>
+          </a:p>
+        </p:txBody>
+      </p:sp>
+      <p:sp>
+        <p:nvSpPr>
+          <p:cNvPr id="57" name="Rectangle 56"/>
+          <p:cNvSpPr/>
+          <p:nvPr/>
+        </p:nvSpPr>
+        <p:spPr>
+          <a:xfrm>
+            <a:off x="10149840" y="4379976"/>
+            <a:ext cx="1234439" cy="347472"/>
+          </a:xfrm>
+          <a:prstGeom prst="rect">
+            <a:avLst/>
+          </a:prstGeom>
+          <a:solidFill>
+            <a:srgbClr val="111827"/>
+          </a:solidFill>
+          <a:ln>
+            <a:noFill/>
+          </a:ln>
+        </p:spPr>
+        <p:style>
+          <a:lnRef idx="1">
+            <a:schemeClr val="accent1"/>
+          </a:lnRef>
+          <a:fillRef idx="3">
+            <a:schemeClr val="accent1"/>
+          </a:fillRef>
+          <a:effectRef idx="2">
+            <a:schemeClr val="accent1"/>
+          </a:effectRef>
+          <a:fontRef idx="minor">
+            <a:schemeClr val="lt1"/>
+          </a:fontRef>
+        </p:style>
+        <p:txBody>
+          <a:bodyPr rtlCol="0" anchor="ctr"/>
+          <a:lstStyle/>
+          <a:p>
+            <a:pPr algn="ctr"/>
+          </a:p>
+        </p:txBody>
+      </p:sp>
+      <p:sp>
+        <p:nvSpPr>
+          <p:cNvPr id="58" name="TextBox 57"/>
+          <p:cNvSpPr txBox="1"/>
+          <p:nvPr/>
+        </p:nvSpPr>
+        <p:spPr>
+          <a:xfrm>
+            <a:off x="10195560" y="4416552"/>
+            <a:ext cx="1188719" cy="292608"/>
+          </a:xfrm>
+          <a:prstGeom prst="rect">
+            <a:avLst/>
+          </a:prstGeom>
+          <a:noFill/>
+        </p:spPr>
+        <p:txBody>
+          <a:bodyPr wrap="square">
+            <a:spAutoFit/>
+          </a:bodyPr>
+          <a:lstStyle/>
+          <a:p>
+            <a:pPr algn="l"/>
+            <a:r>
+              <a:rPr sz="1000" b="0">
+                <a:solidFill>
+                  <a:srgbClr val="FFFFFF"/>
+                </a:solidFill>
+              </a:rPr>
+              <a:t>0 nulls</a:t>
+            </a:r>
+          </a:p>
+        </p:txBody>
+      </p:sp>
+      <p:sp>
+        <p:nvSpPr>
+          <p:cNvPr id="59" name="Rectangle 58"/>
+          <p:cNvSpPr/>
+          <p:nvPr/>
+        </p:nvSpPr>
+        <p:spPr>
+          <a:xfrm>
+            <a:off x="5943600" y="4764024"/>
+            <a:ext cx="3063240" cy="347472"/>
+          </a:xfrm>
+          <a:prstGeom prst="rect">
+            <a:avLst/>
+          </a:prstGeom>
+          <a:solidFill>
+            <a:srgbClr val="1E293B"/>
+          </a:solidFill>
+          <a:ln>
+            <a:noFill/>
+          </a:ln>
+        </p:spPr>
+        <p:style>
+          <a:lnRef idx="1">
+            <a:schemeClr val="accent1"/>
+          </a:lnRef>
+          <a:fillRef idx="3">
+            <a:schemeClr val="accent1"/>
+          </a:fillRef>
+          <a:effectRef idx="2">
+            <a:schemeClr val="accent1"/>
+          </a:effectRef>
+          <a:fontRef idx="minor">
+            <a:schemeClr val="lt1"/>
+          </a:fontRef>
+        </p:style>
+        <p:txBody>
+          <a:bodyPr rtlCol="0" anchor="ctr"/>
+          <a:lstStyle/>
+          <a:p>
+            <a:pPr algn="ctr"/>
+          </a:p>
+        </p:txBody>
+      </p:sp>
+      <p:sp>
+        <p:nvSpPr>
+          <p:cNvPr id="60" name="TextBox 59"/>
+          <p:cNvSpPr txBox="1"/>
+          <p:nvPr/>
+        </p:nvSpPr>
+        <p:spPr>
+          <a:xfrm>
+            <a:off x="5989320" y="4800600"/>
+            <a:ext cx="3017520" cy="292608"/>
+          </a:xfrm>
+          <a:prstGeom prst="rect">
+            <a:avLst/>
+          </a:prstGeom>
+          <a:noFill/>
+        </p:spPr>
+        <p:txBody>
+          <a:bodyPr wrap="square">
+            <a:spAutoFit/>
+          </a:bodyPr>
+          <a:lstStyle/>
+          <a:p>
+            <a:pPr algn="l"/>
+            <a:r>
+              <a:rPr sz="1000" b="0">
+                <a:solidFill>
+                  <a:srgbClr val="FFFFFF"/>
+                </a:solidFill>
+              </a:rPr>
+              <a:t>Amount in range</a:t>
+            </a:r>
+          </a:p>
+        </p:txBody>
+      </p:sp>
+      <p:sp>
+        <p:nvSpPr>
+          <p:cNvPr id="61" name="Rectangle 60"/>
+          <p:cNvSpPr/>
+          <p:nvPr/>
+        </p:nvSpPr>
+        <p:spPr>
+          <a:xfrm>
+            <a:off x="9052560" y="4764024"/>
+            <a:ext cx="1051560" cy="347472"/>
+          </a:xfrm>
+          <a:prstGeom prst="rect">
+            <a:avLst/>
+          </a:prstGeom>
+          <a:solidFill>
+            <a:srgbClr val="1E293B"/>
+          </a:solidFill>
+          <a:ln>
+            <a:noFill/>
+          </a:ln>
+        </p:spPr>
+        <p:style>
+          <a:lnRef idx="1">
+            <a:schemeClr val="accent1"/>
+          </a:lnRef>
+          <a:fillRef idx="3">
+            <a:schemeClr val="accent1"/>
+          </a:fillRef>
+          <a:effectRef idx="2">
+            <a:schemeClr val="accent1"/>
+          </a:effectRef>
+          <a:fontRef idx="minor">
+            <a:schemeClr val="lt1"/>
+          </a:fontRef>
+        </p:style>
+        <p:txBody>
+          <a:bodyPr rtlCol="0" anchor="ctr"/>
+          <a:lstStyle/>
+          <a:p>
+            <a:pPr algn="ctr"/>
+          </a:p>
+        </p:txBody>
+      </p:sp>
+      <p:sp>
+        <p:nvSpPr>
+          <p:cNvPr id="62" name="TextBox 61"/>
+          <p:cNvSpPr txBox="1"/>
+          <p:nvPr/>
+        </p:nvSpPr>
+        <p:spPr>
+          <a:xfrm>
+            <a:off x="9098280" y="4800600"/>
+            <a:ext cx="1005839" cy="292608"/>
+          </a:xfrm>
+          <a:prstGeom prst="rect">
+            <a:avLst/>
+          </a:prstGeom>
+          <a:noFill/>
+        </p:spPr>
+        <p:txBody>
+          <a:bodyPr wrap="square">
+            <a:spAutoFit/>
+          </a:bodyPr>
+          <a:lstStyle/>
+          <a:p>
+            <a:pPr algn="l"/>
+            <a:r>
+              <a:rPr sz="1000" b="0">
+                <a:solidFill>
+                  <a:srgbClr val="22C55E"/>
+                </a:solidFill>
+              </a:rPr>
+              <a:t>✓ PASS</a:t>
+            </a:r>
+          </a:p>
+        </p:txBody>
+      </p:sp>
+      <p:sp>
+        <p:nvSpPr>
+          <p:cNvPr id="63" name="Rectangle 62"/>
+          <p:cNvSpPr/>
+          <p:nvPr/>
+        </p:nvSpPr>
+        <p:spPr>
+          <a:xfrm>
+            <a:off x="10149840" y="4764024"/>
+            <a:ext cx="1234439" cy="347472"/>
+          </a:xfrm>
+          <a:prstGeom prst="rect">
+            <a:avLst/>
+          </a:prstGeom>
+          <a:solidFill>
+            <a:srgbClr val="1E293B"/>
+          </a:solidFill>
+          <a:ln>
+            <a:noFill/>
+          </a:ln>
+        </p:spPr>
+        <p:style>
+          <a:lnRef idx="1">
+            <a:schemeClr val="accent1"/>
+          </a:lnRef>
+          <a:fillRef idx="3">
+            <a:schemeClr val="accent1"/>
+          </a:fillRef>
+          <a:effectRef idx="2">
+            <a:schemeClr val="accent1"/>
+          </a:effectRef>
+          <a:fontRef idx="minor">
+            <a:schemeClr val="lt1"/>
+          </a:fontRef>
+        </p:style>
+        <p:txBody>
+          <a:bodyPr rtlCol="0" anchor="ctr"/>
+          <a:lstStyle/>
+          <a:p>
+            <a:pPr algn="ctr"/>
+          </a:p>
+        </p:txBody>
+      </p:sp>
+      <p:sp>
+        <p:nvSpPr>
+          <p:cNvPr id="64" name="TextBox 63"/>
+          <p:cNvSpPr txBox="1"/>
+          <p:nvPr/>
+        </p:nvSpPr>
+        <p:spPr>
+          <a:xfrm>
+            <a:off x="10195560" y="4800600"/>
+            <a:ext cx="1188719" cy="292608"/>
+          </a:xfrm>
+          <a:prstGeom prst="rect">
+            <a:avLst/>
+          </a:prstGeom>
+          <a:noFill/>
+        </p:spPr>
+        <p:txBody>
+          <a:bodyPr wrap="square">
+            <a:spAutoFit/>
+          </a:bodyPr>
+          <a:lstStyle/>
+          <a:p>
+            <a:pPr algn="l"/>
+            <a:r>
+              <a:rPr sz="1000" b="0">
+                <a:solidFill>
+                  <a:srgbClr val="FFFFFF"/>
+                </a:solidFill>
+              </a:rPr>
+              <a:t>max $20k</a:t>
+            </a:r>
+          </a:p>
+        </p:txBody>
+      </p:sp>
+      <p:sp>
+        <p:nvSpPr>
+          <p:cNvPr id="65" name="Rectangle 64"/>
+          <p:cNvSpPr/>
+          <p:nvPr/>
+        </p:nvSpPr>
+        <p:spPr>
+          <a:xfrm>
+            <a:off x="5943600" y="5148072"/>
+            <a:ext cx="3063240" cy="347472"/>
+          </a:xfrm>
+          <a:prstGeom prst="rect">
+            <a:avLst/>
+          </a:prstGeom>
+          <a:solidFill>
+            <a:srgbClr val="111827"/>
+          </a:solidFill>
+          <a:ln>
+            <a:noFill/>
+          </a:ln>
+        </p:spPr>
+        <p:style>
+          <a:lnRef idx="1">
+            <a:schemeClr val="accent1"/>
+          </a:lnRef>
+          <a:fillRef idx="3">
+            <a:schemeClr val="accent1"/>
+          </a:fillRef>
+          <a:effectRef idx="2">
+            <a:schemeClr val="accent1"/>
+          </a:effectRef>
+          <a:fontRef idx="minor">
+            <a:schemeClr val="lt1"/>
+          </a:fontRef>
+        </p:style>
+        <p:txBody>
+          <a:bodyPr rtlCol="0" anchor="ctr"/>
+          <a:lstStyle/>
+          <a:p>
+            <a:pPr algn="ctr"/>
+          </a:p>
+        </p:txBody>
+      </p:sp>
+      <p:sp>
+        <p:nvSpPr>
+          <p:cNvPr id="66" name="TextBox 65"/>
+          <p:cNvSpPr txBox="1"/>
+          <p:nvPr/>
+        </p:nvSpPr>
+        <p:spPr>
+          <a:xfrm>
+            <a:off x="5989320" y="5184648"/>
+            <a:ext cx="3017520" cy="292608"/>
+          </a:xfrm>
+          <a:prstGeom prst="rect">
+            <a:avLst/>
+          </a:prstGeom>
+          <a:noFill/>
+        </p:spPr>
+        <p:txBody>
+          <a:bodyPr wrap="square">
+            <a:spAutoFit/>
+          </a:bodyPr>
+          <a:lstStyle/>
+          <a:p>
+            <a:pPr algn="l"/>
+            <a:r>
+              <a:rPr sz="1000" b="0">
+                <a:solidFill>
+                  <a:srgbClr val="FFFFFF"/>
+                </a:solidFill>
+              </a:rPr>
+              <a:t>Anomaly rate 1–50%</a:t>
+            </a:r>
+          </a:p>
+        </p:txBody>
+      </p:sp>
+      <p:sp>
+        <p:nvSpPr>
+          <p:cNvPr id="67" name="Rectangle 66"/>
+          <p:cNvSpPr/>
+          <p:nvPr/>
+        </p:nvSpPr>
+        <p:spPr>
+          <a:xfrm>
+            <a:off x="9052560" y="5148072"/>
+            <a:ext cx="1051560" cy="347472"/>
+          </a:xfrm>
+          <a:prstGeom prst="rect">
+            <a:avLst/>
+          </a:prstGeom>
+          <a:solidFill>
+            <a:srgbClr val="111827"/>
+          </a:solidFill>
+          <a:ln>
+            <a:noFill/>
+          </a:ln>
+        </p:spPr>
+        <p:style>
+          <a:lnRef idx="1">
+            <a:schemeClr val="accent1"/>
+          </a:lnRef>
+          <a:fillRef idx="3">
+            <a:schemeClr val="accent1"/>
+          </a:fillRef>
+          <a:effectRef idx="2">
+            <a:schemeClr val="accent1"/>
+          </a:effectRef>
+          <a:fontRef idx="minor">
+            <a:schemeClr val="lt1"/>
+          </a:fontRef>
+        </p:style>
+        <p:txBody>
+          <a:bodyPr rtlCol="0" anchor="ctr"/>
+          <a:lstStyle/>
+          <a:p>
+            <a:pPr algn="ctr"/>
+          </a:p>
+        </p:txBody>
+      </p:sp>
+      <p:sp>
+        <p:nvSpPr>
+          <p:cNvPr id="68" name="TextBox 67"/>
+          <p:cNvSpPr txBox="1"/>
+          <p:nvPr/>
+        </p:nvSpPr>
+        <p:spPr>
+          <a:xfrm>
+            <a:off x="9098280" y="5184648"/>
+            <a:ext cx="1005839" cy="292608"/>
+          </a:xfrm>
+          <a:prstGeom prst="rect">
+            <a:avLst/>
+          </a:prstGeom>
+          <a:noFill/>
+        </p:spPr>
+        <p:txBody>
+          <a:bodyPr wrap="square">
+            <a:spAutoFit/>
+          </a:bodyPr>
+          <a:lstStyle/>
+          <a:p>
+            <a:pPr algn="l"/>
+            <a:r>
+              <a:rPr sz="1000" b="0">
+                <a:solidFill>
+                  <a:srgbClr val="22C55E"/>
+                </a:solidFill>
+              </a:rPr>
+              <a:t>✓ PASS</a:t>
+            </a:r>
+          </a:p>
+        </p:txBody>
+      </p:sp>
+      <p:sp>
+        <p:nvSpPr>
+          <p:cNvPr id="69" name="Rectangle 68"/>
+          <p:cNvSpPr/>
+          <p:nvPr/>
+        </p:nvSpPr>
+        <p:spPr>
+          <a:xfrm>
+            <a:off x="10149840" y="5148072"/>
+            <a:ext cx="1234439" cy="347472"/>
+          </a:xfrm>
+          <a:prstGeom prst="rect">
+            <a:avLst/>
+          </a:prstGeom>
+          <a:solidFill>
+            <a:srgbClr val="111827"/>
+          </a:solidFill>
+          <a:ln>
+            <a:noFill/>
+          </a:ln>
+        </p:spPr>
+        <p:style>
+          <a:lnRef idx="1">
+            <a:schemeClr val="accent1"/>
+          </a:lnRef>
+          <a:fillRef idx="3">
+            <a:schemeClr val="accent1"/>
+          </a:fillRef>
+          <a:effectRef idx="2">
+            <a:schemeClr val="accent1"/>
+          </a:effectRef>
+          <a:fontRef idx="minor">
+            <a:schemeClr val="lt1"/>
+          </a:fontRef>
+        </p:style>
+        <p:txBody>
+          <a:bodyPr rtlCol="0" anchor="ctr"/>
+          <a:lstStyle/>
+          <a:p>
+            <a:pPr algn="ctr"/>
+          </a:p>
+        </p:txBody>
+      </p:sp>
+      <p:sp>
+        <p:nvSpPr>
+          <p:cNvPr id="70" name="TextBox 69"/>
+          <p:cNvSpPr txBox="1"/>
+          <p:nvPr/>
+        </p:nvSpPr>
+        <p:spPr>
+          <a:xfrm>
+            <a:off x="10195560" y="5184648"/>
+            <a:ext cx="1188719" cy="292608"/>
+          </a:xfrm>
+          <a:prstGeom prst="rect">
+            <a:avLst/>
+          </a:prstGeom>
+          <a:noFill/>
+        </p:spPr>
+        <p:txBody>
+          <a:bodyPr wrap="square">
+            <a:spAutoFit/>
+          </a:bodyPr>
+          <a:lstStyle/>
+          <a:p>
+            <a:pPr algn="l"/>
+            <a:r>
+              <a:rPr sz="1000" b="0">
+                <a:solidFill>
+                  <a:srgbClr val="FFFFFF"/>
+                </a:solidFill>
+              </a:rPr>
+              <a:t>10.2%</a:t>
             </a:r>
           </a:p>
         </p:txBody>
@@ -4169,7 +7057,7 @@
     <p:bg>
       <p:bgPr>
         <a:solidFill>
-          <a:srgbClr val="FFFFFF"/>
+          <a:srgbClr val="1F2937"/>
         </a:solidFill>
         <a:effectLst/>
       </p:bgPr>
@@ -4183,21 +7071,95 @@
       <p:grpSpPr/>
       <p:sp>
         <p:nvSpPr>
-          <p:cNvPr id="2" name="Rectangle 1"/>
+          <p:cNvPr id="2" name="TextBox 1"/>
+          <p:cNvSpPr txBox="1"/>
+          <p:nvPr/>
+        </p:nvSpPr>
+        <p:spPr>
+          <a:xfrm>
+            <a:off x="457200" y="274320"/>
+            <a:ext cx="10972800" cy="731520"/>
+          </a:xfrm>
+          <a:prstGeom prst="rect">
+            <a:avLst/>
+          </a:prstGeom>
+          <a:noFill/>
+        </p:spPr>
+        <p:txBody>
+          <a:bodyPr wrap="square">
+            <a:spAutoFit/>
+          </a:bodyPr>
+          <a:lstStyle/>
+          <a:p>
+            <a:pPr algn="l"/>
+            <a:r>
+              <a:rPr sz="3000" b="1">
+                <a:solidFill>
+                  <a:srgbClr val="FFFFFF"/>
+                </a:solidFill>
+              </a:rPr>
+              <a:t>Model Performance</a:t>
+            </a:r>
+          </a:p>
+        </p:txBody>
+      </p:sp>
+      <p:cxnSp>
+        <p:nvCxnSpPr>
+          <p:cNvPr id="3" name="Connector 2"/>
+          <p:cNvCxnSpPr/>
+          <p:nvPr/>
+        </p:nvCxnSpPr>
+        <p:spPr>
+          <a:xfrm>
+            <a:off x="457200" y="1143000"/>
+            <a:ext cx="11274552" cy="0"/>
+          </a:xfrm>
+          <a:prstGeom prst="line">
+            <a:avLst/>
+          </a:prstGeom>
+          <a:ln w="19050">
+            <a:solidFill>
+              <a:srgbClr val="60A5FA"/>
+            </a:solidFill>
+          </a:ln>
+        </p:spPr>
+        <p:style>
+          <a:lnRef idx="2">
+            <a:schemeClr val="accent1"/>
+          </a:lnRef>
+          <a:fillRef idx="0">
+            <a:schemeClr val="accent1"/>
+          </a:fillRef>
+          <a:effectRef idx="1">
+            <a:schemeClr val="accent1"/>
+          </a:effectRef>
+          <a:fontRef idx="minor">
+            <a:schemeClr val="tx1"/>
+          </a:fontRef>
+        </p:style>
+      </p:cxnSp>
+      <p:sp>
+        <p:nvSpPr>
+          <p:cNvPr id="4" name="Rectangle 3"/>
           <p:cNvSpPr/>
           <p:nvPr/>
         </p:nvSpPr>
         <p:spPr>
           <a:xfrm>
-            <a:off x="0" y="0"/>
-            <a:ext cx="12188952" cy="109728"/>
+            <a:off x="457200" y="1371600"/>
+            <a:ext cx="2560320" cy="1371600"/>
           </a:xfrm>
           <a:prstGeom prst="rect">
             <a:avLst/>
           </a:prstGeom>
           <a:solidFill>
-            <a:srgbClr val="1E3A8A"/>
+            <a:srgbClr val="1F2937"/>
           </a:solidFill>
+          <a:ln w="19050">
+            <a:solidFill>
+              <a:srgbClr val="60A5FA"/>
+            </a:solidFill>
+          </a:ln>
         </p:spPr>
         <p:style>
           <a:lnRef idx="1">
@@ -4223,14 +7185,14 @@
       </p:sp>
       <p:sp>
         <p:nvSpPr>
-          <p:cNvPr id="3" name="TextBox 2"/>
+          <p:cNvPr id="5" name="TextBox 4"/>
           <p:cNvSpPr txBox="1"/>
           <p:nvPr/>
         </p:nvSpPr>
         <p:spPr>
           <a:xfrm>
-            <a:off x="731520" y="274320"/>
-            <a:ext cx="10058400" cy="731520"/>
+            <a:off x="594360" y="1444752"/>
+            <a:ext cx="2286000" cy="685800"/>
           </a:xfrm>
           <a:prstGeom prst="rect">
             <a:avLst/>
@@ -4243,35 +7205,74 @@
           </a:bodyPr>
           <a:lstStyle/>
           <a:p>
-            <a:pPr algn="l"/>
-            <a:r>
-              <a:rPr sz="3000" b="1">
-                <a:solidFill>
-                  <a:srgbClr val="1E3A8A"/>
+            <a:pPr algn="ctr"/>
+            <a:r>
+              <a:rPr sz="2800" b="1">
+                <a:solidFill>
+                  <a:srgbClr val="60A5FA"/>
                 </a:solidFill>
               </a:rPr>
-              <a:t>Model Performance — IsolationForest</a:t>
-            </a:r>
-          </a:p>
-        </p:txBody>
-      </p:sp>
-      <p:sp>
-        <p:nvSpPr>
-          <p:cNvPr id="4" name="Rectangle 3"/>
+              <a:t>0.9286</a:t>
+            </a:r>
+          </a:p>
+        </p:txBody>
+      </p:sp>
+      <p:sp>
+        <p:nvSpPr>
+          <p:cNvPr id="6" name="TextBox 5"/>
+          <p:cNvSpPr txBox="1"/>
+          <p:nvPr/>
+        </p:nvSpPr>
+        <p:spPr>
+          <a:xfrm>
+            <a:off x="594360" y="2121408"/>
+            <a:ext cx="2286000" cy="457200"/>
+          </a:xfrm>
+          <a:prstGeom prst="rect">
+            <a:avLst/>
+          </a:prstGeom>
+          <a:noFill/>
+        </p:spPr>
+        <p:txBody>
+          <a:bodyPr wrap="square">
+            <a:spAutoFit/>
+          </a:bodyPr>
+          <a:lstStyle/>
+          <a:p>
+            <a:pPr algn="ctr"/>
+            <a:r>
+              <a:rPr sz="1200" b="0">
+                <a:solidFill>
+                  <a:srgbClr val="FFFFFF"/>
+                </a:solidFill>
+              </a:rPr>
+              <a:t>Precision</a:t>
+            </a:r>
+          </a:p>
+        </p:txBody>
+      </p:sp>
+      <p:sp>
+        <p:nvSpPr>
+          <p:cNvPr id="7" name="Rectangle 6"/>
           <p:cNvSpPr/>
           <p:nvPr/>
         </p:nvSpPr>
         <p:spPr>
           <a:xfrm>
-            <a:off x="548640" y="1280160"/>
-            <a:ext cx="3474720" cy="1645920"/>
+            <a:off x="3200400" y="1371600"/>
+            <a:ext cx="2560320" cy="1371600"/>
           </a:xfrm>
           <a:prstGeom prst="rect">
             <a:avLst/>
           </a:prstGeom>
           <a:solidFill>
-            <a:srgbClr val="F3F4F6"/>
+            <a:srgbClr val="1F2937"/>
           </a:solidFill>
+          <a:ln w="19050">
+            <a:solidFill>
+              <a:srgbClr val="FACC15"/>
+            </a:solidFill>
+          </a:ln>
         </p:spPr>
         <p:style>
           <a:lnRef idx="1">
@@ -4297,14 +7298,14 @@
       </p:sp>
       <p:sp>
         <p:nvSpPr>
-          <p:cNvPr id="5" name="TextBox 4"/>
+          <p:cNvPr id="8" name="TextBox 7"/>
           <p:cNvSpPr txBox="1"/>
           <p:nvPr/>
         </p:nvSpPr>
         <p:spPr>
           <a:xfrm>
-            <a:off x="640080" y="1371600"/>
-            <a:ext cx="3291840" cy="457200"/>
+            <a:off x="3337560" y="1444752"/>
+            <a:ext cx="2286000" cy="685800"/>
           </a:xfrm>
           <a:prstGeom prst="rect">
             <a:avLst/>
@@ -4319,26 +7320,26 @@
           <a:p>
             <a:pPr algn="ctr"/>
             <a:r>
-              <a:rPr sz="1400" b="0">
-                <a:solidFill>
-                  <a:srgbClr val="6B7280"/>
+              <a:rPr sz="2800" b="1">
+                <a:solidFill>
+                  <a:srgbClr val="FACC15"/>
                 </a:solidFill>
               </a:rPr>
-              <a:t>Precision</a:t>
-            </a:r>
-          </a:p>
-        </p:txBody>
-      </p:sp>
-      <p:sp>
-        <p:nvSpPr>
-          <p:cNvPr id="6" name="TextBox 5"/>
+              <a:t>0.8667</a:t>
+            </a:r>
+          </a:p>
+        </p:txBody>
+      </p:sp>
+      <p:sp>
+        <p:nvSpPr>
+          <p:cNvPr id="9" name="TextBox 8"/>
           <p:cNvSpPr txBox="1"/>
           <p:nvPr/>
         </p:nvSpPr>
         <p:spPr>
           <a:xfrm>
-            <a:off x="640080" y="1828800"/>
-            <a:ext cx="3291840" cy="822960"/>
+            <a:off x="3337560" y="2121408"/>
+            <a:ext cx="2286000" cy="457200"/>
           </a:xfrm>
           <a:prstGeom prst="rect">
             <a:avLst/>
@@ -4353,33 +7354,38 @@
           <a:p>
             <a:pPr algn="ctr"/>
             <a:r>
-              <a:rPr sz="3000" b="1">
-                <a:solidFill>
-                  <a:srgbClr val="1E3A8A"/>
+              <a:rPr sz="1200" b="0">
+                <a:solidFill>
+                  <a:srgbClr val="FFFFFF"/>
                 </a:solidFill>
               </a:rPr>
-              <a:t>1.0000</a:t>
-            </a:r>
-          </a:p>
-        </p:txBody>
-      </p:sp>
-      <p:sp>
-        <p:nvSpPr>
-          <p:cNvPr id="7" name="Rectangle 6"/>
+              <a:t>Recall</a:t>
+            </a:r>
+          </a:p>
+        </p:txBody>
+      </p:sp>
+      <p:sp>
+        <p:nvSpPr>
+          <p:cNvPr id="10" name="Rectangle 9"/>
           <p:cNvSpPr/>
           <p:nvPr/>
         </p:nvSpPr>
         <p:spPr>
           <a:xfrm>
-            <a:off x="4389120" y="1280160"/>
-            <a:ext cx="3474720" cy="1645920"/>
+            <a:off x="5943600" y="1371600"/>
+            <a:ext cx="2560320" cy="1371600"/>
           </a:xfrm>
           <a:prstGeom prst="rect">
             <a:avLst/>
           </a:prstGeom>
           <a:solidFill>
-            <a:srgbClr val="F3F4F6"/>
+            <a:srgbClr val="1F2937"/>
           </a:solidFill>
+          <a:ln w="19050">
+            <a:solidFill>
+              <a:srgbClr val="22C55E"/>
+            </a:solidFill>
+          </a:ln>
         </p:spPr>
         <p:style>
           <a:lnRef idx="1">
@@ -4405,14 +7411,14 @@
       </p:sp>
       <p:sp>
         <p:nvSpPr>
-          <p:cNvPr id="8" name="TextBox 7"/>
+          <p:cNvPr id="11" name="TextBox 10"/>
           <p:cNvSpPr txBox="1"/>
           <p:nvPr/>
         </p:nvSpPr>
         <p:spPr>
           <a:xfrm>
-            <a:off x="4480560" y="1371600"/>
-            <a:ext cx="3291840" cy="457200"/>
+            <a:off x="6080760" y="1444752"/>
+            <a:ext cx="2286000" cy="685800"/>
           </a:xfrm>
           <a:prstGeom prst="rect">
             <a:avLst/>
@@ -4427,26 +7433,26 @@
           <a:p>
             <a:pPr algn="ctr"/>
             <a:r>
-              <a:rPr sz="1400" b="0">
-                <a:solidFill>
-                  <a:srgbClr val="6B7280"/>
+              <a:rPr sz="2800" b="1">
+                <a:solidFill>
+                  <a:srgbClr val="22C55E"/>
                 </a:solidFill>
               </a:rPr>
-              <a:t>Recall</a:t>
-            </a:r>
-          </a:p>
-        </p:txBody>
-      </p:sp>
-      <p:sp>
-        <p:nvSpPr>
-          <p:cNvPr id="9" name="TextBox 8"/>
+              <a:t>0.8966</a:t>
+            </a:r>
+          </a:p>
+        </p:txBody>
+      </p:sp>
+      <p:sp>
+        <p:nvSpPr>
+          <p:cNvPr id="12" name="TextBox 11"/>
           <p:cNvSpPr txBox="1"/>
           <p:nvPr/>
         </p:nvSpPr>
         <p:spPr>
           <a:xfrm>
-            <a:off x="4480560" y="1828800"/>
-            <a:ext cx="3291840" cy="822960"/>
+            <a:off x="6080760" y="2121408"/>
+            <a:ext cx="2286000" cy="457200"/>
           </a:xfrm>
           <a:prstGeom prst="rect">
             <a:avLst/>
@@ -4461,66 +7467,26 @@
           <a:p>
             <a:pPr algn="ctr"/>
             <a:r>
-              <a:rPr sz="3000" b="1">
-                <a:solidFill>
-                  <a:srgbClr val="1E3A8A"/>
+              <a:rPr sz="1200" b="0">
+                <a:solidFill>
+                  <a:srgbClr val="FFFFFF"/>
                 </a:solidFill>
               </a:rPr>
-              <a:t>1.0000</a:t>
-            </a:r>
-          </a:p>
-        </p:txBody>
-      </p:sp>
-      <p:sp>
-        <p:nvSpPr>
-          <p:cNvPr id="10" name="Rectangle 9"/>
-          <p:cNvSpPr/>
-          <p:nvPr/>
-        </p:nvSpPr>
-        <p:spPr>
-          <a:xfrm>
-            <a:off x="8229600" y="1280160"/>
-            <a:ext cx="3474720" cy="1645920"/>
-          </a:xfrm>
-          <a:prstGeom prst="rect">
-            <a:avLst/>
-          </a:prstGeom>
-          <a:solidFill>
-            <a:srgbClr val="F3F4F6"/>
-          </a:solidFill>
-        </p:spPr>
-        <p:style>
-          <a:lnRef idx="1">
-            <a:schemeClr val="accent1"/>
-          </a:lnRef>
-          <a:fillRef idx="3">
-            <a:schemeClr val="accent1"/>
-          </a:fillRef>
-          <a:effectRef idx="2">
-            <a:schemeClr val="accent1"/>
-          </a:effectRef>
-          <a:fontRef idx="minor">
-            <a:schemeClr val="lt1"/>
-          </a:fontRef>
-        </p:style>
-        <p:txBody>
-          <a:bodyPr rtlCol="0" anchor="ctr"/>
-          <a:lstStyle/>
-          <a:p>
-            <a:pPr algn="ctr"/>
-          </a:p>
-        </p:txBody>
-      </p:sp>
-      <p:sp>
-        <p:nvSpPr>
-          <p:cNvPr id="11" name="TextBox 10"/>
+              <a:t>F1 Score</a:t>
+            </a:r>
+          </a:p>
+        </p:txBody>
+      </p:sp>
+      <p:sp>
+        <p:nvSpPr>
+          <p:cNvPr id="13" name="TextBox 12"/>
           <p:cNvSpPr txBox="1"/>
           <p:nvPr/>
         </p:nvSpPr>
         <p:spPr>
           <a:xfrm>
-            <a:off x="8321040" y="1371600"/>
-            <a:ext cx="3291840" cy="457200"/>
+            <a:off x="8686800" y="1371600"/>
+            <a:ext cx="3200400" cy="457200"/>
           </a:xfrm>
           <a:prstGeom prst="rect">
             <a:avLst/>
@@ -4533,28 +7499,28 @@
           </a:bodyPr>
           <a:lstStyle/>
           <a:p>
-            <a:pPr algn="ctr"/>
-            <a:r>
-              <a:rPr sz="1400" b="0">
-                <a:solidFill>
-                  <a:srgbClr val="6B7280"/>
+            <a:pPr algn="l"/>
+            <a:r>
+              <a:rPr sz="1100" b="0">
+                <a:solidFill>
+                  <a:srgbClr val="F3F4F6"/>
                 </a:solidFill>
               </a:rPr>
-              <a:t>F1 Score</a:t>
-            </a:r>
-          </a:p>
-        </p:txBody>
-      </p:sp>
-      <p:sp>
-        <p:nvSpPr>
-          <p:cNvPr id="12" name="TextBox 11"/>
+              <a:t>Algorithm</a:t>
+            </a:r>
+          </a:p>
+        </p:txBody>
+      </p:sp>
+      <p:sp>
+        <p:nvSpPr>
+          <p:cNvPr id="14" name="TextBox 13"/>
           <p:cNvSpPr txBox="1"/>
           <p:nvPr/>
         </p:nvSpPr>
         <p:spPr>
           <a:xfrm>
-            <a:off x="8321040" y="1828800"/>
-            <a:ext cx="3291840" cy="822960"/>
+            <a:off x="8686800" y="1737360"/>
+            <a:ext cx="3200400" cy="640080"/>
           </a:xfrm>
           <a:prstGeom prst="rect">
             <a:avLst/>
@@ -4567,21 +7533,89 @@
           </a:bodyPr>
           <a:lstStyle/>
           <a:p>
-            <a:pPr algn="ctr"/>
-            <a:r>
-              <a:rPr sz="3000" b="1">
-                <a:solidFill>
-                  <a:srgbClr val="1E3A8A"/>
+            <a:pPr algn="l"/>
+            <a:r>
+              <a:rPr sz="1800" b="1">
+                <a:solidFill>
+                  <a:srgbClr val="FFFFFF"/>
                 </a:solidFill>
               </a:rPr>
-              <a:t>1.0000</a:t>
+              <a:t>IsolationForest</a:t>
+            </a:r>
+          </a:p>
+        </p:txBody>
+      </p:sp>
+      <p:sp>
+        <p:nvSpPr>
+          <p:cNvPr id="15" name="TextBox 14"/>
+          <p:cNvSpPr txBox="1"/>
+          <p:nvPr/>
+        </p:nvSpPr>
+        <p:spPr>
+          <a:xfrm>
+            <a:off x="8686800" y="2286000"/>
+            <a:ext cx="3200400" cy="457200"/>
+          </a:xfrm>
+          <a:prstGeom prst="rect">
+            <a:avLst/>
+          </a:prstGeom>
+          <a:noFill/>
+        </p:spPr>
+        <p:txBody>
+          <a:bodyPr wrap="square">
+            <a:spAutoFit/>
+          </a:bodyPr>
+          <a:lstStyle/>
+          <a:p>
+            <a:pPr algn="l"/>
+            <a:r>
+              <a:rPr sz="1100" b="0">
+                <a:solidFill>
+                  <a:srgbClr val="F3F4F6"/>
+                </a:solidFill>
+              </a:rPr>
+              <a:t>Train samples</a:t>
+            </a:r>
+          </a:p>
+        </p:txBody>
+      </p:sp>
+      <p:sp>
+        <p:nvSpPr>
+          <p:cNvPr id="16" name="TextBox 15"/>
+          <p:cNvSpPr txBox="1"/>
+          <p:nvPr/>
+        </p:nvSpPr>
+        <p:spPr>
+          <a:xfrm>
+            <a:off x="8686800" y="2651760"/>
+            <a:ext cx="3200400" cy="457200"/>
+          </a:xfrm>
+          <a:prstGeom prst="rect">
+            <a:avLst/>
+          </a:prstGeom>
+          <a:noFill/>
+        </p:spPr>
+        <p:txBody>
+          <a:bodyPr wrap="square">
+            <a:spAutoFit/>
+          </a:bodyPr>
+          <a:lstStyle/>
+          <a:p>
+            <a:pPr algn="l"/>
+            <a:r>
+              <a:rPr sz="1800" b="1">
+                <a:solidFill>
+                  <a:srgbClr val="FFFFFF"/>
+                </a:solidFill>
+              </a:rPr>
+              <a:t>700</a:t>
             </a:r>
           </a:p>
         </p:txBody>
       </p:sp>
       <p:pic>
         <p:nvPicPr>
-          <p:cNvPr id="13" name="Picture 12" descr="04_anomaly_rate_by_category.png"/>
+          <p:cNvPr id="17" name="Picture 16" descr="05_log_amount_vs_zscore.png"/>
           <p:cNvPicPr>
             <a:picLocks noChangeAspect="1"/>
           </p:cNvPicPr>
@@ -4595,8 +7629,8 @@
         </p:blipFill>
         <p:spPr>
           <a:xfrm>
-            <a:off x="457200" y="3108960"/>
-            <a:ext cx="10972800" cy="2743200"/>
+            <a:off x="365760" y="3017520"/>
+            <a:ext cx="7315200" cy="3474720"/>
           </a:xfrm>
           <a:prstGeom prst="rect">
             <a:avLst/>
@@ -4605,14 +7639,14 @@
       </p:pic>
       <p:sp>
         <p:nvSpPr>
-          <p:cNvPr id="14" name="TextBox 13"/>
+          <p:cNvPr id="18" name="TextBox 17"/>
           <p:cNvSpPr txBox="1"/>
           <p:nvPr/>
         </p:nvSpPr>
         <p:spPr>
           <a:xfrm>
-            <a:off x="457200" y="5943600"/>
-            <a:ext cx="10972800" cy="457200"/>
+            <a:off x="365760" y="6492240"/>
+            <a:ext cx="11430000" cy="365760"/>
           </a:xfrm>
           <a:prstGeom prst="rect">
             <a:avLst/>
@@ -4627,12 +7661,12 @@
           <a:p>
             <a:pPr algn="ctr"/>
             <a:r>
-              <a:rPr sz="1300" b="0">
-                <a:solidFill>
-                  <a:srgbClr val="6B7280"/>
+              <a:rPr sz="1200" b="0">
+                <a:solidFill>
+                  <a:srgbClr val="F3F4F6"/>
                 </a:solidFill>
               </a:rPr>
-              <a:t>Algorithm: IsolationForest  ·  RandomizedSearchCV  ·  Train size: 3</a:t>
+              <a:t>Algorithm: IsolationForest  ·  Trained on 700 samples  ·  70/15/15 stratified split</a:t>
             </a:r>
           </a:p>
         </p:txBody>
@@ -4651,7 +7685,7 @@
     <p:bg>
       <p:bgPr>
         <a:solidFill>
-          <a:srgbClr val="FFFFFF"/>
+          <a:srgbClr val="1F2937"/>
         </a:solidFill>
         <a:effectLst/>
       </p:bgPr>
@@ -4665,54 +7699,14 @@
       <p:grpSpPr/>
       <p:sp>
         <p:nvSpPr>
-          <p:cNvPr id="2" name="Rectangle 1"/>
-          <p:cNvSpPr/>
-          <p:nvPr/>
-        </p:nvSpPr>
-        <p:spPr>
-          <a:xfrm>
-            <a:off x="0" y="0"/>
-            <a:ext cx="12188952" cy="109728"/>
-          </a:xfrm>
-          <a:prstGeom prst="rect">
-            <a:avLst/>
-          </a:prstGeom>
-          <a:solidFill>
-            <a:srgbClr val="1E3A8A"/>
-          </a:solidFill>
-        </p:spPr>
-        <p:style>
-          <a:lnRef idx="1">
-            <a:schemeClr val="accent1"/>
-          </a:lnRef>
-          <a:fillRef idx="3">
-            <a:schemeClr val="accent1"/>
-          </a:fillRef>
-          <a:effectRef idx="2">
-            <a:schemeClr val="accent1"/>
-          </a:effectRef>
-          <a:fontRef idx="minor">
-            <a:schemeClr val="lt1"/>
-          </a:fontRef>
-        </p:style>
-        <p:txBody>
-          <a:bodyPr rtlCol="0" anchor="ctr"/>
-          <a:lstStyle/>
-          <a:p>
-            <a:pPr algn="ctr"/>
-          </a:p>
-        </p:txBody>
-      </p:sp>
-      <p:sp>
-        <p:nvSpPr>
-          <p:cNvPr id="3" name="TextBox 2"/>
+          <p:cNvPr id="2" name="TextBox 1"/>
           <p:cNvSpPr txBox="1"/>
           <p:nvPr/>
         </p:nvSpPr>
         <p:spPr>
           <a:xfrm>
-            <a:off x="731520" y="274320"/>
-            <a:ext cx="10058400" cy="731520"/>
+            <a:off x="457200" y="274320"/>
+            <a:ext cx="10972800" cy="731520"/>
           </a:xfrm>
           <a:prstGeom prst="rect">
             <a:avLst/>
@@ -4729,14 +7723,49 @@
             <a:r>
               <a:rPr sz="3000" b="1">
                 <a:solidFill>
-                  <a:srgbClr val="1E3A8A"/>
+                  <a:srgbClr val="FFFFFF"/>
                 </a:solidFill>
               </a:rPr>
-              <a:t>Live Dashboard — FastAPI + Tailwind</a:t>
-            </a:r>
-          </a:p>
-        </p:txBody>
-      </p:sp>
+              <a:t>Live Dashboard</a:t>
+            </a:r>
+          </a:p>
+        </p:txBody>
+      </p:sp>
+      <p:cxnSp>
+        <p:nvCxnSpPr>
+          <p:cNvPr id="3" name="Connector 2"/>
+          <p:cNvCxnSpPr/>
+          <p:nvPr/>
+        </p:nvCxnSpPr>
+        <p:spPr>
+          <a:xfrm>
+            <a:off x="457200" y="1143000"/>
+            <a:ext cx="11274552" cy="0"/>
+          </a:xfrm>
+          <a:prstGeom prst="line">
+            <a:avLst/>
+          </a:prstGeom>
+          <a:ln w="19050">
+            <a:solidFill>
+              <a:srgbClr val="60A5FA"/>
+            </a:solidFill>
+          </a:ln>
+        </p:spPr>
+        <p:style>
+          <a:lnRef idx="2">
+            <a:schemeClr val="accent1"/>
+          </a:lnRef>
+          <a:fillRef idx="0">
+            <a:schemeClr val="accent1"/>
+          </a:fillRef>
+          <a:effectRef idx="1">
+            <a:schemeClr val="accent1"/>
+          </a:effectRef>
+          <a:fontRef idx="minor">
+            <a:schemeClr val="tx1"/>
+          </a:fontRef>
+        </p:style>
+      </p:cxnSp>
       <p:pic>
         <p:nvPicPr>
           <p:cNvPr id="4" name="Picture 3" descr="01_dashboard_home.png"/>
@@ -4753,8 +7782,8 @@
         </p:blipFill>
         <p:spPr>
           <a:xfrm>
-            <a:off x="274320" y="1097280"/>
-            <a:ext cx="11612880" cy="5029200"/>
+            <a:off x="365760" y="1280160"/>
+            <a:ext cx="11430000" cy="5120640"/>
           </a:xfrm>
           <a:prstGeom prst="rect">
             <a:avLst/>
@@ -4769,8 +7798,8 @@
         </p:nvSpPr>
         <p:spPr>
           <a:xfrm>
-            <a:off x="457200" y="6309360"/>
-            <a:ext cx="10972800" cy="365760"/>
+            <a:off x="365760" y="6492240"/>
+            <a:ext cx="11430000" cy="365760"/>
           </a:xfrm>
           <a:prstGeom prst="rect">
             <a:avLst/>
@@ -4787,10 +7816,10 @@
             <a:r>
               <a:rPr sz="1300" b="0">
                 <a:solidFill>
-                  <a:srgbClr val="6B7280"/>
+                  <a:srgbClr val="F3F4F6"/>
                 </a:solidFill>
               </a:rPr>
-              <a:t>Accessible at http://localhost:8000  ·  Swagger: /docs  ·  Metrics: /metrics</a:t>
+              <a:t>Accessible at http://localhost:8000  ·  POST /predict · GET /health · GET /metrics</a:t>
             </a:r>
           </a:p>
         </p:txBody>
@@ -4809,7 +7838,7 @@
     <p:bg>
       <p:bgPr>
         <a:solidFill>
-          <a:srgbClr val="FFFFFF"/>
+          <a:srgbClr val="1F2937"/>
         </a:solidFill>
         <a:effectLst/>
       </p:bgPr>
@@ -4823,54 +7852,14 @@
       <p:grpSpPr/>
       <p:sp>
         <p:nvSpPr>
-          <p:cNvPr id="2" name="Rectangle 1"/>
-          <p:cNvSpPr/>
-          <p:nvPr/>
-        </p:nvSpPr>
-        <p:spPr>
-          <a:xfrm>
-            <a:off x="0" y="0"/>
-            <a:ext cx="12188952" cy="109728"/>
-          </a:xfrm>
-          <a:prstGeom prst="rect">
-            <a:avLst/>
-          </a:prstGeom>
-          <a:solidFill>
-            <a:srgbClr val="1E3A8A"/>
-          </a:solidFill>
-        </p:spPr>
-        <p:style>
-          <a:lnRef idx="1">
-            <a:schemeClr val="accent1"/>
-          </a:lnRef>
-          <a:fillRef idx="3">
-            <a:schemeClr val="accent1"/>
-          </a:fillRef>
-          <a:effectRef idx="2">
-            <a:schemeClr val="accent1"/>
-          </a:effectRef>
-          <a:fontRef idx="minor">
-            <a:schemeClr val="lt1"/>
-          </a:fontRef>
-        </p:style>
-        <p:txBody>
-          <a:bodyPr rtlCol="0" anchor="ctr"/>
-          <a:lstStyle/>
-          <a:p>
-            <a:pPr algn="ctr"/>
-          </a:p>
-        </p:txBody>
-      </p:sp>
-      <p:sp>
-        <p:nvSpPr>
-          <p:cNvPr id="3" name="TextBox 2"/>
+          <p:cNvPr id="2" name="TextBox 1"/>
           <p:cNvSpPr txBox="1"/>
           <p:nvPr/>
         </p:nvSpPr>
         <p:spPr>
           <a:xfrm>
-            <a:off x="731520" y="274320"/>
-            <a:ext cx="10058400" cy="731520"/>
+            <a:off x="457200" y="274320"/>
+            <a:ext cx="10972800" cy="731520"/>
           </a:xfrm>
           <a:prstGeom prst="rect">
             <a:avLst/>
@@ -4885,9 +7874,9 @@
           <a:p>
             <a:pPr algn="l"/>
             <a:r>
-              <a:rPr sz="3200" b="1">
-                <a:solidFill>
-                  <a:srgbClr val="1E3A8A"/>
+              <a:rPr sz="3000" b="1">
+                <a:solidFill>
+                  <a:srgbClr val="FFFFFF"/>
                 </a:solidFill>
               </a:rPr>
               <a:t>Automated Quality Gates</a:t>
@@ -4895,6 +7884,41 @@
           </a:p>
         </p:txBody>
       </p:sp>
+      <p:cxnSp>
+        <p:nvCxnSpPr>
+          <p:cNvPr id="3" name="Connector 2"/>
+          <p:cNvCxnSpPr/>
+          <p:nvPr/>
+        </p:nvCxnSpPr>
+        <p:spPr>
+          <a:xfrm>
+            <a:off x="457200" y="1143000"/>
+            <a:ext cx="11274552" cy="0"/>
+          </a:xfrm>
+          <a:prstGeom prst="line">
+            <a:avLst/>
+          </a:prstGeom>
+          <a:ln w="19050">
+            <a:solidFill>
+              <a:srgbClr val="60A5FA"/>
+            </a:solidFill>
+          </a:ln>
+        </p:spPr>
+        <p:style>
+          <a:lnRef idx="2">
+            <a:schemeClr val="accent1"/>
+          </a:lnRef>
+          <a:fillRef idx="0">
+            <a:schemeClr val="accent1"/>
+          </a:fillRef>
+          <a:effectRef idx="1">
+            <a:schemeClr val="accent1"/>
+          </a:effectRef>
+          <a:fontRef idx="minor">
+            <a:schemeClr val="tx1"/>
+          </a:fontRef>
+        </p:style>
+      </p:cxnSp>
       <p:pic>
         <p:nvPicPr>
           <p:cNvPr id="4" name="Picture 3" descr="03_prediction_result.png"/>
@@ -4911,8 +7935,8 @@
         </p:blipFill>
         <p:spPr>
           <a:xfrm>
-            <a:off x="274320" y="1097280"/>
-            <a:ext cx="5669280" cy="4114800"/>
+            <a:off x="365760" y="1280160"/>
+            <a:ext cx="5669280" cy="4297680"/>
           </a:xfrm>
           <a:prstGeom prst="rect">
             <a:avLst/>
@@ -4935,8 +7959,8 @@
         </p:blipFill>
         <p:spPr>
           <a:xfrm>
-            <a:off x="6217920" y="1097280"/>
-            <a:ext cx="5669280" cy="4114800"/>
+            <a:off x="6217920" y="1280160"/>
+            <a:ext cx="5577840" cy="4297680"/>
           </a:xfrm>
           <a:prstGeom prst="rect">
             <a:avLst/>
@@ -4945,14 +7969,57 @@
       </p:pic>
       <p:sp>
         <p:nvSpPr>
-          <p:cNvPr id="6" name="TextBox 5"/>
+          <p:cNvPr id="6" name="Rectangle 5"/>
+          <p:cNvSpPr/>
+          <p:nvPr/>
+        </p:nvSpPr>
+        <p:spPr>
+          <a:xfrm>
+            <a:off x="365760" y="5806440"/>
+            <a:ext cx="11430000" cy="640080"/>
+          </a:xfrm>
+          <a:prstGeom prst="rect">
+            <a:avLst/>
+          </a:prstGeom>
+          <a:solidFill>
+            <a:srgbClr val="1E3A8A"/>
+          </a:solidFill>
+          <a:ln>
+            <a:noFill/>
+          </a:ln>
+        </p:spPr>
+        <p:style>
+          <a:lnRef idx="1">
+            <a:schemeClr val="accent1"/>
+          </a:lnRef>
+          <a:fillRef idx="3">
+            <a:schemeClr val="accent1"/>
+          </a:fillRef>
+          <a:effectRef idx="2">
+            <a:schemeClr val="accent1"/>
+          </a:effectRef>
+          <a:fontRef idx="minor">
+            <a:schemeClr val="lt1"/>
+          </a:fontRef>
+        </p:style>
+        <p:txBody>
+          <a:bodyPr rtlCol="0" anchor="ctr"/>
+          <a:lstStyle/>
+          <a:p>
+            <a:pPr algn="ctr"/>
+          </a:p>
+        </p:txBody>
+      </p:sp>
+      <p:sp>
+        <p:nvSpPr>
+          <p:cNvPr id="7" name="TextBox 6"/>
           <p:cNvSpPr txBox="1"/>
           <p:nvPr/>
         </p:nvSpPr>
         <p:spPr>
           <a:xfrm>
-            <a:off x="457200" y="5486400"/>
-            <a:ext cx="10972800" cy="548640"/>
+            <a:off x="548640" y="5870448"/>
+            <a:ext cx="11064240" cy="502920"/>
           </a:xfrm>
           <a:prstGeom prst="rect">
             <a:avLst/>
@@ -4969,10 +8036,10 @@
             <a:r>
               <a:rPr sz="1600" b="1">
                 <a:solidFill>
-                  <a:srgbClr val="059669"/>
+                  <a:srgbClr val="22C55E"/>
                 </a:solidFill>
               </a:rPr>
-              <a:t>8/8 unit tests passed   ·   6/6 Playwright E2E tests passed   ·   6 screenshots saved</a:t>
+              <a:t>8 unit tests passed  ·  6 Playwright E2E tests passed  ·  14 / 14 total  ·  0 failures</a:t>
             </a:r>
           </a:p>
         </p:txBody>
@@ -5005,14 +8072,57 @@
       <p:grpSpPr/>
       <p:sp>
         <p:nvSpPr>
-          <p:cNvPr id="2" name="TextBox 1"/>
+          <p:cNvPr id="2" name="Rectangle 1"/>
+          <p:cNvSpPr/>
+          <p:nvPr/>
+        </p:nvSpPr>
+        <p:spPr>
+          <a:xfrm>
+            <a:off x="0" y="0"/>
+            <a:ext cx="365760" cy="6858000"/>
+          </a:xfrm>
+          <a:prstGeom prst="rect">
+            <a:avLst/>
+          </a:prstGeom>
+          <a:solidFill>
+            <a:srgbClr val="22C55E"/>
+          </a:solidFill>
+          <a:ln>
+            <a:noFill/>
+          </a:ln>
+        </p:spPr>
+        <p:style>
+          <a:lnRef idx="1">
+            <a:schemeClr val="accent1"/>
+          </a:lnRef>
+          <a:fillRef idx="3">
+            <a:schemeClr val="accent1"/>
+          </a:fillRef>
+          <a:effectRef idx="2">
+            <a:schemeClr val="accent1"/>
+          </a:effectRef>
+          <a:fontRef idx="minor">
+            <a:schemeClr val="lt1"/>
+          </a:fontRef>
+        </p:style>
+        <p:txBody>
+          <a:bodyPr rtlCol="0" anchor="ctr"/>
+          <a:lstStyle/>
+          <a:p>
+            <a:pPr algn="ctr"/>
+          </a:p>
+        </p:txBody>
+      </p:sp>
+      <p:sp>
+        <p:nvSpPr>
+          <p:cNvPr id="3" name="TextBox 2"/>
           <p:cNvSpPr txBox="1"/>
           <p:nvPr/>
         </p:nvSpPr>
         <p:spPr>
           <a:xfrm>
-            <a:off x="457200" y="731520"/>
-            <a:ext cx="10972800" cy="914400"/>
+            <a:off x="822960" y="365760"/>
+            <a:ext cx="10515600" cy="822960"/>
           </a:xfrm>
           <a:prstGeom prst="rect">
             <a:avLst/>
@@ -5025,11 +8135,11 @@
           </a:bodyPr>
           <a:lstStyle/>
           <a:p>
-            <a:pPr algn="ctr"/>
+            <a:pPr algn="l"/>
             <a:r>
               <a:rPr sz="3600" b="1">
                 <a:solidFill>
-                  <a:srgbClr val="FFFFFF"/>
+                  <a:srgbClr val="22C55E"/>
                 </a:solidFill>
               </a:rPr>
               <a:t>PIPELINE COMPLETE</a:t>
@@ -5037,16 +8147,94 @@
           </a:p>
         </p:txBody>
       </p:sp>
-      <p:sp>
-        <p:nvSpPr>
-          <p:cNvPr id="3" name="TextBox 2"/>
+      <p:cxnSp>
+        <p:nvCxnSpPr>
+          <p:cNvPr id="4" name="Connector 3"/>
+          <p:cNvCxnSpPr/>
+          <p:nvPr/>
+        </p:nvCxnSpPr>
+        <p:spPr>
+          <a:xfrm>
+            <a:off x="457200" y="1325880"/>
+            <a:ext cx="11274552" cy="0"/>
+          </a:xfrm>
+          <a:prstGeom prst="line">
+            <a:avLst/>
+          </a:prstGeom>
+          <a:ln w="19050">
+            <a:solidFill>
+              <a:srgbClr val="22C55E"/>
+            </a:solidFill>
+          </a:ln>
+        </p:spPr>
+        <p:style>
+          <a:lnRef idx="2">
+            <a:schemeClr val="accent1"/>
+          </a:lnRef>
+          <a:fillRef idx="0">
+            <a:schemeClr val="accent1"/>
+          </a:fillRef>
+          <a:effectRef idx="1">
+            <a:schemeClr val="accent1"/>
+          </a:effectRef>
+          <a:fontRef idx="minor">
+            <a:schemeClr val="tx1"/>
+          </a:fontRef>
+        </p:style>
+      </p:cxnSp>
+      <p:sp>
+        <p:nvSpPr>
+          <p:cNvPr id="5" name="Rectangle 4"/>
+          <p:cNvSpPr/>
+          <p:nvPr/>
+        </p:nvSpPr>
+        <p:spPr>
+          <a:xfrm>
+            <a:off x="822960" y="1591056"/>
+            <a:ext cx="128016" cy="128016"/>
+          </a:xfrm>
+          <a:prstGeom prst="rect">
+            <a:avLst/>
+          </a:prstGeom>
+          <a:solidFill>
+            <a:srgbClr val="60A5FA"/>
+          </a:solidFill>
+          <a:ln>
+            <a:noFill/>
+          </a:ln>
+        </p:spPr>
+        <p:style>
+          <a:lnRef idx="1">
+            <a:schemeClr val="accent1"/>
+          </a:lnRef>
+          <a:fillRef idx="3">
+            <a:schemeClr val="accent1"/>
+          </a:fillRef>
+          <a:effectRef idx="2">
+            <a:schemeClr val="accent1"/>
+          </a:effectRef>
+          <a:fontRef idx="minor">
+            <a:schemeClr val="lt1"/>
+          </a:fontRef>
+        </p:style>
+        <p:txBody>
+          <a:bodyPr rtlCol="0" anchor="ctr"/>
+          <a:lstStyle/>
+          <a:p>
+            <a:pPr algn="ctr"/>
+          </a:p>
+        </p:txBody>
+      </p:sp>
+      <p:sp>
+        <p:nvSpPr>
+          <p:cNvPr id="6" name="TextBox 5"/>
           <p:cNvSpPr txBox="1"/>
           <p:nvPr/>
         </p:nvSpPr>
         <p:spPr>
           <a:xfrm>
-            <a:off x="914400" y="1828800"/>
-            <a:ext cx="10058400" cy="594360"/>
+            <a:off x="1051560" y="1463040"/>
+            <a:ext cx="10515600" cy="502920"/>
           </a:xfrm>
           <a:prstGeom prst="rect">
             <a:avLst/>
@@ -5061,26 +8249,69 @@
           <a:p>
             <a:pPr algn="l"/>
             <a:r>
-              <a:rPr sz="1600" b="0">
-                <a:solidFill>
-                  <a:srgbClr val="BFDBF7"/>
+              <a:rPr sz="1400" b="0">
+                <a:solidFill>
+                  <a:srgbClr val="60A5FA"/>
                 </a:solidFill>
               </a:rPr>
-              <a:t>Model:        IsolationForest  ·  F1=1.0000  ·  Precision=1.0000  ·  Recall=1.0000</a:t>
-            </a:r>
-          </a:p>
-        </p:txBody>
-      </p:sp>
-      <p:sp>
-        <p:nvSpPr>
-          <p:cNvPr id="4" name="TextBox 3"/>
+              <a:t>Model     : IsolationForest — F1=0.8966  ·  Precision=0.9286  ·  Recall=0.8667</a:t>
+            </a:r>
+          </a:p>
+        </p:txBody>
+      </p:sp>
+      <p:sp>
+        <p:nvSpPr>
+          <p:cNvPr id="7" name="Rectangle 6"/>
+          <p:cNvSpPr/>
+          <p:nvPr/>
+        </p:nvSpPr>
+        <p:spPr>
+          <a:xfrm>
+            <a:off x="822960" y="2121408"/>
+            <a:ext cx="128016" cy="128016"/>
+          </a:xfrm>
+          <a:prstGeom prst="rect">
+            <a:avLst/>
+          </a:prstGeom>
+          <a:solidFill>
+            <a:srgbClr val="FFFFFF"/>
+          </a:solidFill>
+          <a:ln>
+            <a:noFill/>
+          </a:ln>
+        </p:spPr>
+        <p:style>
+          <a:lnRef idx="1">
+            <a:schemeClr val="accent1"/>
+          </a:lnRef>
+          <a:fillRef idx="3">
+            <a:schemeClr val="accent1"/>
+          </a:fillRef>
+          <a:effectRef idx="2">
+            <a:schemeClr val="accent1"/>
+          </a:effectRef>
+          <a:fontRef idx="minor">
+            <a:schemeClr val="lt1"/>
+          </a:fontRef>
+        </p:style>
+        <p:txBody>
+          <a:bodyPr rtlCol="0" anchor="ctr"/>
+          <a:lstStyle/>
+          <a:p>
+            <a:pPr algn="ctr"/>
+          </a:p>
+        </p:txBody>
+      </p:sp>
+      <p:sp>
+        <p:nvSpPr>
+          <p:cNvPr id="8" name="TextBox 7"/>
           <p:cNvSpPr txBox="1"/>
           <p:nvPr/>
         </p:nvSpPr>
         <p:spPr>
           <a:xfrm>
-            <a:off x="914400" y="2514600"/>
-            <a:ext cx="10058400" cy="594360"/>
+            <a:off x="1051560" y="1993392"/>
+            <a:ext cx="10515600" cy="502920"/>
           </a:xfrm>
           <a:prstGeom prst="rect">
             <a:avLst/>
@@ -5095,26 +8326,69 @@
           <a:p>
             <a:pPr algn="l"/>
             <a:r>
-              <a:rPr sz="1600" b="0">
-                <a:solidFill>
-                  <a:srgbClr val="BFDBF7"/>
+              <a:rPr sz="1400" b="0">
+                <a:solidFill>
+                  <a:srgbClr val="FFFFFF"/>
                 </a:solidFill>
               </a:rPr>
-              <a:t>API:          http://localhost:8000</a:t>
-            </a:r>
-          </a:p>
-        </p:txBody>
-      </p:sp>
-      <p:sp>
-        <p:nvSpPr>
-          <p:cNvPr id="5" name="TextBox 4"/>
+              <a:t>API       : http://localhost:8000  (POST /predict, GET /health, GET /metrics)</a:t>
+            </a:r>
+          </a:p>
+        </p:txBody>
+      </p:sp>
+      <p:sp>
+        <p:nvSpPr>
+          <p:cNvPr id="9" name="Rectangle 8"/>
+          <p:cNvSpPr/>
+          <p:nvPr/>
+        </p:nvSpPr>
+        <p:spPr>
+          <a:xfrm>
+            <a:off x="822960" y="2651760"/>
+            <a:ext cx="128016" cy="128016"/>
+          </a:xfrm>
+          <a:prstGeom prst="rect">
+            <a:avLst/>
+          </a:prstGeom>
+          <a:solidFill>
+            <a:srgbClr val="93C5FD"/>
+          </a:solidFill>
+          <a:ln>
+            <a:noFill/>
+          </a:ln>
+        </p:spPr>
+        <p:style>
+          <a:lnRef idx="1">
+            <a:schemeClr val="accent1"/>
+          </a:lnRef>
+          <a:fillRef idx="3">
+            <a:schemeClr val="accent1"/>
+          </a:fillRef>
+          <a:effectRef idx="2">
+            <a:schemeClr val="accent1"/>
+          </a:effectRef>
+          <a:fontRef idx="minor">
+            <a:schemeClr val="lt1"/>
+          </a:fontRef>
+        </p:style>
+        <p:txBody>
+          <a:bodyPr rtlCol="0" anchor="ctr"/>
+          <a:lstStyle/>
+          <a:p>
+            <a:pPr algn="ctr"/>
+          </a:p>
+        </p:txBody>
+      </p:sp>
+      <p:sp>
+        <p:nvSpPr>
+          <p:cNvPr id="10" name="TextBox 9"/>
           <p:cNvSpPr txBox="1"/>
           <p:nvPr/>
         </p:nvSpPr>
         <p:spPr>
           <a:xfrm>
-            <a:off x="914400" y="3200400"/>
-            <a:ext cx="10058400" cy="594360"/>
+            <a:off x="1051560" y="2523744"/>
+            <a:ext cx="10515600" cy="502920"/>
           </a:xfrm>
           <a:prstGeom prst="rect">
             <a:avLst/>
@@ -5129,26 +8403,69 @@
           <a:p>
             <a:pPr algn="l"/>
             <a:r>
-              <a:rPr sz="1600" b="0">
-                <a:solidFill>
-                  <a:srgbClr val="BFDBF7"/>
+              <a:rPr sz="1400" b="0">
+                <a:solidFill>
+                  <a:srgbClr val="93C5FD"/>
                 </a:solidFill>
               </a:rPr>
-              <a:t>GitHub:       github.com/heramb-analytics/claude-code-ml-pipeline-20260415-214802</a:t>
-            </a:r>
-          </a:p>
-        </p:txBody>
-      </p:sp>
-      <p:sp>
-        <p:nvSpPr>
-          <p:cNvPr id="6" name="TextBox 5"/>
+              <a:t>GitHub    : https://github.com/heramb-analytics/claude-code-ml-pipeline-20260415-214802</a:t>
+            </a:r>
+          </a:p>
+        </p:txBody>
+      </p:sp>
+      <p:sp>
+        <p:nvSpPr>
+          <p:cNvPr id="11" name="Rectangle 10"/>
+          <p:cNvSpPr/>
+          <p:nvPr/>
+        </p:nvSpPr>
+        <p:spPr>
+          <a:xfrm>
+            <a:off x="822960" y="3182112"/>
+            <a:ext cx="128016" cy="128016"/>
+          </a:xfrm>
+          <a:prstGeom prst="rect">
+            <a:avLst/>
+          </a:prstGeom>
+          <a:solidFill>
+            <a:srgbClr val="FACC15"/>
+          </a:solidFill>
+          <a:ln>
+            <a:noFill/>
+          </a:ln>
+        </p:spPr>
+        <p:style>
+          <a:lnRef idx="1">
+            <a:schemeClr val="accent1"/>
+          </a:lnRef>
+          <a:fillRef idx="3">
+            <a:schemeClr val="accent1"/>
+          </a:fillRef>
+          <a:effectRef idx="2">
+            <a:schemeClr val="accent1"/>
+          </a:effectRef>
+          <a:fontRef idx="minor">
+            <a:schemeClr val="lt1"/>
+          </a:fontRef>
+        </p:style>
+        <p:txBody>
+          <a:bodyPr rtlCol="0" anchor="ctr"/>
+          <a:lstStyle/>
+          <a:p>
+            <a:pPr algn="ctr"/>
+          </a:p>
+        </p:txBody>
+      </p:sp>
+      <p:sp>
+        <p:nvSpPr>
+          <p:cNvPr id="12" name="TextBox 11"/>
           <p:cNvSpPr txBox="1"/>
           <p:nvPr/>
         </p:nvSpPr>
         <p:spPr>
           <a:xfrm>
-            <a:off x="914400" y="3886200"/>
-            <a:ext cx="10058400" cy="594360"/>
+            <a:off x="1051560" y="3054096"/>
+            <a:ext cx="10515600" cy="502920"/>
           </a:xfrm>
           <a:prstGeom prst="rect">
             <a:avLst/>
@@ -5163,26 +8480,69 @@
           <a:p>
             <a:pPr algn="l"/>
             <a:r>
-              <a:rPr sz="1600" b="0">
-                <a:solidFill>
-                  <a:srgbClr val="BFDBF7"/>
+              <a:rPr sz="1400" b="0">
+                <a:solidFill>
+                  <a:srgbClr val="FACC15"/>
                 </a:solidFill>
               </a:rPr>
-              <a:t>JIRA:         TAD-78 (Epic)  ·  TAD-79 → TAD-84 (6 tasks)  ·  TAD Sprint 1</a:t>
-            </a:r>
-          </a:p>
-        </p:txBody>
-      </p:sp>
-      <p:sp>
-        <p:nvSpPr>
-          <p:cNvPr id="7" name="TextBox 6"/>
+              <a:t>JIRA      : 6 tickets (TAD-86 → TAD-91)  ·  Epic TAD-85  ·  Sprint 1  ·  Project TAD</a:t>
+            </a:r>
+          </a:p>
+        </p:txBody>
+      </p:sp>
+      <p:sp>
+        <p:nvSpPr>
+          <p:cNvPr id="13" name="Rectangle 12"/>
+          <p:cNvSpPr/>
+          <p:nvPr/>
+        </p:nvSpPr>
+        <p:spPr>
+          <a:xfrm>
+            <a:off x="822960" y="3712464"/>
+            <a:ext cx="128016" cy="128016"/>
+          </a:xfrm>
+          <a:prstGeom prst="rect">
+            <a:avLst/>
+          </a:prstGeom>
+          <a:solidFill>
+            <a:srgbClr val="FBBF24"/>
+          </a:solidFill>
+          <a:ln>
+            <a:noFill/>
+          </a:ln>
+        </p:spPr>
+        <p:style>
+          <a:lnRef idx="1">
+            <a:schemeClr val="accent1"/>
+          </a:lnRef>
+          <a:fillRef idx="3">
+            <a:schemeClr val="accent1"/>
+          </a:fillRef>
+          <a:effectRef idx="2">
+            <a:schemeClr val="accent1"/>
+          </a:effectRef>
+          <a:fontRef idx="minor">
+            <a:schemeClr val="lt1"/>
+          </a:fontRef>
+        </p:style>
+        <p:txBody>
+          <a:bodyPr rtlCol="0" anchor="ctr"/>
+          <a:lstStyle/>
+          <a:p>
+            <a:pPr algn="ctr"/>
+          </a:p>
+        </p:txBody>
+      </p:sp>
+      <p:sp>
+        <p:nvSpPr>
+          <p:cNvPr id="14" name="TextBox 13"/>
           <p:cNvSpPr txBox="1"/>
           <p:nvPr/>
         </p:nvSpPr>
         <p:spPr>
           <a:xfrm>
-            <a:off x="914400" y="4572000"/>
-            <a:ext cx="10058400" cy="594360"/>
+            <a:off x="1051560" y="3584448"/>
+            <a:ext cx="10515600" cy="502920"/>
           </a:xfrm>
           <a:prstGeom prst="rect">
             <a:avLst/>
@@ -5197,26 +8557,69 @@
           <a:p>
             <a:pPr algn="l"/>
             <a:r>
-              <a:rPr sz="1600" b="0">
-                <a:solidFill>
-                  <a:srgbClr val="BFDBF7"/>
+              <a:rPr sz="1400" b="0">
+                <a:solidFill>
+                  <a:srgbClr val="FBBF24"/>
                 </a:solidFill>
               </a:rPr>
-              <a:t>Tests:        8 unit  ·  6 Playwright E2E  ·  10 data quality  ·  12 validation</a:t>
-            </a:r>
-          </a:p>
-        </p:txBody>
-      </p:sp>
-      <p:sp>
-        <p:nvSpPr>
-          <p:cNvPr id="8" name="TextBox 7"/>
+              <a:t>Confluence: 11-section tech doc  ·  CR space</a:t>
+            </a:r>
+          </a:p>
+        </p:txBody>
+      </p:sp>
+      <p:sp>
+        <p:nvSpPr>
+          <p:cNvPr id="15" name="Rectangle 14"/>
+          <p:cNvSpPr/>
+          <p:nvPr/>
+        </p:nvSpPr>
+        <p:spPr>
+          <a:xfrm>
+            <a:off x="822960" y="4242816"/>
+            <a:ext cx="128016" cy="128016"/>
+          </a:xfrm>
+          <a:prstGeom prst="rect">
+            <a:avLst/>
+          </a:prstGeom>
+          <a:solidFill>
+            <a:srgbClr val="22C55E"/>
+          </a:solidFill>
+          <a:ln>
+            <a:noFill/>
+          </a:ln>
+        </p:spPr>
+        <p:style>
+          <a:lnRef idx="1">
+            <a:schemeClr val="accent1"/>
+          </a:lnRef>
+          <a:fillRef idx="3">
+            <a:schemeClr val="accent1"/>
+          </a:fillRef>
+          <a:effectRef idx="2">
+            <a:schemeClr val="accent1"/>
+          </a:effectRef>
+          <a:fontRef idx="minor">
+            <a:schemeClr val="lt1"/>
+          </a:fontRef>
+        </p:style>
+        <p:txBody>
+          <a:bodyPr rtlCol="0" anchor="ctr"/>
+          <a:lstStyle/>
+          <a:p>
+            <a:pPr algn="ctr"/>
+          </a:p>
+        </p:txBody>
+      </p:sp>
+      <p:sp>
+        <p:nvSpPr>
+          <p:cNvPr id="16" name="TextBox 15"/>
           <p:cNvSpPr txBox="1"/>
           <p:nvPr/>
         </p:nvSpPr>
         <p:spPr>
           <a:xfrm>
-            <a:off x="914400" y="5257800"/>
-            <a:ext cx="10058400" cy="594360"/>
+            <a:off x="1051560" y="4114800"/>
+            <a:ext cx="10515600" cy="502920"/>
           </a:xfrm>
           <a:prstGeom prst="rect">
             <a:avLst/>
@@ -5231,12 +8634,166 @@
           <a:p>
             <a:pPr algn="l"/>
             <a:r>
-              <a:rPr sz="1600" b="0">
-                <a:solidFill>
-                  <a:srgbClr val="BFDBF7"/>
+              <a:rPr sz="1400" b="0">
+                <a:solidFill>
+                  <a:srgbClr val="22C55E"/>
                 </a:solidFill>
               </a:rPr>
-              <a:t>Scheduler:    retrain @ 02:00 UTC daily  ·  drift check every 6h</a:t>
+              <a:t>Tests     : 8 unit + 6 Playwright e2e = 14/14 passed  ·  6 screenshots</a:t>
+            </a:r>
+          </a:p>
+        </p:txBody>
+      </p:sp>
+      <p:sp>
+        <p:nvSpPr>
+          <p:cNvPr id="17" name="Rectangle 16"/>
+          <p:cNvSpPr/>
+          <p:nvPr/>
+        </p:nvSpPr>
+        <p:spPr>
+          <a:xfrm>
+            <a:off x="822960" y="4773168"/>
+            <a:ext cx="128016" cy="128016"/>
+          </a:xfrm>
+          <a:prstGeom prst="rect">
+            <a:avLst/>
+          </a:prstGeom>
+          <a:solidFill>
+            <a:srgbClr val="F47218"/>
+          </a:solidFill>
+          <a:ln>
+            <a:noFill/>
+          </a:ln>
+        </p:spPr>
+        <p:style>
+          <a:lnRef idx="1">
+            <a:schemeClr val="accent1"/>
+          </a:lnRef>
+          <a:fillRef idx="3">
+            <a:schemeClr val="accent1"/>
+          </a:fillRef>
+          <a:effectRef idx="2">
+            <a:schemeClr val="accent1"/>
+          </a:effectRef>
+          <a:fontRef idx="minor">
+            <a:schemeClr val="lt1"/>
+          </a:fontRef>
+        </p:style>
+        <p:txBody>
+          <a:bodyPr rtlCol="0" anchor="ctr"/>
+          <a:lstStyle/>
+          <a:p>
+            <a:pPr algn="ctr"/>
+          </a:p>
+        </p:txBody>
+      </p:sp>
+      <p:sp>
+        <p:nvSpPr>
+          <p:cNvPr id="18" name="TextBox 17"/>
+          <p:cNvSpPr txBox="1"/>
+          <p:nvPr/>
+        </p:nvSpPr>
+        <p:spPr>
+          <a:xfrm>
+            <a:off x="1051560" y="4645152"/>
+            <a:ext cx="10515600" cy="502920"/>
+          </a:xfrm>
+          <a:prstGeom prst="rect">
+            <a:avLst/>
+          </a:prstGeom>
+          <a:noFill/>
+        </p:spPr>
+        <p:txBody>
+          <a:bodyPr wrap="square">
+            <a:spAutoFit/>
+          </a:bodyPr>
+          <a:lstStyle/>
+          <a:p>
+            <a:pPr algn="l"/>
+            <a:r>
+              <a:rPr sz="1400" b="0">
+                <a:solidFill>
+                  <a:srgbClr val="F47218"/>
+                </a:solidFill>
+              </a:rPr>
+              <a:t>Scheduler : Nightly retrain @ 02:00  ·  Drift check every 6h</a:t>
+            </a:r>
+          </a:p>
+        </p:txBody>
+      </p:sp>
+      <p:sp>
+        <p:nvSpPr>
+          <p:cNvPr id="19" name="Rectangle 18"/>
+          <p:cNvSpPr/>
+          <p:nvPr/>
+        </p:nvSpPr>
+        <p:spPr>
+          <a:xfrm>
+            <a:off x="822960" y="5303520"/>
+            <a:ext cx="128016" cy="128016"/>
+          </a:xfrm>
+          <a:prstGeom prst="rect">
+            <a:avLst/>
+          </a:prstGeom>
+          <a:solidFill>
+            <a:srgbClr val="FFFFFF"/>
+          </a:solidFill>
+          <a:ln>
+            <a:noFill/>
+          </a:ln>
+        </p:spPr>
+        <p:style>
+          <a:lnRef idx="1">
+            <a:schemeClr val="accent1"/>
+          </a:lnRef>
+          <a:fillRef idx="3">
+            <a:schemeClr val="accent1"/>
+          </a:fillRef>
+          <a:effectRef idx="2">
+            <a:schemeClr val="accent1"/>
+          </a:effectRef>
+          <a:fontRef idx="minor">
+            <a:schemeClr val="lt1"/>
+          </a:fontRef>
+        </p:style>
+        <p:txBody>
+          <a:bodyPr rtlCol="0" anchor="ctr"/>
+          <a:lstStyle/>
+          <a:p>
+            <a:pPr algn="ctr"/>
+          </a:p>
+        </p:txBody>
+      </p:sp>
+      <p:sp>
+        <p:nvSpPr>
+          <p:cNvPr id="20" name="TextBox 19"/>
+          <p:cNvSpPr txBox="1"/>
+          <p:nvPr/>
+        </p:nvSpPr>
+        <p:spPr>
+          <a:xfrm>
+            <a:off x="1051560" y="5175504"/>
+            <a:ext cx="10515600" cy="502920"/>
+          </a:xfrm>
+          <a:prstGeom prst="rect">
+            <a:avLst/>
+          </a:prstGeom>
+          <a:noFill/>
+        </p:spPr>
+        <p:txBody>
+          <a:bodyPr wrap="square">
+            <a:spAutoFit/>
+          </a:bodyPr>
+          <a:lstStyle/>
+          <a:p>
+            <a:pPr algn="l"/>
+            <a:r>
+              <a:rPr sz="1400" b="0">
+                <a:solidFill>
+                  <a:srgbClr val="FFFFFF"/>
+                </a:solidFill>
+              </a:rPr>
+              <a:t>Built by  : Claude Code (claude-sonnet-4-6)  ·  Fully autonomous  ·  0 human interventions</a:t>
             </a:r>
           </a:p>
         </p:txBody>
